--- a/operacoes/apresentacoes/monica/Pitch-Monica.pptx
+++ b/operacoes/apresentacoes/monica/Pitch-Monica.pptx
@@ -3579,7 +3579,7 @@
                 <a:ea typeface="Calibri" pitchFamily="34" charset="-122"/>
                 <a:cs typeface="Calibri" pitchFamily="34" charset="-120"/>
               </a:rPr>
-              <a:t>R$ 25–50k/mês</a:t>
+              <a:t>R$ 30–60k/mês</a:t>
             </a:r>
             <a:endParaRPr lang="en-US" sz="1400" dirty="0"/>
           </a:p>
@@ -3618,7 +3618,7 @@
                 <a:ea typeface="Calibri" pitchFamily="34" charset="-122"/>
                 <a:cs typeface="Calibri" pitchFamily="34" charset="-120"/>
               </a:rPr>
-              <a:t>R$ 12–25k/mês</a:t>
+              <a:t>R$ 15–30k/mês</a:t>
             </a:r>
             <a:endParaRPr lang="en-US" sz="1400" dirty="0"/>
           </a:p>
@@ -3696,7 +3696,7 @@
                 <a:ea typeface="Calibri" pitchFamily="34" charset="-122"/>
                 <a:cs typeface="Calibri" pitchFamily="34" charset="-120"/>
               </a:rPr>
-              <a:t>R$ 15k/mês</a:t>
+              <a:t>R$ 20k/mês</a:t>
             </a:r>
             <a:endParaRPr lang="en-US" sz="1400" dirty="0"/>
           </a:p>
@@ -3735,7 +3735,7 @@
                 <a:ea typeface="Calibri" pitchFamily="34" charset="-122"/>
                 <a:cs typeface="Calibri" pitchFamily="34" charset="-120"/>
               </a:rPr>
-              <a:t>R$ 80–180k/mês</a:t>
+              <a:t>R$ 100–200k/mês</a:t>
             </a:r>
             <a:endParaRPr lang="en-US" sz="1400" dirty="0"/>
           </a:p>
@@ -3774,7 +3774,7 @@
                 <a:ea typeface="Calibri" pitchFamily="34" charset="-122"/>
                 <a:cs typeface="Calibri" pitchFamily="34" charset="-120"/>
               </a:rPr>
-              <a:t>R$ 40–90k/mês</a:t>
+              <a:t>R$ 50–100k/mês</a:t>
             </a:r>
             <a:endParaRPr lang="en-US" sz="1400" dirty="0"/>
           </a:p>
@@ -3879,7 +3879,7 @@
                 <a:ea typeface="Calibri" pitchFamily="34" charset="-122"/>
                 <a:cs typeface="Calibri" pitchFamily="34" charset="-120"/>
               </a:rPr>
-              <a:t>R$ 40k/mês</a:t>
+              <a:t>R$ 50k/mês</a:t>
             </a:r>
             <a:endParaRPr lang="en-US" sz="1400" dirty="0"/>
           </a:p>
@@ -3918,7 +3918,7 @@
                 <a:ea typeface="Calibri" pitchFamily="34" charset="-122"/>
                 <a:cs typeface="Calibri" pitchFamily="34" charset="-120"/>
               </a:rPr>
-              <a:t>R$ 300k+/mês</a:t>
+              <a:t>R$ 400k+/mês</a:t>
             </a:r>
             <a:endParaRPr lang="en-US" sz="1400" dirty="0"/>
           </a:p>
@@ -3957,7 +3957,7 @@
                 <a:ea typeface="Calibri" pitchFamily="34" charset="-122"/>
                 <a:cs typeface="Calibri" pitchFamily="34" charset="-120"/>
               </a:rPr>
-              <a:t>R$ 150k+/mês</a:t>
+              <a:t>R$ 200k+/mês</a:t>
             </a:r>
             <a:endParaRPr lang="en-US" sz="1400" dirty="0"/>
           </a:p>
@@ -3971,24 +3971,24 @@
         </p:nvSpPr>
         <p:spPr>
           <a:xfrm>
-            <a:off x="914400" y="3931920"/>
-            <a:ext cx="10360152" cy="1188720"/>
-          </a:xfrm>
-          <a:prstGeom prst="rect">
-            <a:avLst/>
-          </a:prstGeom>
-          <a:noFill/>
-          <a:ln/>
-        </p:spPr>
-        <p:txBody>
-          <a:bodyPr wrap="square" rtlCol="0" anchor="ctr"/>
-          <a:lstStyle/>
-          <a:p>
-            <a:pPr algn="ctr" indent="0" marL="0">
-              <a:buNone/>
-            </a:pPr>
-            <a:r>
-              <a:rPr lang="en-US" sz="8800" b="1" dirty="0">
+            <a:off x="914400" y="3794760"/>
+            <a:ext cx="5180076" cy="1005840"/>
+          </a:xfrm>
+          <a:prstGeom prst="rect">
+            <a:avLst/>
+          </a:prstGeom>
+          <a:noFill/>
+          <a:ln/>
+        </p:spPr>
+        <p:txBody>
+          <a:bodyPr wrap="square" rtlCol="0" anchor="ctr"/>
+          <a:lstStyle/>
+          <a:p>
+            <a:pPr algn="ctr" indent="0" marL="0">
+              <a:buNone/>
+            </a:pPr>
+            <a:r>
+              <a:rPr lang="en-US" sz="6800" b="1" dirty="0">
                 <a:solidFill>
                   <a:srgbClr val="7C3AED"/>
                 </a:solidFill>
@@ -3996,9 +3996,9 @@
                 <a:ea typeface="Calibri" pitchFamily="34" charset="-122"/>
                 <a:cs typeface="Calibri" pitchFamily="34" charset="-120"/>
               </a:rPr>
-              <a:t>R$ 25.000</a:t>
-            </a:r>
-            <a:endParaRPr lang="en-US" sz="8800" dirty="0"/>
+              <a:t>R$ 15.000</a:t>
+            </a:r>
+            <a:endParaRPr lang="en-US" sz="6800" dirty="0"/>
           </a:p>
         </p:txBody>
       </p:sp>
@@ -4010,24 +4010,111 @@
         </p:nvSpPr>
         <p:spPr>
           <a:xfrm>
-            <a:off x="914400" y="5074920"/>
-            <a:ext cx="10360152" cy="320040"/>
-          </a:xfrm>
-          <a:prstGeom prst="rect">
-            <a:avLst/>
-          </a:prstGeom>
-          <a:noFill/>
-          <a:ln/>
-        </p:spPr>
-        <p:txBody>
-          <a:bodyPr wrap="square" rtlCol="0" anchor="ctr"/>
-          <a:lstStyle/>
-          <a:p>
-            <a:pPr algn="ctr" indent="0" marL="0">
-              <a:buNone/>
-            </a:pPr>
-            <a:r>
-              <a:rPr lang="en-US" sz="1000" b="1" spc="200" kern="0" dirty="0">
+            <a:off x="914400" y="4800600"/>
+            <a:ext cx="5180076" cy="502920"/>
+          </a:xfrm>
+          <a:prstGeom prst="rect">
+            <a:avLst/>
+          </a:prstGeom>
+          <a:noFill/>
+          <a:ln/>
+        </p:spPr>
+        <p:txBody>
+          <a:bodyPr wrap="square" rtlCol="0" anchor="ctr"/>
+          <a:lstStyle/>
+          <a:p>
+            <a:pPr algn="ctr" indent="0" marL="0">
+              <a:lnSpc>
+                <a:spcPct val="140000"/>
+              </a:lnSpc>
+              <a:buNone/>
+            </a:pPr>
+            <a:r>
+              <a:rPr lang="en-US" sz="900" b="1" spc="100" kern="0" dirty="0">
+                <a:solidFill>
+                  <a:srgbClr val="9CA3AF"/>
+                </a:solidFill>
+                <a:latin typeface="Calibri" pitchFamily="34" charset="0"/>
+                <a:ea typeface="Calibri" pitchFamily="34" charset="-122"/>
+                <a:cs typeface="Calibri" pitchFamily="34" charset="-120"/>
+              </a:rPr>
+              <a:t>SEU SHARE · MÊS 1</a:t>
+            </a:r>
+            <a:endParaRPr lang="en-US" sz="900" dirty="0"/>
+          </a:p>
+          <a:p>
+            <a:pPr algn="ctr" indent="0" marL="0">
+              <a:lnSpc>
+                <a:spcPct val="140000"/>
+              </a:lnSpc>
+              <a:buNone/>
+            </a:pPr>
+            <a:r>
+              <a:rPr lang="en-US" sz="900" b="1" spc="100" kern="0" dirty="0">
+                <a:solidFill>
+                  <a:srgbClr val="9CA3AF"/>
+                </a:solidFill>
+                <a:latin typeface="Calibri" pitchFamily="34" charset="0"/>
+                <a:ea typeface="Calibri" pitchFamily="34" charset="-122"/>
+                <a:cs typeface="Calibri" pitchFamily="34" charset="-120"/>
+              </a:rPr>
+              <a:t>CENÁRIO CONSERVADOR</a:t>
+            </a:r>
+            <a:endParaRPr lang="en-US" sz="900" dirty="0"/>
+          </a:p>
+        </p:txBody>
+      </p:sp>
+      <p:sp>
+        <p:nvSpPr>
+          <p:cNvPr id="25" name="Shape 23"/>
+          <p:cNvSpPr/>
+          <p:nvPr/>
+        </p:nvSpPr>
+        <p:spPr>
+          <a:xfrm>
+            <a:off x="6076188" y="3749040"/>
+            <a:ext cx="36576" cy="1645920"/>
+          </a:xfrm>
+          <a:prstGeom prst="rect">
+            <a:avLst/>
+          </a:prstGeom>
+          <a:solidFill>
+            <a:srgbClr val="1F1F1F"/>
+          </a:solidFill>
+          <a:ln w="12700">
+            <a:solidFill>
+              <a:srgbClr val="1F1F1F"/>
+            </a:solidFill>
+            <a:prstDash val="solid"/>
+          </a:ln>
+        </p:spPr>
+      </p:sp>
+      <p:sp>
+        <p:nvSpPr>
+          <p:cNvPr id="26" name="Text 24"/>
+          <p:cNvSpPr/>
+          <p:nvPr/>
+        </p:nvSpPr>
+        <p:spPr>
+          <a:xfrm>
+            <a:off x="6551676" y="3794760"/>
+            <a:ext cx="4997196" cy="1005840"/>
+          </a:xfrm>
+          <a:prstGeom prst="rect">
+            <a:avLst/>
+          </a:prstGeom>
+          <a:noFill/>
+          <a:ln/>
+        </p:spPr>
+        <p:txBody>
+          <a:bodyPr wrap="square" rtlCol="0" anchor="ctr"/>
+          <a:lstStyle/>
+          <a:p>
+            <a:pPr algn="ctr" indent="0" marL="0">
+              <a:buNone/>
+            </a:pPr>
+            <a:r>
+              <a:rPr lang="en-US" sz="6800" b="1" dirty="0">
                 <a:solidFill>
                   <a:srgbClr val="7C3AED"/>
                 </a:solidFill>
@@ -4035,38 +4122,100 @@
                 <a:ea typeface="Calibri" pitchFamily="34" charset="-122"/>
                 <a:cs typeface="Calibri" pitchFamily="34" charset="-120"/>
               </a:rPr>
-              <a:t>SEU SHARE · CENÁRIO CONSERVADOR · MÊS 1</a:t>
-            </a:r>
-            <a:endParaRPr lang="en-US" sz="1000" dirty="0"/>
-          </a:p>
-        </p:txBody>
-      </p:sp>
-      <p:sp>
-        <p:nvSpPr>
-          <p:cNvPr id="25" name="Text 23"/>
-          <p:cNvSpPr/>
-          <p:nvPr/>
-        </p:nvSpPr>
-        <p:spPr>
-          <a:xfrm>
-            <a:off x="1371600" y="5486400"/>
-            <a:ext cx="9445752" cy="365760"/>
-          </a:xfrm>
-          <a:prstGeom prst="rect">
-            <a:avLst/>
-          </a:prstGeom>
-          <a:noFill/>
-          <a:ln/>
-        </p:spPr>
-        <p:txBody>
-          <a:bodyPr wrap="square" rtlCol="0" anchor="ctr"/>
-          <a:lstStyle/>
-          <a:p>
-            <a:pPr algn="ctr" indent="0" marL="0">
-              <a:buNone/>
-            </a:pPr>
-            <a:r>
-              <a:rPr lang="en-US" sz="1200" i="1" dirty="0">
+              <a:t>R$ 1,2M+</a:t>
+            </a:r>
+            <a:endParaRPr lang="en-US" sz="6800" dirty="0"/>
+          </a:p>
+        </p:txBody>
+      </p:sp>
+      <p:sp>
+        <p:nvSpPr>
+          <p:cNvPr id="27" name="Text 25"/>
+          <p:cNvSpPr/>
+          <p:nvPr/>
+        </p:nvSpPr>
+        <p:spPr>
+          <a:xfrm>
+            <a:off x="6551676" y="4800600"/>
+            <a:ext cx="4997196" cy="502920"/>
+          </a:xfrm>
+          <a:prstGeom prst="rect">
+            <a:avLst/>
+          </a:prstGeom>
+          <a:noFill/>
+          <a:ln/>
+        </p:spPr>
+        <p:txBody>
+          <a:bodyPr wrap="square" rtlCol="0" anchor="ctr"/>
+          <a:lstStyle/>
+          <a:p>
+            <a:pPr algn="ctr" indent="0" marL="0">
+              <a:lnSpc>
+                <a:spcPct val="140000"/>
+              </a:lnSpc>
+              <a:buNone/>
+            </a:pPr>
+            <a:r>
+              <a:rPr lang="en-US" sz="900" b="1" spc="100" kern="0" dirty="0">
+                <a:solidFill>
+                  <a:srgbClr val="9CA3AF"/>
+                </a:solidFill>
+                <a:latin typeface="Calibri" pitchFamily="34" charset="0"/>
+                <a:ea typeface="Calibri" pitchFamily="34" charset="-122"/>
+                <a:cs typeface="Calibri" pitchFamily="34" charset="-120"/>
+              </a:rPr>
+              <a:t>SEU SHARE · ANO 1</a:t>
+            </a:r>
+            <a:endParaRPr lang="en-US" sz="900" dirty="0"/>
+          </a:p>
+          <a:p>
+            <a:pPr algn="ctr" indent="0" marL="0">
+              <a:lnSpc>
+                <a:spcPct val="140000"/>
+              </a:lnSpc>
+              <a:buNone/>
+            </a:pPr>
+            <a:r>
+              <a:rPr lang="en-US" sz="900" b="1" spc="100" kern="0" dirty="0">
+                <a:solidFill>
+                  <a:srgbClr val="9CA3AF"/>
+                </a:solidFill>
+                <a:latin typeface="Calibri" pitchFamily="34" charset="0"/>
+                <a:ea typeface="Calibri" pitchFamily="34" charset="-122"/>
+                <a:cs typeface="Calibri" pitchFamily="34" charset="-120"/>
+              </a:rPr>
+              <a:t>CENÁRIO MODERADO</a:t>
+            </a:r>
+            <a:endParaRPr lang="en-US" sz="900" dirty="0"/>
+          </a:p>
+        </p:txBody>
+      </p:sp>
+      <p:sp>
+        <p:nvSpPr>
+          <p:cNvPr id="28" name="Text 26"/>
+          <p:cNvSpPr/>
+          <p:nvPr/>
+        </p:nvSpPr>
+        <p:spPr>
+          <a:xfrm>
+            <a:off x="1371600" y="5532120"/>
+            <a:ext cx="9445752" cy="320040"/>
+          </a:xfrm>
+          <a:prstGeom prst="rect">
+            <a:avLst/>
+          </a:prstGeom>
+          <a:noFill/>
+          <a:ln/>
+        </p:spPr>
+        <p:txBody>
+          <a:bodyPr wrap="square" rtlCol="0" anchor="ctr"/>
+          <a:lstStyle/>
+          <a:p>
+            <a:pPr algn="ctr" indent="0" marL="0">
+              <a:buNone/>
+            </a:pPr>
+            <a:r>
+              <a:rPr lang="en-US" sz="1100" i="1" dirty="0">
                 <a:solidFill>
                   <a:srgbClr val="374151"/>
                 </a:solidFill>
@@ -4074,15 +4223,15 @@
                 <a:ea typeface="Calibri" pitchFamily="34" charset="-122"/>
                 <a:cs typeface="Calibri" pitchFamily="34" charset="-120"/>
               </a:rPr>
-              <a:t>Baseado em funis ativos com públicos similares ao seu. Começamos conservador. Escalamos com dado.</a:t>
-            </a:r>
-            <a:endParaRPr lang="en-US" sz="1200" dirty="0"/>
-          </a:p>
-        </p:txBody>
-      </p:sp>
-      <p:sp>
-        <p:nvSpPr>
-          <p:cNvPr id="26" name="Text 24"/>
+              <a:t>Baseado em funis ativos com públicos similares. Começamos conservador, escalamos com dado real.</a:t>
+            </a:r>
+            <a:endParaRPr lang="en-US" sz="1100" dirty="0"/>
+          </a:p>
+        </p:txBody>
+      </p:sp>
+      <p:sp>
+        <p:nvSpPr>
+          <p:cNvPr id="29" name="Text 27"/>
           <p:cNvSpPr/>
           <p:nvPr/>
         </p:nvSpPr>
@@ -4113,7 +4262,7 @@
                 <a:ea typeface="Calibri" pitchFamily="34" charset="-122"/>
                 <a:cs typeface="Calibri" pitchFamily="34" charset="-120"/>
               </a:rPr>
-              <a:t>Você nunca investe mais do que o funil sustenta.</a:t>
+              <a:t>Você não investe um centavo — eu coloco o capital de ads e recupero do resultado.</a:t>
             </a:r>
             <a:endParaRPr lang="en-US" sz="1300" dirty="0"/>
           </a:p>
@@ -4302,21 +4451,139 @@
         <p:spPr>
           <a:xfrm>
             <a:off x="1371600" y="2514600"/>
-            <a:ext cx="9445752" cy="868680"/>
-          </a:xfrm>
-          <a:prstGeom prst="rect">
-            <a:avLst/>
-          </a:prstGeom>
-          <a:noFill/>
-          <a:ln/>
-        </p:spPr>
-        <p:txBody>
-          <a:bodyPr wrap="square" rtlCol="0" anchor="ctr"/>
-          <a:lstStyle/>
-          <a:p>
-            <a:pPr algn="ctr" indent="0" marL="0">
-              <a:lnSpc>
-                <a:spcPct val="155000"/>
+            <a:ext cx="9445752" cy="777240"/>
+          </a:xfrm>
+          <a:prstGeom prst="rect">
+            <a:avLst/>
+          </a:prstGeom>
+          <a:noFill/>
+          <a:ln/>
+        </p:spPr>
+        <p:txBody>
+          <a:bodyPr wrap="square" rtlCol="0" anchor="ctr"/>
+          <a:lstStyle/>
+          <a:p>
+            <a:pPr algn="ctr" indent="0" marL="0">
+              <a:lnSpc>
+                <a:spcPct val="145000"/>
+              </a:lnSpc>
+              <a:buNone/>
+            </a:pPr>
+            <a:r>
+              <a:rPr lang="en-US" sz="1800" dirty="0">
+                <a:solidFill>
+                  <a:srgbClr val="9CA3AF"/>
+                </a:solidFill>
+                <a:latin typeface="Calibri" pitchFamily="34" charset="0"/>
+                <a:ea typeface="Calibri" pitchFamily="34" charset="-122"/>
+                <a:cs typeface="Calibri" pitchFamily="34" charset="-120"/>
+              </a:rPr>
+              <a:t>Tudo que combinamos entra no contrato.</a:t>
+            </a:r>
+            <a:endParaRPr lang="en-US" sz="1800" dirty="0"/>
+          </a:p>
+          <a:p>
+            <a:pPr algn="ctr" indent="0" marL="0">
+              <a:lnSpc>
+                <a:spcPct val="145000"/>
+              </a:lnSpc>
+              <a:buNone/>
+            </a:pPr>
+            <a:r>
+              <a:rPr lang="en-US" sz="1800" dirty="0">
+                <a:solidFill>
+                  <a:srgbClr val="9CA3AF"/>
+                </a:solidFill>
+                <a:latin typeface="Calibri" pitchFamily="34" charset="0"/>
+                <a:ea typeface="Calibri" pitchFamily="34" charset="-122"/>
+                <a:cs typeface="Calibri" pitchFamily="34" charset="-120"/>
+              </a:rPr>
+              <a:t>Nada fica só na palavra.</a:t>
+            </a:r>
+            <a:endParaRPr lang="en-US" sz="1800" dirty="0"/>
+          </a:p>
+        </p:txBody>
+      </p:sp>
+      <p:sp>
+        <p:nvSpPr>
+          <p:cNvPr id="7" name="Text 5"/>
+          <p:cNvSpPr/>
+          <p:nvPr/>
+        </p:nvSpPr>
+        <p:spPr>
+          <a:xfrm>
+            <a:off x="1371600" y="3429000"/>
+            <a:ext cx="365760" cy="502920"/>
+          </a:xfrm>
+          <a:prstGeom prst="rect">
+            <a:avLst/>
+          </a:prstGeom>
+          <a:noFill/>
+          <a:ln/>
+        </p:spPr>
+        <p:txBody>
+          <a:bodyPr wrap="square" rtlCol="0" anchor="ctr"/>
+          <a:lstStyle/>
+          <a:p>
+            <a:pPr indent="0" marL="0">
+              <a:buNone/>
+            </a:pPr>
+            <a:r>
+              <a:rPr lang="en-US" sz="1800" b="1" dirty="0">
+                <a:solidFill>
+                  <a:srgbClr val="7C3AED"/>
+                </a:solidFill>
+                <a:latin typeface="Calibri" pitchFamily="34" charset="0"/>
+                <a:ea typeface="Calibri" pitchFamily="34" charset="-122"/>
+                <a:cs typeface="Calibri" pitchFamily="34" charset="-120"/>
+              </a:rPr>
+              <a:t>✓</a:t>
+            </a:r>
+            <a:endParaRPr lang="en-US" sz="1800" dirty="0"/>
+          </a:p>
+        </p:txBody>
+      </p:sp>
+      <p:sp>
+        <p:nvSpPr>
+          <p:cNvPr id="8" name="Text 6"/>
+          <p:cNvSpPr/>
+          <p:nvPr/>
+        </p:nvSpPr>
+        <p:spPr>
+          <a:xfrm>
+            <a:off x="1874520" y="3429000"/>
+            <a:ext cx="8897112" cy="502920"/>
+          </a:xfrm>
+          <a:prstGeom prst="rect">
+            <a:avLst/>
+          </a:prstGeom>
+          <a:noFill/>
+          <a:ln/>
+        </p:spPr>
+        <p:txBody>
+          <a:bodyPr wrap="square" rtlCol="0" anchor="ctr"/>
+          <a:lstStyle/>
+          <a:p>
+            <a:pPr indent="0" marL="0">
+              <a:lnSpc>
+                <a:spcPct val="130000"/>
+              </a:lnSpc>
+              <a:buNone/>
+            </a:pPr>
+            <a:r>
+              <a:rPr lang="en-US" sz="1500" b="1" dirty="0">
+                <a:solidFill>
+                  <a:srgbClr val="FFFFFF"/>
+                </a:solidFill>
+                <a:latin typeface="Calibri" pitchFamily="34" charset="0"/>
+                <a:ea typeface="Calibri" pitchFamily="34" charset="-122"/>
+                <a:cs typeface="Calibri" pitchFamily="34" charset="-120"/>
+              </a:rPr>
+              <a:t>Divisão de receita clara e verificável</a:t>
+            </a:r>
+            <a:pPr indent="0" marL="0">
+              <a:lnSpc>
+                <a:spcPct val="130000"/>
               </a:lnSpc>
               <a:buNone/>
             </a:pPr>
@@ -4329,14 +4596,92 @@
                 <a:ea typeface="Calibri" pitchFamily="34" charset="-122"/>
                 <a:cs typeface="Calibri" pitchFamily="34" charset="-120"/>
               </a:rPr>
-              <a:t>Sei que a maior dúvida de qualquer expert é: "e se eu entregar meu conteúdo e não receber nada?"</a:t>
+              <a:t> — você acompanha em tempo real.</a:t>
             </a:r>
             <a:endParaRPr lang="en-US" sz="1500" dirty="0"/>
           </a:p>
-          <a:p>
-            <a:pPr algn="ctr" indent="0" marL="0">
-              <a:lnSpc>
-                <a:spcPct val="155000"/>
+        </p:txBody>
+      </p:sp>
+      <p:sp>
+        <p:nvSpPr>
+          <p:cNvPr id="9" name="Text 7"/>
+          <p:cNvSpPr/>
+          <p:nvPr/>
+        </p:nvSpPr>
+        <p:spPr>
+          <a:xfrm>
+            <a:off x="1371600" y="4087368"/>
+            <a:ext cx="365760" cy="502920"/>
+          </a:xfrm>
+          <a:prstGeom prst="rect">
+            <a:avLst/>
+          </a:prstGeom>
+          <a:noFill/>
+          <a:ln/>
+        </p:spPr>
+        <p:txBody>
+          <a:bodyPr wrap="square" rtlCol="0" anchor="ctr"/>
+          <a:lstStyle/>
+          <a:p>
+            <a:pPr indent="0" marL="0">
+              <a:buNone/>
+            </a:pPr>
+            <a:r>
+              <a:rPr lang="en-US" sz="1800" b="1" dirty="0">
+                <a:solidFill>
+                  <a:srgbClr val="7C3AED"/>
+                </a:solidFill>
+                <a:latin typeface="Calibri" pitchFamily="34" charset="0"/>
+                <a:ea typeface="Calibri" pitchFamily="34" charset="-122"/>
+                <a:cs typeface="Calibri" pitchFamily="34" charset="-120"/>
+              </a:rPr>
+              <a:t>✓</a:t>
+            </a:r>
+            <a:endParaRPr lang="en-US" sz="1800" dirty="0"/>
+          </a:p>
+        </p:txBody>
+      </p:sp>
+      <p:sp>
+        <p:nvSpPr>
+          <p:cNvPr id="10" name="Text 8"/>
+          <p:cNvSpPr/>
+          <p:nvPr/>
+        </p:nvSpPr>
+        <p:spPr>
+          <a:xfrm>
+            <a:off x="1874520" y="4087368"/>
+            <a:ext cx="8897112" cy="502920"/>
+          </a:xfrm>
+          <a:prstGeom prst="rect">
+            <a:avLst/>
+          </a:prstGeom>
+          <a:noFill/>
+          <a:ln/>
+        </p:spPr>
+        <p:txBody>
+          <a:bodyPr wrap="square" rtlCol="0" anchor="ctr"/>
+          <a:lstStyle/>
+          <a:p>
+            <a:pPr indent="0" marL="0">
+              <a:lnSpc>
+                <a:spcPct val="130000"/>
+              </a:lnSpc>
+              <a:buNone/>
+            </a:pPr>
+            <a:r>
+              <a:rPr lang="en-US" sz="1500" b="1" dirty="0">
+                <a:solidFill>
+                  <a:srgbClr val="FFFFFF"/>
+                </a:solidFill>
+                <a:latin typeface="Calibri" pitchFamily="34" charset="0"/>
+                <a:ea typeface="Calibri" pitchFamily="34" charset="-122"/>
+                <a:cs typeface="Calibri" pitchFamily="34" charset="-120"/>
+              </a:rPr>
+              <a:t>Seu conteúdo permanece seu</a:t>
+            </a:r>
+            <a:pPr indent="0" marL="0">
+              <a:lnSpc>
+                <a:spcPct val="130000"/>
               </a:lnSpc>
               <a:buNone/>
             </a:pPr>
@@ -4349,7 +4694,7 @@
                 <a:ea typeface="Calibri" pitchFamily="34" charset="-122"/>
                 <a:cs typeface="Calibri" pitchFamily="34" charset="-120"/>
               </a:rPr>
-              <a:t>Essa dúvida é legítima. E é exatamente por isso que tudo vai estar em papel.</a:t>
+              <a:t> — nada é usado fora desta parceria sem sua autorização.</a:t>
             </a:r>
             <a:endParaRPr lang="en-US" sz="1500" dirty="0"/>
           </a:p>
@@ -4357,14 +4702,14 @@
       </p:sp>
       <p:sp>
         <p:nvSpPr>
-          <p:cNvPr id="7" name="Text 5"/>
-          <p:cNvSpPr/>
-          <p:nvPr/>
-        </p:nvSpPr>
-        <p:spPr>
-          <a:xfrm>
-            <a:off x="1188720" y="3520440"/>
-            <a:ext cx="365760" cy="457200"/>
+          <p:cNvPr id="11" name="Text 9"/>
+          <p:cNvSpPr/>
+          <p:nvPr/>
+        </p:nvSpPr>
+        <p:spPr>
+          <a:xfrm>
+            <a:off x="1371600" y="4745736"/>
+            <a:ext cx="365760" cy="502920"/>
           </a:xfrm>
           <a:prstGeom prst="rect">
             <a:avLst/>
@@ -4380,7 +4725,7 @@
               <a:buNone/>
             </a:pPr>
             <a:r>
-              <a:rPr lang="en-US" sz="1600" b="1" dirty="0">
+              <a:rPr lang="en-US" sz="1800" b="1" dirty="0">
                 <a:solidFill>
                   <a:srgbClr val="7C3AED"/>
                 </a:solidFill>
@@ -4390,20 +4735,20 @@
               </a:rPr>
               <a:t>✓</a:t>
             </a:r>
-            <a:endParaRPr lang="en-US" sz="1600" dirty="0"/>
-          </a:p>
-        </p:txBody>
-      </p:sp>
-      <p:sp>
-        <p:nvSpPr>
-          <p:cNvPr id="8" name="Text 6"/>
-          <p:cNvSpPr/>
-          <p:nvPr/>
-        </p:nvSpPr>
-        <p:spPr>
-          <a:xfrm>
-            <a:off x="1645920" y="3520440"/>
-            <a:ext cx="9262872" cy="457200"/>
+            <a:endParaRPr lang="en-US" sz="1800" dirty="0"/>
+          </a:p>
+        </p:txBody>
+      </p:sp>
+      <p:sp>
+        <p:nvSpPr>
+          <p:cNvPr id="12" name="Text 10"/>
+          <p:cNvSpPr/>
+          <p:nvPr/>
+        </p:nvSpPr>
+        <p:spPr>
+          <a:xfrm>
+            <a:off x="1874520" y="4745736"/>
+            <a:ext cx="8897112" cy="502920"/>
           </a:xfrm>
           <a:prstGeom prst="rect">
             <a:avLst/>
@@ -4422,7 +4767,7 @@
               <a:buNone/>
             </a:pPr>
             <a:r>
-              <a:rPr lang="en-US" sz="1400" b="1" dirty="0">
+              <a:rPr lang="en-US" sz="1500" b="1" dirty="0">
                 <a:solidFill>
                   <a:srgbClr val="FFFFFF"/>
                 </a:solidFill>
@@ -4430,7 +4775,7 @@
                 <a:ea typeface="Calibri" pitchFamily="34" charset="-122"/>
                 <a:cs typeface="Calibri" pitchFamily="34" charset="-120"/>
               </a:rPr>
-              <a:t>Contrato formal de coprodução</a:t>
+              <a:t>Sem exclusividade</a:t>
             </a:r>
             <a:pPr indent="0" marL="0">
               <a:lnSpc>
@@ -4439,7 +4784,7 @@
               <a:buNone/>
             </a:pPr>
             <a:r>
-              <a:rPr lang="en-US" sz="1400" dirty="0">
+              <a:rPr lang="en-US" sz="1500" dirty="0">
                 <a:solidFill>
                   <a:srgbClr val="9CA3AF"/>
                 </a:solidFill>
@@ -4447,22 +4792,22 @@
                 <a:ea typeface="Calibri" pitchFamily="34" charset="-122"/>
                 <a:cs typeface="Calibri" pitchFamily="34" charset="-120"/>
               </a:rPr>
-              <a:t> — redigido por jurídico especializado em mercado digital</a:t>
-            </a:r>
-            <a:endParaRPr lang="en-US" sz="1400" dirty="0"/>
-          </a:p>
-        </p:txBody>
-      </p:sp>
-      <p:sp>
-        <p:nvSpPr>
-          <p:cNvPr id="9" name="Text 7"/>
-          <p:cNvSpPr/>
-          <p:nvPr/>
-        </p:nvSpPr>
-        <p:spPr>
-          <a:xfrm>
-            <a:off x="1188720" y="4087368"/>
-            <a:ext cx="365760" cy="457200"/>
+              <a:t> — você mantém todos os seus projetos e atendimentos.</a:t>
+            </a:r>
+            <a:endParaRPr lang="en-US" sz="1500" dirty="0"/>
+          </a:p>
+        </p:txBody>
+      </p:sp>
+      <p:sp>
+        <p:nvSpPr>
+          <p:cNvPr id="13" name="Text 11"/>
+          <p:cNvSpPr/>
+          <p:nvPr/>
+        </p:nvSpPr>
+        <p:spPr>
+          <a:xfrm>
+            <a:off x="1371600" y="5404104"/>
+            <a:ext cx="365760" cy="502920"/>
           </a:xfrm>
           <a:prstGeom prst="rect">
             <a:avLst/>
@@ -4478,7 +4823,7 @@
               <a:buNone/>
             </a:pPr>
             <a:r>
-              <a:rPr lang="en-US" sz="1600" b="1" dirty="0">
+              <a:rPr lang="en-US" sz="1800" b="1" dirty="0">
                 <a:solidFill>
                   <a:srgbClr val="7C3AED"/>
                 </a:solidFill>
@@ -4488,20 +4833,20 @@
               </a:rPr>
               <a:t>✓</a:t>
             </a:r>
-            <a:endParaRPr lang="en-US" sz="1600" dirty="0"/>
-          </a:p>
-        </p:txBody>
-      </p:sp>
-      <p:sp>
-        <p:nvSpPr>
-          <p:cNvPr id="10" name="Text 8"/>
-          <p:cNvSpPr/>
-          <p:nvPr/>
-        </p:nvSpPr>
-        <p:spPr>
-          <a:xfrm>
-            <a:off x="1645920" y="4087368"/>
-            <a:ext cx="9262872" cy="457200"/>
+            <a:endParaRPr lang="en-US" sz="1800" dirty="0"/>
+          </a:p>
+        </p:txBody>
+      </p:sp>
+      <p:sp>
+        <p:nvSpPr>
+          <p:cNvPr id="14" name="Text 12"/>
+          <p:cNvSpPr/>
+          <p:nvPr/>
+        </p:nvSpPr>
+        <p:spPr>
+          <a:xfrm>
+            <a:off x="1874520" y="5404104"/>
+            <a:ext cx="8897112" cy="502920"/>
           </a:xfrm>
           <a:prstGeom prst="rect">
             <a:avLst/>
@@ -4520,7 +4865,7 @@
               <a:buNone/>
             </a:pPr>
             <a:r>
-              <a:rPr lang="en-US" sz="1400" b="1" dirty="0">
+              <a:rPr lang="en-US" sz="1500" b="1" dirty="0">
                 <a:solidFill>
                   <a:srgbClr val="FFFFFF"/>
                 </a:solidFill>
@@ -4528,7 +4873,7 @@
                 <a:ea typeface="Calibri" pitchFamily="34" charset="-122"/>
                 <a:cs typeface="Calibri" pitchFamily="34" charset="-120"/>
               </a:rPr>
-              <a:t>Acesso total aos dados de vendas em tempo real</a:t>
+              <a:t>Saída garantida</a:t>
             </a:r>
             <a:pPr indent="0" marL="0">
               <a:lnSpc>
@@ -4537,7 +4882,7 @@
               <a:buNone/>
             </a:pPr>
             <a:r>
-              <a:rPr lang="en-US" sz="1400" dirty="0">
+              <a:rPr lang="en-US" sz="1500" dirty="0">
                 <a:solidFill>
                   <a:srgbClr val="9CA3AF"/>
                 </a:solidFill>
@@ -4545,80 +4890,41 @@
                 <a:ea typeface="Calibri" pitchFamily="34" charset="-122"/>
                 <a:cs typeface="Calibri" pitchFamily="34" charset="-120"/>
               </a:rPr>
-              <a:t> — você vê cada centavo que entra</a:t>
-            </a:r>
-            <a:endParaRPr lang="en-US" sz="1400" dirty="0"/>
-          </a:p>
-        </p:txBody>
-      </p:sp>
-      <p:sp>
-        <p:nvSpPr>
-          <p:cNvPr id="11" name="Text 9"/>
-          <p:cNvSpPr/>
-          <p:nvPr/>
-        </p:nvSpPr>
-        <p:spPr>
-          <a:xfrm>
-            <a:off x="1188720" y="4654296"/>
-            <a:ext cx="365760" cy="457200"/>
-          </a:xfrm>
-          <a:prstGeom prst="rect">
-            <a:avLst/>
-          </a:prstGeom>
-          <a:noFill/>
-          <a:ln/>
-        </p:spPr>
-        <p:txBody>
-          <a:bodyPr wrap="square" rtlCol="0" anchor="ctr"/>
-          <a:lstStyle/>
-          <a:p>
-            <a:pPr indent="0" marL="0">
-              <a:buNone/>
-            </a:pPr>
-            <a:r>
-              <a:rPr lang="en-US" sz="1600" b="1" dirty="0">
-                <a:solidFill>
-                  <a:srgbClr val="7C3AED"/>
-                </a:solidFill>
-                <a:latin typeface="Calibri" pitchFamily="34" charset="0"/>
-                <a:ea typeface="Calibri" pitchFamily="34" charset="-122"/>
-                <a:cs typeface="Calibri" pitchFamily="34" charset="-120"/>
-              </a:rPr>
-              <a:t>✓</a:t>
-            </a:r>
-            <a:endParaRPr lang="en-US" sz="1600" dirty="0"/>
-          </a:p>
-        </p:txBody>
-      </p:sp>
-      <p:sp>
-        <p:nvSpPr>
-          <p:cNvPr id="12" name="Text 10"/>
-          <p:cNvSpPr/>
-          <p:nvPr/>
-        </p:nvSpPr>
-        <p:spPr>
-          <a:xfrm>
-            <a:off x="1645920" y="4654296"/>
-            <a:ext cx="9262872" cy="457200"/>
-          </a:xfrm>
-          <a:prstGeom prst="rect">
-            <a:avLst/>
-          </a:prstGeom>
-          <a:noFill/>
-          <a:ln/>
-        </p:spPr>
-        <p:txBody>
-          <a:bodyPr wrap="square" rtlCol="0" anchor="ctr"/>
-          <a:lstStyle/>
-          <a:p>
-            <a:pPr indent="0" marL="0">
-              <a:lnSpc>
-                <a:spcPct val="130000"/>
-              </a:lnSpc>
-              <a:buNone/>
-            </a:pPr>
-            <a:r>
-              <a:rPr lang="en-US" sz="1400" b="1" dirty="0">
+              <a:t> — se quiser sair, a operação tem transição estruturada.</a:t>
+            </a:r>
+            <a:endParaRPr lang="en-US" sz="1500" dirty="0"/>
+          </a:p>
+        </p:txBody>
+      </p:sp>
+      <p:sp>
+        <p:nvSpPr>
+          <p:cNvPr id="15" name="Text 13"/>
+          <p:cNvSpPr/>
+          <p:nvPr/>
+        </p:nvSpPr>
+        <p:spPr>
+          <a:xfrm>
+            <a:off x="1371600" y="6080760"/>
+            <a:ext cx="9445752" cy="594360"/>
+          </a:xfrm>
+          <a:prstGeom prst="rect">
+            <a:avLst/>
+          </a:prstGeom>
+          <a:noFill/>
+          <a:ln/>
+        </p:spPr>
+        <p:txBody>
+          <a:bodyPr wrap="square" rtlCol="0" anchor="ctr"/>
+          <a:lstStyle/>
+          <a:p>
+            <a:pPr algn="ctr" indent="0" marL="0">
+              <a:lnSpc>
+                <a:spcPct val="140000"/>
+              </a:lnSpc>
+              <a:buNone/>
+            </a:pPr>
+            <a:r>
+              <a:rPr lang="en-US" sz="1500" b="1" dirty="0">
                 <a:solidFill>
                   <a:srgbClr val="FFFFFF"/>
                 </a:solidFill>
@@ -4626,97 +4932,19 @@
                 <a:ea typeface="Calibri" pitchFamily="34" charset="-122"/>
                 <a:cs typeface="Calibri" pitchFamily="34" charset="-120"/>
               </a:rPr>
-              <a:t>Seu conteúdo é seu</a:t>
-            </a:r>
-            <a:pPr indent="0" marL="0">
-              <a:lnSpc>
-                <a:spcPct val="130000"/>
-              </a:lnSpc>
-              <a:buNone/>
-            </a:pPr>
-            <a:r>
-              <a:rPr lang="en-US" sz="1400" dirty="0">
-                <a:solidFill>
-                  <a:srgbClr val="9CA3AF"/>
-                </a:solidFill>
-                <a:latin typeface="Calibri" pitchFamily="34" charset="0"/>
-                <a:ea typeface="Calibri" pitchFamily="34" charset="-122"/>
-                <a:cs typeface="Calibri" pitchFamily="34" charset="-120"/>
-              </a:rPr>
-              <a:t> — nenhuma gravação usada fora desta parceria sem sua autorização</a:t>
-            </a:r>
-            <a:endParaRPr lang="en-US" sz="1400" dirty="0"/>
-          </a:p>
-        </p:txBody>
-      </p:sp>
-      <p:sp>
-        <p:nvSpPr>
-          <p:cNvPr id="13" name="Text 11"/>
-          <p:cNvSpPr/>
-          <p:nvPr/>
-        </p:nvSpPr>
-        <p:spPr>
-          <a:xfrm>
-            <a:off x="1188720" y="5221224"/>
-            <a:ext cx="365760" cy="457200"/>
-          </a:xfrm>
-          <a:prstGeom prst="rect">
-            <a:avLst/>
-          </a:prstGeom>
-          <a:noFill/>
-          <a:ln/>
-        </p:spPr>
-        <p:txBody>
-          <a:bodyPr wrap="square" rtlCol="0" anchor="ctr"/>
-          <a:lstStyle/>
-          <a:p>
-            <a:pPr indent="0" marL="0">
-              <a:buNone/>
-            </a:pPr>
-            <a:r>
-              <a:rPr lang="en-US" sz="1600" b="1" dirty="0">
-                <a:solidFill>
-                  <a:srgbClr val="7C3AED"/>
-                </a:solidFill>
-                <a:latin typeface="Calibri" pitchFamily="34" charset="0"/>
-                <a:ea typeface="Calibri" pitchFamily="34" charset="-122"/>
-                <a:cs typeface="Calibri" pitchFamily="34" charset="-120"/>
-              </a:rPr>
-              <a:t>✓</a:t>
-            </a:r>
-            <a:endParaRPr lang="en-US" sz="1600" dirty="0"/>
-          </a:p>
-        </p:txBody>
-      </p:sp>
-      <p:sp>
-        <p:nvSpPr>
-          <p:cNvPr id="14" name="Text 12"/>
-          <p:cNvSpPr/>
-          <p:nvPr/>
-        </p:nvSpPr>
-        <p:spPr>
-          <a:xfrm>
-            <a:off x="1645920" y="5221224"/>
-            <a:ext cx="9262872" cy="457200"/>
-          </a:xfrm>
-          <a:prstGeom prst="rect">
-            <a:avLst/>
-          </a:prstGeom>
-          <a:noFill/>
-          <a:ln/>
-        </p:spPr>
-        <p:txBody>
-          <a:bodyPr wrap="square" rtlCol="0" anchor="ctr"/>
-          <a:lstStyle/>
-          <a:p>
-            <a:pPr indent="0" marL="0">
-              <a:lnSpc>
-                <a:spcPct val="130000"/>
-              </a:lnSpc>
-              <a:buNone/>
-            </a:pPr>
-            <a:r>
-              <a:rPr lang="en-US" sz="1400" b="1" dirty="0">
+              <a:t>Você não precisa acreditar na minha palavra.</a:t>
+            </a:r>
+            <a:endParaRPr lang="en-US" sz="1500" dirty="0"/>
+          </a:p>
+          <a:p>
+            <a:pPr algn="ctr" indent="0" marL="0">
+              <a:lnSpc>
+                <a:spcPct val="140000"/>
+              </a:lnSpc>
+              <a:buNone/>
+            </a:pPr>
+            <a:r>
+              <a:rPr lang="en-US" sz="1500" b="1" dirty="0">
                 <a:solidFill>
                   <a:srgbClr val="FFFFFF"/>
                 </a:solidFill>
@@ -4724,186 +4952,9 @@
                 <a:ea typeface="Calibri" pitchFamily="34" charset="-122"/>
                 <a:cs typeface="Calibri" pitchFamily="34" charset="-120"/>
               </a:rPr>
-              <a:t>Sem exclusividade</a:t>
-            </a:r>
-            <a:pPr indent="0" marL="0">
-              <a:lnSpc>
-                <a:spcPct val="130000"/>
-              </a:lnSpc>
-              <a:buNone/>
-            </a:pPr>
-            <a:r>
-              <a:rPr lang="en-US" sz="1400" dirty="0">
-                <a:solidFill>
-                  <a:srgbClr val="9CA3AF"/>
-                </a:solidFill>
-                <a:latin typeface="Calibri" pitchFamily="34" charset="0"/>
-                <a:ea typeface="Calibri" pitchFamily="34" charset="-122"/>
-                <a:cs typeface="Calibri" pitchFamily="34" charset="-120"/>
-              </a:rPr>
-              <a:t> — você mantém todos os seus atendimentos e projetos</a:t>
-            </a:r>
-            <a:endParaRPr lang="en-US" sz="1400" dirty="0"/>
-          </a:p>
-        </p:txBody>
-      </p:sp>
-      <p:sp>
-        <p:nvSpPr>
-          <p:cNvPr id="15" name="Text 13"/>
-          <p:cNvSpPr/>
-          <p:nvPr/>
-        </p:nvSpPr>
-        <p:spPr>
-          <a:xfrm>
-            <a:off x="1188720" y="5788152"/>
-            <a:ext cx="365760" cy="457200"/>
-          </a:xfrm>
-          <a:prstGeom prst="rect">
-            <a:avLst/>
-          </a:prstGeom>
-          <a:noFill/>
-          <a:ln/>
-        </p:spPr>
-        <p:txBody>
-          <a:bodyPr wrap="square" rtlCol="0" anchor="ctr"/>
-          <a:lstStyle/>
-          <a:p>
-            <a:pPr indent="0" marL="0">
-              <a:buNone/>
-            </a:pPr>
-            <a:r>
-              <a:rPr lang="en-US" sz="1600" b="1" dirty="0">
-                <a:solidFill>
-                  <a:srgbClr val="7C3AED"/>
-                </a:solidFill>
-                <a:latin typeface="Calibri" pitchFamily="34" charset="0"/>
-                <a:ea typeface="Calibri" pitchFamily="34" charset="-122"/>
-                <a:cs typeface="Calibri" pitchFamily="34" charset="-120"/>
-              </a:rPr>
-              <a:t>✓</a:t>
-            </a:r>
-            <a:endParaRPr lang="en-US" sz="1600" dirty="0"/>
-          </a:p>
-        </p:txBody>
-      </p:sp>
-      <p:sp>
-        <p:nvSpPr>
-          <p:cNvPr id="16" name="Text 14"/>
-          <p:cNvSpPr/>
-          <p:nvPr/>
-        </p:nvSpPr>
-        <p:spPr>
-          <a:xfrm>
-            <a:off x="1645920" y="5788152"/>
-            <a:ext cx="9262872" cy="457200"/>
-          </a:xfrm>
-          <a:prstGeom prst="rect">
-            <a:avLst/>
-          </a:prstGeom>
-          <a:noFill/>
-          <a:ln/>
-        </p:spPr>
-        <p:txBody>
-          <a:bodyPr wrap="square" rtlCol="0" anchor="ctr"/>
-          <a:lstStyle/>
-          <a:p>
-            <a:pPr indent="0" marL="0">
-              <a:lnSpc>
-                <a:spcPct val="130000"/>
-              </a:lnSpc>
-              <a:buNone/>
-            </a:pPr>
-            <a:r>
-              <a:rPr lang="en-US" sz="1400" b="1" dirty="0">
-                <a:solidFill>
-                  <a:srgbClr val="FFFFFF"/>
-                </a:solidFill>
-                <a:latin typeface="Calibri" pitchFamily="34" charset="0"/>
-                <a:ea typeface="Calibri" pitchFamily="34" charset="-122"/>
-                <a:cs typeface="Calibri" pitchFamily="34" charset="-120"/>
-              </a:rPr>
-              <a:t>Você pode sair</a:t>
-            </a:r>
-            <a:pPr indent="0" marL="0">
-              <a:lnSpc>
-                <a:spcPct val="130000"/>
-              </a:lnSpc>
-              <a:buNone/>
-            </a:pPr>
-            <a:r>
-              <a:rPr lang="en-US" sz="1400" dirty="0">
-                <a:solidFill>
-                  <a:srgbClr val="9CA3AF"/>
-                </a:solidFill>
-                <a:latin typeface="Calibri" pitchFamily="34" charset="0"/>
-                <a:ea typeface="Calibri" pitchFamily="34" charset="-122"/>
-                <a:cs typeface="Calibri" pitchFamily="34" charset="-120"/>
-              </a:rPr>
-              <a:t> — a qualquer momento, respeitado o período de transição</a:t>
-            </a:r>
-            <a:endParaRPr lang="en-US" sz="1400" dirty="0"/>
-          </a:p>
-        </p:txBody>
-      </p:sp>
-      <p:sp>
-        <p:nvSpPr>
-          <p:cNvPr id="17" name="Text 15"/>
-          <p:cNvSpPr/>
-          <p:nvPr/>
-        </p:nvSpPr>
-        <p:spPr>
-          <a:xfrm>
-            <a:off x="1371600" y="6400800"/>
-            <a:ext cx="9445752" cy="502920"/>
-          </a:xfrm>
-          <a:prstGeom prst="rect">
-            <a:avLst/>
-          </a:prstGeom>
-          <a:noFill/>
-          <a:ln/>
-        </p:spPr>
-        <p:txBody>
-          <a:bodyPr wrap="square" rtlCol="0" anchor="ctr"/>
-          <a:lstStyle/>
-          <a:p>
-            <a:pPr algn="ctr" indent="0" marL="0">
-              <a:lnSpc>
-                <a:spcPct val="140000"/>
-              </a:lnSpc>
-              <a:buNone/>
-            </a:pPr>
-            <a:r>
-              <a:rPr lang="en-US" sz="1400" b="1" dirty="0">
-                <a:solidFill>
-                  <a:srgbClr val="FFFFFF"/>
-                </a:solidFill>
-                <a:latin typeface="Calibri" pitchFamily="34" charset="0"/>
-                <a:ea typeface="Calibri" pitchFamily="34" charset="-122"/>
-                <a:cs typeface="Calibri" pitchFamily="34" charset="-120"/>
-              </a:rPr>
-              <a:t>Você não precisa confiar em mim porque eu sou bacana.</a:t>
-            </a:r>
-            <a:endParaRPr lang="en-US" sz="1400" dirty="0"/>
-          </a:p>
-          <a:p>
-            <a:pPr algn="ctr" indent="0" marL="0">
-              <a:lnSpc>
-                <a:spcPct val="140000"/>
-              </a:lnSpc>
-              <a:buNone/>
-            </a:pPr>
-            <a:r>
-              <a:rPr lang="en-US" sz="1400" b="1" dirty="0">
-                <a:solidFill>
-                  <a:srgbClr val="FFFFFF"/>
-                </a:solidFill>
-                <a:latin typeface="Calibri" pitchFamily="34" charset="0"/>
-                <a:ea typeface="Calibri" pitchFamily="34" charset="-122"/>
-                <a:cs typeface="Calibri" pitchFamily="34" charset="-120"/>
-              </a:rPr>
-              <a:t>Você confia porque está escrito, assinado e verificável.</a:t>
-            </a:r>
-            <a:endParaRPr lang="en-US" sz="1400" dirty="0"/>
+              <a:t>Você vai ter tudo escrito, assinado e verificável.</a:t>
+            </a:r>
+            <a:endParaRPr lang="en-US" sz="1500" dirty="0"/>
           </a:p>
         </p:txBody>
       </p:sp>
@@ -5681,7 +5732,7 @@
                 <a:ea typeface="Calibri" pitchFamily="34" charset="-122"/>
                 <a:cs typeface="Calibri" pitchFamily="34" charset="-120"/>
               </a:rPr>
-              <a:t>POR QUE EU TE ESCOLHI</a:t>
+              <a:t>POR QUE VOCÊ</a:t>
             </a:r>
             <a:endParaRPr lang="en-US" sz="900" dirty="0"/>
           </a:p>
@@ -5695,27 +5746,27 @@
         </p:nvSpPr>
         <p:spPr>
           <a:xfrm>
-            <a:off x="914400" y="914400"/>
-            <a:ext cx="10360152" cy="1280160"/>
-          </a:xfrm>
-          <a:prstGeom prst="rect">
-            <a:avLst/>
-          </a:prstGeom>
-          <a:noFill/>
-          <a:ln/>
-        </p:spPr>
-        <p:txBody>
-          <a:bodyPr wrap="square" rtlCol="0" anchor="ctr"/>
-          <a:lstStyle/>
-          <a:p>
-            <a:pPr algn="ctr" indent="0" marL="0">
-              <a:lnSpc>
-                <a:spcPct val="115000"/>
-              </a:lnSpc>
-              <a:buNone/>
-            </a:pPr>
-            <a:r>
-              <a:rPr lang="en-US" sz="3600" b="1" dirty="0">
+            <a:off x="914400" y="777240"/>
+            <a:ext cx="10360152" cy="1417320"/>
+          </a:xfrm>
+          <a:prstGeom prst="rect">
+            <a:avLst/>
+          </a:prstGeom>
+          <a:noFill/>
+          <a:ln/>
+        </p:spPr>
+        <p:txBody>
+          <a:bodyPr wrap="square" rtlCol="0" anchor="ctr"/>
+          <a:lstStyle/>
+          <a:p>
+            <a:pPr algn="ctr" indent="0" marL="0">
+              <a:lnSpc>
+                <a:spcPct val="110000"/>
+              </a:lnSpc>
+              <a:buNone/>
+            </a:pPr>
+            <a:r>
+              <a:rPr lang="en-US" sz="4600" b="1" dirty="0">
                 <a:solidFill>
                   <a:srgbClr val="FFFFFF"/>
                 </a:solidFill>
@@ -5723,9 +5774,29 @@
                 <a:ea typeface="Calibri" pitchFamily="34" charset="-122"/>
                 <a:cs typeface="Calibri" pitchFamily="34" charset="-120"/>
               </a:rPr>
-              <a:t>Eu analisei dezenas de perfis antes de chegar até você.</a:t>
-            </a:r>
-            <a:endParaRPr lang="en-US" sz="3600" dirty="0"/>
+              <a:t>Você tem o ativo mais raro</a:t>
+            </a:r>
+            <a:endParaRPr lang="en-US" sz="4600" dirty="0"/>
+          </a:p>
+          <a:p>
+            <a:pPr algn="ctr" indent="0" marL="0">
+              <a:lnSpc>
+                <a:spcPct val="110000"/>
+              </a:lnSpc>
+              <a:buNone/>
+            </a:pPr>
+            <a:r>
+              <a:rPr lang="en-US" sz="4600" b="1" dirty="0">
+                <a:solidFill>
+                  <a:srgbClr val="FFFFFF"/>
+                </a:solidFill>
+                <a:latin typeface="Calibri" pitchFamily="34" charset="0"/>
+                <a:ea typeface="Calibri" pitchFamily="34" charset="-122"/>
+                <a:cs typeface="Calibri" pitchFamily="34" charset="-120"/>
+              </a:rPr>
+              <a:t>do mercado digital.</a:t>
+            </a:r>
+            <a:endParaRPr lang="en-US" sz="4600" dirty="0"/>
           </a:p>
         </p:txBody>
       </p:sp>
@@ -5737,7 +5808,7 @@
         </p:nvSpPr>
         <p:spPr>
           <a:xfrm>
-            <a:off x="5728716" y="2286000"/>
+            <a:off x="5728716" y="2331720"/>
             <a:ext cx="731520" cy="36576"/>
           </a:xfrm>
           <a:prstGeom prst="rect">
@@ -5756,33 +5827,124 @@
       </p:sp>
       <p:sp>
         <p:nvSpPr>
-          <p:cNvPr id="6" name="Text 4"/>
-          <p:cNvSpPr/>
-          <p:nvPr/>
-        </p:nvSpPr>
-        <p:spPr>
-          <a:xfrm>
-            <a:off x="1645920" y="2423160"/>
-            <a:ext cx="8897112" cy="3200400"/>
-          </a:xfrm>
-          <a:prstGeom prst="rect">
-            <a:avLst/>
-          </a:prstGeom>
-          <a:noFill/>
-          <a:ln/>
-        </p:spPr>
-        <p:txBody>
-          <a:bodyPr wrap="square" rtlCol="0" anchor="ctr"/>
-          <a:lstStyle/>
-          <a:p>
-            <a:pPr algn="ctr" indent="0" marL="0">
-              <a:lnSpc>
-                <a:spcPct val="165000"/>
-              </a:lnSpc>
-              <a:buNone/>
-            </a:pPr>
-            <a:r>
-              <a:rPr lang="en-US" sz="1700" dirty="0">
+          <p:cNvPr id="6" name="Shape 4"/>
+          <p:cNvSpPr/>
+          <p:nvPr/>
+        </p:nvSpPr>
+        <p:spPr>
+          <a:xfrm>
+            <a:off x="457200" y="2514600"/>
+            <a:ext cx="3657600" cy="3931920"/>
+          </a:xfrm>
+          <a:prstGeom prst="rect">
+            <a:avLst>
+              <a:gd name="adj" fmla="val 3750"/>
+            </a:avLst>
+          </a:prstGeom>
+          <a:solidFill>
+            <a:srgbClr val="111111"/>
+          </a:solidFill>
+          <a:ln w="12700">
+            <a:solidFill>
+              <a:srgbClr val="1F1F1F"/>
+            </a:solidFill>
+            <a:prstDash val="solid"/>
+          </a:ln>
+        </p:spPr>
+      </p:sp>
+      <p:sp>
+        <p:nvSpPr>
+          <p:cNvPr id="7" name="Text 5"/>
+          <p:cNvSpPr/>
+          <p:nvPr/>
+        </p:nvSpPr>
+        <p:spPr>
+          <a:xfrm>
+            <a:off x="594360" y="2697480"/>
+            <a:ext cx="3383280" cy="457200"/>
+          </a:xfrm>
+          <a:prstGeom prst="rect">
+            <a:avLst/>
+          </a:prstGeom>
+          <a:noFill/>
+          <a:ln/>
+        </p:spPr>
+        <p:txBody>
+          <a:bodyPr wrap="square" rtlCol="0" anchor="ctr"/>
+          <a:lstStyle/>
+          <a:p>
+            <a:pPr algn="ctr" indent="0" marL="0">
+              <a:buNone/>
+            </a:pPr>
+            <a:r>
+              <a:rPr lang="en-US" sz="1600" b="1" dirty="0">
+                <a:solidFill>
+                  <a:srgbClr val="FFFFFF"/>
+                </a:solidFill>
+                <a:latin typeface="Calibri" pitchFamily="34" charset="0"/>
+                <a:ea typeface="Calibri" pitchFamily="34" charset="-122"/>
+                <a:cs typeface="Calibri" pitchFamily="34" charset="-120"/>
+              </a:rPr>
+              <a:t>Autoridade Real</a:t>
+            </a:r>
+            <a:endParaRPr lang="en-US" sz="1600" dirty="0"/>
+          </a:p>
+        </p:txBody>
+      </p:sp>
+      <p:sp>
+        <p:nvSpPr>
+          <p:cNvPr id="8" name="Shape 6"/>
+          <p:cNvSpPr/>
+          <p:nvPr/>
+        </p:nvSpPr>
+        <p:spPr>
+          <a:xfrm>
+            <a:off x="1828800" y="3200400"/>
+            <a:ext cx="914400" cy="27432"/>
+          </a:xfrm>
+          <a:prstGeom prst="rect">
+            <a:avLst/>
+          </a:prstGeom>
+          <a:solidFill>
+            <a:srgbClr val="7C3AED"/>
+          </a:solidFill>
+          <a:ln w="12700">
+            <a:solidFill>
+              <a:srgbClr val="7C3AED"/>
+            </a:solidFill>
+            <a:prstDash val="solid"/>
+          </a:ln>
+        </p:spPr>
+      </p:sp>
+      <p:sp>
+        <p:nvSpPr>
+          <p:cNvPr id="9" name="Text 7"/>
+          <p:cNvSpPr/>
+          <p:nvPr/>
+        </p:nvSpPr>
+        <p:spPr>
+          <a:xfrm>
+            <a:off x="594360" y="3337560"/>
+            <a:ext cx="3383280" cy="2560320"/>
+          </a:xfrm>
+          <a:prstGeom prst="rect">
+            <a:avLst/>
+          </a:prstGeom>
+          <a:noFill/>
+          <a:ln/>
+        </p:spPr>
+        <p:txBody>
+          <a:bodyPr wrap="square" rtlCol="0" anchor="ctr"/>
+          <a:lstStyle/>
+          <a:p>
+            <a:pPr algn="ctr" indent="0" marL="0">
+              <a:lnSpc>
+                <a:spcPct val="155000"/>
+              </a:lnSpc>
+              <a:buNone/>
+            </a:pPr>
+            <a:r>
+              <a:rPr lang="en-US" sz="1300" dirty="0">
                 <a:solidFill>
                   <a:srgbClr val="9CA3AF"/>
                 </a:solidFill>
@@ -5790,17 +5952,258 @@
                 <a:ea typeface="Calibri" pitchFamily="34" charset="-122"/>
                 <a:cs typeface="Calibri" pitchFamily="34" charset="-120"/>
               </a:rPr>
-              <a:t>A maioria fala de psicanálise como teoria.
-</a:t>
-            </a:r>
-            <a:pPr algn="ctr" indent="0" marL="0">
-              <a:lnSpc>
-                <a:spcPct val="165000"/>
-              </a:lnSpc>
-              <a:buNone/>
-            </a:pPr>
-            <a:r>
-              <a:rPr lang="en-US" sz="1700" b="1" dirty="0">
+              <a:t>Você não ensina psicanálise como teoria.</a:t>
+            </a:r>
+            <a:endParaRPr lang="en-US" sz="1300" dirty="0"/>
+          </a:p>
+          <a:p>
+            <a:pPr algn="ctr" indent="0" marL="0">
+              <a:lnSpc>
+                <a:spcPct val="155000"/>
+              </a:lnSpc>
+              <a:buNone/>
+            </a:pPr>
+            <a:r>
+              <a:rPr lang="en-US" sz="1300" dirty="0">
+                <a:solidFill>
+                  <a:srgbClr val="9CA3AF"/>
+                </a:solidFill>
+                <a:latin typeface="Calibri" pitchFamily="34" charset="0"/>
+                <a:ea typeface="Calibri" pitchFamily="34" charset="-122"/>
+                <a:cs typeface="Calibri" pitchFamily="34" charset="-120"/>
+              </a:rPr>
+              <a:t>Você fala como quem viveu.</a:t>
+            </a:r>
+            <a:endParaRPr lang="en-US" sz="1300" dirty="0"/>
+          </a:p>
+          <a:p>
+            <a:pPr algn="ctr" indent="0" marL="0">
+              <a:lnSpc>
+                <a:spcPct val="155000"/>
+              </a:lnSpc>
+              <a:buNone/>
+            </a:pPr>
+            <a:r>
+              <a:rPr lang="en-US" sz="1300" dirty="0">
+                <a:solidFill>
+                  <a:srgbClr val="9CA3AF"/>
+                </a:solidFill>
+                <a:latin typeface="Calibri" pitchFamily="34" charset="0"/>
+                <a:ea typeface="Calibri" pitchFamily="34" charset="-122"/>
+                <a:cs typeface="Calibri" pitchFamily="34" charset="-120"/>
+              </a:rPr>
+              <a:t>Isso cria confiança que não se compra.</a:t>
+            </a:r>
+            <a:endParaRPr lang="en-US" sz="1300" dirty="0"/>
+          </a:p>
+        </p:txBody>
+      </p:sp>
+      <p:sp>
+        <p:nvSpPr>
+          <p:cNvPr id="10" name="Shape 8"/>
+          <p:cNvSpPr/>
+          <p:nvPr/>
+        </p:nvSpPr>
+        <p:spPr>
+          <a:xfrm>
+            <a:off x="4389120" y="2514600"/>
+            <a:ext cx="3657600" cy="3931920"/>
+          </a:xfrm>
+          <a:prstGeom prst="rect">
+            <a:avLst>
+              <a:gd name="adj" fmla="val 3750"/>
+            </a:avLst>
+          </a:prstGeom>
+          <a:solidFill>
+            <a:srgbClr val="1A0A2E"/>
+          </a:solidFill>
+          <a:ln w="12700">
+            <a:solidFill>
+              <a:srgbClr val="7C3AED"/>
+            </a:solidFill>
+            <a:prstDash val="solid"/>
+          </a:ln>
+        </p:spPr>
+      </p:sp>
+      <p:sp>
+        <p:nvSpPr>
+          <p:cNvPr id="11" name="Text 9"/>
+          <p:cNvSpPr/>
+          <p:nvPr/>
+        </p:nvSpPr>
+        <p:spPr>
+          <a:xfrm>
+            <a:off x="4526280" y="2697480"/>
+            <a:ext cx="3383280" cy="457200"/>
+          </a:xfrm>
+          <a:prstGeom prst="rect">
+            <a:avLst/>
+          </a:prstGeom>
+          <a:noFill/>
+          <a:ln/>
+        </p:spPr>
+        <p:txBody>
+          <a:bodyPr wrap="square" rtlCol="0" anchor="ctr"/>
+          <a:lstStyle/>
+          <a:p>
+            <a:pPr algn="ctr" indent="0" marL="0">
+              <a:buNone/>
+            </a:pPr>
+            <a:r>
+              <a:rPr lang="en-US" sz="1600" b="1" dirty="0">
+                <a:solidFill>
+                  <a:srgbClr val="7C3AED"/>
+                </a:solidFill>
+                <a:latin typeface="Calibri" pitchFamily="34" charset="0"/>
+                <a:ea typeface="Calibri" pitchFamily="34" charset="-122"/>
+                <a:cs typeface="Calibri" pitchFamily="34" charset="-120"/>
+              </a:rPr>
+              <a:t>Audiência que Converte</a:t>
+            </a:r>
+            <a:endParaRPr lang="en-US" sz="1600" dirty="0"/>
+          </a:p>
+        </p:txBody>
+      </p:sp>
+      <p:sp>
+        <p:nvSpPr>
+          <p:cNvPr id="12" name="Shape 10"/>
+          <p:cNvSpPr/>
+          <p:nvPr/>
+        </p:nvSpPr>
+        <p:spPr>
+          <a:xfrm>
+            <a:off x="5760720" y="3200400"/>
+            <a:ext cx="914400" cy="27432"/>
+          </a:xfrm>
+          <a:prstGeom prst="rect">
+            <a:avLst/>
+          </a:prstGeom>
+          <a:solidFill>
+            <a:srgbClr val="7C3AED"/>
+          </a:solidFill>
+          <a:ln w="12700">
+            <a:solidFill>
+              <a:srgbClr val="7C3AED"/>
+            </a:solidFill>
+            <a:prstDash val="solid"/>
+          </a:ln>
+        </p:spPr>
+      </p:sp>
+      <p:sp>
+        <p:nvSpPr>
+          <p:cNvPr id="13" name="Text 11"/>
+          <p:cNvSpPr/>
+          <p:nvPr/>
+        </p:nvSpPr>
+        <p:spPr>
+          <a:xfrm>
+            <a:off x="4526280" y="3337560"/>
+            <a:ext cx="3383280" cy="2560320"/>
+          </a:xfrm>
+          <a:prstGeom prst="rect">
+            <a:avLst/>
+          </a:prstGeom>
+          <a:noFill/>
+          <a:ln/>
+        </p:spPr>
+        <p:txBody>
+          <a:bodyPr wrap="square" rtlCol="0" anchor="ctr"/>
+          <a:lstStyle/>
+          <a:p>
+            <a:pPr algn="ctr" indent="0" marL="0">
+              <a:lnSpc>
+                <a:spcPct val="155000"/>
+              </a:lnSpc>
+              <a:buNone/>
+            </a:pPr>
+            <a:r>
+              <a:rPr lang="en-US" sz="1300" dirty="0">
+                <a:solidFill>
+                  <a:srgbClr val="9CA3AF"/>
+                </a:solidFill>
+                <a:latin typeface="Calibri" pitchFamily="34" charset="0"/>
+                <a:ea typeface="Calibri" pitchFamily="34" charset="-122"/>
+                <a:cs typeface="Calibri" pitchFamily="34" charset="-120"/>
+              </a:rPr>
+              <a:t>Mulheres que se perdem, se anulam e buscam se reconstruir.</a:t>
+            </a:r>
+            <a:endParaRPr lang="en-US" sz="1300" dirty="0"/>
+          </a:p>
+          <a:p>
+            <a:pPr algn="ctr" indent="0" marL="0">
+              <a:lnSpc>
+                <a:spcPct val="155000"/>
+              </a:lnSpc>
+              <a:buNone/>
+            </a:pPr>
+            <a:r>
+              <a:rPr lang="en-US" sz="1300" dirty="0">
+                <a:solidFill>
+                  <a:srgbClr val="9CA3AF"/>
+                </a:solidFill>
+                <a:latin typeface="Calibri" pitchFamily="34" charset="0"/>
+                <a:ea typeface="Calibri" pitchFamily="34" charset="-122"/>
+                <a:cs typeface="Calibri" pitchFamily="34" charset="-120"/>
+              </a:rPr>
+              <a:t>O público que mais compra infoproduto no Brasil.</a:t>
+            </a:r>
+            <a:endParaRPr lang="en-US" sz="1300" dirty="0"/>
+          </a:p>
+        </p:txBody>
+      </p:sp>
+      <p:sp>
+        <p:nvSpPr>
+          <p:cNvPr id="14" name="Shape 12"/>
+          <p:cNvSpPr/>
+          <p:nvPr/>
+        </p:nvSpPr>
+        <p:spPr>
+          <a:xfrm>
+            <a:off x="8321040" y="2514600"/>
+            <a:ext cx="3657600" cy="3931920"/>
+          </a:xfrm>
+          <a:prstGeom prst="rect">
+            <a:avLst>
+              <a:gd name="adj" fmla="val 3750"/>
+            </a:avLst>
+          </a:prstGeom>
+          <a:solidFill>
+            <a:srgbClr val="111111"/>
+          </a:solidFill>
+          <a:ln w="12700">
+            <a:solidFill>
+              <a:srgbClr val="1F1F1F"/>
+            </a:solidFill>
+            <a:prstDash val="solid"/>
+          </a:ln>
+        </p:spPr>
+      </p:sp>
+      <p:sp>
+        <p:nvSpPr>
+          <p:cNvPr id="15" name="Text 13"/>
+          <p:cNvSpPr/>
+          <p:nvPr/>
+        </p:nvSpPr>
+        <p:spPr>
+          <a:xfrm>
+            <a:off x="8458200" y="2697480"/>
+            <a:ext cx="3383280" cy="457200"/>
+          </a:xfrm>
+          <a:prstGeom prst="rect">
+            <a:avLst/>
+          </a:prstGeom>
+          <a:noFill/>
+          <a:ln/>
+        </p:spPr>
+        <p:txBody>
+          <a:bodyPr wrap="square" rtlCol="0" anchor="ctr"/>
+          <a:lstStyle/>
+          <a:p>
+            <a:pPr algn="ctr" indent="0" marL="0">
+              <a:buNone/>
+            </a:pPr>
+            <a:r>
+              <a:rPr lang="en-US" sz="1600" b="1" dirty="0">
                 <a:solidFill>
                   <a:srgbClr val="FFFFFF"/>
                 </a:solidFill>
@@ -5808,17 +6211,66 @@
                 <a:ea typeface="Calibri" pitchFamily="34" charset="-122"/>
                 <a:cs typeface="Calibri" pitchFamily="34" charset="-120"/>
               </a:rPr>
-              <a:t>Você fala como quem viveu na pele.
-</a:t>
-            </a:r>
-            <a:pPr algn="ctr" indent="0" marL="0">
-              <a:lnSpc>
-                <a:spcPct val="165000"/>
-              </a:lnSpc>
-              <a:buNone/>
-            </a:pPr>
-            <a:r>
-              <a:rPr lang="en-US" sz="1700" dirty="0">
+              <a:t>Nicho sem Teto</a:t>
+            </a:r>
+            <a:endParaRPr lang="en-US" sz="1600" dirty="0"/>
+          </a:p>
+        </p:txBody>
+      </p:sp>
+      <p:sp>
+        <p:nvSpPr>
+          <p:cNvPr id="16" name="Shape 14"/>
+          <p:cNvSpPr/>
+          <p:nvPr/>
+        </p:nvSpPr>
+        <p:spPr>
+          <a:xfrm>
+            <a:off x="9692640" y="3200400"/>
+            <a:ext cx="914400" cy="27432"/>
+          </a:xfrm>
+          <a:prstGeom prst="rect">
+            <a:avLst/>
+          </a:prstGeom>
+          <a:solidFill>
+            <a:srgbClr val="7C3AED"/>
+          </a:solidFill>
+          <a:ln w="12700">
+            <a:solidFill>
+              <a:srgbClr val="7C3AED"/>
+            </a:solidFill>
+            <a:prstDash val="solid"/>
+          </a:ln>
+        </p:spPr>
+      </p:sp>
+      <p:sp>
+        <p:nvSpPr>
+          <p:cNvPr id="17" name="Text 15"/>
+          <p:cNvSpPr/>
+          <p:nvPr/>
+        </p:nvSpPr>
+        <p:spPr>
+          <a:xfrm>
+            <a:off x="8458200" y="3337560"/>
+            <a:ext cx="3383280" cy="2560320"/>
+          </a:xfrm>
+          <a:prstGeom prst="rect">
+            <a:avLst/>
+          </a:prstGeom>
+          <a:noFill/>
+          <a:ln/>
+        </p:spPr>
+        <p:txBody>
+          <a:bodyPr wrap="square" rtlCol="0" anchor="ctr"/>
+          <a:lstStyle/>
+          <a:p>
+            <a:pPr algn="ctr" indent="0" marL="0">
+              <a:lnSpc>
+                <a:spcPct val="155000"/>
+              </a:lnSpc>
+              <a:buNone/>
+            </a:pPr>
+            <a:r>
+              <a:rPr lang="en-US" sz="1300" dirty="0">
                 <a:solidFill>
                   <a:srgbClr val="9CA3AF"/>
                 </a:solidFill>
@@ -5826,18 +6278,78 @@
                 <a:ea typeface="Calibri" pitchFamily="34" charset="-122"/>
                 <a:cs typeface="Calibri" pitchFamily="34" charset="-120"/>
               </a:rPr>
-              <a:t>Seus posts não ensinam conceitos — eles nomeiam o que a mulher sente,
-mas não sabe colocar em palavras. Isso é raro.
-</a:t>
-            </a:r>
-            <a:pPr algn="ctr" indent="0" marL="0">
-              <a:lnSpc>
-                <a:spcPct val="165000"/>
-              </a:lnSpc>
-              <a:buNone/>
-            </a:pPr>
-            <a:r>
-              <a:rPr lang="en-US" sz="1700" b="1" dirty="0">
+              <a:t>Autoconhecimento feminino é um dos mercados</a:t>
+            </a:r>
+            <a:endParaRPr lang="en-US" sz="1300" dirty="0"/>
+          </a:p>
+          <a:p>
+            <a:pPr algn="ctr" indent="0" marL="0">
+              <a:lnSpc>
+                <a:spcPct val="155000"/>
+              </a:lnSpc>
+              <a:buNone/>
+            </a:pPr>
+            <a:r>
+              <a:rPr lang="en-US" sz="1300" dirty="0">
+                <a:solidFill>
+                  <a:srgbClr val="9CA3AF"/>
+                </a:solidFill>
+                <a:latin typeface="Calibri" pitchFamily="34" charset="0"/>
+                <a:ea typeface="Calibri" pitchFamily="34" charset="-122"/>
+                <a:cs typeface="Calibri" pitchFamily="34" charset="-120"/>
+              </a:rPr>
+              <a:t>que mais cresce no digital. Você está</a:t>
+            </a:r>
+            <a:endParaRPr lang="en-US" sz="1300" dirty="0"/>
+          </a:p>
+          <a:p>
+            <a:pPr algn="ctr" indent="0" marL="0">
+              <a:lnSpc>
+                <a:spcPct val="155000"/>
+              </a:lnSpc>
+              <a:buNone/>
+            </a:pPr>
+            <a:r>
+              <a:rPr lang="en-US" sz="1300" dirty="0">
+                <a:solidFill>
+                  <a:srgbClr val="9CA3AF"/>
+                </a:solidFill>
+                <a:latin typeface="Calibri" pitchFamily="34" charset="0"/>
+                <a:ea typeface="Calibri" pitchFamily="34" charset="-122"/>
+                <a:cs typeface="Calibri" pitchFamily="34" charset="-120"/>
+              </a:rPr>
+              <a:t>exatamente no centro dele.</a:t>
+            </a:r>
+            <a:endParaRPr lang="en-US" sz="1300" dirty="0"/>
+          </a:p>
+        </p:txBody>
+      </p:sp>
+      <p:sp>
+        <p:nvSpPr>
+          <p:cNvPr id="18" name="Text 16"/>
+          <p:cNvSpPr/>
+          <p:nvPr/>
+        </p:nvSpPr>
+        <p:spPr>
+          <a:xfrm>
+            <a:off x="1371600" y="6492240"/>
+            <a:ext cx="9445752" cy="320040"/>
+          </a:xfrm>
+          <a:prstGeom prst="rect">
+            <a:avLst/>
+          </a:prstGeom>
+          <a:noFill/>
+          <a:ln/>
+        </p:spPr>
+        <p:txBody>
+          <a:bodyPr wrap="square" rtlCol="0" anchor="ctr"/>
+          <a:lstStyle/>
+          <a:p>
+            <a:pPr algn="ctr" indent="0" marL="0">
+              <a:buNone/>
+            </a:pPr>
+            <a:r>
+              <a:rPr lang="en-US" sz="1300" b="1" dirty="0">
                 <a:solidFill>
                   <a:srgbClr val="7C3AED"/>
                 </a:solidFill>
@@ -5845,27 +6357,9 @@
                 <a:ea typeface="Calibri" pitchFamily="34" charset="-122"/>
                 <a:cs typeface="Calibri" pitchFamily="34" charset="-120"/>
               </a:rPr>
-              <a:t>“Para a mulher que se perde, se anula e não entende por quê”
-</a:t>
-            </a:r>
-            <a:pPr algn="ctr" indent="0" marL="0">
-              <a:lnSpc>
-                <a:spcPct val="165000"/>
-              </a:lnSpc>
-              <a:buNone/>
-            </a:pPr>
-            <a:r>
-              <a:rPr lang="en-US" sz="1700" dirty="0">
-                <a:solidFill>
-                  <a:srgbClr val="9CA3AF"/>
-                </a:solidFill>
-                <a:latin typeface="Calibri" pitchFamily="34" charset="0"/>
-                <a:ea typeface="Calibri" pitchFamily="34" charset="-122"/>
-                <a:cs typeface="Calibri" pitchFamily="34" charset="-120"/>
-              </a:rPr>
-              <a:t>— esse é exatamente o público que mais compra na internet.</a:t>
-            </a:r>
-            <a:endParaRPr lang="en-US" sz="1700" dirty="0"/>
+              <a:t>Tudo que falta é a engrenagem certa para isso gerar dinheiro enquanto você dorme.</a:t>
+            </a:r>
+            <a:endParaRPr lang="en-US" sz="1300" dirty="0"/>
           </a:p>
         </p:txBody>
       </p:sp>
@@ -8177,7 +8671,7 @@
         </p:nvSpPr>
         <p:spPr>
           <a:xfrm>
-            <a:off x="914400" y="457200"/>
+            <a:off x="914400" y="365760"/>
             <a:ext cx="10360152" cy="274320"/>
           </a:xfrm>
           <a:prstGeom prst="rect">
@@ -8202,7 +8696,7 @@
                 <a:ea typeface="Calibri" pitchFamily="34" charset="-122"/>
                 <a:cs typeface="Calibri" pitchFamily="34" charset="-120"/>
               </a:rPr>
-              <a:t>O QUE EU VI NO SEU PERFIL</a:t>
+              <a:t>A ESTRATÉGIA — DO ZERO AO PERPÉTUO</a:t>
             </a:r>
             <a:endParaRPr lang="en-US" sz="900" dirty="0"/>
           </a:p>
@@ -8216,27 +8710,27 @@
         </p:nvSpPr>
         <p:spPr>
           <a:xfrm>
-            <a:off x="914400" y="822960"/>
-            <a:ext cx="10360152" cy="1554480"/>
-          </a:xfrm>
-          <a:prstGeom prst="rect">
-            <a:avLst/>
-          </a:prstGeom>
-          <a:noFill/>
-          <a:ln/>
-        </p:spPr>
-        <p:txBody>
-          <a:bodyPr wrap="square" rtlCol="0" anchor="ctr"/>
-          <a:lstStyle/>
-          <a:p>
-            <a:pPr algn="ctr" indent="0" marL="0">
-              <a:lnSpc>
-                <a:spcPct val="115000"/>
-              </a:lnSpc>
-              <a:buNone/>
-            </a:pPr>
-            <a:r>
-              <a:rPr lang="en-US" sz="4000" b="1" dirty="0">
+            <a:off x="914400" y="685800"/>
+            <a:ext cx="10360152" cy="1188720"/>
+          </a:xfrm>
+          <a:prstGeom prst="rect">
+            <a:avLst/>
+          </a:prstGeom>
+          <a:noFill/>
+          <a:ln/>
+        </p:spPr>
+        <p:txBody>
+          <a:bodyPr wrap="square" rtlCol="0" anchor="ctr"/>
+          <a:lstStyle/>
+          <a:p>
+            <a:pPr algn="ctr" indent="0" marL="0">
+              <a:lnSpc>
+                <a:spcPct val="120000"/>
+              </a:lnSpc>
+              <a:buNone/>
+            </a:pPr>
+            <a:r>
+              <a:rPr lang="en-US" sz="3600" b="1" dirty="0">
                 <a:solidFill>
                   <a:srgbClr val="FFFFFF"/>
                 </a:solidFill>
@@ -8244,19 +8738,19 @@
                 <a:ea typeface="Calibri" pitchFamily="34" charset="-122"/>
                 <a:cs typeface="Calibri" pitchFamily="34" charset="-120"/>
               </a:rPr>
-              <a:t>Você tem 12 mil mulheres que confiam em você.</a:t>
-            </a:r>
-            <a:endParaRPr lang="en-US" sz="4000" dirty="0"/>
-          </a:p>
-          <a:p>
-            <a:pPr algn="ctr" indent="0" marL="0">
-              <a:lnSpc>
-                <a:spcPct val="115000"/>
-              </a:lnSpc>
-              <a:buNone/>
-            </a:pPr>
-            <a:r>
-              <a:rPr lang="en-US" sz="4000" b="1" dirty="0">
+              <a:t>90 dias para o funil rodar.</a:t>
+            </a:r>
+            <a:endParaRPr lang="en-US" sz="3600" dirty="0"/>
+          </a:p>
+          <a:p>
+            <a:pPr algn="ctr" indent="0" marL="0">
+              <a:lnSpc>
+                <a:spcPct val="120000"/>
+              </a:lnSpc>
+              <a:buNone/>
+            </a:pPr>
+            <a:r>
+              <a:rPr lang="en-US" sz="3600" b="1" dirty="0">
                 <a:solidFill>
                   <a:srgbClr val="FFFFFF"/>
                 </a:solidFill>
@@ -8264,9 +8758,9 @@
                 <a:ea typeface="Calibri" pitchFamily="34" charset="-122"/>
                 <a:cs typeface="Calibri" pitchFamily="34" charset="-120"/>
               </a:rPr>
-              <a:t>E zero produto escalável.</a:t>
-            </a:r>
-            <a:endParaRPr lang="en-US" sz="4000" dirty="0"/>
+              <a:t>Depois, ele vende sozinho.</a:t>
+            </a:r>
+            <a:endParaRPr lang="en-US" sz="3600" dirty="0"/>
           </a:p>
         </p:txBody>
       </p:sp>
@@ -8278,7 +8772,7 @@
         </p:nvSpPr>
         <p:spPr>
           <a:xfrm>
-            <a:off x="5728716" y="2468880"/>
+            <a:off x="5728716" y="1965960"/>
             <a:ext cx="731520" cy="36576"/>
           </a:xfrm>
           <a:prstGeom prst="rect">
@@ -8303,12 +8797,12 @@
         </p:nvSpPr>
         <p:spPr>
           <a:xfrm>
-            <a:off x="457200" y="2743200"/>
-            <a:ext cx="5029200" cy="3291840"/>
+            <a:off x="320040" y="2148840"/>
+            <a:ext cx="2743200" cy="4297680"/>
           </a:xfrm>
           <a:prstGeom prst="rect">
             <a:avLst>
-              <a:gd name="adj" fmla="val 4167"/>
+              <a:gd name="adj" fmla="val 5000"/>
             </a:avLst>
           </a:prstGeom>
           <a:solidFill>
@@ -8330,24 +8824,232 @@
         </p:nvSpPr>
         <p:spPr>
           <a:xfrm>
-            <a:off x="457200" y="2926080"/>
-            <a:ext cx="5029200" cy="320040"/>
-          </a:xfrm>
-          <a:prstGeom prst="rect">
-            <a:avLst/>
-          </a:prstGeom>
-          <a:noFill/>
-          <a:ln/>
-        </p:spPr>
-        <p:txBody>
-          <a:bodyPr wrap="square" rtlCol="0" anchor="ctr"/>
-          <a:lstStyle/>
-          <a:p>
-            <a:pPr algn="ctr" indent="0" marL="0">
-              <a:buNone/>
-            </a:pPr>
-            <a:r>
-              <a:rPr lang="en-US" sz="900" b="1" spc="300" kern="0" dirty="0">
+            <a:off x="320040" y="2286000"/>
+            <a:ext cx="2743200" cy="320040"/>
+          </a:xfrm>
+          <a:prstGeom prst="rect">
+            <a:avLst/>
+          </a:prstGeom>
+          <a:noFill/>
+          <a:ln/>
+        </p:spPr>
+        <p:txBody>
+          <a:bodyPr wrap="square" rtlCol="0" anchor="ctr"/>
+          <a:lstStyle/>
+          <a:p>
+            <a:pPr algn="ctr" indent="0" marL="0">
+              <a:buNone/>
+            </a:pPr>
+            <a:r>
+              <a:rPr lang="en-US" sz="1000" b="1" spc="300" kern="0" dirty="0">
+                <a:solidFill>
+                  <a:srgbClr val="7C3AED"/>
+                </a:solidFill>
+                <a:latin typeface="Calibri" pitchFamily="34" charset="0"/>
+                <a:ea typeface="Calibri" pitchFamily="34" charset="-122"/>
+                <a:cs typeface="Calibri" pitchFamily="34" charset="-120"/>
+              </a:rPr>
+              <a:t>01</a:t>
+            </a:r>
+            <a:endParaRPr lang="en-US" sz="1000" dirty="0"/>
+          </a:p>
+        </p:txBody>
+      </p:sp>
+      <p:sp>
+        <p:nvSpPr>
+          <p:cNvPr id="8" name="Text 6"/>
+          <p:cNvSpPr/>
+          <p:nvPr/>
+        </p:nvSpPr>
+        <p:spPr>
+          <a:xfrm>
+            <a:off x="411480" y="2651760"/>
+            <a:ext cx="2560320" cy="685800"/>
+          </a:xfrm>
+          <a:prstGeom prst="rect">
+            <a:avLst/>
+          </a:prstGeom>
+          <a:noFill/>
+          <a:ln/>
+        </p:spPr>
+        <p:txBody>
+          <a:bodyPr wrap="square" rtlCol="0" anchor="ctr"/>
+          <a:lstStyle/>
+          <a:p>
+            <a:pPr algn="ctr" indent="0" marL="0">
+              <a:lnSpc>
+                <a:spcPct val="120000"/>
+              </a:lnSpc>
+              <a:buNone/>
+            </a:pPr>
+            <a:r>
+              <a:rPr lang="en-US" sz="1600" b="1" dirty="0">
+                <a:solidFill>
+                  <a:srgbClr val="FFFFFF"/>
+                </a:solidFill>
+                <a:latin typeface="Calibri" pitchFamily="34" charset="0"/>
+                <a:ea typeface="Calibri" pitchFamily="34" charset="-122"/>
+                <a:cs typeface="Calibri" pitchFamily="34" charset="-120"/>
+              </a:rPr>
+              <a:t>Diagnóstico</a:t>
+            </a:r>
+            <a:endParaRPr lang="en-US" sz="1600" dirty="0"/>
+          </a:p>
+          <a:p>
+            <a:pPr algn="ctr" indent="0" marL="0">
+              <a:lnSpc>
+                <a:spcPct val="120000"/>
+              </a:lnSpc>
+              <a:buNone/>
+            </a:pPr>
+            <a:r>
+              <a:rPr lang="en-US" sz="1600" b="1" dirty="0">
+                <a:solidFill>
+                  <a:srgbClr val="FFFFFF"/>
+                </a:solidFill>
+                <a:latin typeface="Calibri" pitchFamily="34" charset="0"/>
+                <a:ea typeface="Calibri" pitchFamily="34" charset="-122"/>
+                <a:cs typeface="Calibri" pitchFamily="34" charset="-120"/>
+              </a:rPr>
+              <a:t>+ Posicionamento</a:t>
+            </a:r>
+            <a:endParaRPr lang="en-US" sz="1600" dirty="0"/>
+          </a:p>
+        </p:txBody>
+      </p:sp>
+      <p:sp>
+        <p:nvSpPr>
+          <p:cNvPr id="9" name="Shape 7"/>
+          <p:cNvSpPr/>
+          <p:nvPr/>
+        </p:nvSpPr>
+        <p:spPr>
+          <a:xfrm>
+            <a:off x="1325880" y="3401568"/>
+            <a:ext cx="731520" cy="27432"/>
+          </a:xfrm>
+          <a:prstGeom prst="rect">
+            <a:avLst/>
+          </a:prstGeom>
+          <a:solidFill>
+            <a:srgbClr val="7C3AED"/>
+          </a:solidFill>
+          <a:ln w="12700">
+            <a:solidFill>
+              <a:srgbClr val="7C3AED"/>
+            </a:solidFill>
+            <a:prstDash val="solid"/>
+          </a:ln>
+        </p:spPr>
+      </p:sp>
+      <p:sp>
+        <p:nvSpPr>
+          <p:cNvPr id="10" name="Text 8"/>
+          <p:cNvSpPr/>
+          <p:nvPr/>
+        </p:nvSpPr>
+        <p:spPr>
+          <a:xfrm>
+            <a:off x="411480" y="3520440"/>
+            <a:ext cx="2560320" cy="1920240"/>
+          </a:xfrm>
+          <a:prstGeom prst="rect">
+            <a:avLst/>
+          </a:prstGeom>
+          <a:noFill/>
+          <a:ln/>
+        </p:spPr>
+        <p:txBody>
+          <a:bodyPr wrap="square" rtlCol="0" anchor="ctr"/>
+          <a:lstStyle/>
+          <a:p>
+            <a:pPr algn="ctr" indent="0" marL="0">
+              <a:lnSpc>
+                <a:spcPct val="155000"/>
+              </a:lnSpc>
+              <a:buNone/>
+            </a:pPr>
+            <a:r>
+              <a:rPr lang="en-US" sz="1200" dirty="0">
+                <a:solidFill>
+                  <a:srgbClr val="9CA3AF"/>
+                </a:solidFill>
+                <a:latin typeface="Calibri" pitchFamily="34" charset="0"/>
+                <a:ea typeface="Calibri" pitchFamily="34" charset="-122"/>
+                <a:cs typeface="Calibri" pitchFamily="34" charset="-120"/>
+              </a:rPr>
+              <a:t>Mapeamos sua audiência.</a:t>
+            </a:r>
+            <a:endParaRPr lang="en-US" sz="1200" dirty="0"/>
+          </a:p>
+          <a:p>
+            <a:pPr algn="ctr" indent="0" marL="0">
+              <a:lnSpc>
+                <a:spcPct val="155000"/>
+              </a:lnSpc>
+              <a:buNone/>
+            </a:pPr>
+            <a:r>
+              <a:rPr lang="en-US" sz="1200" dirty="0">
+                <a:solidFill>
+                  <a:srgbClr val="9CA3AF"/>
+                </a:solidFill>
+                <a:latin typeface="Calibri" pitchFamily="34" charset="0"/>
+                <a:ea typeface="Calibri" pitchFamily="34" charset="-122"/>
+                <a:cs typeface="Calibri" pitchFamily="34" charset="-120"/>
+              </a:rPr>
+              <a:t>Definimos o produto, o preço</a:t>
+            </a:r>
+            <a:endParaRPr lang="en-US" sz="1200" dirty="0"/>
+          </a:p>
+          <a:p>
+            <a:pPr algn="ctr" indent="0" marL="0">
+              <a:lnSpc>
+                <a:spcPct val="155000"/>
+              </a:lnSpc>
+              <a:buNone/>
+            </a:pPr>
+            <a:r>
+              <a:rPr lang="en-US" sz="1200" dirty="0">
+                <a:solidFill>
+                  <a:srgbClr val="9CA3AF"/>
+                </a:solidFill>
+                <a:latin typeface="Calibri" pitchFamily="34" charset="0"/>
+                <a:ea typeface="Calibri" pitchFamily="34" charset="-122"/>
+                <a:cs typeface="Calibri" pitchFamily="34" charset="-120"/>
+              </a:rPr>
+              <a:t>e o ângulo da VSL.</a:t>
+            </a:r>
+            <a:endParaRPr lang="en-US" sz="1200" dirty="0"/>
+          </a:p>
+        </p:txBody>
+      </p:sp>
+      <p:sp>
+        <p:nvSpPr>
+          <p:cNvPr id="11" name="Text 9"/>
+          <p:cNvSpPr/>
+          <p:nvPr/>
+        </p:nvSpPr>
+        <p:spPr>
+          <a:xfrm>
+            <a:off x="320040" y="6080760"/>
+            <a:ext cx="2743200" cy="228600"/>
+          </a:xfrm>
+          <a:prstGeom prst="rect">
+            <a:avLst/>
+          </a:prstGeom>
+          <a:noFill/>
+          <a:ln/>
+        </p:spPr>
+        <p:txBody>
+          <a:bodyPr wrap="square" rtlCol="0" anchor="ctr"/>
+          <a:lstStyle/>
+          <a:p>
+            <a:pPr algn="ctr" indent="0" marL="0">
+              <a:buNone/>
+            </a:pPr>
+            <a:r>
+              <a:rPr lang="en-US" sz="900" dirty="0">
                 <a:solidFill>
                   <a:srgbClr val="374151"/>
                 </a:solidFill>
@@ -8355,7 +9057,7 @@
                 <a:ea typeface="Calibri" pitchFamily="34" charset="-122"/>
                 <a:cs typeface="Calibri" pitchFamily="34" charset="-120"/>
               </a:rPr>
-              <a:t>HOJE</a:t>
+              <a:t>Semanas 1–2</a:t>
             </a:r>
             <a:endParaRPr lang="en-US" sz="900" dirty="0"/>
           </a:p>
@@ -8363,33 +9065,304 @@
       </p:sp>
       <p:sp>
         <p:nvSpPr>
-          <p:cNvPr id="8" name="Text 6"/>
-          <p:cNvSpPr/>
-          <p:nvPr/>
-        </p:nvSpPr>
-        <p:spPr>
-          <a:xfrm>
-            <a:off x="731520" y="3383280"/>
-            <a:ext cx="4480560" cy="411480"/>
-          </a:xfrm>
-          <a:prstGeom prst="rect">
-            <a:avLst/>
-          </a:prstGeom>
-          <a:noFill/>
-          <a:ln/>
-        </p:spPr>
-        <p:txBody>
-          <a:bodyPr wrap="square" rtlCol="0" anchor="ctr"/>
-          <a:lstStyle/>
-          <a:p>
-            <a:pPr indent="0" marL="0">
+          <p:cNvPr id="12" name="Text 10"/>
+          <p:cNvSpPr/>
+          <p:nvPr/>
+        </p:nvSpPr>
+        <p:spPr>
+          <a:xfrm>
+            <a:off x="3081528" y="3383280"/>
+            <a:ext cx="182880" cy="365760"/>
+          </a:xfrm>
+          <a:prstGeom prst="rect">
+            <a:avLst/>
+          </a:prstGeom>
+          <a:noFill/>
+          <a:ln/>
+        </p:spPr>
+        <p:txBody>
+          <a:bodyPr wrap="square" rtlCol="0" anchor="ctr"/>
+          <a:lstStyle/>
+          <a:p>
+            <a:pPr algn="ctr" indent="0" marL="0">
+              <a:buNone/>
+            </a:pPr>
+            <a:r>
+              <a:rPr lang="en-US" sz="1400" dirty="0">
+                <a:solidFill>
+                  <a:srgbClr val="7C3AED"/>
+                </a:solidFill>
+                <a:latin typeface="Calibri" pitchFamily="34" charset="0"/>
+                <a:ea typeface="Calibri" pitchFamily="34" charset="-122"/>
+                <a:cs typeface="Calibri" pitchFamily="34" charset="-120"/>
+              </a:rPr>
+              <a:t>→</a:t>
+            </a:r>
+            <a:endParaRPr lang="en-US" sz="1400" dirty="0"/>
+          </a:p>
+        </p:txBody>
+      </p:sp>
+      <p:sp>
+        <p:nvSpPr>
+          <p:cNvPr id="13" name="Shape 11"/>
+          <p:cNvSpPr/>
+          <p:nvPr/>
+        </p:nvSpPr>
+        <p:spPr>
+          <a:xfrm>
+            <a:off x="3264408" y="2148840"/>
+            <a:ext cx="2743200" cy="4297680"/>
+          </a:xfrm>
+          <a:prstGeom prst="rect">
+            <a:avLst>
+              <a:gd name="adj" fmla="val 5000"/>
+            </a:avLst>
+          </a:prstGeom>
+          <a:solidFill>
+            <a:srgbClr val="111111"/>
+          </a:solidFill>
+          <a:ln w="12700">
+            <a:solidFill>
+              <a:srgbClr val="1F1F1F"/>
+            </a:solidFill>
+            <a:prstDash val="solid"/>
+          </a:ln>
+        </p:spPr>
+      </p:sp>
+      <p:sp>
+        <p:nvSpPr>
+          <p:cNvPr id="14" name="Text 12"/>
+          <p:cNvSpPr/>
+          <p:nvPr/>
+        </p:nvSpPr>
+        <p:spPr>
+          <a:xfrm>
+            <a:off x="3264408" y="2286000"/>
+            <a:ext cx="2743200" cy="320040"/>
+          </a:xfrm>
+          <a:prstGeom prst="rect">
+            <a:avLst/>
+          </a:prstGeom>
+          <a:noFill/>
+          <a:ln/>
+        </p:spPr>
+        <p:txBody>
+          <a:bodyPr wrap="square" rtlCol="0" anchor="ctr"/>
+          <a:lstStyle/>
+          <a:p>
+            <a:pPr algn="ctr" indent="0" marL="0">
+              <a:buNone/>
+            </a:pPr>
+            <a:r>
+              <a:rPr lang="en-US" sz="1000" b="1" spc="300" kern="0" dirty="0">
+                <a:solidFill>
+                  <a:srgbClr val="7C3AED"/>
+                </a:solidFill>
+                <a:latin typeface="Calibri" pitchFamily="34" charset="0"/>
+                <a:ea typeface="Calibri" pitchFamily="34" charset="-122"/>
+                <a:cs typeface="Calibri" pitchFamily="34" charset="-120"/>
+              </a:rPr>
+              <a:t>02</a:t>
+            </a:r>
+            <a:endParaRPr lang="en-US" sz="1000" dirty="0"/>
+          </a:p>
+        </p:txBody>
+      </p:sp>
+      <p:sp>
+        <p:nvSpPr>
+          <p:cNvPr id="15" name="Text 13"/>
+          <p:cNvSpPr/>
+          <p:nvPr/>
+        </p:nvSpPr>
+        <p:spPr>
+          <a:xfrm>
+            <a:off x="3355848" y="2651760"/>
+            <a:ext cx="2560320" cy="685800"/>
+          </a:xfrm>
+          <a:prstGeom prst="rect">
+            <a:avLst/>
+          </a:prstGeom>
+          <a:noFill/>
+          <a:ln/>
+        </p:spPr>
+        <p:txBody>
+          <a:bodyPr wrap="square" rtlCol="0" anchor="ctr"/>
+          <a:lstStyle/>
+          <a:p>
+            <a:pPr algn="ctr" indent="0" marL="0">
               <a:lnSpc>
                 <a:spcPct val="120000"/>
               </a:lnSpc>
               <a:buNone/>
             </a:pPr>
             <a:r>
-              <a:rPr lang="en-US" sz="1300" dirty="0">
+              <a:rPr lang="en-US" sz="1600" b="1" dirty="0">
+                <a:solidFill>
+                  <a:srgbClr val="FFFFFF"/>
+                </a:solidFill>
+                <a:latin typeface="Calibri" pitchFamily="34" charset="0"/>
+                <a:ea typeface="Calibri" pitchFamily="34" charset="-122"/>
+                <a:cs typeface="Calibri" pitchFamily="34" charset="-120"/>
+              </a:rPr>
+              <a:t>Criação</a:t>
+            </a:r>
+            <a:endParaRPr lang="en-US" sz="1600" dirty="0"/>
+          </a:p>
+          <a:p>
+            <a:pPr algn="ctr" indent="0" marL="0">
+              <a:lnSpc>
+                <a:spcPct val="120000"/>
+              </a:lnSpc>
+              <a:buNone/>
+            </a:pPr>
+            <a:r>
+              <a:rPr lang="en-US" sz="1600" b="1" dirty="0">
+                <a:solidFill>
+                  <a:srgbClr val="FFFFFF"/>
+                </a:solidFill>
+                <a:latin typeface="Calibri" pitchFamily="34" charset="0"/>
+                <a:ea typeface="Calibri" pitchFamily="34" charset="-122"/>
+                <a:cs typeface="Calibri" pitchFamily="34" charset="-120"/>
+              </a:rPr>
+              <a:t>+ Produção</a:t>
+            </a:r>
+            <a:endParaRPr lang="en-US" sz="1600" dirty="0"/>
+          </a:p>
+        </p:txBody>
+      </p:sp>
+      <p:sp>
+        <p:nvSpPr>
+          <p:cNvPr id="16" name="Shape 14"/>
+          <p:cNvSpPr/>
+          <p:nvPr/>
+        </p:nvSpPr>
+        <p:spPr>
+          <a:xfrm>
+            <a:off x="4270248" y="3401568"/>
+            <a:ext cx="731520" cy="27432"/>
+          </a:xfrm>
+          <a:prstGeom prst="rect">
+            <a:avLst/>
+          </a:prstGeom>
+          <a:solidFill>
+            <a:srgbClr val="7C3AED"/>
+          </a:solidFill>
+          <a:ln w="12700">
+            <a:solidFill>
+              <a:srgbClr val="7C3AED"/>
+            </a:solidFill>
+            <a:prstDash val="solid"/>
+          </a:ln>
+        </p:spPr>
+      </p:sp>
+      <p:sp>
+        <p:nvSpPr>
+          <p:cNvPr id="17" name="Text 15"/>
+          <p:cNvSpPr/>
+          <p:nvPr/>
+        </p:nvSpPr>
+        <p:spPr>
+          <a:xfrm>
+            <a:off x="3355848" y="3520440"/>
+            <a:ext cx="2560320" cy="1920240"/>
+          </a:xfrm>
+          <a:prstGeom prst="rect">
+            <a:avLst/>
+          </a:prstGeom>
+          <a:noFill/>
+          <a:ln/>
+        </p:spPr>
+        <p:txBody>
+          <a:bodyPr wrap="square" rtlCol="0" anchor="ctr"/>
+          <a:lstStyle/>
+          <a:p>
+            <a:pPr algn="ctr" indent="0" marL="0">
+              <a:lnSpc>
+                <a:spcPct val="155000"/>
+              </a:lnSpc>
+              <a:buNone/>
+            </a:pPr>
+            <a:r>
+              <a:rPr lang="en-US" sz="1200" dirty="0">
+                <a:solidFill>
+                  <a:srgbClr val="9CA3AF"/>
+                </a:solidFill>
+                <a:latin typeface="Calibri" pitchFamily="34" charset="0"/>
+                <a:ea typeface="Calibri" pitchFamily="34" charset="-122"/>
+                <a:cs typeface="Calibri" pitchFamily="34" charset="-120"/>
+              </a:rPr>
+              <a:t>Você grava as aulas.</a:t>
+            </a:r>
+            <a:endParaRPr lang="en-US" sz="1200" dirty="0"/>
+          </a:p>
+          <a:p>
+            <a:pPr algn="ctr" indent="0" marL="0">
+              <a:lnSpc>
+                <a:spcPct val="155000"/>
+              </a:lnSpc>
+              <a:buNone/>
+            </a:pPr>
+            <a:r>
+              <a:rPr lang="en-US" sz="1200" dirty="0">
+                <a:solidFill>
+                  <a:srgbClr val="9CA3AF"/>
+                </a:solidFill>
+                <a:latin typeface="Calibri" pitchFamily="34" charset="0"/>
+                <a:ea typeface="Calibri" pitchFamily="34" charset="-122"/>
+                <a:cs typeface="Calibri" pitchFamily="34" charset="-120"/>
+              </a:rPr>
+              <a:t>Eu produzo a VSL, as páginas,</a:t>
+            </a:r>
+            <a:endParaRPr lang="en-US" sz="1200" dirty="0"/>
+          </a:p>
+          <a:p>
+            <a:pPr algn="ctr" indent="0" marL="0">
+              <a:lnSpc>
+                <a:spcPct val="155000"/>
+              </a:lnSpc>
+              <a:buNone/>
+            </a:pPr>
+            <a:r>
+              <a:rPr lang="en-US" sz="1200" dirty="0">
+                <a:solidFill>
+                  <a:srgbClr val="9CA3AF"/>
+                </a:solidFill>
+                <a:latin typeface="Calibri" pitchFamily="34" charset="0"/>
+                <a:ea typeface="Calibri" pitchFamily="34" charset="-122"/>
+                <a:cs typeface="Calibri" pitchFamily="34" charset="-120"/>
+              </a:rPr>
+              <a:t>os emails e os anúncios.</a:t>
+            </a:r>
+            <a:endParaRPr lang="en-US" sz="1200" dirty="0"/>
+          </a:p>
+        </p:txBody>
+      </p:sp>
+      <p:sp>
+        <p:nvSpPr>
+          <p:cNvPr id="18" name="Text 16"/>
+          <p:cNvSpPr/>
+          <p:nvPr/>
+        </p:nvSpPr>
+        <p:spPr>
+          <a:xfrm>
+            <a:off x="3264408" y="6080760"/>
+            <a:ext cx="2743200" cy="228600"/>
+          </a:xfrm>
+          <a:prstGeom prst="rect">
+            <a:avLst/>
+          </a:prstGeom>
+          <a:noFill/>
+          <a:ln/>
+        </p:spPr>
+        <p:txBody>
+          <a:bodyPr wrap="square" rtlCol="0" anchor="ctr"/>
+          <a:lstStyle/>
+          <a:p>
+            <a:pPr algn="ctr" indent="0" marL="0">
+              <a:buNone/>
+            </a:pPr>
+            <a:r>
+              <a:rPr lang="en-US" sz="900" dirty="0">
                 <a:solidFill>
                   <a:srgbClr val="374151"/>
                 </a:solidFill>
@@ -8397,41 +9370,312 @@
                 <a:ea typeface="Calibri" pitchFamily="34" charset="-122"/>
                 <a:cs typeface="Calibri" pitchFamily="34" charset="-120"/>
               </a:rPr>
-              <a:t>— Atendimento individual — caro e limitado</a:t>
-            </a:r>
-            <a:endParaRPr lang="en-US" sz="1300" dirty="0"/>
-          </a:p>
-        </p:txBody>
-      </p:sp>
-      <p:sp>
-        <p:nvSpPr>
-          <p:cNvPr id="9" name="Text 7"/>
-          <p:cNvSpPr/>
-          <p:nvPr/>
-        </p:nvSpPr>
-        <p:spPr>
-          <a:xfrm>
-            <a:off x="731520" y="3858768"/>
-            <a:ext cx="4480560" cy="411480"/>
-          </a:xfrm>
-          <a:prstGeom prst="rect">
-            <a:avLst/>
-          </a:prstGeom>
-          <a:noFill/>
-          <a:ln/>
-        </p:spPr>
-        <p:txBody>
-          <a:bodyPr wrap="square" rtlCol="0" anchor="ctr"/>
-          <a:lstStyle/>
-          <a:p>
-            <a:pPr indent="0" marL="0">
+              <a:t>Semanas 3–5</a:t>
+            </a:r>
+            <a:endParaRPr lang="en-US" sz="900" dirty="0"/>
+          </a:p>
+        </p:txBody>
+      </p:sp>
+      <p:sp>
+        <p:nvSpPr>
+          <p:cNvPr id="19" name="Text 17"/>
+          <p:cNvSpPr/>
+          <p:nvPr/>
+        </p:nvSpPr>
+        <p:spPr>
+          <a:xfrm>
+            <a:off x="6025896" y="3383280"/>
+            <a:ext cx="182880" cy="365760"/>
+          </a:xfrm>
+          <a:prstGeom prst="rect">
+            <a:avLst/>
+          </a:prstGeom>
+          <a:noFill/>
+          <a:ln/>
+        </p:spPr>
+        <p:txBody>
+          <a:bodyPr wrap="square" rtlCol="0" anchor="ctr"/>
+          <a:lstStyle/>
+          <a:p>
+            <a:pPr algn="ctr" indent="0" marL="0">
+              <a:buNone/>
+            </a:pPr>
+            <a:r>
+              <a:rPr lang="en-US" sz="1400" dirty="0">
+                <a:solidFill>
+                  <a:srgbClr val="7C3AED"/>
+                </a:solidFill>
+                <a:latin typeface="Calibri" pitchFamily="34" charset="0"/>
+                <a:ea typeface="Calibri" pitchFamily="34" charset="-122"/>
+                <a:cs typeface="Calibri" pitchFamily="34" charset="-120"/>
+              </a:rPr>
+              <a:t>→</a:t>
+            </a:r>
+            <a:endParaRPr lang="en-US" sz="1400" dirty="0"/>
+          </a:p>
+        </p:txBody>
+      </p:sp>
+      <p:sp>
+        <p:nvSpPr>
+          <p:cNvPr id="20" name="Shape 18"/>
+          <p:cNvSpPr/>
+          <p:nvPr/>
+        </p:nvSpPr>
+        <p:spPr>
+          <a:xfrm>
+            <a:off x="6208776" y="2148840"/>
+            <a:ext cx="2743200" cy="4297680"/>
+          </a:xfrm>
+          <a:prstGeom prst="rect">
+            <a:avLst>
+              <a:gd name="adj" fmla="val 5000"/>
+            </a:avLst>
+          </a:prstGeom>
+          <a:solidFill>
+            <a:srgbClr val="111111"/>
+          </a:solidFill>
+          <a:ln w="12700">
+            <a:solidFill>
+              <a:srgbClr val="1F1F1F"/>
+            </a:solidFill>
+            <a:prstDash val="solid"/>
+          </a:ln>
+        </p:spPr>
+      </p:sp>
+      <p:sp>
+        <p:nvSpPr>
+          <p:cNvPr id="21" name="Text 19"/>
+          <p:cNvSpPr/>
+          <p:nvPr/>
+        </p:nvSpPr>
+        <p:spPr>
+          <a:xfrm>
+            <a:off x="6208776" y="2286000"/>
+            <a:ext cx="2743200" cy="320040"/>
+          </a:xfrm>
+          <a:prstGeom prst="rect">
+            <a:avLst/>
+          </a:prstGeom>
+          <a:noFill/>
+          <a:ln/>
+        </p:spPr>
+        <p:txBody>
+          <a:bodyPr wrap="square" rtlCol="0" anchor="ctr"/>
+          <a:lstStyle/>
+          <a:p>
+            <a:pPr algn="ctr" indent="0" marL="0">
+              <a:buNone/>
+            </a:pPr>
+            <a:r>
+              <a:rPr lang="en-US" sz="1000" b="1" spc="300" kern="0" dirty="0">
+                <a:solidFill>
+                  <a:srgbClr val="7C3AED"/>
+                </a:solidFill>
+                <a:latin typeface="Calibri" pitchFamily="34" charset="0"/>
+                <a:ea typeface="Calibri" pitchFamily="34" charset="-122"/>
+                <a:cs typeface="Calibri" pitchFamily="34" charset="-120"/>
+              </a:rPr>
+              <a:t>03</a:t>
+            </a:r>
+            <a:endParaRPr lang="en-US" sz="1000" dirty="0"/>
+          </a:p>
+        </p:txBody>
+      </p:sp>
+      <p:sp>
+        <p:nvSpPr>
+          <p:cNvPr id="22" name="Text 20"/>
+          <p:cNvSpPr/>
+          <p:nvPr/>
+        </p:nvSpPr>
+        <p:spPr>
+          <a:xfrm>
+            <a:off x="6300216" y="2651760"/>
+            <a:ext cx="2560320" cy="685800"/>
+          </a:xfrm>
+          <a:prstGeom prst="rect">
+            <a:avLst/>
+          </a:prstGeom>
+          <a:noFill/>
+          <a:ln/>
+        </p:spPr>
+        <p:txBody>
+          <a:bodyPr wrap="square" rtlCol="0" anchor="ctr"/>
+          <a:lstStyle/>
+          <a:p>
+            <a:pPr algn="ctr" indent="0" marL="0">
               <a:lnSpc>
                 <a:spcPct val="120000"/>
               </a:lnSpc>
               <a:buNone/>
             </a:pPr>
             <a:r>
-              <a:rPr lang="en-US" sz="1300" dirty="0">
+              <a:rPr lang="en-US" sz="1600" b="1" dirty="0">
+                <a:solidFill>
+                  <a:srgbClr val="FFFFFF"/>
+                </a:solidFill>
+                <a:latin typeface="Calibri" pitchFamily="34" charset="0"/>
+                <a:ea typeface="Calibri" pitchFamily="34" charset="-122"/>
+                <a:cs typeface="Calibri" pitchFamily="34" charset="-120"/>
+              </a:rPr>
+              <a:t>Lançamento</a:t>
+            </a:r>
+            <a:endParaRPr lang="en-US" sz="1600" dirty="0"/>
+          </a:p>
+          <a:p>
+            <a:pPr algn="ctr" indent="0" marL="0">
+              <a:lnSpc>
+                <a:spcPct val="120000"/>
+              </a:lnSpc>
+              <a:buNone/>
+            </a:pPr>
+            <a:r>
+              <a:rPr lang="en-US" sz="1600" b="1" dirty="0">
+                <a:solidFill>
+                  <a:srgbClr val="FFFFFF"/>
+                </a:solidFill>
+                <a:latin typeface="Calibri" pitchFamily="34" charset="0"/>
+                <a:ea typeface="Calibri" pitchFamily="34" charset="-122"/>
+                <a:cs typeface="Calibri" pitchFamily="34" charset="-120"/>
+              </a:rPr>
+              <a:t>+ Validação</a:t>
+            </a:r>
+            <a:endParaRPr lang="en-US" sz="1600" dirty="0"/>
+          </a:p>
+        </p:txBody>
+      </p:sp>
+      <p:sp>
+        <p:nvSpPr>
+          <p:cNvPr id="23" name="Shape 21"/>
+          <p:cNvSpPr/>
+          <p:nvPr/>
+        </p:nvSpPr>
+        <p:spPr>
+          <a:xfrm>
+            <a:off x="7214616" y="3401568"/>
+            <a:ext cx="731520" cy="27432"/>
+          </a:xfrm>
+          <a:prstGeom prst="rect">
+            <a:avLst/>
+          </a:prstGeom>
+          <a:solidFill>
+            <a:srgbClr val="7C3AED"/>
+          </a:solidFill>
+          <a:ln w="12700">
+            <a:solidFill>
+              <a:srgbClr val="7C3AED"/>
+            </a:solidFill>
+            <a:prstDash val="solid"/>
+          </a:ln>
+        </p:spPr>
+      </p:sp>
+      <p:sp>
+        <p:nvSpPr>
+          <p:cNvPr id="24" name="Text 22"/>
+          <p:cNvSpPr/>
+          <p:nvPr/>
+        </p:nvSpPr>
+        <p:spPr>
+          <a:xfrm>
+            <a:off x="6300216" y="3520440"/>
+            <a:ext cx="2560320" cy="1920240"/>
+          </a:xfrm>
+          <a:prstGeom prst="rect">
+            <a:avLst/>
+          </a:prstGeom>
+          <a:noFill/>
+          <a:ln/>
+        </p:spPr>
+        <p:txBody>
+          <a:bodyPr wrap="square" rtlCol="0" anchor="ctr"/>
+          <a:lstStyle/>
+          <a:p>
+            <a:pPr algn="ctr" indent="0" marL="0">
+              <a:lnSpc>
+                <a:spcPct val="155000"/>
+              </a:lnSpc>
+              <a:buNone/>
+            </a:pPr>
+            <a:r>
+              <a:rPr lang="en-US" sz="1200" dirty="0">
+                <a:solidFill>
+                  <a:srgbClr val="9CA3AF"/>
+                </a:solidFill>
+                <a:latin typeface="Calibri" pitchFamily="34" charset="0"/>
+                <a:ea typeface="Calibri" pitchFamily="34" charset="-122"/>
+                <a:cs typeface="Calibri" pitchFamily="34" charset="-120"/>
+              </a:rPr>
+              <a:t>Subimos com budget pequeno.</a:t>
+            </a:r>
+            <a:endParaRPr lang="en-US" sz="1200" dirty="0"/>
+          </a:p>
+          <a:p>
+            <a:pPr algn="ctr" indent="0" marL="0">
+              <a:lnSpc>
+                <a:spcPct val="155000"/>
+              </a:lnSpc>
+              <a:buNone/>
+            </a:pPr>
+            <a:r>
+              <a:rPr lang="en-US" sz="1200" dirty="0">
+                <a:solidFill>
+                  <a:srgbClr val="9CA3AF"/>
+                </a:solidFill>
+                <a:latin typeface="Calibri" pitchFamily="34" charset="0"/>
+                <a:ea typeface="Calibri" pitchFamily="34" charset="-122"/>
+                <a:cs typeface="Calibri" pitchFamily="34" charset="-120"/>
+              </a:rPr>
+              <a:t>Testamos. Medimos.</a:t>
+            </a:r>
+            <a:endParaRPr lang="en-US" sz="1200" dirty="0"/>
+          </a:p>
+          <a:p>
+            <a:pPr algn="ctr" indent="0" marL="0">
+              <a:lnSpc>
+                <a:spcPct val="155000"/>
+              </a:lnSpc>
+              <a:buNone/>
+            </a:pPr>
+            <a:r>
+              <a:rPr lang="en-US" sz="1200" dirty="0">
+                <a:solidFill>
+                  <a:srgbClr val="9CA3AF"/>
+                </a:solidFill>
+                <a:latin typeface="Calibri" pitchFamily="34" charset="0"/>
+                <a:ea typeface="Calibri" pitchFamily="34" charset="-122"/>
+                <a:cs typeface="Calibri" pitchFamily="34" charset="-120"/>
+              </a:rPr>
+              <a:t>Ajustamos com dado real.</a:t>
+            </a:r>
+            <a:endParaRPr lang="en-US" sz="1200" dirty="0"/>
+          </a:p>
+        </p:txBody>
+      </p:sp>
+      <p:sp>
+        <p:nvSpPr>
+          <p:cNvPr id="25" name="Text 23"/>
+          <p:cNvSpPr/>
+          <p:nvPr/>
+        </p:nvSpPr>
+        <p:spPr>
+          <a:xfrm>
+            <a:off x="6208776" y="6080760"/>
+            <a:ext cx="2743200" cy="228600"/>
+          </a:xfrm>
+          <a:prstGeom prst="rect">
+            <a:avLst/>
+          </a:prstGeom>
+          <a:noFill/>
+          <a:ln/>
+        </p:spPr>
+        <p:txBody>
+          <a:bodyPr wrap="square" rtlCol="0" anchor="ctr"/>
+          <a:lstStyle/>
+          <a:p>
+            <a:pPr algn="ctr" indent="0" marL="0">
+              <a:buNone/>
+            </a:pPr>
+            <a:r>
+              <a:rPr lang="en-US" sz="900" dirty="0">
                 <a:solidFill>
                   <a:srgbClr val="374151"/>
                 </a:solidFill>
@@ -8439,152 +9683,65 @@
                 <a:ea typeface="Calibri" pitchFamily="34" charset="-122"/>
                 <a:cs typeface="Calibri" pitchFamily="34" charset="-120"/>
               </a:rPr>
-              <a:t>— Você para → a renda para</a:t>
-            </a:r>
-            <a:endParaRPr lang="en-US" sz="1300" dirty="0"/>
-          </a:p>
-        </p:txBody>
-      </p:sp>
-      <p:sp>
-        <p:nvSpPr>
-          <p:cNvPr id="10" name="Text 8"/>
-          <p:cNvSpPr/>
-          <p:nvPr/>
-        </p:nvSpPr>
-        <p:spPr>
-          <a:xfrm>
-            <a:off x="731520" y="4334256"/>
-            <a:ext cx="4480560" cy="411480"/>
-          </a:xfrm>
-          <a:prstGeom prst="rect">
-            <a:avLst/>
-          </a:prstGeom>
-          <a:noFill/>
-          <a:ln/>
-        </p:spPr>
-        <p:txBody>
-          <a:bodyPr wrap="square" rtlCol="0" anchor="ctr"/>
-          <a:lstStyle/>
-          <a:p>
-            <a:pPr indent="0" marL="0">
-              <a:lnSpc>
-                <a:spcPct val="120000"/>
-              </a:lnSpc>
-              <a:buNone/>
-            </a:pPr>
-            <a:r>
-              <a:rPr lang="en-US" sz="1300" dirty="0">
-                <a:solidFill>
-                  <a:srgbClr val="374151"/>
-                </a:solidFill>
-                <a:latin typeface="Calibri" pitchFamily="34" charset="0"/>
-                <a:ea typeface="Calibri" pitchFamily="34" charset="-122"/>
-                <a:cs typeface="Calibri" pitchFamily="34" charset="-120"/>
-              </a:rPr>
-              <a:t>— Crescer = mais horas de trabalho</a:t>
-            </a:r>
-            <a:endParaRPr lang="en-US" sz="1300" dirty="0"/>
-          </a:p>
-        </p:txBody>
-      </p:sp>
-      <p:sp>
-        <p:nvSpPr>
-          <p:cNvPr id="11" name="Text 9"/>
-          <p:cNvSpPr/>
-          <p:nvPr/>
-        </p:nvSpPr>
-        <p:spPr>
-          <a:xfrm>
-            <a:off x="731520" y="4809744"/>
-            <a:ext cx="4480560" cy="411480"/>
-          </a:xfrm>
-          <a:prstGeom prst="rect">
-            <a:avLst/>
-          </a:prstGeom>
-          <a:noFill/>
-          <a:ln/>
-        </p:spPr>
-        <p:txBody>
-          <a:bodyPr wrap="square" rtlCol="0" anchor="ctr"/>
-          <a:lstStyle/>
-          <a:p>
-            <a:pPr indent="0" marL="0">
-              <a:lnSpc>
-                <a:spcPct val="120000"/>
-              </a:lnSpc>
-              <a:buNone/>
-            </a:pPr>
-            <a:r>
-              <a:rPr lang="en-US" sz="1300" dirty="0">
-                <a:solidFill>
-                  <a:srgbClr val="374151"/>
-                </a:solidFill>
-                <a:latin typeface="Calibri" pitchFamily="34" charset="0"/>
-                <a:ea typeface="Calibri" pitchFamily="34" charset="-122"/>
-                <a:cs typeface="Calibri" pitchFamily="34" charset="-120"/>
-              </a:rPr>
-              <a:t>— 12k seguidores vendo conteúdo de graça</a:t>
-            </a:r>
-            <a:endParaRPr lang="en-US" sz="1300" dirty="0"/>
-          </a:p>
-        </p:txBody>
-      </p:sp>
-      <p:sp>
-        <p:nvSpPr>
-          <p:cNvPr id="12" name="Text 10"/>
-          <p:cNvSpPr/>
-          <p:nvPr/>
-        </p:nvSpPr>
-        <p:spPr>
-          <a:xfrm>
-            <a:off x="731520" y="5285232"/>
-            <a:ext cx="4480560" cy="411480"/>
-          </a:xfrm>
-          <a:prstGeom prst="rect">
-            <a:avLst/>
-          </a:prstGeom>
-          <a:noFill/>
-          <a:ln/>
-        </p:spPr>
-        <p:txBody>
-          <a:bodyPr wrap="square" rtlCol="0" anchor="ctr"/>
-          <a:lstStyle/>
-          <a:p>
-            <a:pPr indent="0" marL="0">
-              <a:lnSpc>
-                <a:spcPct val="120000"/>
-              </a:lnSpc>
-              <a:buNone/>
-            </a:pPr>
-            <a:r>
-              <a:rPr lang="en-US" sz="1300" dirty="0">
-                <a:solidFill>
-                  <a:srgbClr val="374151"/>
-                </a:solidFill>
-                <a:latin typeface="Calibri" pitchFamily="34" charset="0"/>
-                <a:ea typeface="Calibri" pitchFamily="34" charset="-122"/>
-                <a:cs typeface="Calibri" pitchFamily="34" charset="-120"/>
-              </a:rPr>
-              <a:t>— Potencial enorme. Sem canal de venda.</a:t>
-            </a:r>
-            <a:endParaRPr lang="en-US" sz="1300" dirty="0"/>
-          </a:p>
-        </p:txBody>
-      </p:sp>
-      <p:sp>
-        <p:nvSpPr>
-          <p:cNvPr id="13" name="Shape 11"/>
-          <p:cNvSpPr/>
-          <p:nvPr/>
-        </p:nvSpPr>
-        <p:spPr>
-          <a:xfrm>
-            <a:off x="6217920" y="2743200"/>
-            <a:ext cx="5029200" cy="3291840"/>
+              <a:t>Semanas 6–8</a:t>
+            </a:r>
+            <a:endParaRPr lang="en-US" sz="900" dirty="0"/>
+          </a:p>
+        </p:txBody>
+      </p:sp>
+      <p:sp>
+        <p:nvSpPr>
+          <p:cNvPr id="26" name="Text 24"/>
+          <p:cNvSpPr/>
+          <p:nvPr/>
+        </p:nvSpPr>
+        <p:spPr>
+          <a:xfrm>
+            <a:off x="8970264" y="3383280"/>
+            <a:ext cx="182880" cy="365760"/>
+          </a:xfrm>
+          <a:prstGeom prst="rect">
+            <a:avLst/>
+          </a:prstGeom>
+          <a:noFill/>
+          <a:ln/>
+        </p:spPr>
+        <p:txBody>
+          <a:bodyPr wrap="square" rtlCol="0" anchor="ctr"/>
+          <a:lstStyle/>
+          <a:p>
+            <a:pPr algn="ctr" indent="0" marL="0">
+              <a:buNone/>
+            </a:pPr>
+            <a:r>
+              <a:rPr lang="en-US" sz="1400" dirty="0">
+                <a:solidFill>
+                  <a:srgbClr val="7C3AED"/>
+                </a:solidFill>
+                <a:latin typeface="Calibri" pitchFamily="34" charset="0"/>
+                <a:ea typeface="Calibri" pitchFamily="34" charset="-122"/>
+                <a:cs typeface="Calibri" pitchFamily="34" charset="-120"/>
+              </a:rPr>
+              <a:t>→</a:t>
+            </a:r>
+            <a:endParaRPr lang="en-US" sz="1400" dirty="0"/>
+          </a:p>
+        </p:txBody>
+      </p:sp>
+      <p:sp>
+        <p:nvSpPr>
+          <p:cNvPr id="27" name="Shape 25"/>
+          <p:cNvSpPr/>
+          <p:nvPr/>
+        </p:nvSpPr>
+        <p:spPr>
+          <a:xfrm>
+            <a:off x="9153144" y="2148840"/>
+            <a:ext cx="2743200" cy="4297680"/>
           </a:xfrm>
           <a:prstGeom prst="rect">
             <a:avLst>
-              <a:gd name="adj" fmla="val 4167"/>
+              <a:gd name="adj" fmla="val 5000"/>
             </a:avLst>
           </a:prstGeom>
           <a:solidFill>
@@ -8600,30 +9757,30 @@
       </p:sp>
       <p:sp>
         <p:nvSpPr>
-          <p:cNvPr id="14" name="Text 12"/>
-          <p:cNvSpPr/>
-          <p:nvPr/>
-        </p:nvSpPr>
-        <p:spPr>
-          <a:xfrm>
-            <a:off x="6217920" y="2926080"/>
-            <a:ext cx="5029200" cy="320040"/>
-          </a:xfrm>
-          <a:prstGeom prst="rect">
-            <a:avLst/>
-          </a:prstGeom>
-          <a:noFill/>
-          <a:ln/>
-        </p:spPr>
-        <p:txBody>
-          <a:bodyPr wrap="square" rtlCol="0" anchor="ctr"/>
-          <a:lstStyle/>
-          <a:p>
-            <a:pPr algn="ctr" indent="0" marL="0">
-              <a:buNone/>
-            </a:pPr>
-            <a:r>
-              <a:rPr lang="en-US" sz="900" b="1" spc="300" kern="0" dirty="0">
+          <p:cNvPr id="28" name="Text 26"/>
+          <p:cNvSpPr/>
+          <p:nvPr/>
+        </p:nvSpPr>
+        <p:spPr>
+          <a:xfrm>
+            <a:off x="9153144" y="2286000"/>
+            <a:ext cx="2743200" cy="320040"/>
+          </a:xfrm>
+          <a:prstGeom prst="rect">
+            <a:avLst/>
+          </a:prstGeom>
+          <a:noFill/>
+          <a:ln/>
+        </p:spPr>
+        <p:txBody>
+          <a:bodyPr wrap="square" rtlCol="0" anchor="ctr"/>
+          <a:lstStyle/>
+          <a:p>
+            <a:pPr algn="ctr" indent="0" marL="0">
+              <a:buNone/>
+            </a:pPr>
+            <a:r>
+              <a:rPr lang="en-US" sz="1000" b="1" spc="300" kern="0" dirty="0">
                 <a:solidFill>
                   <a:srgbClr val="7C3AED"/>
                 </a:solidFill>
@@ -8631,7 +9788,215 @@
                 <a:ea typeface="Calibri" pitchFamily="34" charset="-122"/>
                 <a:cs typeface="Calibri" pitchFamily="34" charset="-120"/>
               </a:rPr>
-              <a:t>COM ESTRUTURA</a:t>
+              <a:t>04</a:t>
+            </a:r>
+            <a:endParaRPr lang="en-US" sz="1000" dirty="0"/>
+          </a:p>
+        </p:txBody>
+      </p:sp>
+      <p:sp>
+        <p:nvSpPr>
+          <p:cNvPr id="29" name="Text 27"/>
+          <p:cNvSpPr/>
+          <p:nvPr/>
+        </p:nvSpPr>
+        <p:spPr>
+          <a:xfrm>
+            <a:off x="9244584" y="2651760"/>
+            <a:ext cx="2560320" cy="685800"/>
+          </a:xfrm>
+          <a:prstGeom prst="rect">
+            <a:avLst/>
+          </a:prstGeom>
+          <a:noFill/>
+          <a:ln/>
+        </p:spPr>
+        <p:txBody>
+          <a:bodyPr wrap="square" rtlCol="0" anchor="ctr"/>
+          <a:lstStyle/>
+          <a:p>
+            <a:pPr algn="ctr" indent="0" marL="0">
+              <a:lnSpc>
+                <a:spcPct val="120000"/>
+              </a:lnSpc>
+              <a:buNone/>
+            </a:pPr>
+            <a:r>
+              <a:rPr lang="en-US" sz="1600" b="1" dirty="0">
+                <a:solidFill>
+                  <a:srgbClr val="FFFFFF"/>
+                </a:solidFill>
+                <a:latin typeface="Calibri" pitchFamily="34" charset="0"/>
+                <a:ea typeface="Calibri" pitchFamily="34" charset="-122"/>
+                <a:cs typeface="Calibri" pitchFamily="34" charset="-120"/>
+              </a:rPr>
+              <a:t>Escala</a:t>
+            </a:r>
+            <a:endParaRPr lang="en-US" sz="1600" dirty="0"/>
+          </a:p>
+          <a:p>
+            <a:pPr algn="ctr" indent="0" marL="0">
+              <a:lnSpc>
+                <a:spcPct val="120000"/>
+              </a:lnSpc>
+              <a:buNone/>
+            </a:pPr>
+            <a:r>
+              <a:rPr lang="en-US" sz="1600" b="1" dirty="0">
+                <a:solidFill>
+                  <a:srgbClr val="FFFFFF"/>
+                </a:solidFill>
+                <a:latin typeface="Calibri" pitchFamily="34" charset="0"/>
+                <a:ea typeface="Calibri" pitchFamily="34" charset="-122"/>
+                <a:cs typeface="Calibri" pitchFamily="34" charset="-120"/>
+              </a:rPr>
+              <a:t>Perpétua</a:t>
+            </a:r>
+            <a:endParaRPr lang="en-US" sz="1600" dirty="0"/>
+          </a:p>
+        </p:txBody>
+      </p:sp>
+      <p:sp>
+        <p:nvSpPr>
+          <p:cNvPr id="30" name="Shape 28"/>
+          <p:cNvSpPr/>
+          <p:nvPr/>
+        </p:nvSpPr>
+        <p:spPr>
+          <a:xfrm>
+            <a:off x="10158984" y="3401568"/>
+            <a:ext cx="731520" cy="27432"/>
+          </a:xfrm>
+          <a:prstGeom prst="rect">
+            <a:avLst/>
+          </a:prstGeom>
+          <a:solidFill>
+            <a:srgbClr val="7C3AED"/>
+          </a:solidFill>
+          <a:ln w="12700">
+            <a:solidFill>
+              <a:srgbClr val="7C3AED"/>
+            </a:solidFill>
+            <a:prstDash val="solid"/>
+          </a:ln>
+        </p:spPr>
+      </p:sp>
+      <p:sp>
+        <p:nvSpPr>
+          <p:cNvPr id="31" name="Text 29"/>
+          <p:cNvSpPr/>
+          <p:nvPr/>
+        </p:nvSpPr>
+        <p:spPr>
+          <a:xfrm>
+            <a:off x="9244584" y="3520440"/>
+            <a:ext cx="2560320" cy="1920240"/>
+          </a:xfrm>
+          <a:prstGeom prst="rect">
+            <a:avLst/>
+          </a:prstGeom>
+          <a:noFill/>
+          <a:ln/>
+        </p:spPr>
+        <p:txBody>
+          <a:bodyPr wrap="square" rtlCol="0" anchor="ctr"/>
+          <a:lstStyle/>
+          <a:p>
+            <a:pPr algn="ctr" indent="0" marL="0">
+              <a:lnSpc>
+                <a:spcPct val="155000"/>
+              </a:lnSpc>
+              <a:buNone/>
+            </a:pPr>
+            <a:r>
+              <a:rPr lang="en-US" sz="1200" dirty="0">
+                <a:solidFill>
+                  <a:srgbClr val="9CA3AF"/>
+                </a:solidFill>
+                <a:latin typeface="Calibri" pitchFamily="34" charset="0"/>
+                <a:ea typeface="Calibri" pitchFamily="34" charset="-122"/>
+                <a:cs typeface="Calibri" pitchFamily="34" charset="-120"/>
+              </a:rPr>
+              <a:t>Com ROAS validado, escalamos.</a:t>
+            </a:r>
+            <a:endParaRPr lang="en-US" sz="1200" dirty="0"/>
+          </a:p>
+          <a:p>
+            <a:pPr algn="ctr" indent="0" marL="0">
+              <a:lnSpc>
+                <a:spcPct val="155000"/>
+              </a:lnSpc>
+              <a:buNone/>
+            </a:pPr>
+            <a:r>
+              <a:rPr lang="en-US" sz="1200" dirty="0">
+                <a:solidFill>
+                  <a:srgbClr val="9CA3AF"/>
+                </a:solidFill>
+                <a:latin typeface="Calibri" pitchFamily="34" charset="0"/>
+                <a:ea typeface="Calibri" pitchFamily="34" charset="-122"/>
+                <a:cs typeface="Calibri" pitchFamily="34" charset="-120"/>
+              </a:rPr>
+              <a:t>O funil roda 24h sem você.</a:t>
+            </a:r>
+            <a:endParaRPr lang="en-US" sz="1200" dirty="0"/>
+          </a:p>
+          <a:p>
+            <a:pPr algn="ctr" indent="0" marL="0">
+              <a:lnSpc>
+                <a:spcPct val="155000"/>
+              </a:lnSpc>
+              <a:buNone/>
+            </a:pPr>
+            <a:r>
+              <a:rPr lang="en-US" sz="1200" dirty="0">
+                <a:solidFill>
+                  <a:srgbClr val="9CA3AF"/>
+                </a:solidFill>
+                <a:latin typeface="Calibri" pitchFamily="34" charset="0"/>
+                <a:ea typeface="Calibri" pitchFamily="34" charset="-122"/>
+                <a:cs typeface="Calibri" pitchFamily="34" charset="-120"/>
+              </a:rPr>
+              <a:t>Novos produtos na esteira.</a:t>
+            </a:r>
+            <a:endParaRPr lang="en-US" sz="1200" dirty="0"/>
+          </a:p>
+        </p:txBody>
+      </p:sp>
+      <p:sp>
+        <p:nvSpPr>
+          <p:cNvPr id="32" name="Text 30"/>
+          <p:cNvSpPr/>
+          <p:nvPr/>
+        </p:nvSpPr>
+        <p:spPr>
+          <a:xfrm>
+            <a:off x="9153144" y="6080760"/>
+            <a:ext cx="2743200" cy="228600"/>
+          </a:xfrm>
+          <a:prstGeom prst="rect">
+            <a:avLst/>
+          </a:prstGeom>
+          <a:noFill/>
+          <a:ln/>
+        </p:spPr>
+        <p:txBody>
+          <a:bodyPr wrap="square" rtlCol="0" anchor="ctr"/>
+          <a:lstStyle/>
+          <a:p>
+            <a:pPr algn="ctr" indent="0" marL="0">
+              <a:buNone/>
+            </a:pPr>
+            <a:r>
+              <a:rPr lang="en-US" sz="900" b="1" dirty="0">
+                <a:solidFill>
+                  <a:srgbClr val="7C3AED"/>
+                </a:solidFill>
+                <a:latin typeface="Calibri" pitchFamily="34" charset="0"/>
+                <a:ea typeface="Calibri" pitchFamily="34" charset="-122"/>
+                <a:cs typeface="Calibri" pitchFamily="34" charset="-120"/>
+              </a:rPr>
+              <a:t>Mês 3 em diante</a:t>
             </a:r>
             <a:endParaRPr lang="en-US" sz="900" dirty="0"/>
           </a:p>
@@ -8639,224 +10004,14 @@
       </p:sp>
       <p:sp>
         <p:nvSpPr>
-          <p:cNvPr id="15" name="Text 13"/>
-          <p:cNvSpPr/>
-          <p:nvPr/>
-        </p:nvSpPr>
-        <p:spPr>
-          <a:xfrm>
-            <a:off x="6492240" y="3383280"/>
-            <a:ext cx="4480560" cy="411480"/>
-          </a:xfrm>
-          <a:prstGeom prst="rect">
-            <a:avLst/>
-          </a:prstGeom>
-          <a:noFill/>
-          <a:ln/>
-        </p:spPr>
-        <p:txBody>
-          <a:bodyPr wrap="square" rtlCol="0" anchor="ctr"/>
-          <a:lstStyle/>
-          <a:p>
-            <a:pPr indent="0" marL="0">
-              <a:lnSpc>
-                <a:spcPct val="120000"/>
-              </a:lnSpc>
-              <a:buNone/>
-            </a:pPr>
-            <a:r>
-              <a:rPr lang="en-US" sz="1300" dirty="0">
-                <a:solidFill>
-                  <a:srgbClr val="FFFFFF"/>
-                </a:solidFill>
-                <a:latin typeface="Calibri" pitchFamily="34" charset="0"/>
-                <a:ea typeface="Calibri" pitchFamily="34" charset="-122"/>
-                <a:cs typeface="Calibri" pitchFamily="34" charset="-120"/>
-              </a:rPr>
-              <a:t>→ Produto digital vendendo 24h/dia</a:t>
-            </a:r>
-            <a:endParaRPr lang="en-US" sz="1300" dirty="0"/>
-          </a:p>
-        </p:txBody>
-      </p:sp>
-      <p:sp>
-        <p:nvSpPr>
-          <p:cNvPr id="16" name="Text 14"/>
-          <p:cNvSpPr/>
-          <p:nvPr/>
-        </p:nvSpPr>
-        <p:spPr>
-          <a:xfrm>
-            <a:off x="6492240" y="3858768"/>
-            <a:ext cx="4480560" cy="411480"/>
-          </a:xfrm>
-          <a:prstGeom prst="rect">
-            <a:avLst/>
-          </a:prstGeom>
-          <a:noFill/>
-          <a:ln/>
-        </p:spPr>
-        <p:txBody>
-          <a:bodyPr wrap="square" rtlCol="0" anchor="ctr"/>
-          <a:lstStyle/>
-          <a:p>
-            <a:pPr indent="0" marL="0">
-              <a:lnSpc>
-                <a:spcPct val="120000"/>
-              </a:lnSpc>
-              <a:buNone/>
-            </a:pPr>
-            <a:r>
-              <a:rPr lang="en-US" sz="1300" dirty="0">
-                <a:solidFill>
-                  <a:srgbClr val="FFFFFF"/>
-                </a:solidFill>
-                <a:latin typeface="Calibri" pitchFamily="34" charset="0"/>
-                <a:ea typeface="Calibri" pitchFamily="34" charset="-122"/>
-                <a:cs typeface="Calibri" pitchFamily="34" charset="-120"/>
-              </a:rPr>
-              <a:t>→ Você dorme → o funil vende</a:t>
-            </a:r>
-            <a:endParaRPr lang="en-US" sz="1300" dirty="0"/>
-          </a:p>
-        </p:txBody>
-      </p:sp>
-      <p:sp>
-        <p:nvSpPr>
-          <p:cNvPr id="17" name="Text 15"/>
-          <p:cNvSpPr/>
-          <p:nvPr/>
-        </p:nvSpPr>
-        <p:spPr>
-          <a:xfrm>
-            <a:off x="6492240" y="4334256"/>
-            <a:ext cx="4480560" cy="411480"/>
-          </a:xfrm>
-          <a:prstGeom prst="rect">
-            <a:avLst/>
-          </a:prstGeom>
-          <a:noFill/>
-          <a:ln/>
-        </p:spPr>
-        <p:txBody>
-          <a:bodyPr wrap="square" rtlCol="0" anchor="ctr"/>
-          <a:lstStyle/>
-          <a:p>
-            <a:pPr indent="0" marL="0">
-              <a:lnSpc>
-                <a:spcPct val="120000"/>
-              </a:lnSpc>
-              <a:buNone/>
-            </a:pPr>
-            <a:r>
-              <a:rPr lang="en-US" sz="1300" dirty="0">
-                <a:solidFill>
-                  <a:srgbClr val="FFFFFF"/>
-                </a:solidFill>
-                <a:latin typeface="Calibri" pitchFamily="34" charset="0"/>
-                <a:ea typeface="Calibri" pitchFamily="34" charset="-122"/>
-                <a:cs typeface="Calibri" pitchFamily="34" charset="-120"/>
-              </a:rPr>
-              <a:t>→ Crescer = ajustar os anúncios</a:t>
-            </a:r>
-            <a:endParaRPr lang="en-US" sz="1300" dirty="0"/>
-          </a:p>
-        </p:txBody>
-      </p:sp>
-      <p:sp>
-        <p:nvSpPr>
-          <p:cNvPr id="18" name="Text 16"/>
-          <p:cNvSpPr/>
-          <p:nvPr/>
-        </p:nvSpPr>
-        <p:spPr>
-          <a:xfrm>
-            <a:off x="6492240" y="4809744"/>
-            <a:ext cx="4480560" cy="411480"/>
-          </a:xfrm>
-          <a:prstGeom prst="rect">
-            <a:avLst/>
-          </a:prstGeom>
-          <a:noFill/>
-          <a:ln/>
-        </p:spPr>
-        <p:txBody>
-          <a:bodyPr wrap="square" rtlCol="0" anchor="ctr"/>
-          <a:lstStyle/>
-          <a:p>
-            <a:pPr indent="0" marL="0">
-              <a:lnSpc>
-                <a:spcPct val="120000"/>
-              </a:lnSpc>
-              <a:buNone/>
-            </a:pPr>
-            <a:r>
-              <a:rPr lang="en-US" sz="1300" dirty="0">
-                <a:solidFill>
-                  <a:srgbClr val="FFFFFF"/>
-                </a:solidFill>
-                <a:latin typeface="Calibri" pitchFamily="34" charset="0"/>
-                <a:ea typeface="Calibri" pitchFamily="34" charset="-122"/>
-                <a:cs typeface="Calibri" pitchFamily="34" charset="-120"/>
-              </a:rPr>
-              <a:t>→ 12k seguidores virando clientes reais</a:t>
-            </a:r>
-            <a:endParaRPr lang="en-US" sz="1300" dirty="0"/>
-          </a:p>
-        </p:txBody>
-      </p:sp>
-      <p:sp>
-        <p:nvSpPr>
-          <p:cNvPr id="19" name="Text 17"/>
-          <p:cNvSpPr/>
-          <p:nvPr/>
-        </p:nvSpPr>
-        <p:spPr>
-          <a:xfrm>
-            <a:off x="6492240" y="5285232"/>
-            <a:ext cx="4480560" cy="411480"/>
-          </a:xfrm>
-          <a:prstGeom prst="rect">
-            <a:avLst/>
-          </a:prstGeom>
-          <a:noFill/>
-          <a:ln/>
-        </p:spPr>
-        <p:txBody>
-          <a:bodyPr wrap="square" rtlCol="0" anchor="ctr"/>
-          <a:lstStyle/>
-          <a:p>
-            <a:pPr indent="0" marL="0">
-              <a:lnSpc>
-                <a:spcPct val="120000"/>
-              </a:lnSpc>
-              <a:buNone/>
-            </a:pPr>
-            <a:r>
-              <a:rPr lang="en-US" sz="1300" dirty="0">
-                <a:solidFill>
-                  <a:srgbClr val="FFFFFF"/>
-                </a:solidFill>
-                <a:latin typeface="Calibri" pitchFamily="34" charset="0"/>
-                <a:ea typeface="Calibri" pitchFamily="34" charset="-122"/>
-                <a:cs typeface="Calibri" pitchFamily="34" charset="-120"/>
-              </a:rPr>
-              <a:t>→ Renda que escala sem você estar presente.</a:t>
-            </a:r>
-            <a:endParaRPr lang="en-US" sz="1300" dirty="0"/>
-          </a:p>
-        </p:txBody>
-      </p:sp>
-      <p:sp>
-        <p:nvSpPr>
-          <p:cNvPr id="20" name="Text 18"/>
-          <p:cNvSpPr/>
-          <p:nvPr/>
-        </p:nvSpPr>
-        <p:spPr>
-          <a:xfrm>
-            <a:off x="914400" y="6126480"/>
-            <a:ext cx="10360152" cy="365760"/>
+          <p:cNvPr id="33" name="Text 31"/>
+          <p:cNvSpPr/>
+          <p:nvPr/>
+        </p:nvSpPr>
+        <p:spPr>
+          <a:xfrm>
+            <a:off x="914400" y="6492240"/>
+            <a:ext cx="10360152" cy="274320"/>
           </a:xfrm>
           <a:prstGeom prst="rect">
             <a:avLst/>
@@ -8880,7 +10035,7 @@
                 <a:ea typeface="Calibri" pitchFamily="34" charset="-122"/>
                 <a:cs typeface="Calibri" pitchFamily="34" charset="-120"/>
               </a:rPr>
-              <a:t>Isso não é falta de competência. É falta de estrutura. E estrutura eu tenho.</a:t>
+              <a:t>Você aparece. Eu opero. O funil vende enquanto você dorme.</a:t>
             </a:r>
             <a:endParaRPr lang="en-US" sz="1300" dirty="0"/>
           </a:p>
@@ -8969,7 +10124,7 @@
                 <a:ea typeface="Calibri" pitchFamily="34" charset="-122"/>
                 <a:cs typeface="Calibri" pitchFamily="34" charset="-120"/>
               </a:rPr>
-              <a:t>QUEM JÁ FEZ ISSO ANTES DE VOCÊ</a:t>
+              <a:t>O QUE EU VI NO SEU PERFIL</a:t>
             </a:r>
             <a:endParaRPr lang="en-US" sz="900" dirty="0"/>
           </a:p>
@@ -8983,24 +10138,27 @@
         </p:nvSpPr>
         <p:spPr>
           <a:xfrm>
-            <a:off x="914400" y="777240"/>
-            <a:ext cx="10360152" cy="502920"/>
-          </a:xfrm>
-          <a:prstGeom prst="rect">
-            <a:avLst/>
-          </a:prstGeom>
-          <a:noFill/>
-          <a:ln/>
-        </p:spPr>
-        <p:txBody>
-          <a:bodyPr wrap="square" rtlCol="0" anchor="ctr"/>
-          <a:lstStyle/>
-          <a:p>
-            <a:pPr algn="ctr" indent="0" marL="0">
-              <a:buNone/>
-            </a:pPr>
-            <a:r>
-              <a:rPr lang="en-US" sz="2800" b="1" dirty="0">
+            <a:off x="914400" y="822960"/>
+            <a:ext cx="10360152" cy="1554480"/>
+          </a:xfrm>
+          <a:prstGeom prst="rect">
+            <a:avLst/>
+          </a:prstGeom>
+          <a:noFill/>
+          <a:ln/>
+        </p:spPr>
+        <p:txBody>
+          <a:bodyPr wrap="square" rtlCol="0" anchor="ctr"/>
+          <a:lstStyle/>
+          <a:p>
+            <a:pPr algn="ctr" indent="0" marL="0">
+              <a:lnSpc>
+                <a:spcPct val="115000"/>
+              </a:lnSpc>
+              <a:buNone/>
+            </a:pPr>
+            <a:r>
+              <a:rPr lang="en-US" sz="4000" b="1" dirty="0">
                 <a:solidFill>
                   <a:srgbClr val="FFFFFF"/>
                 </a:solidFill>
@@ -9008,9 +10166,29 @@
                 <a:ea typeface="Calibri" pitchFamily="34" charset="-122"/>
                 <a:cs typeface="Calibri" pitchFamily="34" charset="-120"/>
               </a:rPr>
-              <a:t>Não é teoria. São pessoas reais com histórias verificáveis.</a:t>
-            </a:r>
-            <a:endParaRPr lang="en-US" sz="2800" dirty="0"/>
+              <a:t>Você tem 12 mil mulheres que confiam em você.</a:t>
+            </a:r>
+            <a:endParaRPr lang="en-US" sz="4000" dirty="0"/>
+          </a:p>
+          <a:p>
+            <a:pPr algn="ctr" indent="0" marL="0">
+              <a:lnSpc>
+                <a:spcPct val="115000"/>
+              </a:lnSpc>
+              <a:buNone/>
+            </a:pPr>
+            <a:r>
+              <a:rPr lang="en-US" sz="4000" b="1" dirty="0">
+                <a:solidFill>
+                  <a:srgbClr val="FFFFFF"/>
+                </a:solidFill>
+                <a:latin typeface="Calibri" pitchFamily="34" charset="0"/>
+                <a:ea typeface="Calibri" pitchFamily="34" charset="-122"/>
+                <a:cs typeface="Calibri" pitchFamily="34" charset="-120"/>
+              </a:rPr>
+              <a:t>E zero produto escalável.</a:t>
+            </a:r>
+            <a:endParaRPr lang="en-US" sz="4000" dirty="0"/>
           </a:p>
         </p:txBody>
       </p:sp>
@@ -9022,7 +10200,7 @@
         </p:nvSpPr>
         <p:spPr>
           <a:xfrm>
-            <a:off x="5728716" y="1417320"/>
+            <a:off x="5728716" y="2468880"/>
             <a:ext cx="731520" cy="36576"/>
           </a:xfrm>
           <a:prstGeom prst="rect">
@@ -9047,12 +10225,12 @@
         </p:nvSpPr>
         <p:spPr>
           <a:xfrm>
-            <a:off x="457200" y="1691640"/>
-            <a:ext cx="3657600" cy="4846320"/>
+            <a:off x="457200" y="2743200"/>
+            <a:ext cx="5029200" cy="3291840"/>
           </a:xfrm>
           <a:prstGeom prst="rect">
             <a:avLst>
-              <a:gd name="adj" fmla="val 3750"/>
+              <a:gd name="adj" fmla="val 4167"/>
             </a:avLst>
           </a:prstGeom>
           <a:solidFill>
@@ -9074,8 +10252,47 @@
         </p:nvSpPr>
         <p:spPr>
           <a:xfrm>
-            <a:off x="594360" y="1874520"/>
-            <a:ext cx="3383280" cy="274320"/>
+            <a:off x="457200" y="2926080"/>
+            <a:ext cx="5029200" cy="320040"/>
+          </a:xfrm>
+          <a:prstGeom prst="rect">
+            <a:avLst/>
+          </a:prstGeom>
+          <a:noFill/>
+          <a:ln/>
+        </p:spPr>
+        <p:txBody>
+          <a:bodyPr wrap="square" rtlCol="0" anchor="ctr"/>
+          <a:lstStyle/>
+          <a:p>
+            <a:pPr algn="ctr" indent="0" marL="0">
+              <a:buNone/>
+            </a:pPr>
+            <a:r>
+              <a:rPr lang="en-US" sz="900" b="1" spc="300" kern="0" dirty="0">
+                <a:solidFill>
+                  <a:srgbClr val="374151"/>
+                </a:solidFill>
+                <a:latin typeface="Calibri" pitchFamily="34" charset="0"/>
+                <a:ea typeface="Calibri" pitchFamily="34" charset="-122"/>
+                <a:cs typeface="Calibri" pitchFamily="34" charset="-120"/>
+              </a:rPr>
+              <a:t>HOJE</a:t>
+            </a:r>
+            <a:endParaRPr lang="en-US" sz="900" dirty="0"/>
+          </a:p>
+        </p:txBody>
+      </p:sp>
+      <p:sp>
+        <p:nvSpPr>
+          <p:cNvPr id="8" name="Text 6"/>
+          <p:cNvSpPr/>
+          <p:nvPr/>
+        </p:nvSpPr>
+        <p:spPr>
+          <a:xfrm>
+            <a:off x="731520" y="3383280"/>
+            <a:ext cx="4480560" cy="411480"/>
           </a:xfrm>
           <a:prstGeom prst="rect">
             <a:avLst/>
@@ -9088,33 +10305,36 @@
           <a:lstStyle/>
           <a:p>
             <a:pPr indent="0" marL="0">
-              <a:buNone/>
-            </a:pPr>
-            <a:r>
-              <a:rPr lang="en-US" sz="1000" b="1" spc="100" kern="0" dirty="0">
-                <a:solidFill>
-                  <a:srgbClr val="7C3AED"/>
-                </a:solidFill>
-                <a:latin typeface="Calibri" pitchFamily="34" charset="0"/>
-                <a:ea typeface="Calibri" pitchFamily="34" charset="-122"/>
-                <a:cs typeface="Calibri" pitchFamily="34" charset="-120"/>
-              </a:rPr>
-              <a:t>@elidadiasv</a:t>
-            </a:r>
-            <a:endParaRPr lang="en-US" sz="1000" dirty="0"/>
-          </a:p>
-        </p:txBody>
-      </p:sp>
-      <p:sp>
-        <p:nvSpPr>
-          <p:cNvPr id="8" name="Text 6"/>
-          <p:cNvSpPr/>
-          <p:nvPr/>
-        </p:nvSpPr>
-        <p:spPr>
-          <a:xfrm>
-            <a:off x="594360" y="2194560"/>
-            <a:ext cx="3383280" cy="320040"/>
+              <a:lnSpc>
+                <a:spcPct val="120000"/>
+              </a:lnSpc>
+              <a:buNone/>
+            </a:pPr>
+            <a:r>
+              <a:rPr lang="en-US" sz="1300" dirty="0">
+                <a:solidFill>
+                  <a:srgbClr val="374151"/>
+                </a:solidFill>
+                <a:latin typeface="Calibri" pitchFamily="34" charset="0"/>
+                <a:ea typeface="Calibri" pitchFamily="34" charset="-122"/>
+                <a:cs typeface="Calibri" pitchFamily="34" charset="-120"/>
+              </a:rPr>
+              <a:t>— Atendimento individual — caro e limitado</a:t>
+            </a:r>
+            <a:endParaRPr lang="en-US" sz="1300" dirty="0"/>
+          </a:p>
+        </p:txBody>
+      </p:sp>
+      <p:sp>
+        <p:nvSpPr>
+          <p:cNvPr id="9" name="Text 7"/>
+          <p:cNvSpPr/>
+          <p:nvPr/>
+        </p:nvSpPr>
+        <p:spPr>
+          <a:xfrm>
+            <a:off x="731520" y="3858768"/>
+            <a:ext cx="4480560" cy="411480"/>
           </a:xfrm>
           <a:prstGeom prst="rect">
             <a:avLst/>
@@ -9127,33 +10347,36 @@
           <a:lstStyle/>
           <a:p>
             <a:pPr indent="0" marL="0">
-              <a:buNone/>
-            </a:pPr>
-            <a:r>
-              <a:rPr lang="en-US" sz="1500" b="1" dirty="0">
-                <a:solidFill>
-                  <a:srgbClr val="FFFFFF"/>
-                </a:solidFill>
-                <a:latin typeface="Calibri" pitchFamily="34" charset="0"/>
-                <a:ea typeface="Calibri" pitchFamily="34" charset="-122"/>
-                <a:cs typeface="Calibri" pitchFamily="34" charset="-120"/>
-              </a:rPr>
-              <a:t>Elida Dias</a:t>
-            </a:r>
-            <a:endParaRPr lang="en-US" sz="1500" dirty="0"/>
-          </a:p>
-        </p:txBody>
-      </p:sp>
-      <p:sp>
-        <p:nvSpPr>
-          <p:cNvPr id="9" name="Text 7"/>
-          <p:cNvSpPr/>
-          <p:nvPr/>
-        </p:nvSpPr>
-        <p:spPr>
-          <a:xfrm>
-            <a:off x="594360" y="2560320"/>
-            <a:ext cx="3383280" cy="640080"/>
+              <a:lnSpc>
+                <a:spcPct val="120000"/>
+              </a:lnSpc>
+              <a:buNone/>
+            </a:pPr>
+            <a:r>
+              <a:rPr lang="en-US" sz="1300" dirty="0">
+                <a:solidFill>
+                  <a:srgbClr val="374151"/>
+                </a:solidFill>
+                <a:latin typeface="Calibri" pitchFamily="34" charset="0"/>
+                <a:ea typeface="Calibri" pitchFamily="34" charset="-122"/>
+                <a:cs typeface="Calibri" pitchFamily="34" charset="-120"/>
+              </a:rPr>
+              <a:t>— Você para → a renda para</a:t>
+            </a:r>
+            <a:endParaRPr lang="en-US" sz="1300" dirty="0"/>
+          </a:p>
+        </p:txBody>
+      </p:sp>
+      <p:sp>
+        <p:nvSpPr>
+          <p:cNvPr id="10" name="Text 8"/>
+          <p:cNvSpPr/>
+          <p:nvPr/>
+        </p:nvSpPr>
+        <p:spPr>
+          <a:xfrm>
+            <a:off x="731520" y="4334256"/>
+            <a:ext cx="4480560" cy="411480"/>
           </a:xfrm>
           <a:prstGeom prst="rect">
             <a:avLst/>
@@ -9166,33 +10389,36 @@
           <a:lstStyle/>
           <a:p>
             <a:pPr indent="0" marL="0">
-              <a:buNone/>
-            </a:pPr>
-            <a:r>
-              <a:rPr lang="en-US" sz="3600" b="1" dirty="0">
-                <a:solidFill>
-                  <a:srgbClr val="7C3AED"/>
-                </a:solidFill>
-                <a:latin typeface="Calibri" pitchFamily="34" charset="0"/>
-                <a:ea typeface="Calibri" pitchFamily="34" charset="-122"/>
-                <a:cs typeface="Calibri" pitchFamily="34" charset="-120"/>
-              </a:rPr>
-              <a:t>R$ 20M+</a:t>
-            </a:r>
-            <a:endParaRPr lang="en-US" sz="3600" dirty="0"/>
-          </a:p>
-        </p:txBody>
-      </p:sp>
-      <p:sp>
-        <p:nvSpPr>
-          <p:cNvPr id="10" name="Text 8"/>
-          <p:cNvSpPr/>
-          <p:nvPr/>
-        </p:nvSpPr>
-        <p:spPr>
-          <a:xfrm>
-            <a:off x="594360" y="3200400"/>
-            <a:ext cx="3383280" cy="228600"/>
+              <a:lnSpc>
+                <a:spcPct val="120000"/>
+              </a:lnSpc>
+              <a:buNone/>
+            </a:pPr>
+            <a:r>
+              <a:rPr lang="en-US" sz="1300" dirty="0">
+                <a:solidFill>
+                  <a:srgbClr val="374151"/>
+                </a:solidFill>
+                <a:latin typeface="Calibri" pitchFamily="34" charset="0"/>
+                <a:ea typeface="Calibri" pitchFamily="34" charset="-122"/>
+                <a:cs typeface="Calibri" pitchFamily="34" charset="-120"/>
+              </a:rPr>
+              <a:t>— Crescer = mais horas de trabalho</a:t>
+            </a:r>
+            <a:endParaRPr lang="en-US" sz="1300" dirty="0"/>
+          </a:p>
+        </p:txBody>
+      </p:sp>
+      <p:sp>
+        <p:nvSpPr>
+          <p:cNvPr id="11" name="Text 9"/>
+          <p:cNvSpPr/>
+          <p:nvPr/>
+        </p:nvSpPr>
+        <p:spPr>
+          <a:xfrm>
+            <a:off x="731520" y="4809744"/>
+            <a:ext cx="4480560" cy="411480"/>
           </a:xfrm>
           <a:prstGeom prst="rect">
             <a:avLst/>
@@ -9205,47 +10431,25 @@
           <a:lstStyle/>
           <a:p>
             <a:pPr indent="0" marL="0">
-              <a:buNone/>
-            </a:pPr>
-            <a:r>
-              <a:rPr lang="en-US" sz="1000" dirty="0">
-                <a:solidFill>
-                  <a:srgbClr val="9CA3AF"/>
-                </a:solidFill>
-                <a:latin typeface="Calibri" pitchFamily="34" charset="0"/>
-                <a:ea typeface="Calibri" pitchFamily="34" charset="-122"/>
-                <a:cs typeface="Calibri" pitchFamily="34" charset="-120"/>
-              </a:rPr>
-              <a:t>com tráfego direto</a:t>
-            </a:r>
-            <a:endParaRPr lang="en-US" sz="1000" dirty="0"/>
-          </a:p>
-        </p:txBody>
-      </p:sp>
-      <p:sp>
-        <p:nvSpPr>
-          <p:cNvPr id="11" name="Shape 9"/>
-          <p:cNvSpPr/>
-          <p:nvPr/>
-        </p:nvSpPr>
-        <p:spPr>
-          <a:xfrm>
-            <a:off x="594360" y="3474720"/>
-            <a:ext cx="457200" cy="27432"/>
-          </a:xfrm>
-          <a:prstGeom prst="rect">
-            <a:avLst/>
-          </a:prstGeom>
-          <a:solidFill>
-            <a:srgbClr val="7C3AED"/>
-          </a:solidFill>
-          <a:ln w="12700">
-            <a:solidFill>
-              <a:srgbClr val="7C3AED"/>
-            </a:solidFill>
-            <a:prstDash val="solid"/>
-          </a:ln>
-        </p:spPr>
+              <a:lnSpc>
+                <a:spcPct val="120000"/>
+              </a:lnSpc>
+              <a:buNone/>
+            </a:pPr>
+            <a:r>
+              <a:rPr lang="en-US" sz="1300" dirty="0">
+                <a:solidFill>
+                  <a:srgbClr val="374151"/>
+                </a:solidFill>
+                <a:latin typeface="Calibri" pitchFamily="34" charset="0"/>
+                <a:ea typeface="Calibri" pitchFamily="34" charset="-122"/>
+                <a:cs typeface="Calibri" pitchFamily="34" charset="-120"/>
+              </a:rPr>
+              <a:t>— 12k seguidores vendo conteúdo de graça</a:t>
+            </a:r>
+            <a:endParaRPr lang="en-US" sz="1300" dirty="0"/>
+          </a:p>
+        </p:txBody>
       </p:sp>
       <p:sp>
         <p:nvSpPr>
@@ -9255,8 +10459,8 @@
         </p:nvSpPr>
         <p:spPr>
           <a:xfrm>
-            <a:off x="594360" y="3611880"/>
-            <a:ext cx="3383280" cy="2194560"/>
+            <a:off x="731520" y="5285232"/>
+            <a:ext cx="4480560" cy="411480"/>
           </a:xfrm>
           <a:prstGeom prst="rect">
             <a:avLst/>
@@ -9270,111 +10474,12 @@
           <a:p>
             <a:pPr indent="0" marL="0">
               <a:lnSpc>
-                <a:spcPct val="155000"/>
-              </a:lnSpc>
-              <a:buNone/>
-            </a:pPr>
-            <a:r>
-              <a:rPr lang="en-US" sz="1200" dirty="0">
-                <a:solidFill>
-                  <a:srgbClr val="9CA3AF"/>
-                </a:solidFill>
-                <a:latin typeface="Calibri" pitchFamily="34" charset="0"/>
-                <a:ea typeface="Calibri" pitchFamily="34" charset="-122"/>
-                <a:cs typeface="Calibri" pitchFamily="34" charset="-120"/>
-              </a:rPr>
-              <a:t>Jovem aprendiz da periferia de Belém.</a:t>
-            </a:r>
-            <a:endParaRPr lang="en-US" sz="1200" dirty="0"/>
-          </a:p>
-          <a:p>
-            <a:pPr indent="0" marL="0">
-              <a:lnSpc>
-                <a:spcPct val="155000"/>
-              </a:lnSpc>
-              <a:buNone/>
-            </a:pPr>
-            <a:r>
-              <a:rPr lang="en-US" sz="1200" dirty="0">
-                <a:solidFill>
-                  <a:srgbClr val="9CA3AF"/>
-                </a:solidFill>
-                <a:latin typeface="Calibri" pitchFamily="34" charset="0"/>
-                <a:ea typeface="Calibri" pitchFamily="34" charset="-122"/>
-                <a:cs typeface="Calibri" pitchFamily="34" charset="-120"/>
-              </a:rPr>
-              <a:t>Sem capital, sem contato.</a:t>
-            </a:r>
-            <a:endParaRPr lang="en-US" sz="1200" dirty="0"/>
-          </a:p>
-          <a:p>
-            <a:pPr indent="0" marL="0">
-              <a:lnSpc>
-                <a:spcPct val="155000"/>
-              </a:lnSpc>
-              <a:buNone/>
-            </a:pPr>
-            <a:r>
-              <a:rPr lang="en-US" sz="1200" dirty="0">
-                <a:solidFill>
-                  <a:srgbClr val="9CA3AF"/>
-                </a:solidFill>
-                <a:latin typeface="Calibri" pitchFamily="34" charset="0"/>
-                <a:ea typeface="Calibri" pitchFamily="34" charset="-122"/>
-                <a:cs typeface="Calibri" pitchFamily="34" charset="-120"/>
-              </a:rPr>
-              <a:t>Usou o próprio conhecimento como produto.</a:t>
-            </a:r>
-            <a:endParaRPr lang="en-US" sz="1200" dirty="0"/>
-          </a:p>
-          <a:p>
-            <a:pPr indent="0" marL="0">
-              <a:lnSpc>
-                <a:spcPct val="155000"/>
-              </a:lnSpc>
-              <a:buNone/>
-            </a:pPr>
-            <a:r>
-              <a:rPr lang="en-US" sz="1200" dirty="0">
-                <a:solidFill>
-                  <a:srgbClr val="9CA3AF"/>
-                </a:solidFill>
-                <a:latin typeface="Calibri" pitchFamily="34" charset="0"/>
-                <a:ea typeface="Calibri" pitchFamily="34" charset="-122"/>
-                <a:cs typeface="Calibri" pitchFamily="34" charset="-120"/>
-              </a:rPr>
-              <a:t>Hoje tem +30 mil alunos.</a:t>
-            </a:r>
-            <a:endParaRPr lang="en-US" sz="1200" dirty="0"/>
-          </a:p>
-        </p:txBody>
-      </p:sp>
-      <p:sp>
-        <p:nvSpPr>
-          <p:cNvPr id="13" name="Text 11"/>
-          <p:cNvSpPr/>
-          <p:nvPr/>
-        </p:nvSpPr>
-        <p:spPr>
-          <a:xfrm>
-            <a:off x="594360" y="6126480"/>
-            <a:ext cx="3383280" cy="274320"/>
-          </a:xfrm>
-          <a:prstGeom prst="rect">
-            <a:avLst/>
-          </a:prstGeom>
-          <a:noFill/>
-          <a:ln/>
-        </p:spPr>
-        <p:txBody>
-          <a:bodyPr wrap="square" rtlCol="0" anchor="ctr"/>
-          <a:lstStyle/>
-          <a:p>
-            <a:pPr indent="0" marL="0">
-              <a:buNone/>
-            </a:pPr>
-            <a:r>
-              <a:rPr lang="en-US" sz="900" dirty="0">
+                <a:spcPct val="120000"/>
+              </a:lnSpc>
+              <a:buNone/>
+            </a:pPr>
+            <a:r>
+              <a:rPr lang="en-US" sz="1300" dirty="0">
                 <a:solidFill>
                   <a:srgbClr val="374151"/>
                 </a:solidFill>
@@ -9382,26 +10487,26 @@
                 <a:ea typeface="Calibri" pitchFamily="34" charset="-122"/>
                 <a:cs typeface="Calibri" pitchFamily="34" charset="-120"/>
               </a:rPr>
-              <a:t>350k seguidores · verificada</a:t>
-            </a:r>
-            <a:endParaRPr lang="en-US" sz="900" dirty="0"/>
-          </a:p>
-        </p:txBody>
-      </p:sp>
-      <p:sp>
-        <p:nvSpPr>
-          <p:cNvPr id="14" name="Shape 12"/>
-          <p:cNvSpPr/>
-          <p:nvPr/>
-        </p:nvSpPr>
-        <p:spPr>
-          <a:xfrm>
-            <a:off x="4389120" y="1691640"/>
-            <a:ext cx="3657600" cy="4846320"/>
+              <a:t>— Potencial enorme. Sem canal de venda.</a:t>
+            </a:r>
+            <a:endParaRPr lang="en-US" sz="1300" dirty="0"/>
+          </a:p>
+        </p:txBody>
+      </p:sp>
+      <p:sp>
+        <p:nvSpPr>
+          <p:cNvPr id="13" name="Shape 11"/>
+          <p:cNvSpPr/>
+          <p:nvPr/>
+        </p:nvSpPr>
+        <p:spPr>
+          <a:xfrm>
+            <a:off x="6217920" y="2743200"/>
+            <a:ext cx="5029200" cy="3291840"/>
           </a:xfrm>
           <a:prstGeom prst="rect">
             <a:avLst>
-              <a:gd name="adj" fmla="val 3750"/>
+              <a:gd name="adj" fmla="val 4167"/>
             </a:avLst>
           </a:prstGeom>
           <a:solidFill>
@@ -9417,14 +10522,53 @@
       </p:sp>
       <p:sp>
         <p:nvSpPr>
+          <p:cNvPr id="14" name="Text 12"/>
+          <p:cNvSpPr/>
+          <p:nvPr/>
+        </p:nvSpPr>
+        <p:spPr>
+          <a:xfrm>
+            <a:off x="6217920" y="2926080"/>
+            <a:ext cx="5029200" cy="320040"/>
+          </a:xfrm>
+          <a:prstGeom prst="rect">
+            <a:avLst/>
+          </a:prstGeom>
+          <a:noFill/>
+          <a:ln/>
+        </p:spPr>
+        <p:txBody>
+          <a:bodyPr wrap="square" rtlCol="0" anchor="ctr"/>
+          <a:lstStyle/>
+          <a:p>
+            <a:pPr algn="ctr" indent="0" marL="0">
+              <a:buNone/>
+            </a:pPr>
+            <a:r>
+              <a:rPr lang="en-US" sz="900" b="1" spc="300" kern="0" dirty="0">
+                <a:solidFill>
+                  <a:srgbClr val="7C3AED"/>
+                </a:solidFill>
+                <a:latin typeface="Calibri" pitchFamily="34" charset="0"/>
+                <a:ea typeface="Calibri" pitchFamily="34" charset="-122"/>
+                <a:cs typeface="Calibri" pitchFamily="34" charset="-120"/>
+              </a:rPr>
+              <a:t>COM ESTRUTURA</a:t>
+            </a:r>
+            <a:endParaRPr lang="en-US" sz="900" dirty="0"/>
+          </a:p>
+        </p:txBody>
+      </p:sp>
+      <p:sp>
+        <p:nvSpPr>
           <p:cNvPr id="15" name="Text 13"/>
           <p:cNvSpPr/>
           <p:nvPr/>
         </p:nvSpPr>
         <p:spPr>
           <a:xfrm>
-            <a:off x="4526280" y="1874520"/>
-            <a:ext cx="3383280" cy="274320"/>
+            <a:off x="6492240" y="3383280"/>
+            <a:ext cx="4480560" cy="411480"/>
           </a:xfrm>
           <a:prstGeom prst="rect">
             <a:avLst/>
@@ -9437,20 +10581,23 @@
           <a:lstStyle/>
           <a:p>
             <a:pPr indent="0" marL="0">
-              <a:buNone/>
-            </a:pPr>
-            <a:r>
-              <a:rPr lang="en-US" sz="1000" b="1" spc="100" kern="0" dirty="0">
-                <a:solidFill>
-                  <a:srgbClr val="7C3AED"/>
-                </a:solidFill>
-                <a:latin typeface="Calibri" pitchFamily="34" charset="0"/>
-                <a:ea typeface="Calibri" pitchFamily="34" charset="-122"/>
-                <a:cs typeface="Calibri" pitchFamily="34" charset="-120"/>
-              </a:rPr>
-              <a:t>@lucasramos1_</a:t>
-            </a:r>
-            <a:endParaRPr lang="en-US" sz="1000" dirty="0"/>
+              <a:lnSpc>
+                <a:spcPct val="120000"/>
+              </a:lnSpc>
+              <a:buNone/>
+            </a:pPr>
+            <a:r>
+              <a:rPr lang="en-US" sz="1300" dirty="0">
+                <a:solidFill>
+                  <a:srgbClr val="FFFFFF"/>
+                </a:solidFill>
+                <a:latin typeface="Calibri" pitchFamily="34" charset="0"/>
+                <a:ea typeface="Calibri" pitchFamily="34" charset="-122"/>
+                <a:cs typeface="Calibri" pitchFamily="34" charset="-120"/>
+              </a:rPr>
+              <a:t>→ Produto digital vendendo 24h/dia</a:t>
+            </a:r>
+            <a:endParaRPr lang="en-US" sz="1300" dirty="0"/>
           </a:p>
         </p:txBody>
       </p:sp>
@@ -9462,8 +10609,8 @@
         </p:nvSpPr>
         <p:spPr>
           <a:xfrm>
-            <a:off x="4526280" y="2194560"/>
-            <a:ext cx="3383280" cy="320040"/>
+            <a:off x="6492240" y="3858768"/>
+            <a:ext cx="4480560" cy="411480"/>
           </a:xfrm>
           <a:prstGeom prst="rect">
             <a:avLst/>
@@ -9476,10 +10623,13 @@
           <a:lstStyle/>
           <a:p>
             <a:pPr indent="0" marL="0">
-              <a:buNone/>
-            </a:pPr>
-            <a:r>
-              <a:rPr lang="en-US" sz="1500" b="1" dirty="0">
+              <a:lnSpc>
+                <a:spcPct val="120000"/>
+              </a:lnSpc>
+              <a:buNone/>
+            </a:pPr>
+            <a:r>
+              <a:rPr lang="en-US" sz="1300" dirty="0">
                 <a:solidFill>
                   <a:srgbClr val="FFFFFF"/>
                 </a:solidFill>
@@ -9487,9 +10637,9 @@
                 <a:ea typeface="Calibri" pitchFamily="34" charset="-122"/>
                 <a:cs typeface="Calibri" pitchFamily="34" charset="-120"/>
               </a:rPr>
-              <a:t>Lucas Ramos</a:t>
-            </a:r>
-            <a:endParaRPr lang="en-US" sz="1500" dirty="0"/>
+              <a:t>→ Você dorme → o funil vende</a:t>
+            </a:r>
+            <a:endParaRPr lang="en-US" sz="1300" dirty="0"/>
           </a:p>
         </p:txBody>
       </p:sp>
@@ -9501,8 +10651,8 @@
         </p:nvSpPr>
         <p:spPr>
           <a:xfrm>
-            <a:off x="4526280" y="2560320"/>
-            <a:ext cx="3383280" cy="640080"/>
+            <a:off x="6492240" y="4334256"/>
+            <a:ext cx="4480560" cy="411480"/>
           </a:xfrm>
           <a:prstGeom prst="rect">
             <a:avLst/>
@@ -9515,20 +10665,23 @@
           <a:lstStyle/>
           <a:p>
             <a:pPr indent="0" marL="0">
-              <a:buNone/>
-            </a:pPr>
-            <a:r>
-              <a:rPr lang="en-US" sz="3600" b="1" dirty="0">
-                <a:solidFill>
-                  <a:srgbClr val="7C3AED"/>
-                </a:solidFill>
-                <a:latin typeface="Calibri" pitchFamily="34" charset="0"/>
-                <a:ea typeface="Calibri" pitchFamily="34" charset="-122"/>
-                <a:cs typeface="Calibri" pitchFamily="34" charset="-120"/>
-              </a:rPr>
-              <a:t>8 dígitos</a:t>
-            </a:r>
-            <a:endParaRPr lang="en-US" sz="3600" dirty="0"/>
+              <a:lnSpc>
+                <a:spcPct val="120000"/>
+              </a:lnSpc>
+              <a:buNone/>
+            </a:pPr>
+            <a:r>
+              <a:rPr lang="en-US" sz="1300" dirty="0">
+                <a:solidFill>
+                  <a:srgbClr val="FFFFFF"/>
+                </a:solidFill>
+                <a:latin typeface="Calibri" pitchFamily="34" charset="0"/>
+                <a:ea typeface="Calibri" pitchFamily="34" charset="-122"/>
+                <a:cs typeface="Calibri" pitchFamily="34" charset="-120"/>
+              </a:rPr>
+              <a:t>→ Crescer = ajustar os anúncios</a:t>
+            </a:r>
+            <a:endParaRPr lang="en-US" sz="1300" dirty="0"/>
           </a:p>
         </p:txBody>
       </p:sp>
@@ -9540,8 +10693,8 @@
         </p:nvSpPr>
         <p:spPr>
           <a:xfrm>
-            <a:off x="4526280" y="3200400"/>
-            <a:ext cx="3383280" cy="228600"/>
+            <a:off x="6492240" y="4809744"/>
+            <a:ext cx="4480560" cy="411480"/>
           </a:xfrm>
           <a:prstGeom prst="rect">
             <a:avLst/>
@@ -9554,47 +10707,67 @@
           <a:lstStyle/>
           <a:p>
             <a:pPr indent="0" marL="0">
-              <a:buNone/>
-            </a:pPr>
-            <a:r>
-              <a:rPr lang="en-US" sz="1000" dirty="0">
-                <a:solidFill>
-                  <a:srgbClr val="9CA3AF"/>
-                </a:solidFill>
-                <a:latin typeface="Calibri" pitchFamily="34" charset="0"/>
-                <a:ea typeface="Calibri" pitchFamily="34" charset="-122"/>
-                <a:cs typeface="Calibri" pitchFamily="34" charset="-120"/>
-              </a:rPr>
-              <a:t>faturados como produtor</a:t>
-            </a:r>
-            <a:endParaRPr lang="en-US" sz="1000" dirty="0"/>
-          </a:p>
-        </p:txBody>
-      </p:sp>
-      <p:sp>
-        <p:nvSpPr>
-          <p:cNvPr id="19" name="Shape 17"/>
-          <p:cNvSpPr/>
-          <p:nvPr/>
-        </p:nvSpPr>
-        <p:spPr>
-          <a:xfrm>
-            <a:off x="4526280" y="3474720"/>
-            <a:ext cx="457200" cy="27432"/>
-          </a:xfrm>
-          <a:prstGeom prst="rect">
-            <a:avLst/>
-          </a:prstGeom>
-          <a:solidFill>
-            <a:srgbClr val="7C3AED"/>
-          </a:solidFill>
-          <a:ln w="12700">
-            <a:solidFill>
-              <a:srgbClr val="7C3AED"/>
-            </a:solidFill>
-            <a:prstDash val="solid"/>
-          </a:ln>
-        </p:spPr>
+              <a:lnSpc>
+                <a:spcPct val="120000"/>
+              </a:lnSpc>
+              <a:buNone/>
+            </a:pPr>
+            <a:r>
+              <a:rPr lang="en-US" sz="1300" dirty="0">
+                <a:solidFill>
+                  <a:srgbClr val="FFFFFF"/>
+                </a:solidFill>
+                <a:latin typeface="Calibri" pitchFamily="34" charset="0"/>
+                <a:ea typeface="Calibri" pitchFamily="34" charset="-122"/>
+                <a:cs typeface="Calibri" pitchFamily="34" charset="-120"/>
+              </a:rPr>
+              <a:t>→ 12k seguidores virando clientes reais</a:t>
+            </a:r>
+            <a:endParaRPr lang="en-US" sz="1300" dirty="0"/>
+          </a:p>
+        </p:txBody>
+      </p:sp>
+      <p:sp>
+        <p:nvSpPr>
+          <p:cNvPr id="19" name="Text 17"/>
+          <p:cNvSpPr/>
+          <p:nvPr/>
+        </p:nvSpPr>
+        <p:spPr>
+          <a:xfrm>
+            <a:off x="6492240" y="5285232"/>
+            <a:ext cx="4480560" cy="411480"/>
+          </a:xfrm>
+          <a:prstGeom prst="rect">
+            <a:avLst/>
+          </a:prstGeom>
+          <a:noFill/>
+          <a:ln/>
+        </p:spPr>
+        <p:txBody>
+          <a:bodyPr wrap="square" rtlCol="0" anchor="ctr"/>
+          <a:lstStyle/>
+          <a:p>
+            <a:pPr indent="0" marL="0">
+              <a:lnSpc>
+                <a:spcPct val="120000"/>
+              </a:lnSpc>
+              <a:buNone/>
+            </a:pPr>
+            <a:r>
+              <a:rPr lang="en-US" sz="1300" dirty="0">
+                <a:solidFill>
+                  <a:srgbClr val="FFFFFF"/>
+                </a:solidFill>
+                <a:latin typeface="Calibri" pitchFamily="34" charset="0"/>
+                <a:ea typeface="Calibri" pitchFamily="34" charset="-122"/>
+                <a:cs typeface="Calibri" pitchFamily="34" charset="-120"/>
+              </a:rPr>
+              <a:t>→ Renda que escala sem você estar presente.</a:t>
+            </a:r>
+            <a:endParaRPr lang="en-US" sz="1300" dirty="0"/>
+          </a:p>
+        </p:txBody>
       </p:sp>
       <p:sp>
         <p:nvSpPr>
@@ -9604,126 +10777,24 @@
         </p:nvSpPr>
         <p:spPr>
           <a:xfrm>
-            <a:off x="4526280" y="3611880"/>
-            <a:ext cx="3383280" cy="2194560"/>
-          </a:xfrm>
-          <a:prstGeom prst="rect">
-            <a:avLst/>
-          </a:prstGeom>
-          <a:noFill/>
-          <a:ln/>
-        </p:spPr>
-        <p:txBody>
-          <a:bodyPr wrap="square" rtlCol="0" anchor="ctr"/>
-          <a:lstStyle/>
-          <a:p>
-            <a:pPr indent="0" marL="0">
-              <a:lnSpc>
-                <a:spcPct val="155000"/>
-              </a:lnSpc>
-              <a:buNone/>
-            </a:pPr>
-            <a:r>
-              <a:rPr lang="en-US" sz="1200" dirty="0">
-                <a:solidFill>
-                  <a:srgbClr val="9CA3AF"/>
-                </a:solidFill>
-                <a:latin typeface="Calibri" pitchFamily="34" charset="0"/>
-                <a:ea typeface="Calibri" pitchFamily="34" charset="-122"/>
-                <a:cs typeface="Calibri" pitchFamily="34" charset="-120"/>
-              </a:rPr>
-              <a:t>Sócio 50/50 dos maiores experts do Brasil.</a:t>
-            </a:r>
-            <a:endParaRPr lang="en-US" sz="1200" dirty="0"/>
-          </a:p>
-          <a:p>
-            <a:pPr indent="0" marL="0">
-              <a:lnSpc>
-                <a:spcPct val="155000"/>
-              </a:lnSpc>
-              <a:buNone/>
-            </a:pPr>
-            <a:r>
-              <a:rPr lang="en-US" sz="1200" dirty="0">
-                <a:solidFill>
-                  <a:srgbClr val="9CA3AF"/>
-                </a:solidFill>
-                <a:latin typeface="Calibri" pitchFamily="34" charset="0"/>
-                <a:ea typeface="Calibri" pitchFamily="34" charset="-122"/>
-                <a:cs typeface="Calibri" pitchFamily="34" charset="-120"/>
-              </a:rPr>
-              <a:t>6 dígitos de lucro por dia no modelo perpétuo.</a:t>
-            </a:r>
-            <a:endParaRPr lang="en-US" sz="1200" dirty="0"/>
-          </a:p>
-          <a:p>
-            <a:pPr indent="0" marL="0">
-              <a:lnSpc>
-                <a:spcPct val="155000"/>
-              </a:lnSpc>
-              <a:buNone/>
-            </a:pPr>
-            <a:r>
-              <a:rPr lang="en-US" sz="1200" dirty="0">
-                <a:solidFill>
-                  <a:srgbClr val="9CA3AF"/>
-                </a:solidFill>
-                <a:latin typeface="Calibri" pitchFamily="34" charset="0"/>
-                <a:ea typeface="Calibri" pitchFamily="34" charset="-122"/>
-                <a:cs typeface="Calibri" pitchFamily="34" charset="-120"/>
-              </a:rPr>
-              <a:t>Não é expert — é o cara que opera os bastidores.</a:t>
-            </a:r>
-            <a:endParaRPr lang="en-US" sz="1200" dirty="0"/>
-          </a:p>
-          <a:p>
-            <a:pPr indent="0" marL="0">
-              <a:lnSpc>
-                <a:spcPct val="155000"/>
-              </a:lnSpc>
-              <a:buNone/>
-            </a:pPr>
-            <a:r>
-              <a:rPr lang="en-US" sz="1200" dirty="0">
-                <a:solidFill>
-                  <a:srgbClr val="9CA3AF"/>
-                </a:solidFill>
-                <a:latin typeface="Calibri" pitchFamily="34" charset="0"/>
-                <a:ea typeface="Calibri" pitchFamily="34" charset="-122"/>
-                <a:cs typeface="Calibri" pitchFamily="34" charset="-120"/>
-              </a:rPr>
-              <a:t>Exatamente o que eu faço.</a:t>
-            </a:r>
-            <a:endParaRPr lang="en-US" sz="1200" dirty="0"/>
-          </a:p>
-        </p:txBody>
-      </p:sp>
-      <p:sp>
-        <p:nvSpPr>
-          <p:cNvPr id="21" name="Text 19"/>
-          <p:cNvSpPr/>
-          <p:nvPr/>
-        </p:nvSpPr>
-        <p:spPr>
-          <a:xfrm>
-            <a:off x="4526280" y="6126480"/>
-            <a:ext cx="3383280" cy="274320"/>
-          </a:xfrm>
-          <a:prstGeom prst="rect">
-            <a:avLst/>
-          </a:prstGeom>
-          <a:noFill/>
-          <a:ln/>
-        </p:spPr>
-        <p:txBody>
-          <a:bodyPr wrap="square" rtlCol="0" anchor="ctr"/>
-          <a:lstStyle/>
-          <a:p>
-            <a:pPr indent="0" marL="0">
-              <a:buNone/>
-            </a:pPr>
-            <a:r>
-              <a:rPr lang="en-US" sz="900" dirty="0">
+            <a:off x="914400" y="6126480"/>
+            <a:ext cx="10360152" cy="365760"/>
+          </a:xfrm>
+          <a:prstGeom prst="rect">
+            <a:avLst/>
+          </a:prstGeom>
+          <a:noFill/>
+          <a:ln/>
+        </p:spPr>
+        <p:txBody>
+          <a:bodyPr wrap="square" rtlCol="0" anchor="ctr"/>
+          <a:lstStyle/>
+          <a:p>
+            <a:pPr algn="ctr" indent="0" marL="0">
+              <a:buNone/>
+            </a:pPr>
+            <a:r>
+              <a:rPr lang="en-US" sz="1300" i="1" dirty="0">
                 <a:solidFill>
                   <a:srgbClr val="374151"/>
                 </a:solidFill>
@@ -9731,358 +10802,9 @@
                 <a:ea typeface="Calibri" pitchFamily="34" charset="-122"/>
                 <a:cs typeface="Calibri" pitchFamily="34" charset="-120"/>
               </a:rPr>
-              <a:t>Produtor referência em DR com expert</a:t>
-            </a:r>
-            <a:endParaRPr lang="en-US" sz="900" dirty="0"/>
-          </a:p>
-        </p:txBody>
-      </p:sp>
-      <p:sp>
-        <p:nvSpPr>
-          <p:cNvPr id="22" name="Shape 20"/>
-          <p:cNvSpPr/>
-          <p:nvPr/>
-        </p:nvSpPr>
-        <p:spPr>
-          <a:xfrm>
-            <a:off x="8321040" y="1691640"/>
-            <a:ext cx="3657600" cy="4846320"/>
-          </a:xfrm>
-          <a:prstGeom prst="rect">
-            <a:avLst>
-              <a:gd name="adj" fmla="val 3750"/>
-            </a:avLst>
-          </a:prstGeom>
-          <a:solidFill>
-            <a:srgbClr val="111111"/>
-          </a:solidFill>
-          <a:ln w="12700">
-            <a:solidFill>
-              <a:srgbClr val="1F1F1F"/>
-            </a:solidFill>
-            <a:prstDash val="solid"/>
-          </a:ln>
-        </p:spPr>
-      </p:sp>
-      <p:sp>
-        <p:nvSpPr>
-          <p:cNvPr id="23" name="Text 21"/>
-          <p:cNvSpPr/>
-          <p:nvPr/>
-        </p:nvSpPr>
-        <p:spPr>
-          <a:xfrm>
-            <a:off x="8458200" y="1874520"/>
-            <a:ext cx="3383280" cy="274320"/>
-          </a:xfrm>
-          <a:prstGeom prst="rect">
-            <a:avLst/>
-          </a:prstGeom>
-          <a:noFill/>
-          <a:ln/>
-        </p:spPr>
-        <p:txBody>
-          <a:bodyPr wrap="square" rtlCol="0" anchor="ctr"/>
-          <a:lstStyle/>
-          <a:p>
-            <a:pPr indent="0" marL="0">
-              <a:buNone/>
-            </a:pPr>
-            <a:r>
-              <a:rPr lang="en-US" sz="1000" b="1" spc="100" kern="0" dirty="0">
-                <a:solidFill>
-                  <a:srgbClr val="7C3AED"/>
-                </a:solidFill>
-                <a:latin typeface="Calibri" pitchFamily="34" charset="0"/>
-                <a:ea typeface="Calibri" pitchFamily="34" charset="-122"/>
-                <a:cs typeface="Calibri" pitchFamily="34" charset="-120"/>
-              </a:rPr>
-              <a:t>@enzoneto</a:t>
-            </a:r>
-            <a:endParaRPr lang="en-US" sz="1000" dirty="0"/>
-          </a:p>
-        </p:txBody>
-      </p:sp>
-      <p:sp>
-        <p:nvSpPr>
-          <p:cNvPr id="24" name="Text 22"/>
-          <p:cNvSpPr/>
-          <p:nvPr/>
-        </p:nvSpPr>
-        <p:spPr>
-          <a:xfrm>
-            <a:off x="8458200" y="2194560"/>
-            <a:ext cx="3383280" cy="320040"/>
-          </a:xfrm>
-          <a:prstGeom prst="rect">
-            <a:avLst/>
-          </a:prstGeom>
-          <a:noFill/>
-          <a:ln/>
-        </p:spPr>
-        <p:txBody>
-          <a:bodyPr wrap="square" rtlCol="0" anchor="ctr"/>
-          <a:lstStyle/>
-          <a:p>
-            <a:pPr indent="0" marL="0">
-              <a:buNone/>
-            </a:pPr>
-            <a:r>
-              <a:rPr lang="en-US" sz="1500" b="1" dirty="0">
-                <a:solidFill>
-                  <a:srgbClr val="FFFFFF"/>
-                </a:solidFill>
-                <a:latin typeface="Calibri" pitchFamily="34" charset="0"/>
-                <a:ea typeface="Calibri" pitchFamily="34" charset="-122"/>
-                <a:cs typeface="Calibri" pitchFamily="34" charset="-120"/>
-              </a:rPr>
-              <a:t>Enzo Neto — Chef</a:t>
-            </a:r>
-            <a:endParaRPr lang="en-US" sz="1500" dirty="0"/>
-          </a:p>
-        </p:txBody>
-      </p:sp>
-      <p:sp>
-        <p:nvSpPr>
-          <p:cNvPr id="25" name="Text 23"/>
-          <p:cNvSpPr/>
-          <p:nvPr/>
-        </p:nvSpPr>
-        <p:spPr>
-          <a:xfrm>
-            <a:off x="8458200" y="2560320"/>
-            <a:ext cx="3383280" cy="640080"/>
-          </a:xfrm>
-          <a:prstGeom prst="rect">
-            <a:avLst/>
-          </a:prstGeom>
-          <a:noFill/>
-          <a:ln/>
-        </p:spPr>
-        <p:txBody>
-          <a:bodyPr wrap="square" rtlCol="0" anchor="ctr"/>
-          <a:lstStyle/>
-          <a:p>
-            <a:pPr indent="0" marL="0">
-              <a:buNone/>
-            </a:pPr>
-            <a:r>
-              <a:rPr lang="en-US" sz="3600" b="1" dirty="0">
-                <a:solidFill>
-                  <a:srgbClr val="7C3AED"/>
-                </a:solidFill>
-                <a:latin typeface="Calibri" pitchFamily="34" charset="0"/>
-                <a:ea typeface="Calibri" pitchFamily="34" charset="-122"/>
-                <a:cs typeface="Calibri" pitchFamily="34" charset="-120"/>
-              </a:rPr>
-              <a:t>1,1M</a:t>
-            </a:r>
-            <a:endParaRPr lang="en-US" sz="3600" dirty="0"/>
-          </a:p>
-        </p:txBody>
-      </p:sp>
-      <p:sp>
-        <p:nvSpPr>
-          <p:cNvPr id="26" name="Text 24"/>
-          <p:cNvSpPr/>
-          <p:nvPr/>
-        </p:nvSpPr>
-        <p:spPr>
-          <a:xfrm>
-            <a:off x="8458200" y="3200400"/>
-            <a:ext cx="3383280" cy="228600"/>
-          </a:xfrm>
-          <a:prstGeom prst="rect">
-            <a:avLst/>
-          </a:prstGeom>
-          <a:noFill/>
-          <a:ln/>
-        </p:spPr>
-        <p:txBody>
-          <a:bodyPr wrap="square" rtlCol="0" anchor="ctr"/>
-          <a:lstStyle/>
-          <a:p>
-            <a:pPr indent="0" marL="0">
-              <a:buNone/>
-            </a:pPr>
-            <a:r>
-              <a:rPr lang="en-US" sz="1000" dirty="0">
-                <a:solidFill>
-                  <a:srgbClr val="9CA3AF"/>
-                </a:solidFill>
-                <a:latin typeface="Calibri" pitchFamily="34" charset="0"/>
-                <a:ea typeface="Calibri" pitchFamily="34" charset="-122"/>
-                <a:cs typeface="Calibri" pitchFamily="34" charset="-120"/>
-              </a:rPr>
-              <a:t>seguidores · funil ativo</a:t>
-            </a:r>
-            <a:endParaRPr lang="en-US" sz="1000" dirty="0"/>
-          </a:p>
-        </p:txBody>
-      </p:sp>
-      <p:sp>
-        <p:nvSpPr>
-          <p:cNvPr id="27" name="Shape 25"/>
-          <p:cNvSpPr/>
-          <p:nvPr/>
-        </p:nvSpPr>
-        <p:spPr>
-          <a:xfrm>
-            <a:off x="8458200" y="3474720"/>
-            <a:ext cx="457200" cy="27432"/>
-          </a:xfrm>
-          <a:prstGeom prst="rect">
-            <a:avLst/>
-          </a:prstGeom>
-          <a:solidFill>
-            <a:srgbClr val="7C3AED"/>
-          </a:solidFill>
-          <a:ln w="12700">
-            <a:solidFill>
-              <a:srgbClr val="7C3AED"/>
-            </a:solidFill>
-            <a:prstDash val="solid"/>
-          </a:ln>
-        </p:spPr>
-      </p:sp>
-      <p:sp>
-        <p:nvSpPr>
-          <p:cNvPr id="28" name="Text 26"/>
-          <p:cNvSpPr/>
-          <p:nvPr/>
-        </p:nvSpPr>
-        <p:spPr>
-          <a:xfrm>
-            <a:off x="8458200" y="3611880"/>
-            <a:ext cx="3383280" cy="2194560"/>
-          </a:xfrm>
-          <a:prstGeom prst="rect">
-            <a:avLst/>
-          </a:prstGeom>
-          <a:noFill/>
-          <a:ln/>
-        </p:spPr>
-        <p:txBody>
-          <a:bodyPr wrap="square" rtlCol="0" anchor="ctr"/>
-          <a:lstStyle/>
-          <a:p>
-            <a:pPr indent="0" marL="0">
-              <a:lnSpc>
-                <a:spcPct val="155000"/>
-              </a:lnSpc>
-              <a:buNone/>
-            </a:pPr>
-            <a:r>
-              <a:rPr lang="en-US" sz="1200" dirty="0">
-                <a:solidFill>
-                  <a:srgbClr val="9CA3AF"/>
-                </a:solidFill>
-                <a:latin typeface="Calibri" pitchFamily="34" charset="0"/>
-                <a:ea typeface="Calibri" pitchFamily="34" charset="-122"/>
-                <a:cs typeface="Calibri" pitchFamily="34" charset="-120"/>
-              </a:rPr>
-              <a:t>Transformou conhecimento de cozinha no</a:t>
-            </a:r>
-            <a:endParaRPr lang="en-US" sz="1200" dirty="0"/>
-          </a:p>
-          <a:p>
-            <a:pPr indent="0" marL="0">
-              <a:lnSpc>
-                <a:spcPct val="155000"/>
-              </a:lnSpc>
-              <a:buNone/>
-            </a:pPr>
-            <a:r>
-              <a:rPr lang="en-US" sz="1200" dirty="0">
-                <a:solidFill>
-                  <a:srgbClr val="9CA3AF"/>
-                </a:solidFill>
-                <a:latin typeface="Calibri" pitchFamily="34" charset="0"/>
-                <a:ea typeface="Calibri" pitchFamily="34" charset="-122"/>
-                <a:cs typeface="Calibri" pitchFamily="34" charset="-120"/>
-              </a:rPr>
-              <a:t>curso mais escolhido do Brasil.</a:t>
-            </a:r>
-            <a:endParaRPr lang="en-US" sz="1200" dirty="0"/>
-          </a:p>
-          <a:p>
-            <a:pPr indent="0" marL="0">
-              <a:lnSpc>
-                <a:spcPct val="155000"/>
-              </a:lnSpc>
-              <a:buNone/>
-            </a:pPr>
-            <a:r>
-              <a:rPr lang="en-US" sz="1200" dirty="0">
-                <a:solidFill>
-                  <a:srgbClr val="9CA3AF"/>
-                </a:solidFill>
-                <a:latin typeface="Calibri" pitchFamily="34" charset="0"/>
-                <a:ea typeface="Calibri" pitchFamily="34" charset="-122"/>
-                <a:cs typeface="Calibri" pitchFamily="34" charset="-120"/>
-              </a:rPr>
-              <a:t>Nicho que parecia impossível de escalar.</a:t>
-            </a:r>
-            <a:endParaRPr lang="en-US" sz="1200" dirty="0"/>
-          </a:p>
-          <a:p>
-            <a:pPr indent="0" marL="0">
-              <a:lnSpc>
-                <a:spcPct val="155000"/>
-              </a:lnSpc>
-              <a:buNone/>
-            </a:pPr>
-            <a:r>
-              <a:rPr lang="en-US" sz="1200" dirty="0">
-                <a:solidFill>
-                  <a:srgbClr val="9CA3AF"/>
-                </a:solidFill>
-                <a:latin typeface="Calibri" pitchFamily="34" charset="0"/>
-                <a:ea typeface="Calibri" pitchFamily="34" charset="-122"/>
-                <a:cs typeface="Calibri" pitchFamily="34" charset="-120"/>
-              </a:rPr>
-              <a:t>Funciona quando a estrutura está certa.</a:t>
-            </a:r>
-            <a:endParaRPr lang="en-US" sz="1200" dirty="0"/>
-          </a:p>
-        </p:txBody>
-      </p:sp>
-      <p:sp>
-        <p:nvSpPr>
-          <p:cNvPr id="29" name="Text 27"/>
-          <p:cNvSpPr/>
-          <p:nvPr/>
-        </p:nvSpPr>
-        <p:spPr>
-          <a:xfrm>
-            <a:off x="8458200" y="6126480"/>
-            <a:ext cx="3383280" cy="274320"/>
-          </a:xfrm>
-          <a:prstGeom prst="rect">
-            <a:avLst/>
-          </a:prstGeom>
-          <a:noFill/>
-          <a:ln/>
-        </p:spPr>
-        <p:txBody>
-          <a:bodyPr wrap="square" rtlCol="0" anchor="ctr"/>
-          <a:lstStyle/>
-          <a:p>
-            <a:pPr indent="0" marL="0">
-              <a:buNone/>
-            </a:pPr>
-            <a:r>
-              <a:rPr lang="en-US" sz="900" dirty="0">
-                <a:solidFill>
-                  <a:srgbClr val="374151"/>
-                </a:solidFill>
-                <a:latin typeface="Calibri" pitchFamily="34" charset="0"/>
-                <a:ea typeface="Calibri" pitchFamily="34" charset="-122"/>
-                <a:cs typeface="Calibri" pitchFamily="34" charset="-120"/>
-              </a:rPr>
-              <a:t>1,1 milhão de seguidores · verificado</a:t>
-            </a:r>
-            <a:endParaRPr lang="en-US" sz="900" dirty="0"/>
+              <a:t>Isso não é falta de competência. É falta de estrutura. E estrutura eu tenho.</a:t>
+            </a:r>
+            <a:endParaRPr lang="en-US" sz="1300" dirty="0"/>
           </a:p>
         </p:txBody>
       </p:sp>
@@ -10169,7 +10891,7 @@
                 <a:ea typeface="Calibri" pitchFamily="34" charset="-122"/>
                 <a:cs typeface="Calibri" pitchFamily="34" charset="-120"/>
               </a:rPr>
-              <a:t>O MODELO FUNCIONA EM QUALQUER NICHO</a:t>
+              <a:t>QUEM JÁ FEZ ISSO ANTES DE VOCÊ</a:t>
             </a:r>
             <a:endParaRPr lang="en-US" sz="900" dirty="0"/>
           </a:p>
@@ -10177,18 +10899,454 @@
       </p:sp>
       <p:sp>
         <p:nvSpPr>
-          <p:cNvPr id="4" name="Shape 2"/>
-          <p:cNvSpPr/>
-          <p:nvPr/>
-        </p:nvSpPr>
-        <p:spPr>
-          <a:xfrm>
-            <a:off x="731520" y="1005840"/>
-            <a:ext cx="5120640" cy="4754880"/>
+          <p:cNvPr id="4" name="Text 2"/>
+          <p:cNvSpPr/>
+          <p:nvPr/>
+        </p:nvSpPr>
+        <p:spPr>
+          <a:xfrm>
+            <a:off x="914400" y="777240"/>
+            <a:ext cx="10360152" cy="502920"/>
+          </a:xfrm>
+          <a:prstGeom prst="rect">
+            <a:avLst/>
+          </a:prstGeom>
+          <a:noFill/>
+          <a:ln/>
+        </p:spPr>
+        <p:txBody>
+          <a:bodyPr wrap="square" rtlCol="0" anchor="ctr"/>
+          <a:lstStyle/>
+          <a:p>
+            <a:pPr algn="ctr" indent="0" marL="0">
+              <a:buNone/>
+            </a:pPr>
+            <a:r>
+              <a:rPr lang="en-US" sz="2800" b="1" dirty="0">
+                <a:solidFill>
+                  <a:srgbClr val="FFFFFF"/>
+                </a:solidFill>
+                <a:latin typeface="Calibri" pitchFamily="34" charset="0"/>
+                <a:ea typeface="Calibri" pitchFamily="34" charset="-122"/>
+                <a:cs typeface="Calibri" pitchFamily="34" charset="-120"/>
+              </a:rPr>
+              <a:t>Não é teoria. São pessoas reais com histórias verificáveis.</a:t>
+            </a:r>
+            <a:endParaRPr lang="en-US" sz="2800" dirty="0"/>
+          </a:p>
+        </p:txBody>
+      </p:sp>
+      <p:sp>
+        <p:nvSpPr>
+          <p:cNvPr id="5" name="Shape 3"/>
+          <p:cNvSpPr/>
+          <p:nvPr/>
+        </p:nvSpPr>
+        <p:spPr>
+          <a:xfrm>
+            <a:off x="5728716" y="1417320"/>
+            <a:ext cx="731520" cy="36576"/>
+          </a:xfrm>
+          <a:prstGeom prst="rect">
+            <a:avLst/>
+          </a:prstGeom>
+          <a:solidFill>
+            <a:srgbClr val="7C3AED"/>
+          </a:solidFill>
+          <a:ln w="12700">
+            <a:solidFill>
+              <a:srgbClr val="7C3AED"/>
+            </a:solidFill>
+            <a:prstDash val="solid"/>
+          </a:ln>
+        </p:spPr>
+      </p:sp>
+      <p:sp>
+        <p:nvSpPr>
+          <p:cNvPr id="6" name="Shape 4"/>
+          <p:cNvSpPr/>
+          <p:nvPr/>
+        </p:nvSpPr>
+        <p:spPr>
+          <a:xfrm>
+            <a:off x="457200" y="1691640"/>
+            <a:ext cx="3657600" cy="4846320"/>
           </a:xfrm>
           <a:prstGeom prst="rect">
             <a:avLst>
-              <a:gd name="adj" fmla="val 2885"/>
+              <a:gd name="adj" fmla="val 3750"/>
+            </a:avLst>
+          </a:prstGeom>
+          <a:solidFill>
+            <a:srgbClr val="111111"/>
+          </a:solidFill>
+          <a:ln w="12700">
+            <a:solidFill>
+              <a:srgbClr val="1F1F1F"/>
+            </a:solidFill>
+            <a:prstDash val="solid"/>
+          </a:ln>
+        </p:spPr>
+      </p:sp>
+      <p:pic>
+        <p:nvPicPr>
+          <p:cNvPr id="7" name="Image 0" descr="c:/Users/Desktop/Downloads/grupoaura/operacoes/apresentacoes/monica/foto-elida.jpg">    </p:cNvPr>
+          <p:cNvPicPr>
+            <a:picLocks noChangeAspect="1"/>
+          </p:cNvPicPr>
+          <p:nvPr/>
+        </p:nvPicPr>
+        <p:blipFill>
+          <a:blip r:embed="rId1"/>
+          <a:srcRect l="0" r="0" t="0" b="0"/>
+          <a:stretch/>
+        </p:blipFill>
+        <p:spPr>
+          <a:xfrm>
+            <a:off x="594360" y="1828800"/>
+            <a:ext cx="594360" cy="594360"/>
+          </a:xfrm>
+          <a:prstGeom prst="rect">
+            <a:avLst/>
+          </a:prstGeom>
+        </p:spPr>
+      </p:pic>
+      <p:sp>
+        <p:nvSpPr>
+          <p:cNvPr id="8" name="Text 5"/>
+          <p:cNvSpPr/>
+          <p:nvPr/>
+        </p:nvSpPr>
+        <p:spPr>
+          <a:xfrm>
+            <a:off x="1261872" y="1874520"/>
+            <a:ext cx="2743200" cy="274320"/>
+          </a:xfrm>
+          <a:prstGeom prst="rect">
+            <a:avLst/>
+          </a:prstGeom>
+          <a:noFill/>
+          <a:ln/>
+        </p:spPr>
+        <p:txBody>
+          <a:bodyPr wrap="square" rtlCol="0" anchor="ctr"/>
+          <a:lstStyle/>
+          <a:p>
+            <a:pPr indent="0" marL="0">
+              <a:buNone/>
+            </a:pPr>
+            <a:r>
+              <a:rPr lang="en-US" sz="1000" b="1" spc="100" kern="0" dirty="0">
+                <a:solidFill>
+                  <a:srgbClr val="7C3AED"/>
+                </a:solidFill>
+                <a:latin typeface="Calibri" pitchFamily="34" charset="0"/>
+                <a:ea typeface="Calibri" pitchFamily="34" charset="-122"/>
+                <a:cs typeface="Calibri" pitchFamily="34" charset="-120"/>
+              </a:rPr>
+              <a:t>@elidadiasv</a:t>
+            </a:r>
+            <a:endParaRPr lang="en-US" sz="1000" dirty="0"/>
+          </a:p>
+        </p:txBody>
+      </p:sp>
+      <p:sp>
+        <p:nvSpPr>
+          <p:cNvPr id="9" name="Text 6"/>
+          <p:cNvSpPr/>
+          <p:nvPr/>
+        </p:nvSpPr>
+        <p:spPr>
+          <a:xfrm>
+            <a:off x="1261872" y="2167128"/>
+            <a:ext cx="2743200" cy="292608"/>
+          </a:xfrm>
+          <a:prstGeom prst="rect">
+            <a:avLst/>
+          </a:prstGeom>
+          <a:noFill/>
+          <a:ln/>
+        </p:spPr>
+        <p:txBody>
+          <a:bodyPr wrap="square" rtlCol="0" anchor="ctr"/>
+          <a:lstStyle/>
+          <a:p>
+            <a:pPr indent="0" marL="0">
+              <a:buNone/>
+            </a:pPr>
+            <a:r>
+              <a:rPr lang="en-US" sz="1400" b="1" dirty="0">
+                <a:solidFill>
+                  <a:srgbClr val="FFFFFF"/>
+                </a:solidFill>
+                <a:latin typeface="Calibri" pitchFamily="34" charset="0"/>
+                <a:ea typeface="Calibri" pitchFamily="34" charset="-122"/>
+                <a:cs typeface="Calibri" pitchFamily="34" charset="-120"/>
+              </a:rPr>
+              <a:t>Elida Dias</a:t>
+            </a:r>
+            <a:endParaRPr lang="en-US" sz="1400" dirty="0"/>
+          </a:p>
+        </p:txBody>
+      </p:sp>
+      <p:sp>
+        <p:nvSpPr>
+          <p:cNvPr id="10" name="Text 7"/>
+          <p:cNvSpPr/>
+          <p:nvPr/>
+        </p:nvSpPr>
+        <p:spPr>
+          <a:xfrm>
+            <a:off x="594360" y="2606040"/>
+            <a:ext cx="3383280" cy="640080"/>
+          </a:xfrm>
+          <a:prstGeom prst="rect">
+            <a:avLst/>
+          </a:prstGeom>
+          <a:noFill/>
+          <a:ln/>
+        </p:spPr>
+        <p:txBody>
+          <a:bodyPr wrap="square" rtlCol="0" anchor="ctr"/>
+          <a:lstStyle/>
+          <a:p>
+            <a:pPr indent="0" marL="0">
+              <a:buNone/>
+            </a:pPr>
+            <a:r>
+              <a:rPr lang="en-US" sz="3600" b="1" dirty="0">
+                <a:solidFill>
+                  <a:srgbClr val="7C3AED"/>
+                </a:solidFill>
+                <a:latin typeface="Calibri" pitchFamily="34" charset="0"/>
+                <a:ea typeface="Calibri" pitchFamily="34" charset="-122"/>
+                <a:cs typeface="Calibri" pitchFamily="34" charset="-120"/>
+              </a:rPr>
+              <a:t>R$ 20M+</a:t>
+            </a:r>
+            <a:endParaRPr lang="en-US" sz="3600" dirty="0"/>
+          </a:p>
+        </p:txBody>
+      </p:sp>
+      <p:sp>
+        <p:nvSpPr>
+          <p:cNvPr id="11" name="Text 8"/>
+          <p:cNvSpPr/>
+          <p:nvPr/>
+        </p:nvSpPr>
+        <p:spPr>
+          <a:xfrm>
+            <a:off x="594360" y="3227832"/>
+            <a:ext cx="3383280" cy="228600"/>
+          </a:xfrm>
+          <a:prstGeom prst="rect">
+            <a:avLst/>
+          </a:prstGeom>
+          <a:noFill/>
+          <a:ln/>
+        </p:spPr>
+        <p:txBody>
+          <a:bodyPr wrap="square" rtlCol="0" anchor="ctr"/>
+          <a:lstStyle/>
+          <a:p>
+            <a:pPr indent="0" marL="0">
+              <a:buNone/>
+            </a:pPr>
+            <a:r>
+              <a:rPr lang="en-US" sz="1000" dirty="0">
+                <a:solidFill>
+                  <a:srgbClr val="9CA3AF"/>
+                </a:solidFill>
+                <a:latin typeface="Calibri" pitchFamily="34" charset="0"/>
+                <a:ea typeface="Calibri" pitchFamily="34" charset="-122"/>
+                <a:cs typeface="Calibri" pitchFamily="34" charset="-120"/>
+              </a:rPr>
+              <a:t>com tráfego direto</a:t>
+            </a:r>
+            <a:endParaRPr lang="en-US" sz="1000" dirty="0"/>
+          </a:p>
+        </p:txBody>
+      </p:sp>
+      <p:sp>
+        <p:nvSpPr>
+          <p:cNvPr id="12" name="Shape 9"/>
+          <p:cNvSpPr/>
+          <p:nvPr/>
+        </p:nvSpPr>
+        <p:spPr>
+          <a:xfrm>
+            <a:off x="594360" y="3502152"/>
+            <a:ext cx="457200" cy="27432"/>
+          </a:xfrm>
+          <a:prstGeom prst="rect">
+            <a:avLst/>
+          </a:prstGeom>
+          <a:solidFill>
+            <a:srgbClr val="7C3AED"/>
+          </a:solidFill>
+          <a:ln w="12700">
+            <a:solidFill>
+              <a:srgbClr val="7C3AED"/>
+            </a:solidFill>
+            <a:prstDash val="solid"/>
+          </a:ln>
+        </p:spPr>
+      </p:sp>
+      <p:sp>
+        <p:nvSpPr>
+          <p:cNvPr id="13" name="Text 10"/>
+          <p:cNvSpPr/>
+          <p:nvPr/>
+        </p:nvSpPr>
+        <p:spPr>
+          <a:xfrm>
+            <a:off x="594360" y="3611880"/>
+            <a:ext cx="3383280" cy="2194560"/>
+          </a:xfrm>
+          <a:prstGeom prst="rect">
+            <a:avLst/>
+          </a:prstGeom>
+          <a:noFill/>
+          <a:ln/>
+        </p:spPr>
+        <p:txBody>
+          <a:bodyPr wrap="square" rtlCol="0" anchor="ctr"/>
+          <a:lstStyle/>
+          <a:p>
+            <a:pPr indent="0" marL="0">
+              <a:lnSpc>
+                <a:spcPct val="155000"/>
+              </a:lnSpc>
+              <a:buNone/>
+            </a:pPr>
+            <a:r>
+              <a:rPr lang="en-US" sz="1200" dirty="0">
+                <a:solidFill>
+                  <a:srgbClr val="9CA3AF"/>
+                </a:solidFill>
+                <a:latin typeface="Calibri" pitchFamily="34" charset="0"/>
+                <a:ea typeface="Calibri" pitchFamily="34" charset="-122"/>
+                <a:cs typeface="Calibri" pitchFamily="34" charset="-120"/>
+              </a:rPr>
+              <a:t>Jovem aprendiz da periferia de Belém.</a:t>
+            </a:r>
+            <a:endParaRPr lang="en-US" sz="1200" dirty="0"/>
+          </a:p>
+          <a:p>
+            <a:pPr indent="0" marL="0">
+              <a:lnSpc>
+                <a:spcPct val="155000"/>
+              </a:lnSpc>
+              <a:buNone/>
+            </a:pPr>
+            <a:r>
+              <a:rPr lang="en-US" sz="1200" dirty="0">
+                <a:solidFill>
+                  <a:srgbClr val="9CA3AF"/>
+                </a:solidFill>
+                <a:latin typeface="Calibri" pitchFamily="34" charset="0"/>
+                <a:ea typeface="Calibri" pitchFamily="34" charset="-122"/>
+                <a:cs typeface="Calibri" pitchFamily="34" charset="-120"/>
+              </a:rPr>
+              <a:t>Sem capital, sem contato.</a:t>
+            </a:r>
+            <a:endParaRPr lang="en-US" sz="1200" dirty="0"/>
+          </a:p>
+          <a:p>
+            <a:pPr indent="0" marL="0">
+              <a:lnSpc>
+                <a:spcPct val="155000"/>
+              </a:lnSpc>
+              <a:buNone/>
+            </a:pPr>
+            <a:r>
+              <a:rPr lang="en-US" sz="1200" dirty="0">
+                <a:solidFill>
+                  <a:srgbClr val="9CA3AF"/>
+                </a:solidFill>
+                <a:latin typeface="Calibri" pitchFamily="34" charset="0"/>
+                <a:ea typeface="Calibri" pitchFamily="34" charset="-122"/>
+                <a:cs typeface="Calibri" pitchFamily="34" charset="-120"/>
+              </a:rPr>
+              <a:t>Usou o próprio conhecimento como produto.</a:t>
+            </a:r>
+            <a:endParaRPr lang="en-US" sz="1200" dirty="0"/>
+          </a:p>
+          <a:p>
+            <a:pPr indent="0" marL="0">
+              <a:lnSpc>
+                <a:spcPct val="155000"/>
+              </a:lnSpc>
+              <a:buNone/>
+            </a:pPr>
+            <a:r>
+              <a:rPr lang="en-US" sz="1200" dirty="0">
+                <a:solidFill>
+                  <a:srgbClr val="9CA3AF"/>
+                </a:solidFill>
+                <a:latin typeface="Calibri" pitchFamily="34" charset="0"/>
+                <a:ea typeface="Calibri" pitchFamily="34" charset="-122"/>
+                <a:cs typeface="Calibri" pitchFamily="34" charset="-120"/>
+              </a:rPr>
+              <a:t>Hoje tem +30 mil alunos.</a:t>
+            </a:r>
+            <a:endParaRPr lang="en-US" sz="1200" dirty="0"/>
+          </a:p>
+        </p:txBody>
+      </p:sp>
+      <p:sp>
+        <p:nvSpPr>
+          <p:cNvPr id="14" name="Text 11"/>
+          <p:cNvSpPr/>
+          <p:nvPr/>
+        </p:nvSpPr>
+        <p:spPr>
+          <a:xfrm>
+            <a:off x="594360" y="6126480"/>
+            <a:ext cx="3383280" cy="274320"/>
+          </a:xfrm>
+          <a:prstGeom prst="rect">
+            <a:avLst/>
+          </a:prstGeom>
+          <a:noFill/>
+          <a:ln/>
+        </p:spPr>
+        <p:txBody>
+          <a:bodyPr wrap="square" rtlCol="0" anchor="ctr"/>
+          <a:lstStyle/>
+          <a:p>
+            <a:pPr indent="0" marL="0">
+              <a:buNone/>
+            </a:pPr>
+            <a:r>
+              <a:rPr lang="en-US" sz="900" dirty="0">
+                <a:solidFill>
+                  <a:srgbClr val="374151"/>
+                </a:solidFill>
+                <a:latin typeface="Calibri" pitchFamily="34" charset="0"/>
+                <a:ea typeface="Calibri" pitchFamily="34" charset="-122"/>
+                <a:cs typeface="Calibri" pitchFamily="34" charset="-120"/>
+              </a:rPr>
+              <a:t>350k seguidores · verificada</a:t>
+            </a:r>
+            <a:endParaRPr lang="en-US" sz="900" dirty="0"/>
+          </a:p>
+        </p:txBody>
+      </p:sp>
+      <p:sp>
+        <p:nvSpPr>
+          <p:cNvPr id="15" name="Shape 12"/>
+          <p:cNvSpPr/>
+          <p:nvPr/>
+        </p:nvSpPr>
+        <p:spPr>
+          <a:xfrm>
+            <a:off x="4389120" y="1691640"/>
+            <a:ext cx="3657600" cy="4846320"/>
+          </a:xfrm>
+          <a:prstGeom prst="rect">
+            <a:avLst>
+              <a:gd name="adj" fmla="val 3750"/>
             </a:avLst>
           </a:prstGeom>
           <a:solidFill>
@@ -10202,16 +11360,39 @@
           </a:ln>
         </p:spPr>
       </p:sp>
-      <p:sp>
-        <p:nvSpPr>
-          <p:cNvPr id="5" name="Text 3"/>
-          <p:cNvSpPr/>
-          <p:nvPr/>
-        </p:nvSpPr>
-        <p:spPr>
-          <a:xfrm>
-            <a:off x="914400" y="1188720"/>
-            <a:ext cx="4754880" cy="274320"/>
+      <p:pic>
+        <p:nvPicPr>
+          <p:cNvPr id="16" name="Image 1" descr="c:/Users/Desktop/Downloads/grupoaura/operacoes/apresentacoes/monica/foto-lucas.jpg">    </p:cNvPr>
+          <p:cNvPicPr>
+            <a:picLocks noChangeAspect="1"/>
+          </p:cNvPicPr>
+          <p:nvPr/>
+        </p:nvPicPr>
+        <p:blipFill>
+          <a:blip r:embed="rId2"/>
+          <a:srcRect l="0" r="0" t="0" b="0"/>
+          <a:stretch/>
+        </p:blipFill>
+        <p:spPr>
+          <a:xfrm>
+            <a:off x="4526280" y="1828800"/>
+            <a:ext cx="594360" cy="594360"/>
+          </a:xfrm>
+          <a:prstGeom prst="rect">
+            <a:avLst/>
+          </a:prstGeom>
+        </p:spPr>
+      </p:pic>
+      <p:sp>
+        <p:nvSpPr>
+          <p:cNvPr id="17" name="Text 13"/>
+          <p:cNvSpPr/>
+          <p:nvPr/>
+        </p:nvSpPr>
+        <p:spPr>
+          <a:xfrm>
+            <a:off x="5193792" y="1874520"/>
+            <a:ext cx="2743200" cy="274320"/>
           </a:xfrm>
           <a:prstGeom prst="rect">
             <a:avLst/>
@@ -10235,7 +11416,7 @@
                 <a:ea typeface="Calibri" pitchFamily="34" charset="-122"/>
                 <a:cs typeface="Calibri" pitchFamily="34" charset="-120"/>
               </a:rPr>
-              <a:t>@priscianepereira</a:t>
+              <a:t>@lucasramos1_</a:t>
             </a:r>
             <a:endParaRPr lang="en-US" sz="1000" dirty="0"/>
           </a:p>
@@ -10243,14 +11424,14 @@
       </p:sp>
       <p:sp>
         <p:nvSpPr>
-          <p:cNvPr id="6" name="Text 4"/>
-          <p:cNvSpPr/>
-          <p:nvPr/>
-        </p:nvSpPr>
-        <p:spPr>
-          <a:xfrm>
-            <a:off x="914400" y="1508760"/>
-            <a:ext cx="4754880" cy="365760"/>
+          <p:cNvPr id="18" name="Text 14"/>
+          <p:cNvSpPr/>
+          <p:nvPr/>
+        </p:nvSpPr>
+        <p:spPr>
+          <a:xfrm>
+            <a:off x="5193792" y="2167128"/>
+            <a:ext cx="2743200" cy="292608"/>
           </a:xfrm>
           <a:prstGeom prst="rect">
             <a:avLst/>
@@ -10266,7 +11447,7 @@
               <a:buNone/>
             </a:pPr>
             <a:r>
-              <a:rPr lang="en-US" sz="1800" b="1" dirty="0">
+              <a:rPr lang="en-US" sz="1400" b="1" dirty="0">
                 <a:solidFill>
                   <a:srgbClr val="FFFFFF"/>
                 </a:solidFill>
@@ -10274,22 +11455,22 @@
                 <a:ea typeface="Calibri" pitchFamily="34" charset="-122"/>
                 <a:cs typeface="Calibri" pitchFamily="34" charset="-120"/>
               </a:rPr>
-              <a:t>Prisciane Pereira</a:t>
-            </a:r>
-            <a:endParaRPr lang="en-US" sz="1800" dirty="0"/>
-          </a:p>
-        </p:txBody>
-      </p:sp>
-      <p:sp>
-        <p:nvSpPr>
-          <p:cNvPr id="7" name="Text 5"/>
-          <p:cNvSpPr/>
-          <p:nvPr/>
-        </p:nvSpPr>
-        <p:spPr>
-          <a:xfrm>
-            <a:off x="914400" y="1920240"/>
-            <a:ext cx="4754880" cy="731520"/>
+              <a:t>Lucas Ramos</a:t>
+            </a:r>
+            <a:endParaRPr lang="en-US" sz="1400" dirty="0"/>
+          </a:p>
+        </p:txBody>
+      </p:sp>
+      <p:sp>
+        <p:nvSpPr>
+          <p:cNvPr id="19" name="Text 15"/>
+          <p:cNvSpPr/>
+          <p:nvPr/>
+        </p:nvSpPr>
+        <p:spPr>
+          <a:xfrm>
+            <a:off x="4526280" y="2606040"/>
+            <a:ext cx="3383280" cy="640080"/>
           </a:xfrm>
           <a:prstGeom prst="rect">
             <a:avLst/>
@@ -10305,7 +11486,7 @@
               <a:buNone/>
             </a:pPr>
             <a:r>
-              <a:rPr lang="en-US" sz="4800" b="1" dirty="0">
+              <a:rPr lang="en-US" sz="3600" b="1" dirty="0">
                 <a:solidFill>
                   <a:srgbClr val="7C3AED"/>
                 </a:solidFill>
@@ -10313,22 +11494,22 @@
                 <a:ea typeface="Calibri" pitchFamily="34" charset="-122"/>
                 <a:cs typeface="Calibri" pitchFamily="34" charset="-120"/>
               </a:rPr>
-              <a:t>953k</a:t>
-            </a:r>
-            <a:endParaRPr lang="en-US" sz="4800" dirty="0"/>
-          </a:p>
-        </p:txBody>
-      </p:sp>
-      <p:sp>
-        <p:nvSpPr>
-          <p:cNvPr id="8" name="Text 6"/>
-          <p:cNvSpPr/>
-          <p:nvPr/>
-        </p:nvSpPr>
-        <p:spPr>
-          <a:xfrm>
-            <a:off x="914400" y="2651760"/>
-            <a:ext cx="4754880" cy="274320"/>
+              <a:t>8 dígitos</a:t>
+            </a:r>
+            <a:endParaRPr lang="en-US" sz="3600" dirty="0"/>
+          </a:p>
+        </p:txBody>
+      </p:sp>
+      <p:sp>
+        <p:nvSpPr>
+          <p:cNvPr id="20" name="Text 16"/>
+          <p:cNvSpPr/>
+          <p:nvPr/>
+        </p:nvSpPr>
+        <p:spPr>
+          <a:xfrm>
+            <a:off x="4526280" y="3227832"/>
+            <a:ext cx="3383280" cy="228600"/>
           </a:xfrm>
           <a:prstGeom prst="rect">
             <a:avLst/>
@@ -10344,7 +11525,7 @@
               <a:buNone/>
             </a:pPr>
             <a:r>
-              <a:rPr lang="en-US" sz="1100" dirty="0">
+              <a:rPr lang="en-US" sz="1000" dirty="0">
                 <a:solidFill>
                   <a:srgbClr val="9CA3AF"/>
                 </a:solidFill>
@@ -10352,21 +11533,21 @@
                 <a:ea typeface="Calibri" pitchFamily="34" charset="-122"/>
                 <a:cs typeface="Calibri" pitchFamily="34" charset="-120"/>
               </a:rPr>
-              <a:t>seguidores em escala</a:t>
-            </a:r>
-            <a:endParaRPr lang="en-US" sz="1100" dirty="0"/>
-          </a:p>
-        </p:txBody>
-      </p:sp>
-      <p:sp>
-        <p:nvSpPr>
-          <p:cNvPr id="9" name="Shape 7"/>
-          <p:cNvSpPr/>
-          <p:nvPr/>
-        </p:nvSpPr>
-        <p:spPr>
-          <a:xfrm>
-            <a:off x="914400" y="2971800"/>
+              <a:t>faturados como produtor</a:t>
+            </a:r>
+            <a:endParaRPr lang="en-US" sz="1000" dirty="0"/>
+          </a:p>
+        </p:txBody>
+      </p:sp>
+      <p:sp>
+        <p:nvSpPr>
+          <p:cNvPr id="21" name="Shape 17"/>
+          <p:cNvSpPr/>
+          <p:nvPr/>
+        </p:nvSpPr>
+        <p:spPr>
+          <a:xfrm>
+            <a:off x="4526280" y="3502152"/>
             <a:ext cx="457200" cy="27432"/>
           </a:xfrm>
           <a:prstGeom prst="rect">
@@ -10385,14 +11566,14 @@
       </p:sp>
       <p:sp>
         <p:nvSpPr>
-          <p:cNvPr id="10" name="Text 8"/>
-          <p:cNvSpPr/>
-          <p:nvPr/>
-        </p:nvSpPr>
-        <p:spPr>
-          <a:xfrm>
-            <a:off x="914400" y="3108960"/>
-            <a:ext cx="4754880" cy="2194560"/>
+          <p:cNvPr id="22" name="Text 18"/>
+          <p:cNvSpPr/>
+          <p:nvPr/>
+        </p:nvSpPr>
+        <p:spPr>
+          <a:xfrm>
+            <a:off x="4526280" y="3611880"/>
+            <a:ext cx="3383280" cy="2194560"/>
           </a:xfrm>
           <a:prstGeom prst="rect">
             <a:avLst/>
@@ -10411,7 +11592,7 @@
               <a:buNone/>
             </a:pPr>
             <a:r>
-              <a:rPr lang="en-US" sz="1400" dirty="0">
+              <a:rPr lang="en-US" sz="1200" dirty="0">
                 <a:solidFill>
                   <a:srgbClr val="9CA3AF"/>
                 </a:solidFill>
@@ -10419,9 +11600,9 @@
                 <a:ea typeface="Calibri" pitchFamily="34" charset="-122"/>
                 <a:cs typeface="Calibri" pitchFamily="34" charset="-120"/>
               </a:rPr>
-              <a:t>Ensina renda extra com Shopee.</a:t>
-            </a:r>
-            <a:endParaRPr lang="en-US" sz="1400" dirty="0"/>
+              <a:t>Sócio 50/50 dos maiores experts do Brasil.</a:t>
+            </a:r>
+            <a:endParaRPr lang="en-US" sz="1200" dirty="0"/>
           </a:p>
           <a:p>
             <a:pPr indent="0" marL="0">
@@ -10431,7 +11612,7 @@
               <a:buNone/>
             </a:pPr>
             <a:r>
-              <a:rPr lang="en-US" sz="1400" dirty="0">
+              <a:rPr lang="en-US" sz="1200" dirty="0">
                 <a:solidFill>
                   <a:srgbClr val="9CA3AF"/>
                 </a:solidFill>
@@ -10439,9 +11620,9 @@
                 <a:ea typeface="Calibri" pitchFamily="34" charset="-122"/>
                 <a:cs typeface="Calibri" pitchFamily="34" charset="-120"/>
               </a:rPr>
-              <a:t>Criou um funil de VSL que vende</a:t>
-            </a:r>
-            <a:endParaRPr lang="en-US" sz="1400" dirty="0"/>
+              <a:t>6 dígitos de lucro por dia no modelo perpétuo.</a:t>
+            </a:r>
+            <a:endParaRPr lang="en-US" sz="1200" dirty="0"/>
           </a:p>
           <a:p>
             <a:pPr indent="0" marL="0">
@@ -10451,7 +11632,7 @@
               <a:buNone/>
             </a:pPr>
             <a:r>
-              <a:rPr lang="en-US" sz="1400" dirty="0">
+              <a:rPr lang="en-US" sz="1200" dirty="0">
                 <a:solidFill>
                   <a:srgbClr val="9CA3AF"/>
                 </a:solidFill>
@@ -10459,9 +11640,9 @@
                 <a:ea typeface="Calibri" pitchFamily="34" charset="-122"/>
                 <a:cs typeface="Calibri" pitchFamily="34" charset="-120"/>
               </a:rPr>
-              <a:t>todos os dias, com tráfego pago.</a:t>
-            </a:r>
-            <a:endParaRPr lang="en-US" sz="1400" dirty="0"/>
+              <a:t>Não é expert — é o cara que opera os bastidores.</a:t>
+            </a:r>
+            <a:endParaRPr lang="en-US" sz="1200" dirty="0"/>
           </a:p>
           <a:p>
             <a:pPr indent="0" marL="0">
@@ -10471,7 +11652,7 @@
               <a:buNone/>
             </a:pPr>
             <a:r>
-              <a:rPr lang="en-US" sz="1400" dirty="0">
+              <a:rPr lang="en-US" sz="1200" dirty="0">
                 <a:solidFill>
                   <a:srgbClr val="9CA3AF"/>
                 </a:solidFill>
@@ -10479,22 +11660,22 @@
                 <a:ea typeface="Calibri" pitchFamily="34" charset="-122"/>
                 <a:cs typeface="Calibri" pitchFamily="34" charset="-120"/>
               </a:rPr>
-              <a:t>O mesmo sistema que seria aplicado aqui.</a:t>
-            </a:r>
-            <a:endParaRPr lang="en-US" sz="1400" dirty="0"/>
-          </a:p>
-        </p:txBody>
-      </p:sp>
-      <p:sp>
-        <p:nvSpPr>
-          <p:cNvPr id="11" name="Text 9"/>
-          <p:cNvSpPr/>
-          <p:nvPr/>
-        </p:nvSpPr>
-        <p:spPr>
-          <a:xfrm>
-            <a:off x="914400" y="5303520"/>
-            <a:ext cx="4754880" cy="274320"/>
+              <a:t>Exatamente o que eu faço.</a:t>
+            </a:r>
+            <a:endParaRPr lang="en-US" sz="1200" dirty="0"/>
+          </a:p>
+        </p:txBody>
+      </p:sp>
+      <p:sp>
+        <p:nvSpPr>
+          <p:cNvPr id="23" name="Text 19"/>
+          <p:cNvSpPr/>
+          <p:nvPr/>
+        </p:nvSpPr>
+        <p:spPr>
+          <a:xfrm>
+            <a:off x="4526280" y="6126480"/>
+            <a:ext cx="3383280" cy="274320"/>
           </a:xfrm>
           <a:prstGeom prst="rect">
             <a:avLst/>
@@ -10518,7 +11699,7 @@
                 <a:ea typeface="Calibri" pitchFamily="34" charset="-122"/>
                 <a:cs typeface="Calibri" pitchFamily="34" charset="-120"/>
               </a:rPr>
-              <a:t>953 mil seguidores · verificada</a:t>
+              <a:t>Produtor referência em DR com expert</a:t>
             </a:r>
             <a:endParaRPr lang="en-US" sz="900" dirty="0"/>
           </a:p>
@@ -10526,18 +11707,18 @@
       </p:sp>
       <p:sp>
         <p:nvSpPr>
-          <p:cNvPr id="12" name="Shape 10"/>
-          <p:cNvSpPr/>
-          <p:nvPr/>
-        </p:nvSpPr>
-        <p:spPr>
-          <a:xfrm>
-            <a:off x="6949440" y="1005840"/>
-            <a:ext cx="5120640" cy="4754880"/>
+          <p:cNvPr id="24" name="Shape 20"/>
+          <p:cNvSpPr/>
+          <p:nvPr/>
+        </p:nvSpPr>
+        <p:spPr>
+          <a:xfrm>
+            <a:off x="8321040" y="1691640"/>
+            <a:ext cx="3657600" cy="4846320"/>
           </a:xfrm>
           <a:prstGeom prst="rect">
             <a:avLst>
-              <a:gd name="adj" fmla="val 2885"/>
+              <a:gd name="adj" fmla="val 3750"/>
             </a:avLst>
           </a:prstGeom>
           <a:solidFill>
@@ -10551,16 +11732,39 @@
           </a:ln>
         </p:spPr>
       </p:sp>
-      <p:sp>
-        <p:nvSpPr>
-          <p:cNvPr id="13" name="Text 11"/>
-          <p:cNvSpPr/>
-          <p:nvPr/>
-        </p:nvSpPr>
-        <p:spPr>
-          <a:xfrm>
-            <a:off x="7132320" y="1188720"/>
-            <a:ext cx="4754880" cy="274320"/>
+      <p:pic>
+        <p:nvPicPr>
+          <p:cNvPr id="25" name="Image 2" descr="c:/Users/Desktop/Downloads/grupoaura/operacoes/apresentacoes/monica/foto-enzo.jpg">    </p:cNvPr>
+          <p:cNvPicPr>
+            <a:picLocks noChangeAspect="1"/>
+          </p:cNvPicPr>
+          <p:nvPr/>
+        </p:nvPicPr>
+        <p:blipFill>
+          <a:blip r:embed="rId3"/>
+          <a:srcRect l="0" r="0" t="0" b="0"/>
+          <a:stretch/>
+        </p:blipFill>
+        <p:spPr>
+          <a:xfrm>
+            <a:off x="8458200" y="1828800"/>
+            <a:ext cx="594360" cy="594360"/>
+          </a:xfrm>
+          <a:prstGeom prst="rect">
+            <a:avLst/>
+          </a:prstGeom>
+        </p:spPr>
+      </p:pic>
+      <p:sp>
+        <p:nvSpPr>
+          <p:cNvPr id="26" name="Text 21"/>
+          <p:cNvSpPr/>
+          <p:nvPr/>
+        </p:nvSpPr>
+        <p:spPr>
+          <a:xfrm>
+            <a:off x="9125712" y="1874520"/>
+            <a:ext cx="2743200" cy="274320"/>
           </a:xfrm>
           <a:prstGeom prst="rect">
             <a:avLst/>
@@ -10584,7 +11788,7 @@
                 <a:ea typeface="Calibri" pitchFamily="34" charset="-122"/>
                 <a:cs typeface="Calibri" pitchFamily="34" charset="-120"/>
               </a:rPr>
-              <a:t>@fealvessn</a:t>
+              <a:t>@enzoneto</a:t>
             </a:r>
             <a:endParaRPr lang="en-US" sz="1000" dirty="0"/>
           </a:p>
@@ -10592,14 +11796,14 @@
       </p:sp>
       <p:sp>
         <p:nvSpPr>
-          <p:cNvPr id="14" name="Text 12"/>
-          <p:cNvSpPr/>
-          <p:nvPr/>
-        </p:nvSpPr>
-        <p:spPr>
-          <a:xfrm>
-            <a:off x="7132320" y="1508760"/>
-            <a:ext cx="4754880" cy="365760"/>
+          <p:cNvPr id="27" name="Text 22"/>
+          <p:cNvSpPr/>
+          <p:nvPr/>
+        </p:nvSpPr>
+        <p:spPr>
+          <a:xfrm>
+            <a:off x="9125712" y="2167128"/>
+            <a:ext cx="2743200" cy="292608"/>
           </a:xfrm>
           <a:prstGeom prst="rect">
             <a:avLst/>
@@ -10615,7 +11819,7 @@
               <a:buNone/>
             </a:pPr>
             <a:r>
-              <a:rPr lang="en-US" sz="1800" b="1" dirty="0">
+              <a:rPr lang="en-US" sz="1400" b="1" dirty="0">
                 <a:solidFill>
                   <a:srgbClr val="FFFFFF"/>
                 </a:solidFill>
@@ -10623,22 +11827,22 @@
                 <a:ea typeface="Calibri" pitchFamily="34" charset="-122"/>
                 <a:cs typeface="Calibri" pitchFamily="34" charset="-120"/>
               </a:rPr>
-              <a:t>Felipe Alves</a:t>
-            </a:r>
-            <a:endParaRPr lang="en-US" sz="1800" dirty="0"/>
-          </a:p>
-        </p:txBody>
-      </p:sp>
-      <p:sp>
-        <p:nvSpPr>
-          <p:cNvPr id="15" name="Text 13"/>
-          <p:cNvSpPr/>
-          <p:nvPr/>
-        </p:nvSpPr>
-        <p:spPr>
-          <a:xfrm>
-            <a:off x="7132320" y="1920240"/>
-            <a:ext cx="4754880" cy="731520"/>
+              <a:t>Enzo Neto — Chef</a:t>
+            </a:r>
+            <a:endParaRPr lang="en-US" sz="1400" dirty="0"/>
+          </a:p>
+        </p:txBody>
+      </p:sp>
+      <p:sp>
+        <p:nvSpPr>
+          <p:cNvPr id="28" name="Text 23"/>
+          <p:cNvSpPr/>
+          <p:nvPr/>
+        </p:nvSpPr>
+        <p:spPr>
+          <a:xfrm>
+            <a:off x="8458200" y="2606040"/>
+            <a:ext cx="3383280" cy="640080"/>
           </a:xfrm>
           <a:prstGeom prst="rect">
             <a:avLst/>
@@ -10654,7 +11858,7 @@
               <a:buNone/>
             </a:pPr>
             <a:r>
-              <a:rPr lang="en-US" sz="4800" b="1" dirty="0">
+              <a:rPr lang="en-US" sz="3600" b="1" dirty="0">
                 <a:solidFill>
                   <a:srgbClr val="7C3AED"/>
                 </a:solidFill>
@@ -10662,22 +11866,22 @@
                 <a:ea typeface="Calibri" pitchFamily="34" charset="-122"/>
                 <a:cs typeface="Calibri" pitchFamily="34" charset="-120"/>
               </a:rPr>
-              <a:t>6,9M</a:t>
-            </a:r>
-            <a:endParaRPr lang="en-US" sz="4800" dirty="0"/>
-          </a:p>
-        </p:txBody>
-      </p:sp>
-      <p:sp>
-        <p:nvSpPr>
-          <p:cNvPr id="16" name="Text 14"/>
-          <p:cNvSpPr/>
-          <p:nvPr/>
-        </p:nvSpPr>
-        <p:spPr>
-          <a:xfrm>
-            <a:off x="7132320" y="2651760"/>
-            <a:ext cx="4754880" cy="274320"/>
+              <a:t>1,1M</a:t>
+            </a:r>
+            <a:endParaRPr lang="en-US" sz="3600" dirty="0"/>
+          </a:p>
+        </p:txBody>
+      </p:sp>
+      <p:sp>
+        <p:nvSpPr>
+          <p:cNvPr id="29" name="Text 24"/>
+          <p:cNvSpPr/>
+          <p:nvPr/>
+        </p:nvSpPr>
+        <p:spPr>
+          <a:xfrm>
+            <a:off x="8458200" y="3227832"/>
+            <a:ext cx="3383280" cy="228600"/>
           </a:xfrm>
           <a:prstGeom prst="rect">
             <a:avLst/>
@@ -10693,7 +11897,7 @@
               <a:buNone/>
             </a:pPr>
             <a:r>
-              <a:rPr lang="en-US" sz="1100" dirty="0">
+              <a:rPr lang="en-US" sz="1000" dirty="0">
                 <a:solidFill>
                   <a:srgbClr val="9CA3AF"/>
                 </a:solidFill>
@@ -10701,21 +11905,21 @@
                 <a:ea typeface="Calibri" pitchFamily="34" charset="-122"/>
                 <a:cs typeface="Calibri" pitchFamily="34" charset="-120"/>
               </a:rPr>
-              <a:t>seguidores · multiple produtos</a:t>
-            </a:r>
-            <a:endParaRPr lang="en-US" sz="1100" dirty="0"/>
-          </a:p>
-        </p:txBody>
-      </p:sp>
-      <p:sp>
-        <p:nvSpPr>
-          <p:cNvPr id="17" name="Shape 15"/>
-          <p:cNvSpPr/>
-          <p:nvPr/>
-        </p:nvSpPr>
-        <p:spPr>
-          <a:xfrm>
-            <a:off x="7132320" y="2971800"/>
+              <a:t>seguidores · funil ativo</a:t>
+            </a:r>
+            <a:endParaRPr lang="en-US" sz="1000" dirty="0"/>
+          </a:p>
+        </p:txBody>
+      </p:sp>
+      <p:sp>
+        <p:nvSpPr>
+          <p:cNvPr id="30" name="Shape 25"/>
+          <p:cNvSpPr/>
+          <p:nvPr/>
+        </p:nvSpPr>
+        <p:spPr>
+          <a:xfrm>
+            <a:off x="8458200" y="3502152"/>
             <a:ext cx="457200" cy="27432"/>
           </a:xfrm>
           <a:prstGeom prst="rect">
@@ -10734,14 +11938,14 @@
       </p:sp>
       <p:sp>
         <p:nvSpPr>
-          <p:cNvPr id="18" name="Text 16"/>
-          <p:cNvSpPr/>
-          <p:nvPr/>
-        </p:nvSpPr>
-        <p:spPr>
-          <a:xfrm>
-            <a:off x="7132320" y="3108960"/>
-            <a:ext cx="4754880" cy="2194560"/>
+          <p:cNvPr id="31" name="Text 26"/>
+          <p:cNvSpPr/>
+          <p:nvPr/>
+        </p:nvSpPr>
+        <p:spPr>
+          <a:xfrm>
+            <a:off x="8458200" y="3611880"/>
+            <a:ext cx="3383280" cy="2194560"/>
           </a:xfrm>
           <a:prstGeom prst="rect">
             <a:avLst/>
@@ -10760,7 +11964,7 @@
               <a:buNone/>
             </a:pPr>
             <a:r>
-              <a:rPr lang="en-US" sz="1400" dirty="0">
+              <a:rPr lang="en-US" sz="1200" dirty="0">
                 <a:solidFill>
                   <a:srgbClr val="9CA3AF"/>
                 </a:solidFill>
@@ -10768,9 +11972,9 @@
                 <a:ea typeface="Calibri" pitchFamily="34" charset="-122"/>
                 <a:cs typeface="Calibri" pitchFamily="34" charset="-120"/>
               </a:rPr>
-              <a:t>Desenvolvimento pessoal e autoconhecimento.</a:t>
-            </a:r>
-            <a:endParaRPr lang="en-US" sz="1400" dirty="0"/>
+              <a:t>Transformou conhecimento de cozinha no</a:t>
+            </a:r>
+            <a:endParaRPr lang="en-US" sz="1200" dirty="0"/>
           </a:p>
           <a:p>
             <a:pPr indent="0" marL="0">
@@ -10780,7 +11984,7 @@
               <a:buNone/>
             </a:pPr>
             <a:r>
-              <a:rPr lang="en-US" sz="1400" dirty="0">
+              <a:rPr lang="en-US" sz="1200" dirty="0">
                 <a:solidFill>
                   <a:srgbClr val="9CA3AF"/>
                 </a:solidFill>
@@ -10788,9 +11992,9 @@
                 <a:ea typeface="Calibri" pitchFamily="34" charset="-122"/>
                 <a:cs typeface="Calibri" pitchFamily="34" charset="-120"/>
               </a:rPr>
-              <a:t>Nicho muito próximo ao seu.</a:t>
-            </a:r>
-            <a:endParaRPr lang="en-US" sz="1400" dirty="0"/>
+              <a:t>curso mais escolhido do Brasil.</a:t>
+            </a:r>
+            <a:endParaRPr lang="en-US" sz="1200" dirty="0"/>
           </a:p>
           <a:p>
             <a:pPr indent="0" marL="0">
@@ -10800,7 +12004,7 @@
               <a:buNone/>
             </a:pPr>
             <a:r>
-              <a:rPr lang="en-US" sz="1400" dirty="0">
+              <a:rPr lang="en-US" sz="1200" dirty="0">
                 <a:solidFill>
                   <a:srgbClr val="9CA3AF"/>
                 </a:solidFill>
@@ -10808,9 +12012,9 @@
                 <a:ea typeface="Calibri" pitchFamily="34" charset="-122"/>
                 <a:cs typeface="Calibri" pitchFamily="34" charset="-120"/>
               </a:rPr>
-              <a:t>Autoridade construída com conteúdo —</a:t>
-            </a:r>
-            <a:endParaRPr lang="en-US" sz="1400" dirty="0"/>
+              <a:t>Nicho que parecia impossível de escalar.</a:t>
+            </a:r>
+            <a:endParaRPr lang="en-US" sz="1200" dirty="0"/>
           </a:p>
           <a:p>
             <a:pPr indent="0" marL="0">
@@ -10820,7 +12024,7 @@
               <a:buNone/>
             </a:pPr>
             <a:r>
-              <a:rPr lang="en-US" sz="1400" dirty="0">
+              <a:rPr lang="en-US" sz="1200" dirty="0">
                 <a:solidFill>
                   <a:srgbClr val="9CA3AF"/>
                 </a:solidFill>
@@ -10828,22 +12032,22 @@
                 <a:ea typeface="Calibri" pitchFamily="34" charset="-122"/>
                 <a:cs typeface="Calibri" pitchFamily="34" charset="-120"/>
               </a:rPr>
-              <a:t>funil estruturado multiplica o orgânico.</a:t>
-            </a:r>
-            <a:endParaRPr lang="en-US" sz="1400" dirty="0"/>
-          </a:p>
-        </p:txBody>
-      </p:sp>
-      <p:sp>
-        <p:nvSpPr>
-          <p:cNvPr id="19" name="Text 17"/>
-          <p:cNvSpPr/>
-          <p:nvPr/>
-        </p:nvSpPr>
-        <p:spPr>
-          <a:xfrm>
-            <a:off x="7132320" y="5303520"/>
-            <a:ext cx="4754880" cy="274320"/>
+              <a:t>Funciona quando a estrutura está certa.</a:t>
+            </a:r>
+            <a:endParaRPr lang="en-US" sz="1200" dirty="0"/>
+          </a:p>
+        </p:txBody>
+      </p:sp>
+      <p:sp>
+        <p:nvSpPr>
+          <p:cNvPr id="32" name="Text 27"/>
+          <p:cNvSpPr/>
+          <p:nvPr/>
+        </p:nvSpPr>
+        <p:spPr>
+          <a:xfrm>
+            <a:off x="8458200" y="6126480"/>
+            <a:ext cx="3383280" cy="274320"/>
           </a:xfrm>
           <a:prstGeom prst="rect">
             <a:avLst/>
@@ -10867,48 +12071,9 @@
                 <a:ea typeface="Calibri" pitchFamily="34" charset="-122"/>
                 <a:cs typeface="Calibri" pitchFamily="34" charset="-120"/>
               </a:rPr>
-              <a:t>6,9 milhões de seguidores · verificado</a:t>
+              <a:t>1,1 milhão de seguidores · verificado</a:t>
             </a:r>
             <a:endParaRPr lang="en-US" sz="900" dirty="0"/>
-          </a:p>
-        </p:txBody>
-      </p:sp>
-      <p:sp>
-        <p:nvSpPr>
-          <p:cNvPr id="20" name="Text 18"/>
-          <p:cNvSpPr/>
-          <p:nvPr/>
-        </p:nvSpPr>
-        <p:spPr>
-          <a:xfrm>
-            <a:off x="914400" y="5943600"/>
-            <a:ext cx="10360152" cy="365760"/>
-          </a:xfrm>
-          <a:prstGeom prst="rect">
-            <a:avLst/>
-          </a:prstGeom>
-          <a:noFill/>
-          <a:ln/>
-        </p:spPr>
-        <p:txBody>
-          <a:bodyPr wrap="square" rtlCol="0" anchor="ctr"/>
-          <a:lstStyle/>
-          <a:p>
-            <a:pPr algn="ctr" indent="0" marL="0">
-              <a:buNone/>
-            </a:pPr>
-            <a:r>
-              <a:rPr lang="en-US" sz="1500" i="1" dirty="0">
-                <a:solidFill>
-                  <a:srgbClr val="9CA3AF"/>
-                </a:solidFill>
-                <a:latin typeface="Calibri" pitchFamily="34" charset="0"/>
-                <a:ea typeface="Calibri" pitchFamily="34" charset="-122"/>
-                <a:cs typeface="Calibri" pitchFamily="34" charset="-120"/>
-              </a:rPr>
-              <a:t>Todos começaram onde você está agora.</a:t>
-            </a:r>
-            <a:endParaRPr lang="en-US" sz="1500" dirty="0"/>
           </a:p>
         </p:txBody>
       </p:sp>
@@ -10964,99 +12129,103 @@
       </p:sp>
       <p:sp>
         <p:nvSpPr>
-          <p:cNvPr id="3" name="Shape 1"/>
-          <p:cNvSpPr/>
-          <p:nvPr/>
-        </p:nvSpPr>
-        <p:spPr>
-          <a:xfrm>
-            <a:off x="0" y="0"/>
-            <a:ext cx="5029200" cy="6858000"/>
-          </a:xfrm>
-          <a:prstGeom prst="rect">
-            <a:avLst/>
+          <p:cNvPr id="3" name="Text 1"/>
+          <p:cNvSpPr/>
+          <p:nvPr/>
+        </p:nvSpPr>
+        <p:spPr>
+          <a:xfrm>
+            <a:off x="914400" y="457200"/>
+            <a:ext cx="10360152" cy="274320"/>
+          </a:xfrm>
+          <a:prstGeom prst="rect">
+            <a:avLst/>
+          </a:prstGeom>
+          <a:noFill/>
+          <a:ln/>
+        </p:spPr>
+        <p:txBody>
+          <a:bodyPr wrap="square" rtlCol="0" anchor="ctr"/>
+          <a:lstStyle/>
+          <a:p>
+            <a:pPr algn="ctr" indent="0" marL="0">
+              <a:buNone/>
+            </a:pPr>
+            <a:r>
+              <a:rPr lang="en-US" sz="900" b="1" spc="300" kern="0" dirty="0">
+                <a:solidFill>
+                  <a:srgbClr val="7C3AED"/>
+                </a:solidFill>
+                <a:latin typeface="Calibri" pitchFamily="34" charset="0"/>
+                <a:ea typeface="Calibri" pitchFamily="34" charset="-122"/>
+                <a:cs typeface="Calibri" pitchFamily="34" charset="-120"/>
+              </a:rPr>
+              <a:t>O MODELO FUNCIONA EM QUALQUER NICHO</a:t>
+            </a:r>
+            <a:endParaRPr lang="en-US" sz="900" dirty="0"/>
+          </a:p>
+        </p:txBody>
+      </p:sp>
+      <p:sp>
+        <p:nvSpPr>
+          <p:cNvPr id="4" name="Shape 2"/>
+          <p:cNvSpPr/>
+          <p:nvPr/>
+        </p:nvSpPr>
+        <p:spPr>
+          <a:xfrm>
+            <a:off x="731520" y="1005840"/>
+            <a:ext cx="5120640" cy="4754880"/>
+          </a:xfrm>
+          <a:prstGeom prst="rect">
+            <a:avLst>
+              <a:gd name="adj" fmla="val 2885"/>
+            </a:avLst>
           </a:prstGeom>
           <a:solidFill>
             <a:srgbClr val="1A0A2E"/>
           </a:solidFill>
           <a:ln w="12700">
             <a:solidFill>
-              <a:srgbClr val="1A0A2E"/>
+              <a:srgbClr val="7C3AED"/>
             </a:solidFill>
             <a:prstDash val="solid"/>
           </a:ln>
         </p:spPr>
       </p:sp>
-      <p:sp>
-        <p:nvSpPr>
-          <p:cNvPr id="4" name="Text 2"/>
-          <p:cNvSpPr/>
-          <p:nvPr/>
-        </p:nvSpPr>
-        <p:spPr>
-          <a:xfrm>
-            <a:off x="0" y="2286000"/>
-            <a:ext cx="5029200" cy="1828800"/>
-          </a:xfrm>
-          <a:prstGeom prst="rect">
-            <a:avLst/>
-          </a:prstGeom>
-          <a:noFill/>
-          <a:ln/>
-        </p:spPr>
-        <p:txBody>
-          <a:bodyPr wrap="square" rtlCol="0" anchor="ctr"/>
-          <a:lstStyle/>
-          <a:p>
-            <a:pPr algn="ctr" indent="0" marL="0">
-              <a:buNone/>
-            </a:pPr>
-            <a:r>
-              <a:rPr lang="en-US" sz="1600" dirty="0">
-                <a:solidFill>
-                  <a:srgbClr val="7C3AED">
-                    <a:alpha val="50000"/>
-                  </a:srgbClr>
-                </a:solidFill>
-                <a:latin typeface="Calibri" pitchFamily="34" charset="0"/>
-                <a:ea typeface="Calibri" pitchFamily="34" charset="-122"/>
-                <a:cs typeface="Calibri" pitchFamily="34" charset="-120"/>
-              </a:rPr>
-              <a:t>[ Foto do palco</a:t>
-            </a:r>
-            <a:endParaRPr lang="en-US" sz="1600" dirty="0"/>
-          </a:p>
-          <a:p>
-            <a:pPr algn="ctr" indent="0" marL="0">
-              <a:buNone/>
-            </a:pPr>
-            <a:r>
-              <a:rPr lang="en-US" sz="1600" dirty="0">
-                <a:solidFill>
-                  <a:srgbClr val="7C3AED">
-                    <a:alpha val="50000"/>
-                  </a:srgbClr>
-                </a:solidFill>
-                <a:latin typeface="Calibri" pitchFamily="34" charset="0"/>
-                <a:ea typeface="Calibri" pitchFamily="34" charset="-122"/>
-                <a:cs typeface="Calibri" pitchFamily="34" charset="-120"/>
-              </a:rPr>
-              <a:t>Ouro Digital ]</a:t>
-            </a:r>
-            <a:endParaRPr lang="en-US" sz="1600" dirty="0"/>
-          </a:p>
-        </p:txBody>
-      </p:sp>
-      <p:sp>
-        <p:nvSpPr>
-          <p:cNvPr id="5" name="Text 3"/>
-          <p:cNvSpPr/>
-          <p:nvPr/>
-        </p:nvSpPr>
-        <p:spPr>
-          <a:xfrm>
-            <a:off x="274320" y="6400800"/>
-            <a:ext cx="4480560" cy="274320"/>
+      <p:pic>
+        <p:nvPicPr>
+          <p:cNvPr id="5" name="Image 0" descr="c:/Users/Desktop/Downloads/grupoaura/operacoes/apresentacoes/monica/foto-prisciane.jpg">    </p:cNvPr>
+          <p:cNvPicPr>
+            <a:picLocks noChangeAspect="1"/>
+          </p:cNvPicPr>
+          <p:nvPr/>
+        </p:nvPicPr>
+        <p:blipFill>
+          <a:blip r:embed="rId1"/>
+          <a:srcRect l="0" r="0" t="0" b="0"/>
+          <a:stretch/>
+        </p:blipFill>
+        <p:spPr>
+          <a:xfrm>
+            <a:off x="914400" y="1143000"/>
+            <a:ext cx="594360" cy="594360"/>
+          </a:xfrm>
+          <a:prstGeom prst="rect">
+            <a:avLst/>
+          </a:prstGeom>
+        </p:spPr>
+      </p:pic>
+      <p:sp>
+        <p:nvSpPr>
+          <p:cNvPr id="6" name="Text 3"/>
+          <p:cNvSpPr/>
+          <p:nvPr/>
+        </p:nvSpPr>
+        <p:spPr>
+          <a:xfrm>
+            <a:off x="1600200" y="1188720"/>
+            <a:ext cx="4114800" cy="274320"/>
           </a:xfrm>
           <a:prstGeom prst="rect">
             <a:avLst/>
@@ -11072,15 +12241,298 @@
               <a:buNone/>
             </a:pPr>
             <a:r>
+              <a:rPr lang="en-US" sz="1000" b="1" spc="100" kern="0" dirty="0">
+                <a:solidFill>
+                  <a:srgbClr val="7C3AED"/>
+                </a:solidFill>
+                <a:latin typeface="Calibri" pitchFamily="34" charset="0"/>
+                <a:ea typeface="Calibri" pitchFamily="34" charset="-122"/>
+                <a:cs typeface="Calibri" pitchFamily="34" charset="-120"/>
+              </a:rPr>
+              <a:t>@priscianepereira</a:t>
+            </a:r>
+            <a:endParaRPr lang="en-US" sz="1000" dirty="0"/>
+          </a:p>
+        </p:txBody>
+      </p:sp>
+      <p:sp>
+        <p:nvSpPr>
+          <p:cNvPr id="7" name="Text 4"/>
+          <p:cNvSpPr/>
+          <p:nvPr/>
+        </p:nvSpPr>
+        <p:spPr>
+          <a:xfrm>
+            <a:off x="1600200" y="1481328"/>
+            <a:ext cx="4114800" cy="347472"/>
+          </a:xfrm>
+          <a:prstGeom prst="rect">
+            <a:avLst/>
+          </a:prstGeom>
+          <a:noFill/>
+          <a:ln/>
+        </p:spPr>
+        <p:txBody>
+          <a:bodyPr wrap="square" rtlCol="0" anchor="ctr"/>
+          <a:lstStyle/>
+          <a:p>
+            <a:pPr indent="0" marL="0">
+              <a:buNone/>
+            </a:pPr>
+            <a:r>
+              <a:rPr lang="en-US" sz="1800" b="1" dirty="0">
+                <a:solidFill>
+                  <a:srgbClr val="FFFFFF"/>
+                </a:solidFill>
+                <a:latin typeface="Calibri" pitchFamily="34" charset="0"/>
+                <a:ea typeface="Calibri" pitchFamily="34" charset="-122"/>
+                <a:cs typeface="Calibri" pitchFamily="34" charset="-120"/>
+              </a:rPr>
+              <a:t>Prisciane Pereira</a:t>
+            </a:r>
+            <a:endParaRPr lang="en-US" sz="1800" dirty="0"/>
+          </a:p>
+        </p:txBody>
+      </p:sp>
+      <p:sp>
+        <p:nvSpPr>
+          <p:cNvPr id="8" name="Text 5"/>
+          <p:cNvSpPr/>
+          <p:nvPr/>
+        </p:nvSpPr>
+        <p:spPr>
+          <a:xfrm>
+            <a:off x="914400" y="1920240"/>
+            <a:ext cx="4754880" cy="731520"/>
+          </a:xfrm>
+          <a:prstGeom prst="rect">
+            <a:avLst/>
+          </a:prstGeom>
+          <a:noFill/>
+          <a:ln/>
+        </p:spPr>
+        <p:txBody>
+          <a:bodyPr wrap="square" rtlCol="0" anchor="ctr"/>
+          <a:lstStyle/>
+          <a:p>
+            <a:pPr indent="0" marL="0">
+              <a:buNone/>
+            </a:pPr>
+            <a:r>
+              <a:rPr lang="en-US" sz="4800" b="1" dirty="0">
+                <a:solidFill>
+                  <a:srgbClr val="7C3AED"/>
+                </a:solidFill>
+                <a:latin typeface="Calibri" pitchFamily="34" charset="0"/>
+                <a:ea typeface="Calibri" pitchFamily="34" charset="-122"/>
+                <a:cs typeface="Calibri" pitchFamily="34" charset="-120"/>
+              </a:rPr>
+              <a:t>953k</a:t>
+            </a:r>
+            <a:endParaRPr lang="en-US" sz="4800" dirty="0"/>
+          </a:p>
+        </p:txBody>
+      </p:sp>
+      <p:sp>
+        <p:nvSpPr>
+          <p:cNvPr id="9" name="Text 6"/>
+          <p:cNvSpPr/>
+          <p:nvPr/>
+        </p:nvSpPr>
+        <p:spPr>
+          <a:xfrm>
+            <a:off x="914400" y="2651760"/>
+            <a:ext cx="4754880" cy="274320"/>
+          </a:xfrm>
+          <a:prstGeom prst="rect">
+            <a:avLst/>
+          </a:prstGeom>
+          <a:noFill/>
+          <a:ln/>
+        </p:spPr>
+        <p:txBody>
+          <a:bodyPr wrap="square" rtlCol="0" anchor="ctr"/>
+          <a:lstStyle/>
+          <a:p>
+            <a:pPr indent="0" marL="0">
+              <a:buNone/>
+            </a:pPr>
+            <a:r>
+              <a:rPr lang="en-US" sz="1100" dirty="0">
+                <a:solidFill>
+                  <a:srgbClr val="9CA3AF"/>
+                </a:solidFill>
+                <a:latin typeface="Calibri" pitchFamily="34" charset="0"/>
+                <a:ea typeface="Calibri" pitchFamily="34" charset="-122"/>
+                <a:cs typeface="Calibri" pitchFamily="34" charset="-120"/>
+              </a:rPr>
+              <a:t>seguidores em escala</a:t>
+            </a:r>
+            <a:endParaRPr lang="en-US" sz="1100" dirty="0"/>
+          </a:p>
+        </p:txBody>
+      </p:sp>
+      <p:sp>
+        <p:nvSpPr>
+          <p:cNvPr id="10" name="Shape 7"/>
+          <p:cNvSpPr/>
+          <p:nvPr/>
+        </p:nvSpPr>
+        <p:spPr>
+          <a:xfrm>
+            <a:off x="914400" y="2971800"/>
+            <a:ext cx="457200" cy="27432"/>
+          </a:xfrm>
+          <a:prstGeom prst="rect">
+            <a:avLst/>
+          </a:prstGeom>
+          <a:solidFill>
+            <a:srgbClr val="7C3AED"/>
+          </a:solidFill>
+          <a:ln w="12700">
+            <a:solidFill>
+              <a:srgbClr val="7C3AED"/>
+            </a:solidFill>
+            <a:prstDash val="solid"/>
+          </a:ln>
+        </p:spPr>
+      </p:sp>
+      <p:sp>
+        <p:nvSpPr>
+          <p:cNvPr id="11" name="Text 8"/>
+          <p:cNvSpPr/>
+          <p:nvPr/>
+        </p:nvSpPr>
+        <p:spPr>
+          <a:xfrm>
+            <a:off x="914400" y="3108960"/>
+            <a:ext cx="4754880" cy="2194560"/>
+          </a:xfrm>
+          <a:prstGeom prst="rect">
+            <a:avLst/>
+          </a:prstGeom>
+          <a:noFill/>
+          <a:ln/>
+        </p:spPr>
+        <p:txBody>
+          <a:bodyPr wrap="square" rtlCol="0" anchor="ctr"/>
+          <a:lstStyle/>
+          <a:p>
+            <a:pPr indent="0" marL="0">
+              <a:lnSpc>
+                <a:spcPct val="155000"/>
+              </a:lnSpc>
+              <a:buNone/>
+            </a:pPr>
+            <a:r>
+              <a:rPr lang="en-US" sz="1400" dirty="0">
+                <a:solidFill>
+                  <a:srgbClr val="9CA3AF"/>
+                </a:solidFill>
+                <a:latin typeface="Calibri" pitchFamily="34" charset="0"/>
+                <a:ea typeface="Calibri" pitchFamily="34" charset="-122"/>
+                <a:cs typeface="Calibri" pitchFamily="34" charset="-120"/>
+              </a:rPr>
+              <a:t>Ensina renda extra com Shopee.</a:t>
+            </a:r>
+            <a:endParaRPr lang="en-US" sz="1400" dirty="0"/>
+          </a:p>
+          <a:p>
+            <a:pPr indent="0" marL="0">
+              <a:lnSpc>
+                <a:spcPct val="155000"/>
+              </a:lnSpc>
+              <a:buNone/>
+            </a:pPr>
+            <a:r>
+              <a:rPr lang="en-US" sz="1400" dirty="0">
+                <a:solidFill>
+                  <a:srgbClr val="9CA3AF"/>
+                </a:solidFill>
+                <a:latin typeface="Calibri" pitchFamily="34" charset="0"/>
+                <a:ea typeface="Calibri" pitchFamily="34" charset="-122"/>
+                <a:cs typeface="Calibri" pitchFamily="34" charset="-120"/>
+              </a:rPr>
+              <a:t>Criou um funil de VSL que vende</a:t>
+            </a:r>
+            <a:endParaRPr lang="en-US" sz="1400" dirty="0"/>
+          </a:p>
+          <a:p>
+            <a:pPr indent="0" marL="0">
+              <a:lnSpc>
+                <a:spcPct val="155000"/>
+              </a:lnSpc>
+              <a:buNone/>
+            </a:pPr>
+            <a:r>
+              <a:rPr lang="en-US" sz="1400" dirty="0">
+                <a:solidFill>
+                  <a:srgbClr val="9CA3AF"/>
+                </a:solidFill>
+                <a:latin typeface="Calibri" pitchFamily="34" charset="0"/>
+                <a:ea typeface="Calibri" pitchFamily="34" charset="-122"/>
+                <a:cs typeface="Calibri" pitchFamily="34" charset="-120"/>
+              </a:rPr>
+              <a:t>todos os dias, com tráfego pago.</a:t>
+            </a:r>
+            <a:endParaRPr lang="en-US" sz="1400" dirty="0"/>
+          </a:p>
+          <a:p>
+            <a:pPr indent="0" marL="0">
+              <a:lnSpc>
+                <a:spcPct val="155000"/>
+              </a:lnSpc>
+              <a:buNone/>
+            </a:pPr>
+            <a:r>
+              <a:rPr lang="en-US" sz="1400" dirty="0">
+                <a:solidFill>
+                  <a:srgbClr val="9CA3AF"/>
+                </a:solidFill>
+                <a:latin typeface="Calibri" pitchFamily="34" charset="0"/>
+                <a:ea typeface="Calibri" pitchFamily="34" charset="-122"/>
+                <a:cs typeface="Calibri" pitchFamily="34" charset="-120"/>
+              </a:rPr>
+              <a:t>O mesmo sistema que seria aplicado aqui.</a:t>
+            </a:r>
+            <a:endParaRPr lang="en-US" sz="1400" dirty="0"/>
+          </a:p>
+        </p:txBody>
+      </p:sp>
+      <p:sp>
+        <p:nvSpPr>
+          <p:cNvPr id="12" name="Text 9"/>
+          <p:cNvSpPr/>
+          <p:nvPr/>
+        </p:nvSpPr>
+        <p:spPr>
+          <a:xfrm>
+            <a:off x="914400" y="5303520"/>
+            <a:ext cx="4754880" cy="274320"/>
+          </a:xfrm>
+          <a:prstGeom prst="rect">
+            <a:avLst/>
+          </a:prstGeom>
+          <a:noFill/>
+          <a:ln/>
+        </p:spPr>
+        <p:txBody>
+          <a:bodyPr wrap="square" rtlCol="0" anchor="ctr"/>
+          <a:lstStyle/>
+          <a:p>
+            <a:pPr indent="0" marL="0">
+              <a:buNone/>
+            </a:pPr>
+            <a:r>
               <a:rPr lang="en-US" sz="900" dirty="0">
                 <a:solidFill>
-                  <a:srgbClr val="9CA3AF"/>
-                </a:solidFill>
-                <a:latin typeface="Calibri" pitchFamily="34" charset="0"/>
-                <a:ea typeface="Calibri" pitchFamily="34" charset="-122"/>
-                <a:cs typeface="Calibri" pitchFamily="34" charset="-120"/>
-              </a:rPr>
-              <a:t>OURO DIGITAL · DIRECTADS</a:t>
+                  <a:srgbClr val="374151"/>
+                </a:solidFill>
+                <a:latin typeface="Calibri" pitchFamily="34" charset="0"/>
+                <a:ea typeface="Calibri" pitchFamily="34" charset="-122"/>
+                <a:cs typeface="Calibri" pitchFamily="34" charset="-120"/>
+              </a:rPr>
+              <a:t>953 mil seguidores · verificada</a:t>
             </a:r>
             <a:endParaRPr lang="en-US" sz="900" dirty="0"/>
           </a:p>
@@ -11088,160 +12540,22 @@
       </p:sp>
       <p:sp>
         <p:nvSpPr>
-          <p:cNvPr id="6" name="Text 4"/>
-          <p:cNvSpPr/>
-          <p:nvPr/>
-        </p:nvSpPr>
-        <p:spPr>
-          <a:xfrm>
-            <a:off x="914400" y="502920"/>
-            <a:ext cx="10360152" cy="274320"/>
-          </a:xfrm>
-          <a:prstGeom prst="rect">
-            <a:avLst/>
-          </a:prstGeom>
-          <a:noFill/>
-          <a:ln/>
-        </p:spPr>
-        <p:txBody>
-          <a:bodyPr wrap="square" rtlCol="0" anchor="ctr"/>
-          <a:lstStyle/>
-          <a:p>
-            <a:pPr algn="l" indent="0" marL="0">
-              <a:buNone/>
-            </a:pPr>
-            <a:r>
-              <a:rPr lang="en-US" sz="900" b="1" spc="300" kern="0" dirty="0">
-                <a:solidFill>
-                  <a:srgbClr val="7C3AED"/>
-                </a:solidFill>
-                <a:latin typeface="Calibri" pitchFamily="34" charset="0"/>
-                <a:ea typeface="Calibri" pitchFamily="34" charset="-122"/>
-                <a:cs typeface="Calibri" pitchFamily="34" charset="-120"/>
-              </a:rPr>
-              <a:t>QUEM SOU EU</a:t>
-            </a:r>
-            <a:endParaRPr lang="en-US" sz="900" dirty="0"/>
-          </a:p>
-        </p:txBody>
-      </p:sp>
-      <p:sp>
-        <p:nvSpPr>
-          <p:cNvPr id="7" name="Text 5"/>
-          <p:cNvSpPr/>
-          <p:nvPr/>
-        </p:nvSpPr>
-        <p:spPr>
-          <a:xfrm>
-            <a:off x="5486400" y="777240"/>
-            <a:ext cx="6217920" cy="1463040"/>
-          </a:xfrm>
-          <a:prstGeom prst="rect">
-            <a:avLst/>
-          </a:prstGeom>
-          <a:noFill/>
-          <a:ln/>
-        </p:spPr>
-        <p:txBody>
-          <a:bodyPr wrap="square" rtlCol="0" anchor="ctr"/>
-          <a:lstStyle/>
-          <a:p>
-            <a:pPr indent="0" marL="0">
-              <a:lnSpc>
-                <a:spcPct val="105000"/>
-              </a:lnSpc>
-              <a:buNone/>
-            </a:pPr>
-            <a:r>
-              <a:rPr lang="en-US" sz="5200" b="1" dirty="0">
-                <a:solidFill>
-                  <a:srgbClr val="FFFFFF"/>
-                </a:solidFill>
-                <a:latin typeface="Calibri" pitchFamily="34" charset="0"/>
-                <a:ea typeface="Calibri" pitchFamily="34" charset="-122"/>
-                <a:cs typeface="Calibri" pitchFamily="34" charset="-120"/>
-              </a:rPr>
-              <a:t>Kauã</a:t>
-            </a:r>
-            <a:endParaRPr lang="en-US" sz="5200" dirty="0"/>
-          </a:p>
-          <a:p>
-            <a:pPr indent="0" marL="0">
-              <a:lnSpc>
-                <a:spcPct val="105000"/>
-              </a:lnSpc>
-              <a:buNone/>
-            </a:pPr>
-            <a:r>
-              <a:rPr lang="en-US" sz="5200" b="1" dirty="0">
-                <a:solidFill>
-                  <a:srgbClr val="FFFFFF"/>
-                </a:solidFill>
-                <a:latin typeface="Calibri" pitchFamily="34" charset="0"/>
-                <a:ea typeface="Calibri" pitchFamily="34" charset="-122"/>
-                <a:cs typeface="Calibri" pitchFamily="34" charset="-120"/>
-              </a:rPr>
-              <a:t>Rodriguez</a:t>
-            </a:r>
-            <a:endParaRPr lang="en-US" sz="5200" dirty="0"/>
-          </a:p>
-        </p:txBody>
-      </p:sp>
-      <p:sp>
-        <p:nvSpPr>
-          <p:cNvPr id="8" name="Text 6"/>
-          <p:cNvSpPr/>
-          <p:nvPr/>
-        </p:nvSpPr>
-        <p:spPr>
-          <a:xfrm>
-            <a:off x="5486400" y="2286000"/>
-            <a:ext cx="6217920" cy="365760"/>
-          </a:xfrm>
-          <a:prstGeom prst="rect">
-            <a:avLst/>
-          </a:prstGeom>
-          <a:noFill/>
-          <a:ln/>
-        </p:spPr>
-        <p:txBody>
-          <a:bodyPr wrap="square" rtlCol="0" anchor="ctr"/>
-          <a:lstStyle/>
-          <a:p>
-            <a:pPr indent="0" marL="0">
-              <a:buNone/>
-            </a:pPr>
-            <a:r>
-              <a:rPr lang="en-US" sz="1400" b="1" dirty="0">
-                <a:solidFill>
-                  <a:srgbClr val="7C3AED"/>
-                </a:solidFill>
-                <a:latin typeface="Calibri" pitchFamily="34" charset="0"/>
-                <a:ea typeface="Calibri" pitchFamily="34" charset="-122"/>
-                <a:cs typeface="Calibri" pitchFamily="34" charset="-120"/>
-              </a:rPr>
-              <a:t>Direct Response · Coprodução com Experts</a:t>
-            </a:r>
-            <a:endParaRPr lang="en-US" sz="1400" dirty="0"/>
-          </a:p>
-        </p:txBody>
-      </p:sp>
-      <p:sp>
-        <p:nvSpPr>
-          <p:cNvPr id="9" name="Shape 7"/>
-          <p:cNvSpPr/>
-          <p:nvPr/>
-        </p:nvSpPr>
-        <p:spPr>
-          <a:xfrm>
-            <a:off x="5486400" y="2743200"/>
-            <a:ext cx="5943600" cy="27432"/>
-          </a:xfrm>
-          <a:prstGeom prst="rect">
-            <a:avLst/>
+          <p:cNvPr id="13" name="Shape 10"/>
+          <p:cNvSpPr/>
+          <p:nvPr/>
+        </p:nvSpPr>
+        <p:spPr>
+          <a:xfrm>
+            <a:off x="6949440" y="1005840"/>
+            <a:ext cx="5120640" cy="4754880"/>
+          </a:xfrm>
+          <a:prstGeom prst="rect">
+            <a:avLst>
+              <a:gd name="adj" fmla="val 2885"/>
+            </a:avLst>
           </a:prstGeom>
           <a:solidFill>
-            <a:srgbClr val="1F1F1F"/>
+            <a:srgbClr val="111111"/>
           </a:solidFill>
           <a:ln w="12700">
             <a:solidFill>
@@ -11251,16 +12565,39 @@
           </a:ln>
         </p:spPr>
       </p:sp>
-      <p:sp>
-        <p:nvSpPr>
-          <p:cNvPr id="10" name="Text 8"/>
-          <p:cNvSpPr/>
-          <p:nvPr/>
-        </p:nvSpPr>
-        <p:spPr>
-          <a:xfrm>
-            <a:off x="5486400" y="2880360"/>
-            <a:ext cx="6217920" cy="685800"/>
+      <p:pic>
+        <p:nvPicPr>
+          <p:cNvPr id="14" name="Image 1" descr="c:/Users/Desktop/Downloads/grupoaura/operacoes/apresentacoes/monica/foto-fealves.jpg">    </p:cNvPr>
+          <p:cNvPicPr>
+            <a:picLocks noChangeAspect="1"/>
+          </p:cNvPicPr>
+          <p:nvPr/>
+        </p:nvPicPr>
+        <p:blipFill>
+          <a:blip r:embed="rId2"/>
+          <a:srcRect l="0" r="0" t="0" b="0"/>
+          <a:stretch/>
+        </p:blipFill>
+        <p:spPr>
+          <a:xfrm>
+            <a:off x="7132320" y="1143000"/>
+            <a:ext cx="594360" cy="594360"/>
+          </a:xfrm>
+          <a:prstGeom prst="rect">
+            <a:avLst/>
+          </a:prstGeom>
+        </p:spPr>
+      </p:pic>
+      <p:sp>
+        <p:nvSpPr>
+          <p:cNvPr id="15" name="Text 11"/>
+          <p:cNvSpPr/>
+          <p:nvPr/>
+        </p:nvSpPr>
+        <p:spPr>
+          <a:xfrm>
+            <a:off x="7818120" y="1188720"/>
+            <a:ext cx="4114800" cy="274320"/>
           </a:xfrm>
           <a:prstGeom prst="rect">
             <a:avLst/>
@@ -11273,13 +12610,10 @@
           <a:lstStyle/>
           <a:p>
             <a:pPr indent="0" marL="0">
-              <a:lnSpc>
-                <a:spcPct val="140000"/>
-              </a:lnSpc>
-              <a:buNone/>
-            </a:pPr>
-            <a:r>
-              <a:rPr lang="en-US" sz="1400" b="1" dirty="0">
+              <a:buNone/>
+            </a:pPr>
+            <a:r>
+              <a:rPr lang="en-US" sz="1000" b="1" spc="100" kern="0" dirty="0">
                 <a:solidFill>
                   <a:srgbClr val="7C3AED"/>
                 </a:solidFill>
@@ -11287,16 +12621,38 @@
                 <a:ea typeface="Calibri" pitchFamily="34" charset="-122"/>
                 <a:cs typeface="Calibri" pitchFamily="34" charset="-120"/>
               </a:rPr>
-              <a:t>→ </a:t>
-            </a:r>
+              <a:t>@fealvessn</a:t>
+            </a:r>
+            <a:endParaRPr lang="en-US" sz="1000" dirty="0"/>
+          </a:p>
+        </p:txBody>
+      </p:sp>
+      <p:sp>
+        <p:nvSpPr>
+          <p:cNvPr id="16" name="Text 12"/>
+          <p:cNvSpPr/>
+          <p:nvPr/>
+        </p:nvSpPr>
+        <p:spPr>
+          <a:xfrm>
+            <a:off x="7818120" y="1481328"/>
+            <a:ext cx="4114800" cy="347472"/>
+          </a:xfrm>
+          <a:prstGeom prst="rect">
+            <a:avLst/>
+          </a:prstGeom>
+          <a:noFill/>
+          <a:ln/>
+        </p:spPr>
+        <p:txBody>
+          <a:bodyPr wrap="square" rtlCol="0" anchor="ctr"/>
+          <a:lstStyle/>
+          <a:p>
             <a:pPr indent="0" marL="0">
-              <a:lnSpc>
-                <a:spcPct val="140000"/>
-              </a:lnSpc>
-              <a:buNone/>
-            </a:pPr>
-            <a:r>
-              <a:rPr lang="en-US" sz="1400" b="1" dirty="0">
+              <a:buNone/>
+            </a:pPr>
+            <a:r>
+              <a:rPr lang="en-US" sz="1800" b="1" dirty="0">
                 <a:solidFill>
                   <a:srgbClr val="FFFFFF"/>
                 </a:solidFill>
@@ -11304,16 +12660,77 @@
                 <a:ea typeface="Calibri" pitchFamily="34" charset="-122"/>
                 <a:cs typeface="Calibri" pitchFamily="34" charset="-120"/>
               </a:rPr>
-              <a:t>Não sou consultor que vende conselho.</a:t>
-            </a:r>
+              <a:t>Felipe Alves</a:t>
+            </a:r>
+            <a:endParaRPr lang="en-US" sz="1800" dirty="0"/>
+          </a:p>
+        </p:txBody>
+      </p:sp>
+      <p:sp>
+        <p:nvSpPr>
+          <p:cNvPr id="17" name="Text 13"/>
+          <p:cNvSpPr/>
+          <p:nvPr/>
+        </p:nvSpPr>
+        <p:spPr>
+          <a:xfrm>
+            <a:off x="7132320" y="1920240"/>
+            <a:ext cx="4754880" cy="731520"/>
+          </a:xfrm>
+          <a:prstGeom prst="rect">
+            <a:avLst/>
+          </a:prstGeom>
+          <a:noFill/>
+          <a:ln/>
+        </p:spPr>
+        <p:txBody>
+          <a:bodyPr wrap="square" rtlCol="0" anchor="ctr"/>
+          <a:lstStyle/>
+          <a:p>
             <a:pPr indent="0" marL="0">
-              <a:lnSpc>
-                <a:spcPct val="140000"/>
-              </a:lnSpc>
-              <a:buNone/>
-            </a:pPr>
-            <a:r>
-              <a:rPr lang="en-US" sz="1400" dirty="0">
+              <a:buNone/>
+            </a:pPr>
+            <a:r>
+              <a:rPr lang="en-US" sz="4800" b="1" dirty="0">
+                <a:solidFill>
+                  <a:srgbClr val="7C3AED"/>
+                </a:solidFill>
+                <a:latin typeface="Calibri" pitchFamily="34" charset="0"/>
+                <a:ea typeface="Calibri" pitchFamily="34" charset="-122"/>
+                <a:cs typeface="Calibri" pitchFamily="34" charset="-120"/>
+              </a:rPr>
+              <a:t>6,9M</a:t>
+            </a:r>
+            <a:endParaRPr lang="en-US" sz="4800" dirty="0"/>
+          </a:p>
+        </p:txBody>
+      </p:sp>
+      <p:sp>
+        <p:nvSpPr>
+          <p:cNvPr id="18" name="Text 14"/>
+          <p:cNvSpPr/>
+          <p:nvPr/>
+        </p:nvSpPr>
+        <p:spPr>
+          <a:xfrm>
+            <a:off x="7132320" y="2651760"/>
+            <a:ext cx="4754880" cy="274320"/>
+          </a:xfrm>
+          <a:prstGeom prst="rect">
+            <a:avLst/>
+          </a:prstGeom>
+          <a:noFill/>
+          <a:ln/>
+        </p:spPr>
+        <p:txBody>
+          <a:bodyPr wrap="square" rtlCol="0" anchor="ctr"/>
+          <a:lstStyle/>
+          <a:p>
+            <a:pPr indent="0" marL="0">
+              <a:buNone/>
+            </a:pPr>
+            <a:r>
+              <a:rPr lang="en-US" sz="1100" dirty="0">
                 <a:solidFill>
                   <a:srgbClr val="9CA3AF"/>
                 </a:solidFill>
@@ -11321,32 +12738,32 @@
                 <a:ea typeface="Calibri" pitchFamily="34" charset="-122"/>
                 <a:cs typeface="Calibri" pitchFamily="34" charset="-120"/>
               </a:rPr>
-              <a:t> Sou operador — executo, testo, escalo.</a:t>
-            </a:r>
-            <a:endParaRPr lang="en-US" sz="1400" dirty="0"/>
-          </a:p>
-        </p:txBody>
-      </p:sp>
-      <p:sp>
-        <p:nvSpPr>
-          <p:cNvPr id="11" name="Shape 9"/>
-          <p:cNvSpPr/>
-          <p:nvPr/>
-        </p:nvSpPr>
-        <p:spPr>
-          <a:xfrm>
-            <a:off x="5486400" y="3520440"/>
-            <a:ext cx="5943600" cy="18288"/>
+              <a:t>seguidores · múltiplos produtos</a:t>
+            </a:r>
+            <a:endParaRPr lang="en-US" sz="1100" dirty="0"/>
+          </a:p>
+        </p:txBody>
+      </p:sp>
+      <p:sp>
+        <p:nvSpPr>
+          <p:cNvPr id="19" name="Shape 15"/>
+          <p:cNvSpPr/>
+          <p:nvPr/>
+        </p:nvSpPr>
+        <p:spPr>
+          <a:xfrm>
+            <a:off x="7132320" y="2971800"/>
+            <a:ext cx="457200" cy="27432"/>
           </a:xfrm>
           <a:prstGeom prst="rect">
             <a:avLst/>
           </a:prstGeom>
           <a:solidFill>
-            <a:srgbClr val="1F1F1F"/>
+            <a:srgbClr val="7C3AED"/>
           </a:solidFill>
           <a:ln w="12700">
             <a:solidFill>
-              <a:srgbClr val="1F1F1F"/>
+              <a:srgbClr val="7C3AED"/>
             </a:solidFill>
             <a:prstDash val="solid"/>
           </a:ln>
@@ -11354,14 +12771,14 @@
       </p:sp>
       <p:sp>
         <p:nvSpPr>
-          <p:cNvPr id="12" name="Text 10"/>
-          <p:cNvSpPr/>
-          <p:nvPr/>
-        </p:nvSpPr>
-        <p:spPr>
-          <a:xfrm>
-            <a:off x="5486400" y="3685032"/>
-            <a:ext cx="6217920" cy="685800"/>
+          <p:cNvPr id="20" name="Text 16"/>
+          <p:cNvSpPr/>
+          <p:nvPr/>
+        </p:nvSpPr>
+        <p:spPr>
+          <a:xfrm>
+            <a:off x="7132320" y="3108960"/>
+            <a:ext cx="4754880" cy="2194560"/>
           </a:xfrm>
           <a:prstGeom prst="rect">
             <a:avLst/>
@@ -11375,41 +12792,47 @@
           <a:p>
             <a:pPr indent="0" marL="0">
               <a:lnSpc>
-                <a:spcPct val="140000"/>
-              </a:lnSpc>
-              <a:buNone/>
-            </a:pPr>
-            <a:r>
-              <a:rPr lang="en-US" sz="1400" b="1" dirty="0">
-                <a:solidFill>
-                  <a:srgbClr val="7C3AED"/>
-                </a:solidFill>
-                <a:latin typeface="Calibri" pitchFamily="34" charset="0"/>
-                <a:ea typeface="Calibri" pitchFamily="34" charset="-122"/>
-                <a:cs typeface="Calibri" pitchFamily="34" charset="-120"/>
-              </a:rPr>
-              <a:t>→ </a:t>
-            </a:r>
+                <a:spcPct val="155000"/>
+              </a:lnSpc>
+              <a:buNone/>
+            </a:pPr>
+            <a:r>
+              <a:rPr lang="en-US" sz="1400" dirty="0">
+                <a:solidFill>
+                  <a:srgbClr val="9CA3AF"/>
+                </a:solidFill>
+                <a:latin typeface="Calibri" pitchFamily="34" charset="0"/>
+                <a:ea typeface="Calibri" pitchFamily="34" charset="-122"/>
+                <a:cs typeface="Calibri" pitchFamily="34" charset="-120"/>
+              </a:rPr>
+              <a:t>Desenvolvimento pessoal e autoconhecimento.</a:t>
+            </a:r>
+            <a:endParaRPr lang="en-US" sz="1400" dirty="0"/>
+          </a:p>
+          <a:p>
             <a:pPr indent="0" marL="0">
               <a:lnSpc>
-                <a:spcPct val="140000"/>
-              </a:lnSpc>
-              <a:buNone/>
-            </a:pPr>
-            <a:r>
-              <a:rPr lang="en-US" sz="1400" b="1" dirty="0">
-                <a:solidFill>
-                  <a:srgbClr val="FFFFFF"/>
-                </a:solidFill>
-                <a:latin typeface="Calibri" pitchFamily="34" charset="0"/>
-                <a:ea typeface="Calibri" pitchFamily="34" charset="-122"/>
-                <a:cs typeface="Calibri" pitchFamily="34" charset="-120"/>
-              </a:rPr>
-              <a:t>Formado nas mentorias mais rigorosas</a:t>
-            </a:r>
+                <a:spcPct val="155000"/>
+              </a:lnSpc>
+              <a:buNone/>
+            </a:pPr>
+            <a:r>
+              <a:rPr lang="en-US" sz="1400" dirty="0">
+                <a:solidFill>
+                  <a:srgbClr val="9CA3AF"/>
+                </a:solidFill>
+                <a:latin typeface="Calibri" pitchFamily="34" charset="0"/>
+                <a:ea typeface="Calibri" pitchFamily="34" charset="-122"/>
+                <a:cs typeface="Calibri" pitchFamily="34" charset="-120"/>
+              </a:rPr>
+              <a:t>Nicho muito próximo ao seu.</a:t>
+            </a:r>
+            <a:endParaRPr lang="en-US" sz="1400" dirty="0"/>
+          </a:p>
+          <a:p>
             <a:pPr indent="0" marL="0">
               <a:lnSpc>
-                <a:spcPct val="140000"/>
+                <a:spcPct val="155000"/>
               </a:lnSpc>
               <a:buNone/>
             </a:pPr>
@@ -11422,100 +12845,97 @@
                 <a:ea typeface="Calibri" pitchFamily="34" charset="-122"/>
                 <a:cs typeface="Calibri" pitchFamily="34" charset="-120"/>
               </a:rPr>
-              <a:t> do mercado de performance do Brasil.</a:t>
+              <a:t>Autoridade construída com conteúdo —</a:t>
             </a:r>
             <a:endParaRPr lang="en-US" sz="1400" dirty="0"/>
           </a:p>
-        </p:txBody>
-      </p:sp>
-      <p:sp>
-        <p:nvSpPr>
-          <p:cNvPr id="13" name="Shape 11"/>
-          <p:cNvSpPr/>
-          <p:nvPr/>
-        </p:nvSpPr>
-        <p:spPr>
-          <a:xfrm>
-            <a:off x="5486400" y="4325112"/>
-            <a:ext cx="5943600" cy="18288"/>
-          </a:xfrm>
-          <a:prstGeom prst="rect">
-            <a:avLst/>
-          </a:prstGeom>
-          <a:solidFill>
-            <a:srgbClr val="1F1F1F"/>
-          </a:solidFill>
-          <a:ln w="12700">
-            <a:solidFill>
-              <a:srgbClr val="1F1F1F"/>
-            </a:solidFill>
-            <a:prstDash val="solid"/>
-          </a:ln>
-        </p:spPr>
-      </p:sp>
-      <p:sp>
-        <p:nvSpPr>
-          <p:cNvPr id="14" name="Text 12"/>
-          <p:cNvSpPr/>
-          <p:nvPr/>
-        </p:nvSpPr>
-        <p:spPr>
-          <a:xfrm>
-            <a:off x="5486400" y="4489704"/>
-            <a:ext cx="6217920" cy="685800"/>
-          </a:xfrm>
-          <a:prstGeom prst="rect">
-            <a:avLst/>
-          </a:prstGeom>
-          <a:noFill/>
-          <a:ln/>
-        </p:spPr>
-        <p:txBody>
-          <a:bodyPr wrap="square" rtlCol="0" anchor="ctr"/>
-          <a:lstStyle/>
           <a:p>
             <a:pPr indent="0" marL="0">
               <a:lnSpc>
-                <a:spcPct val="140000"/>
-              </a:lnSpc>
-              <a:buNone/>
-            </a:pPr>
-            <a:r>
-              <a:rPr lang="en-US" sz="1400" b="1" dirty="0">
-                <a:solidFill>
-                  <a:srgbClr val="7C3AED"/>
-                </a:solidFill>
-                <a:latin typeface="Calibri" pitchFamily="34" charset="0"/>
-                <a:ea typeface="Calibri" pitchFamily="34" charset="-122"/>
-                <a:cs typeface="Calibri" pitchFamily="34" charset="-120"/>
-              </a:rPr>
-              <a:t>→ </a:t>
-            </a:r>
+                <a:spcPct val="155000"/>
+              </a:lnSpc>
+              <a:buNone/>
+            </a:pPr>
+            <a:r>
+              <a:rPr lang="en-US" sz="1400" dirty="0">
+                <a:solidFill>
+                  <a:srgbClr val="9CA3AF"/>
+                </a:solidFill>
+                <a:latin typeface="Calibri" pitchFamily="34" charset="0"/>
+                <a:ea typeface="Calibri" pitchFamily="34" charset="-122"/>
+                <a:cs typeface="Calibri" pitchFamily="34" charset="-120"/>
+              </a:rPr>
+              <a:t>funil estruturado multiplica o orgânico.</a:t>
+            </a:r>
+            <a:endParaRPr lang="en-US" sz="1400" dirty="0"/>
+          </a:p>
+        </p:txBody>
+      </p:sp>
+      <p:sp>
+        <p:nvSpPr>
+          <p:cNvPr id="21" name="Text 17"/>
+          <p:cNvSpPr/>
+          <p:nvPr/>
+        </p:nvSpPr>
+        <p:spPr>
+          <a:xfrm>
+            <a:off x="7132320" y="5303520"/>
+            <a:ext cx="4754880" cy="274320"/>
+          </a:xfrm>
+          <a:prstGeom prst="rect">
+            <a:avLst/>
+          </a:prstGeom>
+          <a:noFill/>
+          <a:ln/>
+        </p:spPr>
+        <p:txBody>
+          <a:bodyPr wrap="square" rtlCol="0" anchor="ctr"/>
+          <a:lstStyle/>
+          <a:p>
             <a:pPr indent="0" marL="0">
-              <a:lnSpc>
-                <a:spcPct val="140000"/>
-              </a:lnSpc>
-              <a:buNone/>
-            </a:pPr>
-            <a:r>
-              <a:rPr lang="en-US" sz="1400" b="1" dirty="0">
-                <a:solidFill>
-                  <a:srgbClr val="FFFFFF"/>
-                </a:solidFill>
-                <a:latin typeface="Calibri" pitchFamily="34" charset="0"/>
-                <a:ea typeface="Calibri" pitchFamily="34" charset="-122"/>
-                <a:cs typeface="Calibri" pitchFamily="34" charset="-120"/>
-              </a:rPr>
-              <a:t>Cada coprodução que assino, eu opero.</a:t>
-            </a:r>
-            <a:pPr indent="0" marL="0">
-              <a:lnSpc>
-                <a:spcPct val="140000"/>
-              </a:lnSpc>
-              <a:buNone/>
-            </a:pPr>
-            <a:r>
-              <a:rPr lang="en-US" sz="1400" dirty="0">
+              <a:buNone/>
+            </a:pPr>
+            <a:r>
+              <a:rPr lang="en-US" sz="900" dirty="0">
+                <a:solidFill>
+                  <a:srgbClr val="374151"/>
+                </a:solidFill>
+                <a:latin typeface="Calibri" pitchFamily="34" charset="0"/>
+                <a:ea typeface="Calibri" pitchFamily="34" charset="-122"/>
+                <a:cs typeface="Calibri" pitchFamily="34" charset="-120"/>
+              </a:rPr>
+              <a:t>6,9 milhões de seguidores · verificado</a:t>
+            </a:r>
+            <a:endParaRPr lang="en-US" sz="900" dirty="0"/>
+          </a:p>
+        </p:txBody>
+      </p:sp>
+      <p:sp>
+        <p:nvSpPr>
+          <p:cNvPr id="22" name="Text 18"/>
+          <p:cNvSpPr/>
+          <p:nvPr/>
+        </p:nvSpPr>
+        <p:spPr>
+          <a:xfrm>
+            <a:off x="914400" y="5943600"/>
+            <a:ext cx="10360152" cy="365760"/>
+          </a:xfrm>
+          <a:prstGeom prst="rect">
+            <a:avLst/>
+          </a:prstGeom>
+          <a:noFill/>
+          <a:ln/>
+        </p:spPr>
+        <p:txBody>
+          <a:bodyPr wrap="square" rtlCol="0" anchor="ctr"/>
+          <a:lstStyle/>
+          <a:p>
+            <a:pPr algn="ctr" indent="0" marL="0">
+              <a:buNone/>
+            </a:pPr>
+            <a:r>
+              <a:rPr lang="en-US" sz="1500" i="1" dirty="0">
                 <a:solidFill>
                   <a:srgbClr val="9CA3AF"/>
                 </a:solidFill>
@@ -11523,110 +12943,9 @@
                 <a:ea typeface="Calibri" pitchFamily="34" charset="-122"/>
                 <a:cs typeface="Calibri" pitchFamily="34" charset="-120"/>
               </a:rPr>
-              <a:t> Não terceirizo o que importa.</a:t>
-            </a:r>
-            <a:endParaRPr lang="en-US" sz="1400" dirty="0"/>
-          </a:p>
-        </p:txBody>
-      </p:sp>
-      <p:sp>
-        <p:nvSpPr>
-          <p:cNvPr id="15" name="Shape 13"/>
-          <p:cNvSpPr/>
-          <p:nvPr/>
-        </p:nvSpPr>
-        <p:spPr>
-          <a:xfrm>
-            <a:off x="5486400" y="5129784"/>
-            <a:ext cx="5943600" cy="18288"/>
-          </a:xfrm>
-          <a:prstGeom prst="rect">
-            <a:avLst/>
-          </a:prstGeom>
-          <a:solidFill>
-            <a:srgbClr val="1F1F1F"/>
-          </a:solidFill>
-          <a:ln w="12700">
-            <a:solidFill>
-              <a:srgbClr val="1F1F1F"/>
-            </a:solidFill>
-            <a:prstDash val="solid"/>
-          </a:ln>
-        </p:spPr>
-      </p:sp>
-      <p:sp>
-        <p:nvSpPr>
-          <p:cNvPr id="16" name="Text 14"/>
-          <p:cNvSpPr/>
-          <p:nvPr/>
-        </p:nvSpPr>
-        <p:spPr>
-          <a:xfrm>
-            <a:off x="5486400" y="5294376"/>
-            <a:ext cx="6217920" cy="685800"/>
-          </a:xfrm>
-          <a:prstGeom prst="rect">
-            <a:avLst/>
-          </a:prstGeom>
-          <a:noFill/>
-          <a:ln/>
-        </p:spPr>
-        <p:txBody>
-          <a:bodyPr wrap="square" rtlCol="0" anchor="ctr"/>
-          <a:lstStyle/>
-          <a:p>
-            <a:pPr indent="0" marL="0">
-              <a:lnSpc>
-                <a:spcPct val="140000"/>
-              </a:lnSpc>
-              <a:buNone/>
-            </a:pPr>
-            <a:r>
-              <a:rPr lang="en-US" sz="1400" b="1" dirty="0">
-                <a:solidFill>
-                  <a:srgbClr val="7C3AED"/>
-                </a:solidFill>
-                <a:latin typeface="Calibri" pitchFamily="34" charset="0"/>
-                <a:ea typeface="Calibri" pitchFamily="34" charset="-122"/>
-                <a:cs typeface="Calibri" pitchFamily="34" charset="-120"/>
-              </a:rPr>
-              <a:t>→ </a:t>
-            </a:r>
-            <a:pPr indent="0" marL="0">
-              <a:lnSpc>
-                <a:spcPct val="140000"/>
-              </a:lnSpc>
-              <a:buNone/>
-            </a:pPr>
-            <a:r>
-              <a:rPr lang="en-US" sz="1400" b="1" dirty="0">
-                <a:solidFill>
-                  <a:srgbClr val="FFFFFF"/>
-                </a:solidFill>
-                <a:latin typeface="Calibri" pitchFamily="34" charset="0"/>
-                <a:ea typeface="Calibri" pitchFamily="34" charset="-122"/>
-                <a:cs typeface="Calibri" pitchFamily="34" charset="-120"/>
-              </a:rPr>
-              <a:t>Aprendi errando.</a:t>
-            </a:r>
-            <a:pPr indent="0" marL="0">
-              <a:lnSpc>
-                <a:spcPct val="140000"/>
-              </a:lnSpc>
-              <a:buNone/>
-            </a:pPr>
-            <a:r>
-              <a:rPr lang="en-US" sz="1400" dirty="0">
-                <a:solidFill>
-                  <a:srgbClr val="9CA3AF"/>
-                </a:solidFill>
-                <a:latin typeface="Calibri" pitchFamily="34" charset="0"/>
-                <a:ea typeface="Calibri" pitchFamily="34" charset="-122"/>
-                <a:cs typeface="Calibri" pitchFamily="34" charset="-120"/>
-              </a:rPr>
-              <a:t> Carrego cicatrizes de teste, não teoria.</a:t>
-            </a:r>
-            <a:endParaRPr lang="en-US" sz="1400" dirty="0"/>
+              <a:t>Todos começaram onde você está agora.</a:t>
+            </a:r>
+            <a:endParaRPr lang="en-US" sz="1500" dirty="0"/>
           </a:p>
         </p:txBody>
       </p:sp>
@@ -11682,179 +13001,309 @@
       </p:sp>
       <p:sp>
         <p:nvSpPr>
-          <p:cNvPr id="3" name="Text 1"/>
-          <p:cNvSpPr/>
-          <p:nvPr/>
-        </p:nvSpPr>
-        <p:spPr>
-          <a:xfrm>
-            <a:off x="914400" y="457200"/>
-            <a:ext cx="10360152" cy="274320"/>
-          </a:xfrm>
-          <a:prstGeom prst="rect">
-            <a:avLst/>
-          </a:prstGeom>
-          <a:noFill/>
-          <a:ln/>
-        </p:spPr>
-        <p:txBody>
-          <a:bodyPr wrap="square" rtlCol="0" anchor="ctr"/>
-          <a:lstStyle/>
-          <a:p>
-            <a:pPr algn="ctr" indent="0" marL="0">
-              <a:buNone/>
-            </a:pPr>
-            <a:r>
-              <a:rPr lang="en-US" sz="900" b="1" spc="300" kern="0" dirty="0">
-                <a:solidFill>
-                  <a:srgbClr val="7C3AED"/>
-                </a:solidFill>
-                <a:latin typeface="Calibri" pitchFamily="34" charset="0"/>
-                <a:ea typeface="Calibri" pitchFamily="34" charset="-122"/>
-                <a:cs typeface="Calibri" pitchFamily="34" charset="-120"/>
-              </a:rPr>
-              <a:t>DE ONDE VIM</a:t>
-            </a:r>
-            <a:endParaRPr lang="en-US" sz="900" dirty="0"/>
-          </a:p>
-        </p:txBody>
-      </p:sp>
-      <p:sp>
-        <p:nvSpPr>
-          <p:cNvPr id="4" name="Text 2"/>
-          <p:cNvSpPr/>
-          <p:nvPr/>
-        </p:nvSpPr>
-        <p:spPr>
-          <a:xfrm>
-            <a:off x="914400" y="777240"/>
-            <a:ext cx="10360152" cy="1920240"/>
-          </a:xfrm>
-          <a:prstGeom prst="rect">
-            <a:avLst/>
-          </a:prstGeom>
-          <a:noFill/>
-          <a:ln/>
-        </p:spPr>
-        <p:txBody>
-          <a:bodyPr wrap="square" rtlCol="0" anchor="ctr"/>
-          <a:lstStyle/>
-          <a:p>
-            <a:pPr algn="ctr" indent="0" marL="0">
-              <a:lnSpc>
-                <a:spcPct val="110000"/>
-              </a:lnSpc>
-              <a:buNone/>
-            </a:pPr>
-            <a:r>
-              <a:rPr lang="en-US" sz="5200" b="1" dirty="0">
-                <a:solidFill>
-                  <a:srgbClr val="FFFFFF"/>
-                </a:solidFill>
-                <a:latin typeface="Calibri" pitchFamily="34" charset="0"/>
-                <a:ea typeface="Calibri" pitchFamily="34" charset="-122"/>
-                <a:cs typeface="Calibri" pitchFamily="34" charset="-120"/>
-              </a:rPr>
-              <a:t>Não tive mentor.</a:t>
-            </a:r>
-            <a:endParaRPr lang="en-US" sz="5200" dirty="0"/>
-          </a:p>
-          <a:p>
-            <a:pPr algn="ctr" indent="0" marL="0">
-              <a:lnSpc>
-                <a:spcPct val="110000"/>
-              </a:lnSpc>
-              <a:buNone/>
-            </a:pPr>
-            <a:r>
-              <a:rPr lang="en-US" sz="5200" b="1" dirty="0">
-                <a:solidFill>
-                  <a:srgbClr val="FFFFFF"/>
-                </a:solidFill>
-                <a:latin typeface="Calibri" pitchFamily="34" charset="0"/>
-                <a:ea typeface="Calibri" pitchFamily="34" charset="-122"/>
-                <a:cs typeface="Calibri" pitchFamily="34" charset="-120"/>
-              </a:rPr>
-              <a:t>Não tive capital.</a:t>
-            </a:r>
-            <a:endParaRPr lang="en-US" sz="5200" dirty="0"/>
-          </a:p>
-          <a:p>
-            <a:pPr algn="ctr" indent="0" marL="0">
-              <a:lnSpc>
-                <a:spcPct val="110000"/>
-              </a:lnSpc>
-              <a:buNone/>
-            </a:pPr>
-            <a:r>
-              <a:rPr lang="en-US" sz="5200" b="1" dirty="0">
-                <a:solidFill>
-                  <a:srgbClr val="FFFFFF"/>
-                </a:solidFill>
-                <a:latin typeface="Calibri" pitchFamily="34" charset="0"/>
-                <a:ea typeface="Calibri" pitchFamily="34" charset="-122"/>
-                <a:cs typeface="Calibri" pitchFamily="34" charset="-120"/>
-              </a:rPr>
-              <a:t>Tive obsessão.</a:t>
-            </a:r>
-            <a:endParaRPr lang="en-US" sz="5200" dirty="0"/>
-          </a:p>
-        </p:txBody>
-      </p:sp>
-      <p:sp>
-        <p:nvSpPr>
-          <p:cNvPr id="5" name="Shape 3"/>
-          <p:cNvSpPr/>
-          <p:nvPr/>
-        </p:nvSpPr>
-        <p:spPr>
-          <a:xfrm>
-            <a:off x="5728716" y="2834640"/>
-            <a:ext cx="731520" cy="36576"/>
+          <p:cNvPr id="3" name="Shape 1"/>
+          <p:cNvSpPr/>
+          <p:nvPr/>
+        </p:nvSpPr>
+        <p:spPr>
+          <a:xfrm>
+            <a:off x="0" y="0"/>
+            <a:ext cx="5029200" cy="6858000"/>
           </a:xfrm>
           <a:prstGeom prst="rect">
             <a:avLst/>
           </a:prstGeom>
           <a:solidFill>
-            <a:srgbClr val="7C3AED"/>
+            <a:srgbClr val="1A0A2E"/>
           </a:solidFill>
           <a:ln w="12700">
             <a:solidFill>
-              <a:srgbClr val="7C3AED"/>
+              <a:srgbClr val="1A0A2E"/>
             </a:solidFill>
             <a:prstDash val="solid"/>
           </a:ln>
         </p:spPr>
       </p:sp>
-      <p:sp>
-        <p:nvSpPr>
-          <p:cNvPr id="6" name="Text 4"/>
-          <p:cNvSpPr/>
-          <p:nvPr/>
-        </p:nvSpPr>
-        <p:spPr>
-          <a:xfrm>
-            <a:off x="1645920" y="3017520"/>
-            <a:ext cx="8897112" cy="2743200"/>
-          </a:xfrm>
-          <a:prstGeom prst="rect">
-            <a:avLst/>
-          </a:prstGeom>
-          <a:noFill/>
-          <a:ln/>
-        </p:spPr>
-        <p:txBody>
-          <a:bodyPr wrap="square" rtlCol="0" anchor="ctr"/>
-          <a:lstStyle/>
-          <a:p>
-            <a:pPr algn="ctr" indent="0" marL="0">
-              <a:lnSpc>
-                <a:spcPct val="170000"/>
-              </a:lnSpc>
-              <a:buNone/>
-            </a:pPr>
-            <a:r>
-              <a:rPr lang="en-US" sz="1700" dirty="0">
+      <p:pic>
+        <p:nvPicPr>
+          <p:cNvPr id="4" name="Image 0" descr="c:/Users/Desktop/Downloads/491211111_3466720810130264_3807635024903484999_n.jpg">    </p:cNvPr>
+          <p:cNvPicPr>
+            <a:picLocks noChangeAspect="1"/>
+          </p:cNvPicPr>
+          <p:nvPr/>
+        </p:nvPicPr>
+        <p:blipFill>
+          <a:blip r:embed="rId1"/>
+          <a:srcRect l="0" r="0" t="0" b="0"/>
+          <a:stretch/>
+        </p:blipFill>
+        <p:spPr>
+          <a:xfrm>
+            <a:off x="0" y="0"/>
+            <a:ext cx="5029200" cy="6858000"/>
+          </a:xfrm>
+          <a:prstGeom prst="rect">
+            <a:avLst/>
+          </a:prstGeom>
+        </p:spPr>
+      </p:pic>
+      <p:sp>
+        <p:nvSpPr>
+          <p:cNvPr id="5" name="Shape 2"/>
+          <p:cNvSpPr/>
+          <p:nvPr/>
+        </p:nvSpPr>
+        <p:spPr>
+          <a:xfrm>
+            <a:off x="0" y="0"/>
+            <a:ext cx="5029200" cy="6858000"/>
+          </a:xfrm>
+          <a:prstGeom prst="rect">
+            <a:avLst/>
+          </a:prstGeom>
+          <a:solidFill>
+            <a:srgbClr val="000000">
+              <a:alpha val="60000"/>
+            </a:srgbClr>
+          </a:solidFill>
+          <a:ln w="12700">
+            <a:solidFill>
+              <a:srgbClr val="000000">
+                <a:alpha val="0"/>
+              </a:srgbClr>
+            </a:solidFill>
+            <a:prstDash val="solid"/>
+          </a:ln>
+        </p:spPr>
+      </p:sp>
+      <p:sp>
+        <p:nvSpPr>
+          <p:cNvPr id="6" name="Text 3"/>
+          <p:cNvSpPr/>
+          <p:nvPr/>
+        </p:nvSpPr>
+        <p:spPr>
+          <a:xfrm>
+            <a:off x="914400" y="502920"/>
+            <a:ext cx="10360152" cy="274320"/>
+          </a:xfrm>
+          <a:prstGeom prst="rect">
+            <a:avLst/>
+          </a:prstGeom>
+          <a:noFill/>
+          <a:ln/>
+        </p:spPr>
+        <p:txBody>
+          <a:bodyPr wrap="square" rtlCol="0" anchor="ctr"/>
+          <a:lstStyle/>
+          <a:p>
+            <a:pPr algn="l" indent="0" marL="0">
+              <a:buNone/>
+            </a:pPr>
+            <a:r>
+              <a:rPr lang="en-US" sz="900" b="1" spc="300" kern="0" dirty="0">
+                <a:solidFill>
+                  <a:srgbClr val="7C3AED"/>
+                </a:solidFill>
+                <a:latin typeface="Calibri" pitchFamily="34" charset="0"/>
+                <a:ea typeface="Calibri" pitchFamily="34" charset="-122"/>
+                <a:cs typeface="Calibri" pitchFamily="34" charset="-120"/>
+              </a:rPr>
+              <a:t>QUEM SOU EU</a:t>
+            </a:r>
+            <a:endParaRPr lang="en-US" sz="900" dirty="0"/>
+          </a:p>
+        </p:txBody>
+      </p:sp>
+      <p:sp>
+        <p:nvSpPr>
+          <p:cNvPr id="7" name="Text 4"/>
+          <p:cNvSpPr/>
+          <p:nvPr/>
+        </p:nvSpPr>
+        <p:spPr>
+          <a:xfrm>
+            <a:off x="5486400" y="777240"/>
+            <a:ext cx="6217920" cy="1463040"/>
+          </a:xfrm>
+          <a:prstGeom prst="rect">
+            <a:avLst/>
+          </a:prstGeom>
+          <a:noFill/>
+          <a:ln/>
+        </p:spPr>
+        <p:txBody>
+          <a:bodyPr wrap="square" rtlCol="0" anchor="ctr"/>
+          <a:lstStyle/>
+          <a:p>
+            <a:pPr indent="0" marL="0">
+              <a:lnSpc>
+                <a:spcPct val="105000"/>
+              </a:lnSpc>
+              <a:buNone/>
+            </a:pPr>
+            <a:r>
+              <a:rPr lang="en-US" sz="5200" b="1" dirty="0">
+                <a:solidFill>
+                  <a:srgbClr val="FFFFFF"/>
+                </a:solidFill>
+                <a:latin typeface="Calibri" pitchFamily="34" charset="0"/>
+                <a:ea typeface="Calibri" pitchFamily="34" charset="-122"/>
+                <a:cs typeface="Calibri" pitchFamily="34" charset="-120"/>
+              </a:rPr>
+              <a:t>Kauã</a:t>
+            </a:r>
+            <a:endParaRPr lang="en-US" sz="5200" dirty="0"/>
+          </a:p>
+          <a:p>
+            <a:pPr indent="0" marL="0">
+              <a:lnSpc>
+                <a:spcPct val="105000"/>
+              </a:lnSpc>
+              <a:buNone/>
+            </a:pPr>
+            <a:r>
+              <a:rPr lang="en-US" sz="5200" b="1" dirty="0">
+                <a:solidFill>
+                  <a:srgbClr val="FFFFFF"/>
+                </a:solidFill>
+                <a:latin typeface="Calibri" pitchFamily="34" charset="0"/>
+                <a:ea typeface="Calibri" pitchFamily="34" charset="-122"/>
+                <a:cs typeface="Calibri" pitchFamily="34" charset="-120"/>
+              </a:rPr>
+              <a:t>Rodriguez</a:t>
+            </a:r>
+            <a:endParaRPr lang="en-US" sz="5200" dirty="0"/>
+          </a:p>
+        </p:txBody>
+      </p:sp>
+      <p:sp>
+        <p:nvSpPr>
+          <p:cNvPr id="8" name="Text 5"/>
+          <p:cNvSpPr/>
+          <p:nvPr/>
+        </p:nvSpPr>
+        <p:spPr>
+          <a:xfrm>
+            <a:off x="5486400" y="2286000"/>
+            <a:ext cx="6217920" cy="365760"/>
+          </a:xfrm>
+          <a:prstGeom prst="rect">
+            <a:avLst/>
+          </a:prstGeom>
+          <a:noFill/>
+          <a:ln/>
+        </p:spPr>
+        <p:txBody>
+          <a:bodyPr wrap="square" rtlCol="0" anchor="ctr"/>
+          <a:lstStyle/>
+          <a:p>
+            <a:pPr indent="0" marL="0">
+              <a:buNone/>
+            </a:pPr>
+            <a:r>
+              <a:rPr lang="en-US" sz="1400" b="1" dirty="0">
+                <a:solidFill>
+                  <a:srgbClr val="7C3AED"/>
+                </a:solidFill>
+                <a:latin typeface="Calibri" pitchFamily="34" charset="0"/>
+                <a:ea typeface="Calibri" pitchFamily="34" charset="-122"/>
+                <a:cs typeface="Calibri" pitchFamily="34" charset="-120"/>
+              </a:rPr>
+              <a:t>Direct Response · Coprodução com Experts</a:t>
+            </a:r>
+            <a:endParaRPr lang="en-US" sz="1400" dirty="0"/>
+          </a:p>
+        </p:txBody>
+      </p:sp>
+      <p:sp>
+        <p:nvSpPr>
+          <p:cNvPr id="9" name="Shape 6"/>
+          <p:cNvSpPr/>
+          <p:nvPr/>
+        </p:nvSpPr>
+        <p:spPr>
+          <a:xfrm>
+            <a:off x="5486400" y="2743200"/>
+            <a:ext cx="5943600" cy="27432"/>
+          </a:xfrm>
+          <a:prstGeom prst="rect">
+            <a:avLst/>
+          </a:prstGeom>
+          <a:solidFill>
+            <a:srgbClr val="1F1F1F"/>
+          </a:solidFill>
+          <a:ln w="12700">
+            <a:solidFill>
+              <a:srgbClr val="1F1F1F"/>
+            </a:solidFill>
+            <a:prstDash val="solid"/>
+          </a:ln>
+        </p:spPr>
+      </p:sp>
+      <p:sp>
+        <p:nvSpPr>
+          <p:cNvPr id="10" name="Text 7"/>
+          <p:cNvSpPr/>
+          <p:nvPr/>
+        </p:nvSpPr>
+        <p:spPr>
+          <a:xfrm>
+            <a:off x="5486400" y="2880360"/>
+            <a:ext cx="6217920" cy="685800"/>
+          </a:xfrm>
+          <a:prstGeom prst="rect">
+            <a:avLst/>
+          </a:prstGeom>
+          <a:noFill/>
+          <a:ln/>
+        </p:spPr>
+        <p:txBody>
+          <a:bodyPr wrap="square" rtlCol="0" anchor="ctr"/>
+          <a:lstStyle/>
+          <a:p>
+            <a:pPr indent="0" marL="0">
+              <a:lnSpc>
+                <a:spcPct val="140000"/>
+              </a:lnSpc>
+              <a:buNone/>
+            </a:pPr>
+            <a:r>
+              <a:rPr lang="en-US" sz="1400" b="1" dirty="0">
+                <a:solidFill>
+                  <a:srgbClr val="7C3AED"/>
+                </a:solidFill>
+                <a:latin typeface="Calibri" pitchFamily="34" charset="0"/>
+                <a:ea typeface="Calibri" pitchFamily="34" charset="-122"/>
+                <a:cs typeface="Calibri" pitchFamily="34" charset="-120"/>
+              </a:rPr>
+              <a:t>→ </a:t>
+            </a:r>
+            <a:pPr indent="0" marL="0">
+              <a:lnSpc>
+                <a:spcPct val="140000"/>
+              </a:lnSpc>
+              <a:buNone/>
+            </a:pPr>
+            <a:r>
+              <a:rPr lang="en-US" sz="1400" b="1" dirty="0">
+                <a:solidFill>
+                  <a:srgbClr val="FFFFFF"/>
+                </a:solidFill>
+                <a:latin typeface="Calibri" pitchFamily="34" charset="0"/>
+                <a:ea typeface="Calibri" pitchFamily="34" charset="-122"/>
+                <a:cs typeface="Calibri" pitchFamily="34" charset="-120"/>
+              </a:rPr>
+              <a:t>+7 dígitos faturados</a:t>
+            </a:r>
+            <a:pPr indent="0" marL="0">
+              <a:lnSpc>
+                <a:spcPct val="140000"/>
+              </a:lnSpc>
+              <a:buNone/>
+            </a:pPr>
+            <a:r>
+              <a:rPr lang="en-US" sz="1400" dirty="0">
                 <a:solidFill>
                   <a:srgbClr val="9CA3AF"/>
                 </a:solidFill>
@@ -11862,17 +13311,100 @@
                 <a:ea typeface="Calibri" pitchFamily="34" charset="-122"/>
                 <a:cs typeface="Calibri" pitchFamily="34" charset="-120"/>
               </a:rPr>
-              <a:t>Comecei estudando cada detalhe do mercado de performance quando a maioria
-</a:t>
-            </a:r>
-            <a:pPr algn="ctr" indent="0" marL="0">
-              <a:lnSpc>
-                <a:spcPct val="170000"/>
-              </a:lnSpc>
-              <a:buNone/>
-            </a:pPr>
-            <a:r>
-              <a:rPr lang="en-US" sz="1700" dirty="0">
+              <a:t> em coproduções com experts.</a:t>
+            </a:r>
+            <a:endParaRPr lang="en-US" sz="1400" dirty="0"/>
+          </a:p>
+        </p:txBody>
+      </p:sp>
+      <p:sp>
+        <p:nvSpPr>
+          <p:cNvPr id="11" name="Shape 8"/>
+          <p:cNvSpPr/>
+          <p:nvPr/>
+        </p:nvSpPr>
+        <p:spPr>
+          <a:xfrm>
+            <a:off x="5486400" y="3520440"/>
+            <a:ext cx="5943600" cy="18288"/>
+          </a:xfrm>
+          <a:prstGeom prst="rect">
+            <a:avLst/>
+          </a:prstGeom>
+          <a:solidFill>
+            <a:srgbClr val="1F1F1F"/>
+          </a:solidFill>
+          <a:ln w="12700">
+            <a:solidFill>
+              <a:srgbClr val="1F1F1F"/>
+            </a:solidFill>
+            <a:prstDash val="solid"/>
+          </a:ln>
+        </p:spPr>
+      </p:sp>
+      <p:sp>
+        <p:nvSpPr>
+          <p:cNvPr id="12" name="Text 9"/>
+          <p:cNvSpPr/>
+          <p:nvPr/>
+        </p:nvSpPr>
+        <p:spPr>
+          <a:xfrm>
+            <a:off x="5486400" y="3685032"/>
+            <a:ext cx="6217920" cy="685800"/>
+          </a:xfrm>
+          <a:prstGeom prst="rect">
+            <a:avLst/>
+          </a:prstGeom>
+          <a:noFill/>
+          <a:ln/>
+        </p:spPr>
+        <p:txBody>
+          <a:bodyPr wrap="square" rtlCol="0" anchor="ctr"/>
+          <a:lstStyle/>
+          <a:p>
+            <a:pPr indent="0" marL="0">
+              <a:lnSpc>
+                <a:spcPct val="140000"/>
+              </a:lnSpc>
+              <a:buNone/>
+            </a:pPr>
+            <a:r>
+              <a:rPr lang="en-US" sz="1400" b="1" dirty="0">
+                <a:solidFill>
+                  <a:srgbClr val="7C3AED"/>
+                </a:solidFill>
+                <a:latin typeface="Calibri" pitchFamily="34" charset="0"/>
+                <a:ea typeface="Calibri" pitchFamily="34" charset="-122"/>
+                <a:cs typeface="Calibri" pitchFamily="34" charset="-120"/>
+              </a:rPr>
+              <a:t>→ </a:t>
+            </a:r>
+            <a:pPr indent="0" marL="0">
+              <a:lnSpc>
+                <a:spcPct val="140000"/>
+              </a:lnSpc>
+              <a:buNone/>
+            </a:pPr>
+            <a:r>
+              <a:rPr lang="en-US" sz="1400" b="1" dirty="0">
+                <a:solidFill>
+                  <a:srgbClr val="FFFFFF"/>
+                </a:solidFill>
+                <a:latin typeface="Calibri" pitchFamily="34" charset="0"/>
+                <a:ea typeface="Calibri" pitchFamily="34" charset="-122"/>
+                <a:cs typeface="Calibri" pitchFamily="34" charset="-120"/>
+              </a:rPr>
+              <a:t>6 anos no digital.</a:t>
+            </a:r>
+            <a:pPr indent="0" marL="0">
+              <a:lnSpc>
+                <a:spcPct val="140000"/>
+              </a:lnSpc>
+              <a:buNone/>
+            </a:pPr>
+            <a:r>
+              <a:rPr lang="en-US" sz="1400" dirty="0">
                 <a:solidFill>
                   <a:srgbClr val="9CA3AF"/>
                 </a:solidFill>
@@ -11880,17 +13412,83 @@
                 <a:ea typeface="Calibri" pitchFamily="34" charset="-122"/>
                 <a:cs typeface="Calibri" pitchFamily="34" charset="-120"/>
               </a:rPr>
-              <a:t>ainda achava que resultado vinha de sorte.
-</a:t>
-            </a:r>
-            <a:pPr algn="ctr" indent="0" marL="0">
-              <a:lnSpc>
-                <a:spcPct val="170000"/>
-              </a:lnSpc>
-              <a:buNone/>
-            </a:pPr>
-            <a:r>
-              <a:rPr lang="en-US" sz="1700" b="1" dirty="0">
+              <a:t> Construindo antes de virar tendência.</a:t>
+            </a:r>
+            <a:endParaRPr lang="en-US" sz="1400" dirty="0"/>
+          </a:p>
+        </p:txBody>
+      </p:sp>
+      <p:sp>
+        <p:nvSpPr>
+          <p:cNvPr id="13" name="Shape 10"/>
+          <p:cNvSpPr/>
+          <p:nvPr/>
+        </p:nvSpPr>
+        <p:spPr>
+          <a:xfrm>
+            <a:off x="5486400" y="4325112"/>
+            <a:ext cx="5943600" cy="18288"/>
+          </a:xfrm>
+          <a:prstGeom prst="rect">
+            <a:avLst/>
+          </a:prstGeom>
+          <a:solidFill>
+            <a:srgbClr val="1F1F1F"/>
+          </a:solidFill>
+          <a:ln w="12700">
+            <a:solidFill>
+              <a:srgbClr val="1F1F1F"/>
+            </a:solidFill>
+            <a:prstDash val="solid"/>
+          </a:ln>
+        </p:spPr>
+      </p:sp>
+      <p:sp>
+        <p:nvSpPr>
+          <p:cNvPr id="14" name="Text 11"/>
+          <p:cNvSpPr/>
+          <p:nvPr/>
+        </p:nvSpPr>
+        <p:spPr>
+          <a:xfrm>
+            <a:off x="5486400" y="4489704"/>
+            <a:ext cx="6217920" cy="685800"/>
+          </a:xfrm>
+          <a:prstGeom prst="rect">
+            <a:avLst/>
+          </a:prstGeom>
+          <a:noFill/>
+          <a:ln/>
+        </p:spPr>
+        <p:txBody>
+          <a:bodyPr wrap="square" rtlCol="0" anchor="ctr"/>
+          <a:lstStyle/>
+          <a:p>
+            <a:pPr indent="0" marL="0">
+              <a:lnSpc>
+                <a:spcPct val="140000"/>
+              </a:lnSpc>
+              <a:buNone/>
+            </a:pPr>
+            <a:r>
+              <a:rPr lang="en-US" sz="1400" b="1" dirty="0">
+                <a:solidFill>
+                  <a:srgbClr val="7C3AED"/>
+                </a:solidFill>
+                <a:latin typeface="Calibri" pitchFamily="34" charset="0"/>
+                <a:ea typeface="Calibri" pitchFamily="34" charset="-122"/>
+                <a:cs typeface="Calibri" pitchFamily="34" charset="-120"/>
+              </a:rPr>
+              <a:t>→ </a:t>
+            </a:r>
+            <a:pPr indent="0" marL="0">
+              <a:lnSpc>
+                <a:spcPct val="140000"/>
+              </a:lnSpc>
+              <a:buNone/>
+            </a:pPr>
+            <a:r>
+              <a:rPr lang="en-US" sz="1400" b="1" dirty="0">
                 <a:solidFill>
                   <a:srgbClr val="FFFFFF"/>
                 </a:solidFill>
@@ -11898,17 +13496,16 @@
                 <a:ea typeface="Calibri" pitchFamily="34" charset="-122"/>
                 <a:cs typeface="Calibri" pitchFamily="34" charset="-120"/>
               </a:rPr>
-              <a:t>Errei rápido. Aprendi mais rápido ainda.
-</a:t>
-            </a:r>
-            <a:pPr algn="ctr" indent="0" marL="0">
-              <a:lnSpc>
-                <a:spcPct val="170000"/>
-              </a:lnSpc>
-              <a:buNone/>
-            </a:pPr>
-            <a:r>
-              <a:rPr lang="en-US" sz="1700" dirty="0">
+              <a:t>Escalei mais de 3 experts</a:t>
+            </a:r>
+            <a:pPr indent="0" marL="0">
+              <a:lnSpc>
+                <a:spcPct val="140000"/>
+              </a:lnSpc>
+              <a:buNone/>
+            </a:pPr>
+            <a:r>
+              <a:rPr lang="en-US" sz="1400" dirty="0">
                 <a:solidFill>
                   <a:srgbClr val="9CA3AF"/>
                 </a:solidFill>
@@ -11916,16 +13513,66 @@
                 <a:ea typeface="Calibri" pitchFamily="34" charset="-122"/>
                 <a:cs typeface="Calibri" pitchFamily="34" charset="-120"/>
               </a:rPr>
-              <a:t>Hoje não carrego teoria — carrego </a:t>
-            </a:r>
-            <a:pPr algn="ctr" indent="0" marL="0">
-              <a:lnSpc>
-                <a:spcPct val="170000"/>
-              </a:lnSpc>
-              <a:buNone/>
-            </a:pPr>
-            <a:r>
-              <a:rPr lang="en-US" sz="1700" b="1" dirty="0">
+              <a:t> a múltiplos 6 dígitos por mês.</a:t>
+            </a:r>
+            <a:endParaRPr lang="en-US" sz="1400" dirty="0"/>
+          </a:p>
+        </p:txBody>
+      </p:sp>
+      <p:sp>
+        <p:nvSpPr>
+          <p:cNvPr id="15" name="Shape 12"/>
+          <p:cNvSpPr/>
+          <p:nvPr/>
+        </p:nvSpPr>
+        <p:spPr>
+          <a:xfrm>
+            <a:off x="5486400" y="5129784"/>
+            <a:ext cx="5943600" cy="18288"/>
+          </a:xfrm>
+          <a:prstGeom prst="rect">
+            <a:avLst/>
+          </a:prstGeom>
+          <a:solidFill>
+            <a:srgbClr val="1F1F1F"/>
+          </a:solidFill>
+          <a:ln w="12700">
+            <a:solidFill>
+              <a:srgbClr val="1F1F1F"/>
+            </a:solidFill>
+            <a:prstDash val="solid"/>
+          </a:ln>
+        </p:spPr>
+      </p:sp>
+      <p:sp>
+        <p:nvSpPr>
+          <p:cNvPr id="16" name="Text 13"/>
+          <p:cNvSpPr/>
+          <p:nvPr/>
+        </p:nvSpPr>
+        <p:spPr>
+          <a:xfrm>
+            <a:off x="5486400" y="5294376"/>
+            <a:ext cx="6217920" cy="685800"/>
+          </a:xfrm>
+          <a:prstGeom prst="rect">
+            <a:avLst/>
+          </a:prstGeom>
+          <a:noFill/>
+          <a:ln/>
+        </p:spPr>
+        <p:txBody>
+          <a:bodyPr wrap="square" rtlCol="0" anchor="ctr"/>
+          <a:lstStyle/>
+          <a:p>
+            <a:pPr indent="0" marL="0">
+              <a:lnSpc>
+                <a:spcPct val="140000"/>
+              </a:lnSpc>
+              <a:buNone/>
+            </a:pPr>
+            <a:r>
+              <a:rPr lang="en-US" sz="1400" b="1" dirty="0">
                 <a:solidFill>
                   <a:srgbClr val="7C3AED"/>
                 </a:solidFill>
@@ -11933,16 +13580,33 @@
                 <a:ea typeface="Calibri" pitchFamily="34" charset="-122"/>
                 <a:cs typeface="Calibri" pitchFamily="34" charset="-120"/>
               </a:rPr>
-              <a:t>cicatrizes de teste</a:t>
-            </a:r>
-            <a:pPr algn="ctr" indent="0" marL="0">
-              <a:lnSpc>
-                <a:spcPct val="170000"/>
-              </a:lnSpc>
-              <a:buNone/>
-            </a:pPr>
-            <a:r>
-              <a:rPr lang="en-US" sz="1700" dirty="0">
+              <a:t>→ </a:t>
+            </a:r>
+            <a:pPr indent="0" marL="0">
+              <a:lnSpc>
+                <a:spcPct val="140000"/>
+              </a:lnSpc>
+              <a:buNone/>
+            </a:pPr>
+            <a:r>
+              <a:rPr lang="en-US" sz="1400" b="1" dirty="0">
+                <a:solidFill>
+                  <a:srgbClr val="FFFFFF"/>
+                </a:solidFill>
+                <a:latin typeface="Calibri" pitchFamily="34" charset="0"/>
+                <a:ea typeface="Calibri" pitchFamily="34" charset="-122"/>
+                <a:cs typeface="Calibri" pitchFamily="34" charset="-120"/>
+              </a:rPr>
+              <a:t>Convidado a palestrar no Ouro Digital</a:t>
+            </a:r>
+            <a:pPr indent="0" marL="0">
+              <a:lnSpc>
+                <a:spcPct val="140000"/>
+              </a:lnSpc>
+              <a:buNone/>
+            </a:pPr>
+            <a:r>
+              <a:rPr lang="en-US" sz="1400" dirty="0">
                 <a:solidFill>
                   <a:srgbClr val="9CA3AF"/>
                 </a:solidFill>
@@ -11950,27 +13614,9 @@
                 <a:ea typeface="Calibri" pitchFamily="34" charset="-122"/>
                 <a:cs typeface="Calibri" pitchFamily="34" charset="-120"/>
               </a:rPr>
-              <a:t> e os padrões que funcionam de verdade.
-</a:t>
-            </a:r>
-            <a:pPr algn="ctr" indent="0" marL="0">
-              <a:lnSpc>
-                <a:spcPct val="170000"/>
-              </a:lnSpc>
-              <a:buNone/>
-            </a:pPr>
-            <a:r>
-              <a:rPr lang="en-US" sz="1700" dirty="0">
-                <a:solidFill>
-                  <a:srgbClr val="9CA3AF"/>
-                </a:solidFill>
-                <a:latin typeface="Calibri" pitchFamily="34" charset="0"/>
-                <a:ea typeface="Calibri" pitchFamily="34" charset="-122"/>
-                <a:cs typeface="Calibri" pitchFamily="34" charset="-120"/>
-              </a:rPr>
-              <a:t>É com esse repertório que eu opero cada parceria que assino.</a:t>
-            </a:r>
-            <a:endParaRPr lang="en-US" sz="1700" dirty="0"/>
+              <a:t> — um dos maiores eventos de performance do Brasil.</a:t>
+            </a:r>
+            <a:endParaRPr lang="en-US" sz="1400" dirty="0"/>
           </a:p>
         </p:txBody>
       </p:sp>

--- a/operacoes/apresentacoes/monica/Pitch-Monica.pptx
+++ b/operacoes/apresentacoes/monica/Pitch-Monica.pptx
@@ -13026,7 +13026,7 @@
       </p:sp>
       <p:pic>
         <p:nvPicPr>
-          <p:cNvPr id="4" name="Image 0" descr="c:/Users/Desktop/Downloads/491211111_3466720810130264_3807635024903484999_n.jpg">    </p:cNvPr>
+          <p:cNvPr id="4" name="Image 0" descr="c:/Users/Desktop/Downloads/grupoaura/operacoes/apresentacoes/monica/kaua-palco.jpg">    </p:cNvPr>
           <p:cNvPicPr>
             <a:picLocks noChangeAspect="1"/>
           </p:cNvPicPr>

--- a/operacoes/apresentacoes/monica/Pitch-Monica.pptx
+++ b/operacoes/apresentacoes/monica/Pitch-Monica.pptx
@@ -3632,7 +3632,7 @@
         </p:nvSpPr>
         <p:spPr>
           <a:xfrm>
-            <a:off x="1371600" y="2880360"/>
+            <a:off x="1371600" y="2788920"/>
             <a:ext cx="2194560" cy="411480"/>
           </a:xfrm>
           <a:prstGeom prst="rect">
@@ -3671,7 +3671,7 @@
         </p:nvSpPr>
         <p:spPr>
           <a:xfrm>
-            <a:off x="3840480" y="2880360"/>
+            <a:off x="3840480" y="2788920"/>
             <a:ext cx="2286000" cy="411480"/>
           </a:xfrm>
           <a:prstGeom prst="rect">
@@ -3710,7 +3710,7 @@
         </p:nvSpPr>
         <p:spPr>
           <a:xfrm>
-            <a:off x="6400800" y="2880360"/>
+            <a:off x="6400800" y="2788920"/>
             <a:ext cx="2468880" cy="411480"/>
           </a:xfrm>
           <a:prstGeom prst="rect">
@@ -3749,7 +3749,7 @@
         </p:nvSpPr>
         <p:spPr>
           <a:xfrm>
-            <a:off x="9144000" y="2880360"/>
+            <a:off x="9144000" y="2788920"/>
             <a:ext cx="2560320" cy="411480"/>
           </a:xfrm>
           <a:prstGeom prst="rect">
@@ -3788,7 +3788,7 @@
         </p:nvSpPr>
         <p:spPr>
           <a:xfrm>
-            <a:off x="1188720" y="3474720"/>
+            <a:off x="1188720" y="3291840"/>
             <a:ext cx="10241280" cy="594360"/>
           </a:xfrm>
           <a:prstGeom prst="rect">
@@ -3815,7 +3815,7 @@
         </p:nvSpPr>
         <p:spPr>
           <a:xfrm>
-            <a:off x="1371600" y="3566160"/>
+            <a:off x="1371600" y="3383280"/>
             <a:ext cx="2194560" cy="411480"/>
           </a:xfrm>
           <a:prstGeom prst="rect">
@@ -3854,7 +3854,7 @@
         </p:nvSpPr>
         <p:spPr>
           <a:xfrm>
-            <a:off x="3840480" y="3566160"/>
+            <a:off x="3840480" y="3383280"/>
             <a:ext cx="2286000" cy="411480"/>
           </a:xfrm>
           <a:prstGeom prst="rect">
@@ -3893,7 +3893,7 @@
         </p:nvSpPr>
         <p:spPr>
           <a:xfrm>
-            <a:off x="6400800" y="3566160"/>
+            <a:off x="6400800" y="3383280"/>
             <a:ext cx="2468880" cy="411480"/>
           </a:xfrm>
           <a:prstGeom prst="rect">
@@ -3932,7 +3932,7 @@
         </p:nvSpPr>
         <p:spPr>
           <a:xfrm>
-            <a:off x="9144000" y="3566160"/>
+            <a:off x="9144000" y="3383280"/>
             <a:ext cx="2560320" cy="411480"/>
           </a:xfrm>
           <a:prstGeom prst="rect">
@@ -3971,7 +3971,7 @@
         </p:nvSpPr>
         <p:spPr>
           <a:xfrm>
-            <a:off x="914400" y="3794760"/>
+            <a:off x="914400" y="4114800"/>
             <a:ext cx="5180076" cy="1005840"/>
           </a:xfrm>
           <a:prstGeom prst="rect">
@@ -4010,7 +4010,7 @@
         </p:nvSpPr>
         <p:spPr>
           <a:xfrm>
-            <a:off x="914400" y="4800600"/>
+            <a:off x="914400" y="5120640"/>
             <a:ext cx="5180076" cy="502920"/>
           </a:xfrm>
           <a:prstGeom prst="rect">
@@ -4072,7 +4072,7 @@
         </p:nvSpPr>
         <p:spPr>
           <a:xfrm>
-            <a:off x="6076188" y="3749040"/>
+            <a:off x="6076188" y="4069080"/>
             <a:ext cx="36576" cy="1645920"/>
           </a:xfrm>
           <a:prstGeom prst="rect">
@@ -4097,7 +4097,7 @@
         </p:nvSpPr>
         <p:spPr>
           <a:xfrm>
-            <a:off x="6551676" y="3794760"/>
+            <a:off x="6551676" y="4114800"/>
             <a:ext cx="4997196" cy="1005840"/>
           </a:xfrm>
           <a:prstGeom prst="rect">
@@ -4136,7 +4136,7 @@
         </p:nvSpPr>
         <p:spPr>
           <a:xfrm>
-            <a:off x="6551676" y="4800600"/>
+            <a:off x="6551676" y="5120640"/>
             <a:ext cx="4997196" cy="502920"/>
           </a:xfrm>
           <a:prstGeom prst="rect">
@@ -4198,7 +4198,7 @@
         </p:nvSpPr>
         <p:spPr>
           <a:xfrm>
-            <a:off x="1371600" y="5532120"/>
+            <a:off x="1371600" y="5806440"/>
             <a:ext cx="9445752" cy="320040"/>
           </a:xfrm>
           <a:prstGeom prst="rect">
@@ -4237,7 +4237,7 @@
         </p:nvSpPr>
         <p:spPr>
           <a:xfrm>
-            <a:off x="1371600" y="5897880"/>
+            <a:off x="1371600" y="6217920"/>
             <a:ext cx="9445752" cy="320040"/>
           </a:xfrm>
           <a:prstGeom prst="rect">
@@ -4512,8 +4512,8 @@
         </p:nvSpPr>
         <p:spPr>
           <a:xfrm>
-            <a:off x="1371600" y="3429000"/>
-            <a:ext cx="365760" cy="502920"/>
+            <a:off x="1371600" y="3383280"/>
+            <a:ext cx="365760" cy="640080"/>
           </a:xfrm>
           <a:prstGeom prst="rect">
             <a:avLst/>
@@ -4551,8 +4551,8 @@
         </p:nvSpPr>
         <p:spPr>
           <a:xfrm>
-            <a:off x="1874520" y="3429000"/>
-            <a:ext cx="8897112" cy="502920"/>
+            <a:off x="1874520" y="3383280"/>
+            <a:ext cx="8897112" cy="640080"/>
           </a:xfrm>
           <a:prstGeom prst="rect">
             <a:avLst/>
@@ -4571,7 +4571,7 @@
               <a:buNone/>
             </a:pPr>
             <a:r>
-              <a:rPr lang="en-US" sz="1500" b="1" dirty="0">
+              <a:rPr lang="en-US" sz="1400" b="1" dirty="0">
                 <a:solidFill>
                   <a:srgbClr val="FFFFFF"/>
                 </a:solidFill>
@@ -4588,7 +4588,7 @@
               <a:buNone/>
             </a:pPr>
             <a:r>
-              <a:rPr lang="en-US" sz="1500" dirty="0">
+              <a:rPr lang="en-US" sz="1400" dirty="0">
                 <a:solidFill>
                   <a:srgbClr val="9CA3AF"/>
                 </a:solidFill>
@@ -4598,7 +4598,7 @@
               </a:rPr>
               <a:t> — você acompanha em tempo real.</a:t>
             </a:r>
-            <a:endParaRPr lang="en-US" sz="1500" dirty="0"/>
+            <a:endParaRPr lang="en-US" sz="1400" dirty="0"/>
           </a:p>
         </p:txBody>
       </p:sp>
@@ -4610,8 +4610,8 @@
         </p:nvSpPr>
         <p:spPr>
           <a:xfrm>
-            <a:off x="1371600" y="4087368"/>
-            <a:ext cx="365760" cy="502920"/>
+            <a:off x="1371600" y="4133088"/>
+            <a:ext cx="365760" cy="640080"/>
           </a:xfrm>
           <a:prstGeom prst="rect">
             <a:avLst/>
@@ -4649,8 +4649,8 @@
         </p:nvSpPr>
         <p:spPr>
           <a:xfrm>
-            <a:off x="1874520" y="4087368"/>
-            <a:ext cx="8897112" cy="502920"/>
+            <a:off x="1874520" y="4133088"/>
+            <a:ext cx="8897112" cy="640080"/>
           </a:xfrm>
           <a:prstGeom prst="rect">
             <a:avLst/>
@@ -4669,7 +4669,7 @@
               <a:buNone/>
             </a:pPr>
             <a:r>
-              <a:rPr lang="en-US" sz="1500" b="1" dirty="0">
+              <a:rPr lang="en-US" sz="1400" b="1" dirty="0">
                 <a:solidFill>
                   <a:srgbClr val="FFFFFF"/>
                 </a:solidFill>
@@ -4686,7 +4686,7 @@
               <a:buNone/>
             </a:pPr>
             <a:r>
-              <a:rPr lang="en-US" sz="1500" dirty="0">
+              <a:rPr lang="en-US" sz="1400" dirty="0">
                 <a:solidFill>
                   <a:srgbClr val="9CA3AF"/>
                 </a:solidFill>
@@ -4696,7 +4696,7 @@
               </a:rPr>
               <a:t> — nada é usado fora desta parceria sem sua autorização.</a:t>
             </a:r>
-            <a:endParaRPr lang="en-US" sz="1500" dirty="0"/>
+            <a:endParaRPr lang="en-US" sz="1400" dirty="0"/>
           </a:p>
         </p:txBody>
       </p:sp>
@@ -4708,8 +4708,8 @@
         </p:nvSpPr>
         <p:spPr>
           <a:xfrm>
-            <a:off x="1371600" y="4745736"/>
-            <a:ext cx="365760" cy="502920"/>
+            <a:off x="1371600" y="4882896"/>
+            <a:ext cx="365760" cy="640080"/>
           </a:xfrm>
           <a:prstGeom prst="rect">
             <a:avLst/>
@@ -4747,8 +4747,8 @@
         </p:nvSpPr>
         <p:spPr>
           <a:xfrm>
-            <a:off x="1874520" y="4745736"/>
-            <a:ext cx="8897112" cy="502920"/>
+            <a:off x="1874520" y="4882896"/>
+            <a:ext cx="8897112" cy="640080"/>
           </a:xfrm>
           <a:prstGeom prst="rect">
             <a:avLst/>
@@ -4767,7 +4767,7 @@
               <a:buNone/>
             </a:pPr>
             <a:r>
-              <a:rPr lang="en-US" sz="1500" b="1" dirty="0">
+              <a:rPr lang="en-US" sz="1400" b="1" dirty="0">
                 <a:solidFill>
                   <a:srgbClr val="FFFFFF"/>
                 </a:solidFill>
@@ -4784,7 +4784,7 @@
               <a:buNone/>
             </a:pPr>
             <a:r>
-              <a:rPr lang="en-US" sz="1500" dirty="0">
+              <a:rPr lang="en-US" sz="1400" dirty="0">
                 <a:solidFill>
                   <a:srgbClr val="9CA3AF"/>
                 </a:solidFill>
@@ -4794,7 +4794,7 @@
               </a:rPr>
               <a:t> — você mantém todos os seus projetos e atendimentos.</a:t>
             </a:r>
-            <a:endParaRPr lang="en-US" sz="1500" dirty="0"/>
+            <a:endParaRPr lang="en-US" sz="1400" dirty="0"/>
           </a:p>
         </p:txBody>
       </p:sp>
@@ -4806,8 +4806,8 @@
         </p:nvSpPr>
         <p:spPr>
           <a:xfrm>
-            <a:off x="1371600" y="5404104"/>
-            <a:ext cx="365760" cy="502920"/>
+            <a:off x="1371600" y="5632704"/>
+            <a:ext cx="365760" cy="640080"/>
           </a:xfrm>
           <a:prstGeom prst="rect">
             <a:avLst/>
@@ -4845,8 +4845,8 @@
         </p:nvSpPr>
         <p:spPr>
           <a:xfrm>
-            <a:off x="1874520" y="5404104"/>
-            <a:ext cx="8897112" cy="502920"/>
+            <a:off x="1874520" y="5632704"/>
+            <a:ext cx="8897112" cy="640080"/>
           </a:xfrm>
           <a:prstGeom prst="rect">
             <a:avLst/>
@@ -4865,7 +4865,7 @@
               <a:buNone/>
             </a:pPr>
             <a:r>
-              <a:rPr lang="en-US" sz="1500" b="1" dirty="0">
+              <a:rPr lang="en-US" sz="1400" b="1" dirty="0">
                 <a:solidFill>
                   <a:srgbClr val="FFFFFF"/>
                 </a:solidFill>
@@ -4882,7 +4882,7 @@
               <a:buNone/>
             </a:pPr>
             <a:r>
-              <a:rPr lang="en-US" sz="1500" dirty="0">
+              <a:rPr lang="en-US" sz="1400" dirty="0">
                 <a:solidFill>
                   <a:srgbClr val="9CA3AF"/>
                 </a:solidFill>
@@ -4892,7 +4892,7 @@
               </a:rPr>
               <a:t> — se quiser sair, a operação tem transição estruturada.</a:t>
             </a:r>
-            <a:endParaRPr lang="en-US" sz="1500" dirty="0"/>
+            <a:endParaRPr lang="en-US" sz="1400" dirty="0"/>
           </a:p>
         </p:txBody>
       </p:sp>
@@ -4904,7 +4904,7 @@
         </p:nvSpPr>
         <p:spPr>
           <a:xfrm>
-            <a:off x="1371600" y="6080760"/>
+            <a:off x="1371600" y="6400800"/>
             <a:ext cx="9445752" cy="594360"/>
           </a:xfrm>
           <a:prstGeom prst="rect">
@@ -12193,39 +12193,16 @@
           </a:ln>
         </p:spPr>
       </p:sp>
-      <p:pic>
-        <p:nvPicPr>
-          <p:cNvPr id="5" name="Image 0" descr="c:/Users/Desktop/Downloads/grupoaura/operacoes/apresentacoes/monica/foto-prisciane.jpg">    </p:cNvPr>
-          <p:cNvPicPr>
-            <a:picLocks noChangeAspect="1"/>
-          </p:cNvPicPr>
-          <p:nvPr/>
-        </p:nvPicPr>
-        <p:blipFill>
-          <a:blip r:embed="rId1"/>
-          <a:srcRect l="0" r="0" t="0" b="0"/>
-          <a:stretch/>
-        </p:blipFill>
-        <p:spPr>
-          <a:xfrm>
-            <a:off x="914400" y="1143000"/>
-            <a:ext cx="594360" cy="594360"/>
-          </a:xfrm>
-          <a:prstGeom prst="rect">
-            <a:avLst/>
-          </a:prstGeom>
-        </p:spPr>
-      </p:pic>
-      <p:sp>
-        <p:nvSpPr>
-          <p:cNvPr id="6" name="Text 3"/>
-          <p:cNvSpPr/>
-          <p:nvPr/>
-        </p:nvSpPr>
-        <p:spPr>
-          <a:xfrm>
-            <a:off x="1600200" y="1188720"/>
-            <a:ext cx="4114800" cy="274320"/>
+      <p:sp>
+        <p:nvSpPr>
+          <p:cNvPr id="5" name="Text 3"/>
+          <p:cNvSpPr/>
+          <p:nvPr/>
+        </p:nvSpPr>
+        <p:spPr>
+          <a:xfrm>
+            <a:off x="914400" y="1188720"/>
+            <a:ext cx="4754880" cy="274320"/>
           </a:xfrm>
           <a:prstGeom prst="rect">
             <a:avLst/>
@@ -12257,14 +12234,14 @@
       </p:sp>
       <p:sp>
         <p:nvSpPr>
-          <p:cNvPr id="7" name="Text 4"/>
-          <p:cNvSpPr/>
-          <p:nvPr/>
-        </p:nvSpPr>
-        <p:spPr>
-          <a:xfrm>
-            <a:off x="1600200" y="1481328"/>
-            <a:ext cx="4114800" cy="347472"/>
+          <p:cNvPr id="6" name="Text 4"/>
+          <p:cNvSpPr/>
+          <p:nvPr/>
+        </p:nvSpPr>
+        <p:spPr>
+          <a:xfrm>
+            <a:off x="914400" y="1481328"/>
+            <a:ext cx="4754880" cy="347472"/>
           </a:xfrm>
           <a:prstGeom prst="rect">
             <a:avLst/>
@@ -12296,7 +12273,7 @@
       </p:sp>
       <p:sp>
         <p:nvSpPr>
-          <p:cNvPr id="8" name="Text 5"/>
+          <p:cNvPr id="7" name="Text 5"/>
           <p:cNvSpPr/>
           <p:nvPr/>
         </p:nvSpPr>
@@ -12335,7 +12312,7 @@
       </p:sp>
       <p:sp>
         <p:nvSpPr>
-          <p:cNvPr id="9" name="Text 6"/>
+          <p:cNvPr id="8" name="Text 6"/>
           <p:cNvSpPr/>
           <p:nvPr/>
         </p:nvSpPr>
@@ -12374,7 +12351,7 @@
       </p:sp>
       <p:sp>
         <p:nvSpPr>
-          <p:cNvPr id="10" name="Shape 7"/>
+          <p:cNvPr id="9" name="Shape 7"/>
           <p:cNvSpPr/>
           <p:nvPr/>
         </p:nvSpPr>
@@ -12399,7 +12376,7 @@
       </p:sp>
       <p:sp>
         <p:nvSpPr>
-          <p:cNvPr id="11" name="Text 8"/>
+          <p:cNvPr id="10" name="Text 8"/>
           <p:cNvSpPr/>
           <p:nvPr/>
         </p:nvSpPr>
@@ -12501,7 +12478,7 @@
       </p:sp>
       <p:sp>
         <p:nvSpPr>
-          <p:cNvPr id="12" name="Text 9"/>
+          <p:cNvPr id="11" name="Text 9"/>
           <p:cNvSpPr/>
           <p:nvPr/>
         </p:nvSpPr>
@@ -12540,7 +12517,7 @@
       </p:sp>
       <p:sp>
         <p:nvSpPr>
-          <p:cNvPr id="13" name="Shape 10"/>
+          <p:cNvPr id="12" name="Shape 10"/>
           <p:cNvSpPr/>
           <p:nvPr/>
         </p:nvSpPr>
@@ -12567,14 +12544,14 @@
       </p:sp>
       <p:pic>
         <p:nvPicPr>
-          <p:cNvPr id="14" name="Image 1" descr="c:/Users/Desktop/Downloads/grupoaura/operacoes/apresentacoes/monica/foto-fealves.jpg">    </p:cNvPr>
+          <p:cNvPr id="13" name="Image 0" descr="c:/Users/Desktop/Downloads/grupoaura/operacoes/apresentacoes/monica/foto-fealves.jpg">    </p:cNvPr>
           <p:cNvPicPr>
             <a:picLocks noChangeAspect="1"/>
           </p:cNvPicPr>
           <p:nvPr/>
         </p:nvPicPr>
         <p:blipFill>
-          <a:blip r:embed="rId2"/>
+          <a:blip r:embed="rId1"/>
           <a:srcRect l="0" r="0" t="0" b="0"/>
           <a:stretch/>
         </p:blipFill>
@@ -12590,7 +12567,7 @@
       </p:pic>
       <p:sp>
         <p:nvSpPr>
-          <p:cNvPr id="15" name="Text 11"/>
+          <p:cNvPr id="14" name="Text 11"/>
           <p:cNvSpPr/>
           <p:nvPr/>
         </p:nvSpPr>
@@ -12629,7 +12606,7 @@
       </p:sp>
       <p:sp>
         <p:nvSpPr>
-          <p:cNvPr id="16" name="Text 12"/>
+          <p:cNvPr id="15" name="Text 12"/>
           <p:cNvSpPr/>
           <p:nvPr/>
         </p:nvSpPr>
@@ -12668,7 +12645,7 @@
       </p:sp>
       <p:sp>
         <p:nvSpPr>
-          <p:cNvPr id="17" name="Text 13"/>
+          <p:cNvPr id="16" name="Text 13"/>
           <p:cNvSpPr/>
           <p:nvPr/>
         </p:nvSpPr>
@@ -12707,7 +12684,7 @@
       </p:sp>
       <p:sp>
         <p:nvSpPr>
-          <p:cNvPr id="18" name="Text 14"/>
+          <p:cNvPr id="17" name="Text 14"/>
           <p:cNvSpPr/>
           <p:nvPr/>
         </p:nvSpPr>
@@ -12746,7 +12723,7 @@
       </p:sp>
       <p:sp>
         <p:nvSpPr>
-          <p:cNvPr id="19" name="Shape 15"/>
+          <p:cNvPr id="18" name="Shape 15"/>
           <p:cNvSpPr/>
           <p:nvPr/>
         </p:nvSpPr>
@@ -12771,7 +12748,7 @@
       </p:sp>
       <p:sp>
         <p:nvSpPr>
-          <p:cNvPr id="20" name="Text 16"/>
+          <p:cNvPr id="19" name="Text 16"/>
           <p:cNvSpPr/>
           <p:nvPr/>
         </p:nvSpPr>
@@ -12873,7 +12850,7 @@
       </p:sp>
       <p:sp>
         <p:nvSpPr>
-          <p:cNvPr id="21" name="Text 17"/>
+          <p:cNvPr id="20" name="Text 17"/>
           <p:cNvSpPr/>
           <p:nvPr/>
         </p:nvSpPr>
@@ -12912,7 +12889,7 @@
       </p:sp>
       <p:sp>
         <p:nvSpPr>
-          <p:cNvPr id="22" name="Text 18"/>
+          <p:cNvPr id="21" name="Text 18"/>
           <p:cNvSpPr/>
           <p:nvPr/>
         </p:nvSpPr>

--- a/operacoes/apresentacoes/monica/Pitch-Monica.pptx
+++ b/operacoes/apresentacoes/monica/Pitch-Monica.pptx
@@ -12193,16 +12193,39 @@
           </a:ln>
         </p:spPr>
       </p:sp>
-      <p:sp>
-        <p:nvSpPr>
-          <p:cNvPr id="5" name="Text 3"/>
-          <p:cNvSpPr/>
-          <p:nvPr/>
-        </p:nvSpPr>
-        <p:spPr>
-          <a:xfrm>
-            <a:off x="914400" y="1188720"/>
-            <a:ext cx="4754880" cy="274320"/>
+      <p:pic>
+        <p:nvPicPr>
+          <p:cNvPr id="5" name="Image 0" descr="c:/Users/Desktop/Downloads/grupoaura/operacoes/apresentacoes/monica/foto-prisciane.jpg">    </p:cNvPr>
+          <p:cNvPicPr>
+            <a:picLocks noChangeAspect="1"/>
+          </p:cNvPicPr>
+          <p:nvPr/>
+        </p:nvPicPr>
+        <p:blipFill>
+          <a:blip r:embed="rId1"/>
+          <a:srcRect l="0" r="0" t="0" b="0"/>
+          <a:stretch/>
+        </p:blipFill>
+        <p:spPr>
+          <a:xfrm>
+            <a:off x="914400" y="1143000"/>
+            <a:ext cx="594360" cy="594360"/>
+          </a:xfrm>
+          <a:prstGeom prst="rect">
+            <a:avLst/>
+          </a:prstGeom>
+        </p:spPr>
+      </p:pic>
+      <p:sp>
+        <p:nvSpPr>
+          <p:cNvPr id="6" name="Text 3"/>
+          <p:cNvSpPr/>
+          <p:nvPr/>
+        </p:nvSpPr>
+        <p:spPr>
+          <a:xfrm>
+            <a:off x="1600200" y="1188720"/>
+            <a:ext cx="4114800" cy="274320"/>
           </a:xfrm>
           <a:prstGeom prst="rect">
             <a:avLst/>
@@ -12234,14 +12257,14 @@
       </p:sp>
       <p:sp>
         <p:nvSpPr>
-          <p:cNvPr id="6" name="Text 4"/>
-          <p:cNvSpPr/>
-          <p:nvPr/>
-        </p:nvSpPr>
-        <p:spPr>
-          <a:xfrm>
-            <a:off x="914400" y="1481328"/>
-            <a:ext cx="4754880" cy="347472"/>
+          <p:cNvPr id="7" name="Text 4"/>
+          <p:cNvSpPr/>
+          <p:nvPr/>
+        </p:nvSpPr>
+        <p:spPr>
+          <a:xfrm>
+            <a:off x="1600200" y="1481328"/>
+            <a:ext cx="4114800" cy="347472"/>
           </a:xfrm>
           <a:prstGeom prst="rect">
             <a:avLst/>
@@ -12273,7 +12296,7 @@
       </p:sp>
       <p:sp>
         <p:nvSpPr>
-          <p:cNvPr id="7" name="Text 5"/>
+          <p:cNvPr id="8" name="Text 5"/>
           <p:cNvSpPr/>
           <p:nvPr/>
         </p:nvSpPr>
@@ -12312,7 +12335,7 @@
       </p:sp>
       <p:sp>
         <p:nvSpPr>
-          <p:cNvPr id="8" name="Text 6"/>
+          <p:cNvPr id="9" name="Text 6"/>
           <p:cNvSpPr/>
           <p:nvPr/>
         </p:nvSpPr>
@@ -12351,7 +12374,7 @@
       </p:sp>
       <p:sp>
         <p:nvSpPr>
-          <p:cNvPr id="9" name="Shape 7"/>
+          <p:cNvPr id="10" name="Shape 7"/>
           <p:cNvSpPr/>
           <p:nvPr/>
         </p:nvSpPr>
@@ -12376,7 +12399,7 @@
       </p:sp>
       <p:sp>
         <p:nvSpPr>
-          <p:cNvPr id="10" name="Text 8"/>
+          <p:cNvPr id="11" name="Text 8"/>
           <p:cNvSpPr/>
           <p:nvPr/>
         </p:nvSpPr>
@@ -12478,7 +12501,7 @@
       </p:sp>
       <p:sp>
         <p:nvSpPr>
-          <p:cNvPr id="11" name="Text 9"/>
+          <p:cNvPr id="12" name="Text 9"/>
           <p:cNvSpPr/>
           <p:nvPr/>
         </p:nvSpPr>
@@ -12517,7 +12540,7 @@
       </p:sp>
       <p:sp>
         <p:nvSpPr>
-          <p:cNvPr id="12" name="Shape 10"/>
+          <p:cNvPr id="13" name="Shape 10"/>
           <p:cNvSpPr/>
           <p:nvPr/>
         </p:nvSpPr>
@@ -12544,14 +12567,14 @@
       </p:sp>
       <p:pic>
         <p:nvPicPr>
-          <p:cNvPr id="13" name="Image 0" descr="c:/Users/Desktop/Downloads/grupoaura/operacoes/apresentacoes/monica/foto-fealves.jpg">    </p:cNvPr>
+          <p:cNvPr id="14" name="Image 1" descr="c:/Users/Desktop/Downloads/grupoaura/operacoes/apresentacoes/monica/foto-fealves.jpg">    </p:cNvPr>
           <p:cNvPicPr>
             <a:picLocks noChangeAspect="1"/>
           </p:cNvPicPr>
           <p:nvPr/>
         </p:nvPicPr>
         <p:blipFill>
-          <a:blip r:embed="rId1"/>
+          <a:blip r:embed="rId2"/>
           <a:srcRect l="0" r="0" t="0" b="0"/>
           <a:stretch/>
         </p:blipFill>
@@ -12567,7 +12590,7 @@
       </p:pic>
       <p:sp>
         <p:nvSpPr>
-          <p:cNvPr id="14" name="Text 11"/>
+          <p:cNvPr id="15" name="Text 11"/>
           <p:cNvSpPr/>
           <p:nvPr/>
         </p:nvSpPr>
@@ -12606,7 +12629,7 @@
       </p:sp>
       <p:sp>
         <p:nvSpPr>
-          <p:cNvPr id="15" name="Text 12"/>
+          <p:cNvPr id="16" name="Text 12"/>
           <p:cNvSpPr/>
           <p:nvPr/>
         </p:nvSpPr>
@@ -12645,7 +12668,7 @@
       </p:sp>
       <p:sp>
         <p:nvSpPr>
-          <p:cNvPr id="16" name="Text 13"/>
+          <p:cNvPr id="17" name="Text 13"/>
           <p:cNvSpPr/>
           <p:nvPr/>
         </p:nvSpPr>
@@ -12684,7 +12707,7 @@
       </p:sp>
       <p:sp>
         <p:nvSpPr>
-          <p:cNvPr id="17" name="Text 14"/>
+          <p:cNvPr id="18" name="Text 14"/>
           <p:cNvSpPr/>
           <p:nvPr/>
         </p:nvSpPr>
@@ -12723,7 +12746,7 @@
       </p:sp>
       <p:sp>
         <p:nvSpPr>
-          <p:cNvPr id="18" name="Shape 15"/>
+          <p:cNvPr id="19" name="Shape 15"/>
           <p:cNvSpPr/>
           <p:nvPr/>
         </p:nvSpPr>
@@ -12748,7 +12771,7 @@
       </p:sp>
       <p:sp>
         <p:nvSpPr>
-          <p:cNvPr id="19" name="Text 16"/>
+          <p:cNvPr id="20" name="Text 16"/>
           <p:cNvSpPr/>
           <p:nvPr/>
         </p:nvSpPr>
@@ -12850,7 +12873,7 @@
       </p:sp>
       <p:sp>
         <p:nvSpPr>
-          <p:cNvPr id="20" name="Text 17"/>
+          <p:cNvPr id="21" name="Text 17"/>
           <p:cNvSpPr/>
           <p:nvPr/>
         </p:nvSpPr>
@@ -12889,7 +12912,7 @@
       </p:sp>
       <p:sp>
         <p:nvSpPr>
-          <p:cNvPr id="21" name="Text 18"/>
+          <p:cNvPr id="22" name="Text 18"/>
           <p:cNvSpPr/>
           <p:nvPr/>
         </p:nvSpPr>

--- a/operacoes/apresentacoes/monica/Pitch-Monica.pptx
+++ b/operacoes/apresentacoes/monica/Pitch-Monica.pptx
@@ -4,6 +4,9 @@
   <p:sldMasterIdLst>
     <p:sldMasterId id="2147483648" r:id="rId1"/>
   </p:sldMasterIdLst>
+  <p:notesMasterIdLst>
+    <p:notesMasterId r:id="rId16"/>
+  </p:notesMasterIdLst>
   <p:sldIdLst>
     <p:sldId id="256" r:id="rId2"/>
     <p:sldId id="257" r:id="rId3"/>
@@ -20,9 +23,6 @@
     <p:sldId id="268" r:id="rId14"/>
     <p:sldId id="269" r:id="rId15"/>
   </p:sldIdLst>
-  <p:notesMasterIdLst>
-    <p:notesMasterId r:id="rId16"/>
-  </p:notesMasterIdLst>
   <p:sldSz cx="12192000" cy="6858000"/>
   <p:notesSz cx="6858000" cy="12192000"/>
   <p:defaultTextStyle>
@@ -117,6 +117,11 @@
       </a:defRPr>
     </a:lvl9pPr>
   </p:defaultTextStyle>
+  <p:extLst>
+    <p:ext uri="{EFAFB233-063F-42B5-8137-9DF3F51BA10A}">
+      <p15:sldGuideLst xmlns:p15="http://schemas.microsoft.com/office/powerpoint/2012/main"/>
+    </p:ext>
+  </p:extLst>
 </p:presentation>
 </file>
 
@@ -142,234 +147,10 @@
           <a:chExt cx="0" cy="0"/>
         </a:xfrm>
       </p:grpSpPr>
-      <p:sp>
-        <p:nvSpPr>
-          <p:cNvPr id="2" name="Header Placeholder 1"/>
-          <p:cNvSpPr>
-            <a:spLocks noGrp="1"/>
-          </p:cNvSpPr>
-          <p:nvPr>
-            <p:ph type="hdr" sz="quarter"/>
-          </p:nvPr>
-        </p:nvSpPr>
-        <p:spPr>
-          <a:xfrm>
-            <a:off x="0" y="0"/>
-            <a:ext cx="2971800" cy="458788"/>
-          </a:xfrm>
-          <a:prstGeom prst="rect">
-            <a:avLst/>
-          </a:prstGeom>
-        </p:spPr>
-        <p:txBody>
-          <a:bodyPr vert="horz" lIns="91440" tIns="45720" rIns="91440" bIns="45720" rtlCol="0"/>
-          <a:lstStyle>
-            <a:lvl1pPr algn="l">
-              <a:defRPr sz="1200"/>
-            </a:lvl1pPr>
-          </a:lstStyle>
-          <a:p>
-            <a:endParaRPr lang="en-US"/>
-          </a:p>
-        </p:txBody>
-      </p:sp>
-      <p:sp>
-        <p:nvSpPr>
-          <p:cNvPr id="3" name="Date Placeholder 2"/>
-          <p:cNvSpPr>
-            <a:spLocks noGrp="1"/>
-          </p:cNvSpPr>
-          <p:nvPr>
-            <p:ph type="dt" idx="1"/>
-          </p:nvPr>
-        </p:nvSpPr>
-        <p:spPr>
-          <a:xfrm>
-            <a:off x="3884613" y="0"/>
-            <a:ext cx="2971800" cy="458788"/>
-          </a:xfrm>
-          <a:prstGeom prst="rect">
-            <a:avLst/>
-          </a:prstGeom>
-        </p:spPr>
-        <p:txBody>
-          <a:bodyPr vert="horz" lIns="91440" tIns="45720" rIns="91440" bIns="45720" rtlCol="0"/>
-          <a:lstStyle>
-            <a:lvl1pPr algn="r">
-              <a:defRPr sz="1200"/>
-            </a:lvl1pPr>
-          </a:lstStyle>
-          <a:p>
-            <a:fld id="{5282F153-3F37-0F45-9E97-73ACFA13230C}" type="datetimeFigureOut">
-              <a:rPr lang="en-US"/>
-              <a:t>7/23/19</a:t>
-            </a:fld>
-            <a:endParaRPr lang="en-US"/>
-          </a:p>
-        </p:txBody>
-      </p:sp>
-      <p:sp>
-        <p:nvSpPr>
-          <p:cNvPr id="4" name="Slide Image Placeholder 3"/>
-          <p:cNvSpPr>
-            <a:spLocks noGrp="1" noRot="1" noChangeAspect="1"/>
-          </p:cNvSpPr>
-          <p:nvPr>
-            <p:ph type="sldImg" idx="2"/>
-          </p:nvPr>
-        </p:nvSpPr>
-        <p:spPr>
-          <a:xfrm>
-            <a:off x="685800" y="1143000"/>
-            <a:ext cx="5486400" cy="3086100"/>
-          </a:xfrm>
-          <a:prstGeom prst="rect">
-            <a:avLst/>
-          </a:prstGeom>
-          <a:noFill/>
-          <a:ln w="12700">
-            <a:solidFill>
-              <a:prstClr val="black"/>
-            </a:solidFill>
-          </a:ln>
-        </p:spPr>
-        <p:txBody>
-          <a:bodyPr vert="horz" lIns="91440" tIns="45720" rIns="91440" bIns="45720" rtlCol="0" anchor="ctr"/>
-          <a:lstStyle/>
-          <a:p>
-            <a:endParaRPr lang="en-US"/>
-          </a:p>
-        </p:txBody>
-      </p:sp>
-      <p:sp>
-        <p:nvSpPr>
-          <p:cNvPr id="5" name="Notes Placeholder 4"/>
-          <p:cNvSpPr>
-            <a:spLocks noGrp="1"/>
-          </p:cNvSpPr>
-          <p:nvPr>
-            <p:ph type="body" sz="quarter" idx="3"/>
-          </p:nvPr>
-        </p:nvSpPr>
-        <p:spPr>
-          <a:xfrm>
-            <a:off x="685800" y="4400550"/>
-            <a:ext cx="5486400" cy="3600450"/>
-          </a:xfrm>
-          <a:prstGeom prst="rect">
-            <a:avLst/>
-          </a:prstGeom>
-        </p:spPr>
-        <p:txBody>
-          <a:bodyPr vert="horz" lIns="91440" tIns="45720" rIns="91440" bIns="45720" rtlCol="0"/>
-          <a:lstStyle/>
-          <a:p>
-            <a:pPr lvl="0"/>
-            <a:r>
-              <a:rPr lang="en-US"/>
-              <a:t>Click to edit Master text styles</a:t>
-            </a:r>
-          </a:p>
-          <a:p>
-            <a:pPr lvl="1"/>
-            <a:r>
-              <a:rPr lang="en-US"/>
-              <a:t>Second level</a:t>
-            </a:r>
-          </a:p>
-          <a:p>
-            <a:pPr lvl="2"/>
-            <a:r>
-              <a:rPr lang="en-US"/>
-              <a:t>Third level</a:t>
-            </a:r>
-          </a:p>
-          <a:p>
-            <a:pPr lvl="3"/>
-            <a:r>
-              <a:rPr lang="en-US"/>
-              <a:t>Fourth level</a:t>
-            </a:r>
-          </a:p>
-          <a:p>
-            <a:pPr lvl="4"/>
-            <a:r>
-              <a:rPr lang="en-US"/>
-              <a:t>Fifth level</a:t>
-            </a:r>
-          </a:p>
-        </p:txBody>
-      </p:sp>
-      <p:sp>
-        <p:nvSpPr>
-          <p:cNvPr id="6" name="Footer Placeholder 5"/>
-          <p:cNvSpPr>
-            <a:spLocks noGrp="1"/>
-          </p:cNvSpPr>
-          <p:nvPr>
-            <p:ph type="ftr" sz="quarter" idx="4"/>
-          </p:nvPr>
-        </p:nvSpPr>
-        <p:spPr>
-          <a:xfrm>
-            <a:off x="0" y="8685213"/>
-            <a:ext cx="2971800" cy="458787"/>
-          </a:xfrm>
-          <a:prstGeom prst="rect">
-            <a:avLst/>
-          </a:prstGeom>
-        </p:spPr>
-        <p:txBody>
-          <a:bodyPr vert="horz" lIns="91440" tIns="45720" rIns="91440" bIns="45720" rtlCol="0" anchor="b"/>
-          <a:lstStyle>
-            <a:lvl1pPr algn="l">
-              <a:defRPr sz="1200"/>
-            </a:lvl1pPr>
-          </a:lstStyle>
-          <a:p>
-            <a:endParaRPr lang="en-US"/>
-          </a:p>
-        </p:txBody>
-      </p:sp>
-      <p:sp>
-        <p:nvSpPr>
-          <p:cNvPr id="7" name="Slide Number Placeholder 6"/>
-          <p:cNvSpPr>
-            <a:spLocks noGrp="1"/>
-          </p:cNvSpPr>
-          <p:nvPr>
-            <p:ph type="sldNum" sz="quarter" idx="5"/>
-          </p:nvPr>
-        </p:nvSpPr>
-        <p:spPr>
-          <a:xfrm>
-            <a:off x="3884613" y="8685213"/>
-            <a:ext cx="2971800" cy="458787"/>
-          </a:xfrm>
-          <a:prstGeom prst="rect">
-            <a:avLst/>
-          </a:prstGeom>
-        </p:spPr>
-        <p:txBody>
-          <a:bodyPr vert="horz" lIns="91440" tIns="45720" rIns="91440" bIns="45720" rtlCol="0" anchor="b"/>
-          <a:lstStyle>
-            <a:lvl1pPr algn="r">
-              <a:defRPr sz="1200"/>
-            </a:lvl1pPr>
-          </a:lstStyle>
-          <a:p>
-            <a:fld id="{CE5E9CC1-C706-0F49-92D6-E571CC5EEA8F}" type="slidenum">
-              <a:rPr lang="en-US"/>
-              <a:t>‹#›</a:t>
-            </a:fld>
-            <a:endParaRPr lang="en-US"/>
-          </a:p>
-        </p:txBody>
-      </p:sp>
     </p:spTree>
     <p:extLst>
       <p:ext uri="{BB962C8B-B14F-4D97-AF65-F5344CB8AC3E}">
-        <p14:creationId xmlns:p14="http://schemas.microsoft.com/office/powerpoint/2010/main" val="1024086991"/>
+        <p14:creationId xmlns:p14="http://schemas.microsoft.com/office/powerpoint/2010/main" val="3072950843"/>
       </p:ext>
     </p:extLst>
   </p:cSld>
@@ -513,10 +294,6 @@
           <a:bodyPr/>
           <a:lstStyle/>
           <a:p>
-            <a:r>
-              <a:rPr lang="en-US" dirty="0"/>
-              <a:t/>
-            </a:r>
             <a:endParaRPr lang="en-US" dirty="0"/>
           </a:p>
         </p:txBody>
@@ -601,10 +378,6 @@
           <a:bodyPr/>
           <a:lstStyle/>
           <a:p>
-            <a:r>
-              <a:rPr lang="en-US" dirty="0"/>
-              <a:t/>
-            </a:r>
             <a:endParaRPr lang="en-US" dirty="0"/>
           </a:p>
         </p:txBody>
@@ -689,10 +462,6 @@
           <a:bodyPr/>
           <a:lstStyle/>
           <a:p>
-            <a:r>
-              <a:rPr lang="en-US" dirty="0"/>
-              <a:t/>
-            </a:r>
             <a:endParaRPr lang="en-US" dirty="0"/>
           </a:p>
         </p:txBody>
@@ -777,10 +546,6 @@
           <a:bodyPr/>
           <a:lstStyle/>
           <a:p>
-            <a:r>
-              <a:rPr lang="en-US" dirty="0"/>
-              <a:t/>
-            </a:r>
             <a:endParaRPr lang="en-US" dirty="0"/>
           </a:p>
         </p:txBody>
@@ -865,10 +630,6 @@
           <a:bodyPr/>
           <a:lstStyle/>
           <a:p>
-            <a:r>
-              <a:rPr lang="en-US" dirty="0"/>
-              <a:t/>
-            </a:r>
             <a:endParaRPr lang="en-US" dirty="0"/>
           </a:p>
         </p:txBody>
@@ -953,10 +714,6 @@
           <a:bodyPr/>
           <a:lstStyle/>
           <a:p>
-            <a:r>
-              <a:rPr lang="en-US" dirty="0"/>
-              <a:t/>
-            </a:r>
             <a:endParaRPr lang="en-US" dirty="0"/>
           </a:p>
         </p:txBody>
@@ -1041,10 +798,6 @@
           <a:bodyPr/>
           <a:lstStyle/>
           <a:p>
-            <a:r>
-              <a:rPr lang="en-US" dirty="0"/>
-              <a:t/>
-            </a:r>
             <a:endParaRPr lang="en-US" dirty="0"/>
           </a:p>
         </p:txBody>
@@ -1129,10 +882,6 @@
           <a:bodyPr/>
           <a:lstStyle/>
           <a:p>
-            <a:r>
-              <a:rPr lang="en-US" dirty="0"/>
-              <a:t/>
-            </a:r>
             <a:endParaRPr lang="en-US" dirty="0"/>
           </a:p>
         </p:txBody>
@@ -1217,10 +966,6 @@
           <a:bodyPr/>
           <a:lstStyle/>
           <a:p>
-            <a:r>
-              <a:rPr lang="en-US" dirty="0"/>
-              <a:t/>
-            </a:r>
             <a:endParaRPr lang="en-US" dirty="0"/>
           </a:p>
         </p:txBody>
@@ -1305,10 +1050,6 @@
           <a:bodyPr/>
           <a:lstStyle/>
           <a:p>
-            <a:r>
-              <a:rPr lang="en-US" dirty="0"/>
-              <a:t/>
-            </a:r>
             <a:endParaRPr lang="en-US" dirty="0"/>
           </a:p>
         </p:txBody>
@@ -1393,10 +1134,6 @@
           <a:bodyPr/>
           <a:lstStyle/>
           <a:p>
-            <a:r>
-              <a:rPr lang="en-US" dirty="0"/>
-              <a:t/>
-            </a:r>
             <a:endParaRPr lang="en-US" dirty="0"/>
           </a:p>
         </p:txBody>
@@ -1481,10 +1218,6 @@
           <a:bodyPr/>
           <a:lstStyle/>
           <a:p>
-            <a:r>
-              <a:rPr lang="en-US" dirty="0"/>
-              <a:t/>
-            </a:r>
             <a:endParaRPr lang="en-US" dirty="0"/>
           </a:p>
         </p:txBody>
@@ -1569,10 +1302,6 @@
           <a:bodyPr/>
           <a:lstStyle/>
           <a:p>
-            <a:r>
-              <a:rPr lang="en-US" dirty="0"/>
-              <a:t/>
-            </a:r>
             <a:endParaRPr lang="en-US" dirty="0"/>
           </a:p>
         </p:txBody>
@@ -1657,10 +1386,6 @@
           <a:bodyPr/>
           <a:lstStyle/>
           <a:p>
-            <a:r>
-              <a:rPr lang="en-US" dirty="0"/>
-              <a:t/>
-            </a:r>
             <a:endParaRPr lang="en-US" dirty="0"/>
           </a:p>
         </p:txBody>
@@ -1734,6 +1459,11 @@
 <file path=ppt/slideMasters/slideMaster1.xml><?xml version="1.0" encoding="utf-8"?>
 <p:sldMaster xmlns:a="http://schemas.openxmlformats.org/drawingml/2006/main" xmlns:r="http://schemas.openxmlformats.org/officeDocument/2006/relationships" xmlns:p="http://schemas.openxmlformats.org/presentationml/2006/main">
   <p:cSld>
+    <p:bg>
+      <p:bgRef idx="1001">
+        <a:schemeClr val="bg1"/>
+      </p:bgRef>
+    </p:bg>
     <p:spTree>
       <p:nvGrpSpPr>
         <p:cNvPr id="1" name=""/>
@@ -2049,6 +1779,13 @@
             <a:prstDash val="solid"/>
           </a:ln>
         </p:spPr>
+        <p:txBody>
+          <a:bodyPr/>
+          <a:lstStyle/>
+          <a:p>
+            <a:endParaRPr lang="pt-BR"/>
+          </a:p>
+        </p:txBody>
       </p:sp>
       <p:sp>
         <p:nvSpPr>
@@ -2078,6 +1815,13 @@
             <a:prstDash val="solid"/>
           </a:ln>
         </p:spPr>
+        <p:txBody>
+          <a:bodyPr/>
+          <a:lstStyle/>
+          <a:p>
+            <a:endParaRPr lang="pt-BR"/>
+          </a:p>
+        </p:txBody>
       </p:sp>
       <p:sp>
         <p:nvSpPr>
@@ -2103,6 +1847,13 @@
             <a:prstDash val="solid"/>
           </a:ln>
         </p:spPr>
+        <p:txBody>
+          <a:bodyPr/>
+          <a:lstStyle/>
+          <a:p>
+            <a:endParaRPr lang="pt-BR"/>
+          </a:p>
+        </p:txBody>
       </p:sp>
       <p:sp>
         <p:nvSpPr>
@@ -2125,11 +1876,11 @@
           <a:bodyPr wrap="square" rtlCol="0" anchor="ctr"/>
           <a:lstStyle/>
           <a:p>
-            <a:pPr algn="ctr" indent="0" marL="0">
-              <a:buNone/>
-            </a:pPr>
-            <a:r>
-              <a:rPr lang="en-US" sz="900" b="1" spc="300" kern="0" dirty="0">
+            <a:pPr marL="0" indent="0" algn="ctr">
+              <a:buNone/>
+            </a:pPr>
+            <a:r>
+              <a:rPr lang="en-US" sz="900" b="1" kern="0" spc="300" dirty="0">
                 <a:solidFill>
                   <a:srgbClr val="7C3AED"/>
                 </a:solidFill>
@@ -2164,7 +1915,7 @@
           <a:bodyPr wrap="square" rtlCol="0" anchor="ctr"/>
           <a:lstStyle/>
           <a:p>
-            <a:pPr algn="ctr" indent="0" marL="0">
+            <a:pPr marL="0" indent="0" algn="ctr">
               <a:lnSpc>
                 <a:spcPct val="110000"/>
               </a:lnSpc>
@@ -2184,7 +1935,7 @@
             <a:endParaRPr lang="en-US" sz="4800" dirty="0"/>
           </a:p>
           <a:p>
-            <a:pPr algn="ctr" indent="0" marL="0">
+            <a:pPr marL="0" indent="0" algn="ctr">
               <a:lnSpc>
                 <a:spcPct val="110000"/>
               </a:lnSpc>
@@ -2229,6 +1980,13 @@
             <a:prstDash val="solid"/>
           </a:ln>
         </p:spPr>
+        <p:txBody>
+          <a:bodyPr/>
+          <a:lstStyle/>
+          <a:p>
+            <a:endParaRPr lang="pt-BR"/>
+          </a:p>
+        </p:txBody>
       </p:sp>
       <p:sp>
         <p:nvSpPr>
@@ -2251,7 +2009,7 @@
           <a:bodyPr wrap="square" rtlCol="0" anchor="ctr"/>
           <a:lstStyle/>
           <a:p>
-            <a:pPr algn="ctr" indent="0" marL="0">
+            <a:pPr marL="0" indent="0" algn="ctr">
               <a:lnSpc>
                 <a:spcPct val="140000"/>
               </a:lnSpc>
@@ -2271,7 +2029,7 @@
             <a:endParaRPr lang="en-US" sz="2000" dirty="0"/>
           </a:p>
           <a:p>
-            <a:pPr algn="ctr" indent="0" marL="0">
+            <a:pPr marL="0" indent="0" algn="ctr">
               <a:lnSpc>
                 <a:spcPct val="140000"/>
               </a:lnSpc>
@@ -2313,7 +2071,7 @@
           <a:bodyPr wrap="square" rtlCol="0" anchor="ctr"/>
           <a:lstStyle/>
           <a:p>
-            <a:pPr algn="ctr" indent="0" marL="0">
+            <a:pPr marL="0" indent="0" algn="ctr">
               <a:buNone/>
             </a:pPr>
             <a:r>
@@ -2355,6 +2113,13 @@
             <a:prstDash val="solid"/>
           </a:ln>
         </p:spPr>
+        <p:txBody>
+          <a:bodyPr/>
+          <a:lstStyle/>
+          <a:p>
+            <a:endParaRPr lang="pt-BR"/>
+          </a:p>
+        </p:txBody>
       </p:sp>
     </p:spTree>
   </p:cSld>
@@ -2405,6 +2170,13 @@
             <a:prstDash val="solid"/>
           </a:ln>
         </p:spPr>
+        <p:txBody>
+          <a:bodyPr/>
+          <a:lstStyle/>
+          <a:p>
+            <a:endParaRPr lang="pt-BR"/>
+          </a:p>
+        </p:txBody>
       </p:sp>
       <p:sp>
         <p:nvSpPr>
@@ -2427,11 +2199,11 @@
           <a:bodyPr wrap="square" rtlCol="0" anchor="ctr"/>
           <a:lstStyle/>
           <a:p>
-            <a:pPr algn="ctr" indent="0" marL="0">
-              <a:buNone/>
-            </a:pPr>
-            <a:r>
-              <a:rPr lang="en-US" sz="900" b="1" spc="300" kern="0" dirty="0">
+            <a:pPr marL="0" indent="0" algn="ctr">
+              <a:buNone/>
+            </a:pPr>
+            <a:r>
+              <a:rPr lang="en-US" sz="900" b="1" kern="0" spc="300" dirty="0">
                 <a:solidFill>
                   <a:srgbClr val="7C3AED"/>
                 </a:solidFill>
@@ -2466,7 +2238,7 @@
           <a:bodyPr wrap="square" rtlCol="0" anchor="ctr"/>
           <a:lstStyle/>
           <a:p>
-            <a:pPr algn="ctr" indent="0" marL="0">
+            <a:pPr marL="0" indent="0" algn="ctr">
               <a:lnSpc>
                 <a:spcPct val="120000"/>
               </a:lnSpc>
@@ -2486,7 +2258,7 @@
             <a:endParaRPr lang="en-US" sz="3800" dirty="0"/>
           </a:p>
           <a:p>
-            <a:pPr algn="ctr" indent="0" marL="0">
+            <a:pPr marL="0" indent="0" algn="ctr">
               <a:lnSpc>
                 <a:spcPct val="120000"/>
               </a:lnSpc>
@@ -2531,6 +2303,13 @@
             <a:prstDash val="solid"/>
           </a:ln>
         </p:spPr>
+        <p:txBody>
+          <a:bodyPr/>
+          <a:lstStyle/>
+          <a:p>
+            <a:endParaRPr lang="pt-BR"/>
+          </a:p>
+        </p:txBody>
       </p:sp>
       <p:sp>
         <p:nvSpPr>
@@ -2544,9 +2323,7 @@
             <a:ext cx="5303520" cy="4023360"/>
           </a:xfrm>
           <a:prstGeom prst="rect">
-            <a:avLst>
-              <a:gd name="adj" fmla="val 3409"/>
-            </a:avLst>
+            <a:avLst/>
           </a:prstGeom>
           <a:solidFill>
             <a:srgbClr val="111111"/>
@@ -2558,6 +2335,13 @@
             <a:prstDash val="solid"/>
           </a:ln>
         </p:spPr>
+        <p:txBody>
+          <a:bodyPr/>
+          <a:lstStyle/>
+          <a:p>
+            <a:endParaRPr lang="pt-BR"/>
+          </a:p>
+        </p:txBody>
       </p:sp>
       <p:sp>
         <p:nvSpPr>
@@ -2580,11 +2364,11 @@
           <a:bodyPr wrap="square" rtlCol="0" anchor="ctr"/>
           <a:lstStyle/>
           <a:p>
-            <a:pPr algn="ctr" indent="0" marL="0">
-              <a:buNone/>
-            </a:pPr>
-            <a:r>
-              <a:rPr lang="en-US" sz="900" b="1" spc="300" kern="0" dirty="0">
+            <a:pPr marL="0" indent="0" algn="ctr">
+              <a:buNone/>
+            </a:pPr>
+            <a:r>
+              <a:rPr lang="en-US" sz="900" b="1" kern="0" spc="300" dirty="0">
                 <a:solidFill>
                   <a:srgbClr val="9CA3AF"/>
                 </a:solidFill>
@@ -2619,7 +2403,7 @@
           <a:bodyPr wrap="square" rtlCol="0" anchor="ctr"/>
           <a:lstStyle/>
           <a:p>
-            <a:pPr indent="0" marL="0">
+            <a:pPr marL="0" indent="0">
               <a:lnSpc>
                 <a:spcPct val="130000"/>
               </a:lnSpc>
@@ -2661,7 +2445,7 @@
           <a:bodyPr wrap="square" rtlCol="0" anchor="ctr"/>
           <a:lstStyle/>
           <a:p>
-            <a:pPr indent="0" marL="0">
+            <a:pPr marL="0" indent="0">
               <a:lnSpc>
                 <a:spcPct val="130000"/>
               </a:lnSpc>
@@ -2703,7 +2487,7 @@
           <a:bodyPr wrap="square" rtlCol="0" anchor="ctr"/>
           <a:lstStyle/>
           <a:p>
-            <a:pPr indent="0" marL="0">
+            <a:pPr marL="0" indent="0">
               <a:lnSpc>
                 <a:spcPct val="130000"/>
               </a:lnSpc>
@@ -2745,7 +2529,7 @@
           <a:bodyPr wrap="square" rtlCol="0" anchor="ctr"/>
           <a:lstStyle/>
           <a:p>
-            <a:pPr algn="ctr" indent="0" marL="0">
+            <a:pPr marL="0" indent="0" algn="ctr">
               <a:buNone/>
             </a:pPr>
             <a:r>
@@ -2775,9 +2559,7 @@
             <a:ext cx="5303520" cy="4023360"/>
           </a:xfrm>
           <a:prstGeom prst="rect">
-            <a:avLst>
-              <a:gd name="adj" fmla="val 3409"/>
-            </a:avLst>
+            <a:avLst/>
           </a:prstGeom>
           <a:solidFill>
             <a:srgbClr val="1A0A2E"/>
@@ -2789,6 +2571,13 @@
             <a:prstDash val="solid"/>
           </a:ln>
         </p:spPr>
+        <p:txBody>
+          <a:bodyPr/>
+          <a:lstStyle/>
+          <a:p>
+            <a:endParaRPr lang="pt-BR"/>
+          </a:p>
+        </p:txBody>
       </p:sp>
       <p:sp>
         <p:nvSpPr>
@@ -2811,11 +2600,11 @@
           <a:bodyPr wrap="square" rtlCol="0" anchor="ctr"/>
           <a:lstStyle/>
           <a:p>
-            <a:pPr algn="ctr" indent="0" marL="0">
-              <a:buNone/>
-            </a:pPr>
-            <a:r>
-              <a:rPr lang="en-US" sz="900" b="1" spc="300" kern="0" dirty="0">
+            <a:pPr marL="0" indent="0" algn="ctr">
+              <a:buNone/>
+            </a:pPr>
+            <a:r>
+              <a:rPr lang="en-US" sz="900" b="1" kern="0" spc="300" dirty="0">
                 <a:solidFill>
                   <a:srgbClr val="7C3AED"/>
                 </a:solidFill>
@@ -2850,7 +2639,7 @@
           <a:bodyPr wrap="square" rtlCol="0" anchor="ctr"/>
           <a:lstStyle/>
           <a:p>
-            <a:pPr indent="0" marL="0">
+            <a:pPr marL="0" indent="0">
               <a:lnSpc>
                 <a:spcPct val="120000"/>
               </a:lnSpc>
@@ -2892,7 +2681,7 @@
           <a:bodyPr wrap="square" rtlCol="0" anchor="ctr"/>
           <a:lstStyle/>
           <a:p>
-            <a:pPr indent="0" marL="0">
+            <a:pPr marL="0" indent="0">
               <a:lnSpc>
                 <a:spcPct val="120000"/>
               </a:lnSpc>
@@ -2934,7 +2723,7 @@
           <a:bodyPr wrap="square" rtlCol="0" anchor="ctr"/>
           <a:lstStyle/>
           <a:p>
-            <a:pPr indent="0" marL="0">
+            <a:pPr marL="0" indent="0">
               <a:lnSpc>
                 <a:spcPct val="120000"/>
               </a:lnSpc>
@@ -2976,7 +2765,7 @@
           <a:bodyPr wrap="square" rtlCol="0" anchor="ctr"/>
           <a:lstStyle/>
           <a:p>
-            <a:pPr indent="0" marL="0">
+            <a:pPr marL="0" indent="0">
               <a:lnSpc>
                 <a:spcPct val="120000"/>
               </a:lnSpc>
@@ -3018,7 +2807,7 @@
           <a:bodyPr wrap="square" rtlCol="0" anchor="ctr"/>
           <a:lstStyle/>
           <a:p>
-            <a:pPr indent="0" marL="0">
+            <a:pPr marL="0" indent="0">
               <a:lnSpc>
                 <a:spcPct val="120000"/>
               </a:lnSpc>
@@ -3060,7 +2849,7 @@
           <a:bodyPr wrap="square" rtlCol="0" anchor="ctr"/>
           <a:lstStyle/>
           <a:p>
-            <a:pPr indent="0" marL="0">
+            <a:pPr marL="0" indent="0">
               <a:lnSpc>
                 <a:spcPct val="120000"/>
               </a:lnSpc>
@@ -3102,7 +2891,7 @@
           <a:bodyPr wrap="square" rtlCol="0" anchor="ctr"/>
           <a:lstStyle/>
           <a:p>
-            <a:pPr algn="ctr" indent="0" marL="0">
+            <a:pPr marL="0" indent="0" algn="ctr">
               <a:buNone/>
             </a:pPr>
             <a:r>
@@ -3141,7 +2930,7 @@
           <a:bodyPr wrap="square" rtlCol="0" anchor="ctr"/>
           <a:lstStyle/>
           <a:p>
-            <a:pPr algn="ctr" indent="0" marL="0">
+            <a:pPr marL="0" indent="0" algn="ctr">
               <a:buNone/>
             </a:pPr>
             <a:r>
@@ -3208,6 +2997,13 @@
             <a:prstDash val="solid"/>
           </a:ln>
         </p:spPr>
+        <p:txBody>
+          <a:bodyPr/>
+          <a:lstStyle/>
+          <a:p>
+            <a:endParaRPr lang="pt-BR"/>
+          </a:p>
+        </p:txBody>
       </p:sp>
       <p:sp>
         <p:nvSpPr>
@@ -3230,11 +3026,11 @@
           <a:bodyPr wrap="square" rtlCol="0" anchor="ctr"/>
           <a:lstStyle/>
           <a:p>
-            <a:pPr algn="ctr" indent="0" marL="0">
-              <a:buNone/>
-            </a:pPr>
-            <a:r>
-              <a:rPr lang="en-US" sz="900" b="1" spc="300" kern="0" dirty="0">
+            <a:pPr marL="0" indent="0" algn="ctr">
+              <a:buNone/>
+            </a:pPr>
+            <a:r>
+              <a:rPr lang="en-US" sz="900" b="1" kern="0" spc="300" dirty="0">
                 <a:solidFill>
                   <a:srgbClr val="7C3AED"/>
                 </a:solidFill>
@@ -3269,7 +3065,7 @@
           <a:bodyPr wrap="square" rtlCol="0" anchor="ctr"/>
           <a:lstStyle/>
           <a:p>
-            <a:pPr algn="ctr" indent="0" marL="0">
+            <a:pPr marL="0" indent="0" algn="ctr">
               <a:buNone/>
             </a:pPr>
             <a:r>
@@ -3308,11 +3104,11 @@
           <a:bodyPr wrap="square" rtlCol="0" anchor="ctr"/>
           <a:lstStyle/>
           <a:p>
-            <a:pPr algn="ctr" indent="0" marL="0">
-              <a:buNone/>
-            </a:pPr>
-            <a:r>
-              <a:rPr lang="en-US" sz="1000" b="1" spc="100" kern="0" dirty="0">
+            <a:pPr marL="0" indent="0" algn="ctr">
+              <a:buNone/>
+            </a:pPr>
+            <a:r>
+              <a:rPr lang="en-US" sz="1000" b="1" kern="0" spc="100" dirty="0">
                 <a:solidFill>
                   <a:srgbClr val="9CA3AF"/>
                 </a:solidFill>
@@ -3347,11 +3143,11 @@
           <a:bodyPr wrap="square" rtlCol="0" anchor="ctr"/>
           <a:lstStyle/>
           <a:p>
-            <a:pPr algn="ctr" indent="0" marL="0">
-              <a:buNone/>
-            </a:pPr>
-            <a:r>
-              <a:rPr lang="en-US" sz="1000" b="1" spc="100" kern="0" dirty="0">
+            <a:pPr marL="0" indent="0" algn="ctr">
+              <a:buNone/>
+            </a:pPr>
+            <a:r>
+              <a:rPr lang="en-US" sz="1000" b="1" kern="0" spc="100" dirty="0">
                 <a:solidFill>
                   <a:srgbClr val="9CA3AF"/>
                 </a:solidFill>
@@ -3386,11 +3182,11 @@
           <a:bodyPr wrap="square" rtlCol="0" anchor="ctr"/>
           <a:lstStyle/>
           <a:p>
-            <a:pPr algn="ctr" indent="0" marL="0">
-              <a:buNone/>
-            </a:pPr>
-            <a:r>
-              <a:rPr lang="en-US" sz="1000" b="1" spc="100" kern="0" dirty="0">
+            <a:pPr marL="0" indent="0" algn="ctr">
+              <a:buNone/>
+            </a:pPr>
+            <a:r>
+              <a:rPr lang="en-US" sz="1000" b="1" kern="0" spc="100" dirty="0">
                 <a:solidFill>
                   <a:srgbClr val="9CA3AF"/>
                 </a:solidFill>
@@ -3425,11 +3221,11 @@
           <a:bodyPr wrap="square" rtlCol="0" anchor="ctr"/>
           <a:lstStyle/>
           <a:p>
-            <a:pPr algn="ctr" indent="0" marL="0">
-              <a:buNone/>
-            </a:pPr>
-            <a:r>
-              <a:rPr lang="en-US" sz="1000" b="1" spc="100" kern="0" dirty="0">
+            <a:pPr marL="0" indent="0" algn="ctr">
+              <a:buNone/>
+            </a:pPr>
+            <a:r>
+              <a:rPr lang="en-US" sz="1000" b="1" kern="0" spc="100" dirty="0">
                 <a:solidFill>
                   <a:srgbClr val="9CA3AF"/>
                 </a:solidFill>
@@ -3467,6 +3263,13 @@
             <a:prstDash val="solid"/>
           </a:ln>
         </p:spPr>
+        <p:txBody>
+          <a:bodyPr/>
+          <a:lstStyle/>
+          <a:p>
+            <a:endParaRPr lang="pt-BR"/>
+          </a:p>
+        </p:txBody>
       </p:sp>
       <p:sp>
         <p:nvSpPr>
@@ -3489,7 +3292,7 @@
           <a:bodyPr wrap="square" rtlCol="0" anchor="ctr"/>
           <a:lstStyle/>
           <a:p>
-            <a:pPr algn="ctr" indent="0" marL="0">
+            <a:pPr marL="0" indent="0" algn="ctr">
               <a:buNone/>
             </a:pPr>
             <a:r>
@@ -3528,7 +3331,7 @@
           <a:bodyPr wrap="square" rtlCol="0" anchor="ctr"/>
           <a:lstStyle/>
           <a:p>
-            <a:pPr algn="ctr" indent="0" marL="0">
+            <a:pPr marL="0" indent="0" algn="ctr">
               <a:buNone/>
             </a:pPr>
             <a:r>
@@ -3567,7 +3370,7 @@
           <a:bodyPr wrap="square" rtlCol="0" anchor="ctr"/>
           <a:lstStyle/>
           <a:p>
-            <a:pPr algn="ctr" indent="0" marL="0">
+            <a:pPr marL="0" indent="0" algn="ctr">
               <a:buNone/>
             </a:pPr>
             <a:r>
@@ -3606,7 +3409,7 @@
           <a:bodyPr wrap="square" rtlCol="0" anchor="ctr"/>
           <a:lstStyle/>
           <a:p>
-            <a:pPr algn="ctr" indent="0" marL="0">
+            <a:pPr marL="0" indent="0" algn="ctr">
               <a:buNone/>
             </a:pPr>
             <a:r>
@@ -3645,7 +3448,7 @@
           <a:bodyPr wrap="square" rtlCol="0" anchor="ctr"/>
           <a:lstStyle/>
           <a:p>
-            <a:pPr algn="ctr" indent="0" marL="0">
+            <a:pPr marL="0" indent="0" algn="ctr">
               <a:buNone/>
             </a:pPr>
             <a:r>
@@ -3684,7 +3487,7 @@
           <a:bodyPr wrap="square" rtlCol="0" anchor="ctr"/>
           <a:lstStyle/>
           <a:p>
-            <a:pPr algn="ctr" indent="0" marL="0">
+            <a:pPr marL="0" indent="0" algn="ctr">
               <a:buNone/>
             </a:pPr>
             <a:r>
@@ -3723,7 +3526,7 @@
           <a:bodyPr wrap="square" rtlCol="0" anchor="ctr"/>
           <a:lstStyle/>
           <a:p>
-            <a:pPr algn="ctr" indent="0" marL="0">
+            <a:pPr marL="0" indent="0" algn="ctr">
               <a:buNone/>
             </a:pPr>
             <a:r>
@@ -3762,7 +3565,7 @@
           <a:bodyPr wrap="square" rtlCol="0" anchor="ctr"/>
           <a:lstStyle/>
           <a:p>
-            <a:pPr algn="ctr" indent="0" marL="0">
+            <a:pPr marL="0" indent="0" algn="ctr">
               <a:buNone/>
             </a:pPr>
             <a:r>
@@ -3792,9 +3595,7 @@
             <a:ext cx="10241280" cy="594360"/>
           </a:xfrm>
           <a:prstGeom prst="rect">
-            <a:avLst>
-              <a:gd name="adj" fmla="val 12308"/>
-            </a:avLst>
+            <a:avLst/>
           </a:prstGeom>
           <a:solidFill>
             <a:srgbClr val="1A0A2E"/>
@@ -3806,6 +3607,13 @@
             <a:prstDash val="solid"/>
           </a:ln>
         </p:spPr>
+        <p:txBody>
+          <a:bodyPr/>
+          <a:lstStyle/>
+          <a:p>
+            <a:endParaRPr lang="pt-BR"/>
+          </a:p>
+        </p:txBody>
       </p:sp>
       <p:sp>
         <p:nvSpPr>
@@ -3828,7 +3636,7 @@
           <a:bodyPr wrap="square" rtlCol="0" anchor="ctr"/>
           <a:lstStyle/>
           <a:p>
-            <a:pPr algn="ctr" indent="0" marL="0">
+            <a:pPr marL="0" indent="0" algn="ctr">
               <a:buNone/>
             </a:pPr>
             <a:r>
@@ -3867,7 +3675,7 @@
           <a:bodyPr wrap="square" rtlCol="0" anchor="ctr"/>
           <a:lstStyle/>
           <a:p>
-            <a:pPr algn="ctr" indent="0" marL="0">
+            <a:pPr marL="0" indent="0" algn="ctr">
               <a:buNone/>
             </a:pPr>
             <a:r>
@@ -3906,7 +3714,7 @@
           <a:bodyPr wrap="square" rtlCol="0" anchor="ctr"/>
           <a:lstStyle/>
           <a:p>
-            <a:pPr algn="ctr" indent="0" marL="0">
+            <a:pPr marL="0" indent="0" algn="ctr">
               <a:buNone/>
             </a:pPr>
             <a:r>
@@ -3945,7 +3753,7 @@
           <a:bodyPr wrap="square" rtlCol="0" anchor="ctr"/>
           <a:lstStyle/>
           <a:p>
-            <a:pPr algn="ctr" indent="0" marL="0">
+            <a:pPr marL="0" indent="0" algn="ctr">
               <a:buNone/>
             </a:pPr>
             <a:r>
@@ -3984,7 +3792,7 @@
           <a:bodyPr wrap="square" rtlCol="0" anchor="ctr"/>
           <a:lstStyle/>
           <a:p>
-            <a:pPr algn="ctr" indent="0" marL="0">
+            <a:pPr marL="0" indent="0" algn="ctr">
               <a:buNone/>
             </a:pPr>
             <a:r>
@@ -4023,14 +3831,14 @@
           <a:bodyPr wrap="square" rtlCol="0" anchor="ctr"/>
           <a:lstStyle/>
           <a:p>
-            <a:pPr algn="ctr" indent="0" marL="0">
+            <a:pPr marL="0" indent="0" algn="ctr">
               <a:lnSpc>
                 <a:spcPct val="140000"/>
               </a:lnSpc>
               <a:buNone/>
             </a:pPr>
             <a:r>
-              <a:rPr lang="en-US" sz="900" b="1" spc="100" kern="0" dirty="0">
+              <a:rPr lang="en-US" sz="900" b="1" kern="0" spc="100" dirty="0">
                 <a:solidFill>
                   <a:srgbClr val="9CA3AF"/>
                 </a:solidFill>
@@ -4043,14 +3851,14 @@
             <a:endParaRPr lang="en-US" sz="900" dirty="0"/>
           </a:p>
           <a:p>
-            <a:pPr algn="ctr" indent="0" marL="0">
+            <a:pPr marL="0" indent="0" algn="ctr">
               <a:lnSpc>
                 <a:spcPct val="140000"/>
               </a:lnSpc>
               <a:buNone/>
             </a:pPr>
             <a:r>
-              <a:rPr lang="en-US" sz="900" b="1" spc="100" kern="0" dirty="0">
+              <a:rPr lang="en-US" sz="900" b="1" kern="0" spc="100" dirty="0">
                 <a:solidFill>
                   <a:srgbClr val="9CA3AF"/>
                 </a:solidFill>
@@ -4088,6 +3896,13 @@
             <a:prstDash val="solid"/>
           </a:ln>
         </p:spPr>
+        <p:txBody>
+          <a:bodyPr/>
+          <a:lstStyle/>
+          <a:p>
+            <a:endParaRPr lang="pt-BR"/>
+          </a:p>
+        </p:txBody>
       </p:sp>
       <p:sp>
         <p:nvSpPr>
@@ -4110,7 +3925,7 @@
           <a:bodyPr wrap="square" rtlCol="0" anchor="ctr"/>
           <a:lstStyle/>
           <a:p>
-            <a:pPr algn="ctr" indent="0" marL="0">
+            <a:pPr marL="0" indent="0" algn="ctr">
               <a:buNone/>
             </a:pPr>
             <a:r>
@@ -4149,14 +3964,14 @@
           <a:bodyPr wrap="square" rtlCol="0" anchor="ctr"/>
           <a:lstStyle/>
           <a:p>
-            <a:pPr algn="ctr" indent="0" marL="0">
+            <a:pPr marL="0" indent="0" algn="ctr">
               <a:lnSpc>
                 <a:spcPct val="140000"/>
               </a:lnSpc>
               <a:buNone/>
             </a:pPr>
             <a:r>
-              <a:rPr lang="en-US" sz="900" b="1" spc="100" kern="0" dirty="0">
+              <a:rPr lang="en-US" sz="900" b="1" kern="0" spc="100" dirty="0">
                 <a:solidFill>
                   <a:srgbClr val="9CA3AF"/>
                 </a:solidFill>
@@ -4169,14 +3984,14 @@
             <a:endParaRPr lang="en-US" sz="900" dirty="0"/>
           </a:p>
           <a:p>
-            <a:pPr algn="ctr" indent="0" marL="0">
+            <a:pPr marL="0" indent="0" algn="ctr">
               <a:lnSpc>
                 <a:spcPct val="140000"/>
               </a:lnSpc>
               <a:buNone/>
             </a:pPr>
             <a:r>
-              <a:rPr lang="en-US" sz="900" b="1" spc="100" kern="0" dirty="0">
+              <a:rPr lang="en-US" sz="900" b="1" kern="0" spc="100" dirty="0">
                 <a:solidFill>
                   <a:srgbClr val="9CA3AF"/>
                 </a:solidFill>
@@ -4211,7 +4026,7 @@
           <a:bodyPr wrap="square" rtlCol="0" anchor="ctr"/>
           <a:lstStyle/>
           <a:p>
-            <a:pPr algn="ctr" indent="0" marL="0">
+            <a:pPr marL="0" indent="0" algn="ctr">
               <a:buNone/>
             </a:pPr>
             <a:r>
@@ -4250,7 +4065,7 @@
           <a:bodyPr wrap="square" rtlCol="0" anchor="ctr"/>
           <a:lstStyle/>
           <a:p>
-            <a:pPr algn="ctr" indent="0" marL="0">
+            <a:pPr marL="0" indent="0" algn="ctr">
               <a:buNone/>
             </a:pPr>
             <a:r>
@@ -4317,6 +4132,13 @@
             <a:prstDash val="solid"/>
           </a:ln>
         </p:spPr>
+        <p:txBody>
+          <a:bodyPr/>
+          <a:lstStyle/>
+          <a:p>
+            <a:endParaRPr lang="pt-BR"/>
+          </a:p>
+        </p:txBody>
       </p:sp>
       <p:sp>
         <p:nvSpPr>
@@ -4339,11 +4161,11 @@
           <a:bodyPr wrap="square" rtlCol="0" anchor="ctr"/>
           <a:lstStyle/>
           <a:p>
-            <a:pPr algn="ctr" indent="0" marL="0">
-              <a:buNone/>
-            </a:pPr>
-            <a:r>
-              <a:rPr lang="en-US" sz="900" b="1" spc="300" kern="0" dirty="0">
+            <a:pPr marL="0" indent="0" algn="ctr">
+              <a:buNone/>
+            </a:pPr>
+            <a:r>
+              <a:rPr lang="en-US" sz="900" b="1" kern="0" spc="300" dirty="0">
                 <a:solidFill>
                   <a:srgbClr val="7C3AED"/>
                 </a:solidFill>
@@ -4378,7 +4200,7 @@
           <a:bodyPr wrap="square" rtlCol="0" anchor="ctr"/>
           <a:lstStyle/>
           <a:p>
-            <a:pPr algn="ctr" indent="0" marL="0">
+            <a:pPr marL="0" indent="0" algn="ctr">
               <a:lnSpc>
                 <a:spcPct val="110000"/>
               </a:lnSpc>
@@ -4396,12 +4218,6 @@
               <a:t>Tudo que eu prometo,
 </a:t>
             </a:r>
-            <a:pPr algn="ctr" indent="0" marL="0">
-              <a:lnSpc>
-                <a:spcPct val="110000"/>
-              </a:lnSpc>
-              <a:buNone/>
-            </a:pPr>
             <a:r>
               <a:rPr lang="en-US" sz="5200" b="1" dirty="0">
                 <a:solidFill>
@@ -4441,6 +4257,13 @@
             <a:prstDash val="solid"/>
           </a:ln>
         </p:spPr>
+        <p:txBody>
+          <a:bodyPr/>
+          <a:lstStyle/>
+          <a:p>
+            <a:endParaRPr lang="pt-BR"/>
+          </a:p>
+        </p:txBody>
       </p:sp>
       <p:sp>
         <p:nvSpPr>
@@ -4463,7 +4286,7 @@
           <a:bodyPr wrap="square" rtlCol="0" anchor="ctr"/>
           <a:lstStyle/>
           <a:p>
-            <a:pPr algn="ctr" indent="0" marL="0">
+            <a:pPr marL="0" indent="0" algn="ctr">
               <a:lnSpc>
                 <a:spcPct val="145000"/>
               </a:lnSpc>
@@ -4483,7 +4306,7 @@
             <a:endParaRPr lang="en-US" sz="1800" dirty="0"/>
           </a:p>
           <a:p>
-            <a:pPr algn="ctr" indent="0" marL="0">
+            <a:pPr marL="0" indent="0" algn="ctr">
               <a:lnSpc>
                 <a:spcPct val="145000"/>
               </a:lnSpc>
@@ -4525,20 +4348,9 @@
           <a:bodyPr wrap="square" rtlCol="0" anchor="ctr"/>
           <a:lstStyle/>
           <a:p>
-            <a:pPr indent="0" marL="0">
-              <a:buNone/>
-            </a:pPr>
-            <a:r>
-              <a:rPr lang="en-US" sz="1800" b="1" dirty="0">
-                <a:solidFill>
-                  <a:srgbClr val="7C3AED"/>
-                </a:solidFill>
-                <a:latin typeface="Calibri" pitchFamily="34" charset="0"/>
-                <a:ea typeface="Calibri" pitchFamily="34" charset="-122"/>
-                <a:cs typeface="Calibri" pitchFamily="34" charset="-120"/>
-              </a:rPr>
-              <a:t>✓</a:t>
-            </a:r>
+            <a:pPr marL="0" indent="0">
+              <a:buNone/>
+            </a:pPr>
             <a:endParaRPr lang="en-US" sz="1800" dirty="0"/>
           </a:p>
         </p:txBody>
@@ -4564,53 +4376,84 @@
           <a:bodyPr wrap="square" rtlCol="0" anchor="ctr"/>
           <a:lstStyle/>
           <a:p>
-            <a:pPr indent="0" marL="0">
+            <a:pPr marL="0" indent="0">
               <a:lnSpc>
                 <a:spcPct val="130000"/>
               </a:lnSpc>
               <a:buNone/>
             </a:pPr>
-            <a:r>
-              <a:rPr lang="en-US" sz="1400" b="1" dirty="0">
-                <a:solidFill>
-                  <a:srgbClr val="FFFFFF"/>
-                </a:solidFill>
-                <a:latin typeface="Calibri" pitchFamily="34" charset="0"/>
-                <a:ea typeface="Calibri" pitchFamily="34" charset="-122"/>
-                <a:cs typeface="Calibri" pitchFamily="34" charset="-120"/>
-              </a:rPr>
-              <a:t>Divisão de receita clara e verificável</a:t>
-            </a:r>
-            <a:pPr indent="0" marL="0">
+            <a:endParaRPr lang="en-US" sz="1400" dirty="0"/>
+          </a:p>
+        </p:txBody>
+      </p:sp>
+      <p:sp>
+        <p:nvSpPr>
+          <p:cNvPr id="9" name="Text 7"/>
+          <p:cNvSpPr/>
+          <p:nvPr/>
+        </p:nvSpPr>
+        <p:spPr>
+          <a:xfrm>
+            <a:off x="1371600" y="4133088"/>
+            <a:ext cx="365760" cy="640080"/>
+          </a:xfrm>
+          <a:prstGeom prst="rect">
+            <a:avLst/>
+          </a:prstGeom>
+          <a:noFill/>
+          <a:ln/>
+        </p:spPr>
+        <p:txBody>
+          <a:bodyPr wrap="square" rtlCol="0" anchor="ctr"/>
+          <a:lstStyle/>
+          <a:p>
+            <a:pPr marL="0" indent="0">
+              <a:buNone/>
+            </a:pPr>
+            <a:endParaRPr lang="en-US" sz="1800" dirty="0"/>
+          </a:p>
+        </p:txBody>
+      </p:sp>
+      <p:sp>
+        <p:nvSpPr>
+          <p:cNvPr id="10" name="Text 8"/>
+          <p:cNvSpPr/>
+          <p:nvPr/>
+        </p:nvSpPr>
+        <p:spPr>
+          <a:xfrm>
+            <a:off x="1874520" y="4133088"/>
+            <a:ext cx="8897112" cy="640080"/>
+          </a:xfrm>
+          <a:prstGeom prst="rect">
+            <a:avLst/>
+          </a:prstGeom>
+          <a:noFill/>
+          <a:ln/>
+        </p:spPr>
+        <p:txBody>
+          <a:bodyPr wrap="square" rtlCol="0" anchor="ctr"/>
+          <a:lstStyle/>
+          <a:p>
+            <a:pPr marL="0" indent="0">
               <a:lnSpc>
                 <a:spcPct val="130000"/>
               </a:lnSpc>
               <a:buNone/>
             </a:pPr>
-            <a:r>
-              <a:rPr lang="en-US" sz="1400" dirty="0">
-                <a:solidFill>
-                  <a:srgbClr val="9CA3AF"/>
-                </a:solidFill>
-                <a:latin typeface="Calibri" pitchFamily="34" charset="0"/>
-                <a:ea typeface="Calibri" pitchFamily="34" charset="-122"/>
-                <a:cs typeface="Calibri" pitchFamily="34" charset="-120"/>
-              </a:rPr>
-              <a:t> — você acompanha em tempo real.</a:t>
-            </a:r>
             <a:endParaRPr lang="en-US" sz="1400" dirty="0"/>
           </a:p>
         </p:txBody>
       </p:sp>
       <p:sp>
         <p:nvSpPr>
-          <p:cNvPr id="9" name="Text 7"/>
-          <p:cNvSpPr/>
-          <p:nvPr/>
-        </p:nvSpPr>
-        <p:spPr>
-          <a:xfrm>
-            <a:off x="1371600" y="4133088"/>
+          <p:cNvPr id="11" name="Text 9"/>
+          <p:cNvSpPr/>
+          <p:nvPr/>
+        </p:nvSpPr>
+        <p:spPr>
+          <a:xfrm>
+            <a:off x="1371600" y="4882896"/>
             <a:ext cx="365760" cy="640080"/>
           </a:xfrm>
           <a:prstGeom prst="rect">
@@ -4623,33 +4466,22 @@
           <a:bodyPr wrap="square" rtlCol="0" anchor="ctr"/>
           <a:lstStyle/>
           <a:p>
-            <a:pPr indent="0" marL="0">
-              <a:buNone/>
-            </a:pPr>
-            <a:r>
-              <a:rPr lang="en-US" sz="1800" b="1" dirty="0">
-                <a:solidFill>
-                  <a:srgbClr val="7C3AED"/>
-                </a:solidFill>
-                <a:latin typeface="Calibri" pitchFamily="34" charset="0"/>
-                <a:ea typeface="Calibri" pitchFamily="34" charset="-122"/>
-                <a:cs typeface="Calibri" pitchFamily="34" charset="-120"/>
-              </a:rPr>
-              <a:t>✓</a:t>
-            </a:r>
+            <a:pPr marL="0" indent="0">
+              <a:buNone/>
+            </a:pPr>
             <a:endParaRPr lang="en-US" sz="1800" dirty="0"/>
           </a:p>
         </p:txBody>
       </p:sp>
       <p:sp>
         <p:nvSpPr>
-          <p:cNvPr id="10" name="Text 8"/>
-          <p:cNvSpPr/>
-          <p:nvPr/>
-        </p:nvSpPr>
-        <p:spPr>
-          <a:xfrm>
-            <a:off x="1874520" y="4133088"/>
+          <p:cNvPr id="12" name="Text 10"/>
+          <p:cNvSpPr/>
+          <p:nvPr/>
+        </p:nvSpPr>
+        <p:spPr>
+          <a:xfrm>
+            <a:off x="1874520" y="4882896"/>
             <a:ext cx="8897112" cy="640080"/>
           </a:xfrm>
           <a:prstGeom prst="rect">
@@ -4662,249 +4494,84 @@
           <a:bodyPr wrap="square" rtlCol="0" anchor="ctr"/>
           <a:lstStyle/>
           <a:p>
-            <a:pPr indent="0" marL="0">
+            <a:pPr marL="0" indent="0">
               <a:lnSpc>
                 <a:spcPct val="130000"/>
               </a:lnSpc>
               <a:buNone/>
             </a:pPr>
-            <a:r>
-              <a:rPr lang="en-US" sz="1400" b="1" dirty="0">
-                <a:solidFill>
-                  <a:srgbClr val="FFFFFF"/>
-                </a:solidFill>
-                <a:latin typeface="Calibri" pitchFamily="34" charset="0"/>
-                <a:ea typeface="Calibri" pitchFamily="34" charset="-122"/>
-                <a:cs typeface="Calibri" pitchFamily="34" charset="-120"/>
-              </a:rPr>
-              <a:t>Seu conteúdo permanece seu</a:t>
-            </a:r>
-            <a:pPr indent="0" marL="0">
+            <a:endParaRPr lang="en-US" sz="1400" dirty="0"/>
+          </a:p>
+        </p:txBody>
+      </p:sp>
+      <p:sp>
+        <p:nvSpPr>
+          <p:cNvPr id="13" name="Text 11"/>
+          <p:cNvSpPr/>
+          <p:nvPr/>
+        </p:nvSpPr>
+        <p:spPr>
+          <a:xfrm>
+            <a:off x="1371600" y="5632704"/>
+            <a:ext cx="365760" cy="640080"/>
+          </a:xfrm>
+          <a:prstGeom prst="rect">
+            <a:avLst/>
+          </a:prstGeom>
+          <a:noFill/>
+          <a:ln/>
+        </p:spPr>
+        <p:txBody>
+          <a:bodyPr wrap="square" rtlCol="0" anchor="ctr"/>
+          <a:lstStyle/>
+          <a:p>
+            <a:pPr marL="0" indent="0">
+              <a:buNone/>
+            </a:pPr>
+            <a:endParaRPr lang="en-US" sz="1800" dirty="0"/>
+          </a:p>
+        </p:txBody>
+      </p:sp>
+      <p:sp>
+        <p:nvSpPr>
+          <p:cNvPr id="14" name="Text 12"/>
+          <p:cNvSpPr/>
+          <p:nvPr/>
+        </p:nvSpPr>
+        <p:spPr>
+          <a:xfrm>
+            <a:off x="1874520" y="5632704"/>
+            <a:ext cx="8897112" cy="640080"/>
+          </a:xfrm>
+          <a:prstGeom prst="rect">
+            <a:avLst/>
+          </a:prstGeom>
+          <a:noFill/>
+          <a:ln/>
+        </p:spPr>
+        <p:txBody>
+          <a:bodyPr wrap="square" rtlCol="0" anchor="ctr"/>
+          <a:lstStyle/>
+          <a:p>
+            <a:pPr marL="0" indent="0">
               <a:lnSpc>
                 <a:spcPct val="130000"/>
               </a:lnSpc>
               <a:buNone/>
             </a:pPr>
-            <a:r>
-              <a:rPr lang="en-US" sz="1400" dirty="0">
-                <a:solidFill>
-                  <a:srgbClr val="9CA3AF"/>
-                </a:solidFill>
-                <a:latin typeface="Calibri" pitchFamily="34" charset="0"/>
-                <a:ea typeface="Calibri" pitchFamily="34" charset="-122"/>
-                <a:cs typeface="Calibri" pitchFamily="34" charset="-120"/>
-              </a:rPr>
-              <a:t> — nada é usado fora desta parceria sem sua autorização.</a:t>
-            </a:r>
             <a:endParaRPr lang="en-US" sz="1400" dirty="0"/>
           </a:p>
         </p:txBody>
       </p:sp>
       <p:sp>
         <p:nvSpPr>
-          <p:cNvPr id="11" name="Text 9"/>
-          <p:cNvSpPr/>
-          <p:nvPr/>
-        </p:nvSpPr>
-        <p:spPr>
-          <a:xfrm>
-            <a:off x="1371600" y="4882896"/>
-            <a:ext cx="365760" cy="640080"/>
-          </a:xfrm>
-          <a:prstGeom prst="rect">
-            <a:avLst/>
-          </a:prstGeom>
-          <a:noFill/>
-          <a:ln/>
-        </p:spPr>
-        <p:txBody>
-          <a:bodyPr wrap="square" rtlCol="0" anchor="ctr"/>
-          <a:lstStyle/>
-          <a:p>
-            <a:pPr indent="0" marL="0">
-              <a:buNone/>
-            </a:pPr>
-            <a:r>
-              <a:rPr lang="en-US" sz="1800" b="1" dirty="0">
-                <a:solidFill>
-                  <a:srgbClr val="7C3AED"/>
-                </a:solidFill>
-                <a:latin typeface="Calibri" pitchFamily="34" charset="0"/>
-                <a:ea typeface="Calibri" pitchFamily="34" charset="-122"/>
-                <a:cs typeface="Calibri" pitchFamily="34" charset="-120"/>
-              </a:rPr>
-              <a:t>✓</a:t>
-            </a:r>
-            <a:endParaRPr lang="en-US" sz="1800" dirty="0"/>
-          </a:p>
-        </p:txBody>
-      </p:sp>
-      <p:sp>
-        <p:nvSpPr>
-          <p:cNvPr id="12" name="Text 10"/>
-          <p:cNvSpPr/>
-          <p:nvPr/>
-        </p:nvSpPr>
-        <p:spPr>
-          <a:xfrm>
-            <a:off x="1874520" y="4882896"/>
-            <a:ext cx="8897112" cy="640080"/>
-          </a:xfrm>
-          <a:prstGeom prst="rect">
-            <a:avLst/>
-          </a:prstGeom>
-          <a:noFill/>
-          <a:ln/>
-        </p:spPr>
-        <p:txBody>
-          <a:bodyPr wrap="square" rtlCol="0" anchor="ctr"/>
-          <a:lstStyle/>
-          <a:p>
-            <a:pPr indent="0" marL="0">
-              <a:lnSpc>
-                <a:spcPct val="130000"/>
-              </a:lnSpc>
-              <a:buNone/>
-            </a:pPr>
-            <a:r>
-              <a:rPr lang="en-US" sz="1400" b="1" dirty="0">
-                <a:solidFill>
-                  <a:srgbClr val="FFFFFF"/>
-                </a:solidFill>
-                <a:latin typeface="Calibri" pitchFamily="34" charset="0"/>
-                <a:ea typeface="Calibri" pitchFamily="34" charset="-122"/>
-                <a:cs typeface="Calibri" pitchFamily="34" charset="-120"/>
-              </a:rPr>
-              <a:t>Sem exclusividade</a:t>
-            </a:r>
-            <a:pPr indent="0" marL="0">
-              <a:lnSpc>
-                <a:spcPct val="130000"/>
-              </a:lnSpc>
-              <a:buNone/>
-            </a:pPr>
-            <a:r>
-              <a:rPr lang="en-US" sz="1400" dirty="0">
-                <a:solidFill>
-                  <a:srgbClr val="9CA3AF"/>
-                </a:solidFill>
-                <a:latin typeface="Calibri" pitchFamily="34" charset="0"/>
-                <a:ea typeface="Calibri" pitchFamily="34" charset="-122"/>
-                <a:cs typeface="Calibri" pitchFamily="34" charset="-120"/>
-              </a:rPr>
-              <a:t> — você mantém todos os seus projetos e atendimentos.</a:t>
-            </a:r>
-            <a:endParaRPr lang="en-US" sz="1400" dirty="0"/>
-          </a:p>
-        </p:txBody>
-      </p:sp>
-      <p:sp>
-        <p:nvSpPr>
-          <p:cNvPr id="13" name="Text 11"/>
-          <p:cNvSpPr/>
-          <p:nvPr/>
-        </p:nvSpPr>
-        <p:spPr>
-          <a:xfrm>
-            <a:off x="1371600" y="5632704"/>
-            <a:ext cx="365760" cy="640080"/>
-          </a:xfrm>
-          <a:prstGeom prst="rect">
-            <a:avLst/>
-          </a:prstGeom>
-          <a:noFill/>
-          <a:ln/>
-        </p:spPr>
-        <p:txBody>
-          <a:bodyPr wrap="square" rtlCol="0" anchor="ctr"/>
-          <a:lstStyle/>
-          <a:p>
-            <a:pPr indent="0" marL="0">
-              <a:buNone/>
-            </a:pPr>
-            <a:r>
-              <a:rPr lang="en-US" sz="1800" b="1" dirty="0">
-                <a:solidFill>
-                  <a:srgbClr val="7C3AED"/>
-                </a:solidFill>
-                <a:latin typeface="Calibri" pitchFamily="34" charset="0"/>
-                <a:ea typeface="Calibri" pitchFamily="34" charset="-122"/>
-                <a:cs typeface="Calibri" pitchFamily="34" charset="-120"/>
-              </a:rPr>
-              <a:t>✓</a:t>
-            </a:r>
-            <a:endParaRPr lang="en-US" sz="1800" dirty="0"/>
-          </a:p>
-        </p:txBody>
-      </p:sp>
-      <p:sp>
-        <p:nvSpPr>
-          <p:cNvPr id="14" name="Text 12"/>
-          <p:cNvSpPr/>
-          <p:nvPr/>
-        </p:nvSpPr>
-        <p:spPr>
-          <a:xfrm>
-            <a:off x="1874520" y="5632704"/>
-            <a:ext cx="8897112" cy="640080"/>
-          </a:xfrm>
-          <a:prstGeom prst="rect">
-            <a:avLst/>
-          </a:prstGeom>
-          <a:noFill/>
-          <a:ln/>
-        </p:spPr>
-        <p:txBody>
-          <a:bodyPr wrap="square" rtlCol="0" anchor="ctr"/>
-          <a:lstStyle/>
-          <a:p>
-            <a:pPr indent="0" marL="0">
-              <a:lnSpc>
-                <a:spcPct val="130000"/>
-              </a:lnSpc>
-              <a:buNone/>
-            </a:pPr>
-            <a:r>
-              <a:rPr lang="en-US" sz="1400" b="1" dirty="0">
-                <a:solidFill>
-                  <a:srgbClr val="FFFFFF"/>
-                </a:solidFill>
-                <a:latin typeface="Calibri" pitchFamily="34" charset="0"/>
-                <a:ea typeface="Calibri" pitchFamily="34" charset="-122"/>
-                <a:cs typeface="Calibri" pitchFamily="34" charset="-120"/>
-              </a:rPr>
-              <a:t>Saída garantida</a:t>
-            </a:r>
-            <a:pPr indent="0" marL="0">
-              <a:lnSpc>
-                <a:spcPct val="130000"/>
-              </a:lnSpc>
-              <a:buNone/>
-            </a:pPr>
-            <a:r>
-              <a:rPr lang="en-US" sz="1400" dirty="0">
-                <a:solidFill>
-                  <a:srgbClr val="9CA3AF"/>
-                </a:solidFill>
-                <a:latin typeface="Calibri" pitchFamily="34" charset="0"/>
-                <a:ea typeface="Calibri" pitchFamily="34" charset="-122"/>
-                <a:cs typeface="Calibri" pitchFamily="34" charset="-120"/>
-              </a:rPr>
-              <a:t> — se quiser sair, a operação tem transição estruturada.</a:t>
-            </a:r>
-            <a:endParaRPr lang="en-US" sz="1400" dirty="0"/>
-          </a:p>
-        </p:txBody>
-      </p:sp>
-      <p:sp>
-        <p:nvSpPr>
           <p:cNvPr id="15" name="Text 13"/>
           <p:cNvSpPr/>
           <p:nvPr/>
         </p:nvSpPr>
         <p:spPr>
           <a:xfrm>
-            <a:off x="1371600" y="6400800"/>
+            <a:off x="1420368" y="3438144"/>
             <a:ext cx="9445752" cy="594360"/>
           </a:xfrm>
           <a:prstGeom prst="rect">
@@ -4917,7 +4584,7 @@
           <a:bodyPr wrap="square" rtlCol="0" anchor="ctr"/>
           <a:lstStyle/>
           <a:p>
-            <a:pPr algn="ctr" indent="0" marL="0">
+            <a:pPr marL="0" indent="0" algn="ctr">
               <a:lnSpc>
                 <a:spcPct val="140000"/>
               </a:lnSpc>
@@ -4937,7 +4604,7 @@
             <a:endParaRPr lang="en-US" sz="1500" dirty="0"/>
           </a:p>
           <a:p>
-            <a:pPr algn="ctr" indent="0" marL="0">
+            <a:pPr marL="0" indent="0" algn="ctr">
               <a:lnSpc>
                 <a:spcPct val="140000"/>
               </a:lnSpc>
@@ -5007,6 +4674,13 @@
             <a:prstDash val="solid"/>
           </a:ln>
         </p:spPr>
+        <p:txBody>
+          <a:bodyPr/>
+          <a:lstStyle/>
+          <a:p>
+            <a:endParaRPr lang="pt-BR"/>
+          </a:p>
+        </p:txBody>
       </p:sp>
       <p:sp>
         <p:nvSpPr>
@@ -5036,6 +4710,13 @@
             <a:prstDash val="solid"/>
           </a:ln>
         </p:spPr>
+        <p:txBody>
+          <a:bodyPr/>
+          <a:lstStyle/>
+          <a:p>
+            <a:endParaRPr lang="pt-BR"/>
+          </a:p>
+        </p:txBody>
       </p:sp>
       <p:sp>
         <p:nvSpPr>
@@ -5058,7 +4739,7 @@
           <a:bodyPr wrap="square" rtlCol="0" anchor="ctr"/>
           <a:lstStyle/>
           <a:p>
-            <a:pPr algn="ctr" indent="0" marL="0">
+            <a:pPr marL="0" indent="0" algn="ctr">
               <a:lnSpc>
                 <a:spcPct val="110000"/>
               </a:lnSpc>
@@ -5078,7 +4759,7 @@
             <a:endParaRPr lang="en-US" sz="6400" dirty="0"/>
           </a:p>
           <a:p>
-            <a:pPr algn="ctr" indent="0" marL="0">
+            <a:pPr marL="0" indent="0" algn="ctr">
               <a:lnSpc>
                 <a:spcPct val="110000"/>
               </a:lnSpc>
@@ -5120,7 +4801,7 @@
           <a:bodyPr wrap="square" rtlCol="0" anchor="ctr"/>
           <a:lstStyle/>
           <a:p>
-            <a:pPr algn="ctr" indent="0" marL="0">
+            <a:pPr marL="0" indent="0" algn="ctr">
               <a:lnSpc>
                 <a:spcPct val="145000"/>
               </a:lnSpc>
@@ -5140,7 +4821,7 @@
             <a:endParaRPr lang="en-US" sz="2200" dirty="0"/>
           </a:p>
           <a:p>
-            <a:pPr algn="ctr" indent="0" marL="0">
+            <a:pPr marL="0" indent="0" algn="ctr">
               <a:lnSpc>
                 <a:spcPct val="145000"/>
               </a:lnSpc>
@@ -5185,6 +4866,13 @@
             <a:prstDash val="solid"/>
           </a:ln>
         </p:spPr>
+        <p:txBody>
+          <a:bodyPr/>
+          <a:lstStyle/>
+          <a:p>
+            <a:endParaRPr lang="pt-BR"/>
+          </a:p>
+        </p:txBody>
       </p:sp>
       <p:sp>
         <p:nvSpPr>
@@ -5207,7 +4895,7 @@
           <a:bodyPr wrap="square" rtlCol="0" anchor="ctr"/>
           <a:lstStyle/>
           <a:p>
-            <a:pPr algn="ctr" indent="0" marL="0">
+            <a:pPr marL="0" indent="0" algn="ctr">
               <a:lnSpc>
                 <a:spcPct val="170000"/>
               </a:lnSpc>
@@ -5223,32 +4911,9 @@
                 <a:cs typeface="Calibri" pitchFamily="34" charset="-120"/>
               </a:rPr>
               <a:t>Esta call de 30 minutos não é para te vender nada.
+É para você entender, com todos os dados na mesa, se faz sentido.
 </a:t>
             </a:r>
-            <a:pPr algn="ctr" indent="0" marL="0">
-              <a:lnSpc>
-                <a:spcPct val="170000"/>
-              </a:lnSpc>
-              <a:buNone/>
-            </a:pPr>
-            <a:r>
-              <a:rPr lang="en-US" sz="1700" dirty="0">
-                <a:solidFill>
-                  <a:srgbClr val="C4B5FD"/>
-                </a:solidFill>
-                <a:latin typeface="Calibri" pitchFamily="34" charset="0"/>
-                <a:ea typeface="Calibri" pitchFamily="34" charset="-122"/>
-                <a:cs typeface="Calibri" pitchFamily="34" charset="-120"/>
-              </a:rPr>
-              <a:t>É para você entender, com todos os dados na mesa, se faz sentido.
-</a:t>
-            </a:r>
-            <a:pPr algn="ctr" indent="0" marL="0">
-              <a:lnSpc>
-                <a:spcPct val="170000"/>
-              </a:lnSpc>
-              <a:buNone/>
-            </a:pPr>
             <a:r>
               <a:rPr lang="en-US" sz="1700" b="1" dirty="0">
                 <a:solidFill>
@@ -5261,12 +4926,6 @@
               <a:t>Se fizer — avançamos.
 </a:t>
             </a:r>
-            <a:pPr algn="ctr" indent="0" marL="0">
-              <a:lnSpc>
-                <a:spcPct val="170000"/>
-              </a:lnSpc>
-              <a:buNone/>
-            </a:pPr>
             <a:r>
               <a:rPr lang="en-US" sz="1700" dirty="0">
                 <a:solidFill>
@@ -5279,12 +4938,6 @@
               <a:t>Se não fizer — você sai com clareza do que é possível para o seu negócio.
 </a:t>
             </a:r>
-            <a:pPr algn="ctr" indent="0" marL="0">
-              <a:lnSpc>
-                <a:spcPct val="170000"/>
-              </a:lnSpc>
-              <a:buNone/>
-            </a:pPr>
             <a:r>
               <a:rPr lang="en-US" sz="1700" b="1" dirty="0">
                 <a:solidFill>
@@ -5349,6 +5002,13 @@
             <a:prstDash val="solid"/>
           </a:ln>
         </p:spPr>
+        <p:txBody>
+          <a:bodyPr/>
+          <a:lstStyle/>
+          <a:p>
+            <a:endParaRPr lang="pt-BR"/>
+          </a:p>
+        </p:txBody>
       </p:sp>
       <p:sp>
         <p:nvSpPr>
@@ -5378,6 +5038,13 @@
             <a:prstDash val="solid"/>
           </a:ln>
         </p:spPr>
+        <p:txBody>
+          <a:bodyPr/>
+          <a:lstStyle/>
+          <a:p>
+            <a:endParaRPr lang="pt-BR"/>
+          </a:p>
+        </p:txBody>
       </p:sp>
       <p:sp>
         <p:nvSpPr>
@@ -5403,6 +5070,13 @@
             <a:prstDash val="solid"/>
           </a:ln>
         </p:spPr>
+        <p:txBody>
+          <a:bodyPr/>
+          <a:lstStyle/>
+          <a:p>
+            <a:endParaRPr lang="pt-BR"/>
+          </a:p>
+        </p:txBody>
       </p:sp>
       <p:sp>
         <p:nvSpPr>
@@ -5425,11 +5099,11 @@
           <a:bodyPr wrap="square" rtlCol="0" anchor="ctr"/>
           <a:lstStyle/>
           <a:p>
-            <a:pPr algn="ctr" indent="0" marL="0">
-              <a:buNone/>
-            </a:pPr>
-            <a:r>
-              <a:rPr lang="en-US" sz="900" b="1" spc="300" kern="0" dirty="0">
+            <a:pPr marL="0" indent="0" algn="ctr">
+              <a:buNone/>
+            </a:pPr>
+            <a:r>
+              <a:rPr lang="en-US" sz="900" b="1" kern="0" spc="300" dirty="0">
                 <a:solidFill>
                   <a:srgbClr val="7C3AED"/>
                 </a:solidFill>
@@ -5464,7 +5138,7 @@
           <a:bodyPr wrap="square" rtlCol="0" anchor="ctr"/>
           <a:lstStyle/>
           <a:p>
-            <a:pPr algn="ctr" indent="0" marL="0">
+            <a:pPr marL="0" indent="0" algn="ctr">
               <a:buNone/>
             </a:pPr>
             <a:r>
@@ -5503,7 +5177,7 @@
           <a:bodyPr wrap="square" rtlCol="0" anchor="ctr"/>
           <a:lstStyle/>
           <a:p>
-            <a:pPr algn="ctr" indent="0" marL="0">
+            <a:pPr marL="0" indent="0" algn="ctr">
               <a:buNone/>
             </a:pPr>
             <a:r>
@@ -5542,11 +5216,11 @@
           <a:bodyPr wrap="square" rtlCol="0" anchor="ctr"/>
           <a:lstStyle/>
           <a:p>
-            <a:pPr algn="ctr" indent="0" marL="0">
-              <a:buNone/>
-            </a:pPr>
-            <a:r>
-              <a:rPr lang="en-US" sz="1100" spc="300" kern="0" dirty="0">
+            <a:pPr marL="0" indent="0" algn="ctr">
+              <a:buNone/>
+            </a:pPr>
+            <a:r>
+              <a:rPr lang="en-US" sz="1100" kern="0" spc="300" dirty="0">
                 <a:solidFill>
                   <a:srgbClr val="9CA3AF"/>
                 </a:solidFill>
@@ -5584,6 +5258,13 @@
             <a:prstDash val="solid"/>
           </a:ln>
         </p:spPr>
+        <p:txBody>
+          <a:bodyPr/>
+          <a:lstStyle/>
+          <a:p>
+            <a:endParaRPr lang="pt-BR"/>
+          </a:p>
+        </p:txBody>
       </p:sp>
       <p:sp>
         <p:nvSpPr>
@@ -5606,7 +5287,7 @@
           <a:bodyPr wrap="square" rtlCol="0" anchor="ctr"/>
           <a:lstStyle/>
           <a:p>
-            <a:pPr algn="ctr" indent="0" marL="0">
+            <a:pPr marL="0" indent="0" algn="ctr">
               <a:buNone/>
             </a:pPr>
             <a:r>
@@ -5648,6 +5329,13 @@
             <a:prstDash val="solid"/>
           </a:ln>
         </p:spPr>
+        <p:txBody>
+          <a:bodyPr/>
+          <a:lstStyle/>
+          <a:p>
+            <a:endParaRPr lang="pt-BR"/>
+          </a:p>
+        </p:txBody>
       </p:sp>
     </p:spTree>
   </p:cSld>
@@ -5698,6 +5386,13 @@
             <a:prstDash val="solid"/>
           </a:ln>
         </p:spPr>
+        <p:txBody>
+          <a:bodyPr/>
+          <a:lstStyle/>
+          <a:p>
+            <a:endParaRPr lang="pt-BR"/>
+          </a:p>
+        </p:txBody>
       </p:sp>
       <p:sp>
         <p:nvSpPr>
@@ -5720,11 +5415,11 @@
           <a:bodyPr wrap="square" rtlCol="0" anchor="ctr"/>
           <a:lstStyle/>
           <a:p>
-            <a:pPr algn="ctr" indent="0" marL="0">
-              <a:buNone/>
-            </a:pPr>
-            <a:r>
-              <a:rPr lang="en-US" sz="900" b="1" spc="300" kern="0" dirty="0">
+            <a:pPr marL="0" indent="0" algn="ctr">
+              <a:buNone/>
+            </a:pPr>
+            <a:r>
+              <a:rPr lang="en-US" sz="900" b="1" kern="0" spc="300" dirty="0">
                 <a:solidFill>
                   <a:srgbClr val="7C3AED"/>
                 </a:solidFill>
@@ -5759,7 +5454,7 @@
           <a:bodyPr wrap="square" rtlCol="0" anchor="ctr"/>
           <a:lstStyle/>
           <a:p>
-            <a:pPr algn="ctr" indent="0" marL="0">
+            <a:pPr marL="0" indent="0" algn="ctr">
               <a:lnSpc>
                 <a:spcPct val="110000"/>
               </a:lnSpc>
@@ -5779,7 +5474,7 @@
             <a:endParaRPr lang="en-US" sz="4600" dirty="0"/>
           </a:p>
           <a:p>
-            <a:pPr algn="ctr" indent="0" marL="0">
+            <a:pPr marL="0" indent="0" algn="ctr">
               <a:lnSpc>
                 <a:spcPct val="110000"/>
               </a:lnSpc>
@@ -5824,6 +5519,13 @@
             <a:prstDash val="solid"/>
           </a:ln>
         </p:spPr>
+        <p:txBody>
+          <a:bodyPr/>
+          <a:lstStyle/>
+          <a:p>
+            <a:endParaRPr lang="pt-BR"/>
+          </a:p>
+        </p:txBody>
       </p:sp>
       <p:sp>
         <p:nvSpPr>
@@ -5837,9 +5539,7 @@
             <a:ext cx="3657600" cy="3931920"/>
           </a:xfrm>
           <a:prstGeom prst="rect">
-            <a:avLst>
-              <a:gd name="adj" fmla="val 3750"/>
-            </a:avLst>
+            <a:avLst/>
           </a:prstGeom>
           <a:solidFill>
             <a:srgbClr val="111111"/>
@@ -5851,6 +5551,13 @@
             <a:prstDash val="solid"/>
           </a:ln>
         </p:spPr>
+        <p:txBody>
+          <a:bodyPr/>
+          <a:lstStyle/>
+          <a:p>
+            <a:endParaRPr lang="pt-BR"/>
+          </a:p>
+        </p:txBody>
       </p:sp>
       <p:sp>
         <p:nvSpPr>
@@ -5873,7 +5580,7 @@
           <a:bodyPr wrap="square" rtlCol="0" anchor="ctr"/>
           <a:lstStyle/>
           <a:p>
-            <a:pPr algn="ctr" indent="0" marL="0">
+            <a:pPr marL="0" indent="0" algn="ctr">
               <a:buNone/>
             </a:pPr>
             <a:r>
@@ -5915,6 +5622,13 @@
             <a:prstDash val="solid"/>
           </a:ln>
         </p:spPr>
+        <p:txBody>
+          <a:bodyPr/>
+          <a:lstStyle/>
+          <a:p>
+            <a:endParaRPr lang="pt-BR"/>
+          </a:p>
+        </p:txBody>
       </p:sp>
       <p:sp>
         <p:nvSpPr>
@@ -5937,7 +5651,7 @@
           <a:bodyPr wrap="square" rtlCol="0" anchor="ctr"/>
           <a:lstStyle/>
           <a:p>
-            <a:pPr algn="ctr" indent="0" marL="0">
+            <a:pPr marL="0" indent="0" algn="ctr">
               <a:lnSpc>
                 <a:spcPct val="155000"/>
               </a:lnSpc>
@@ -5957,7 +5671,7 @@
             <a:endParaRPr lang="en-US" sz="1300" dirty="0"/>
           </a:p>
           <a:p>
-            <a:pPr algn="ctr" indent="0" marL="0">
+            <a:pPr marL="0" indent="0" algn="ctr">
               <a:lnSpc>
                 <a:spcPct val="155000"/>
               </a:lnSpc>
@@ -5977,7 +5691,7 @@
             <a:endParaRPr lang="en-US" sz="1300" dirty="0"/>
           </a:p>
           <a:p>
-            <a:pPr algn="ctr" indent="0" marL="0">
+            <a:pPr marL="0" indent="0" algn="ctr">
               <a:lnSpc>
                 <a:spcPct val="155000"/>
               </a:lnSpc>
@@ -6010,9 +5724,7 @@
             <a:ext cx="3657600" cy="3931920"/>
           </a:xfrm>
           <a:prstGeom prst="rect">
-            <a:avLst>
-              <a:gd name="adj" fmla="val 3750"/>
-            </a:avLst>
+            <a:avLst/>
           </a:prstGeom>
           <a:solidFill>
             <a:srgbClr val="1A0A2E"/>
@@ -6024,6 +5736,13 @@
             <a:prstDash val="solid"/>
           </a:ln>
         </p:spPr>
+        <p:txBody>
+          <a:bodyPr/>
+          <a:lstStyle/>
+          <a:p>
+            <a:endParaRPr lang="pt-BR"/>
+          </a:p>
+        </p:txBody>
       </p:sp>
       <p:sp>
         <p:nvSpPr>
@@ -6046,7 +5765,7 @@
           <a:bodyPr wrap="square" rtlCol="0" anchor="ctr"/>
           <a:lstStyle/>
           <a:p>
-            <a:pPr algn="ctr" indent="0" marL="0">
+            <a:pPr marL="0" indent="0" algn="ctr">
               <a:buNone/>
             </a:pPr>
             <a:r>
@@ -6088,6 +5807,13 @@
             <a:prstDash val="solid"/>
           </a:ln>
         </p:spPr>
+        <p:txBody>
+          <a:bodyPr/>
+          <a:lstStyle/>
+          <a:p>
+            <a:endParaRPr lang="pt-BR"/>
+          </a:p>
+        </p:txBody>
       </p:sp>
       <p:sp>
         <p:nvSpPr>
@@ -6110,7 +5836,7 @@
           <a:bodyPr wrap="square" rtlCol="0" anchor="ctr"/>
           <a:lstStyle/>
           <a:p>
-            <a:pPr algn="ctr" indent="0" marL="0">
+            <a:pPr marL="0" indent="0" algn="ctr">
               <a:lnSpc>
                 <a:spcPct val="155000"/>
               </a:lnSpc>
@@ -6130,7 +5856,7 @@
             <a:endParaRPr lang="en-US" sz="1300" dirty="0"/>
           </a:p>
           <a:p>
-            <a:pPr algn="ctr" indent="0" marL="0">
+            <a:pPr marL="0" indent="0" algn="ctr">
               <a:lnSpc>
                 <a:spcPct val="155000"/>
               </a:lnSpc>
@@ -6163,9 +5889,7 @@
             <a:ext cx="3657600" cy="3931920"/>
           </a:xfrm>
           <a:prstGeom prst="rect">
-            <a:avLst>
-              <a:gd name="adj" fmla="val 3750"/>
-            </a:avLst>
+            <a:avLst/>
           </a:prstGeom>
           <a:solidFill>
             <a:srgbClr val="111111"/>
@@ -6177,6 +5901,13 @@
             <a:prstDash val="solid"/>
           </a:ln>
         </p:spPr>
+        <p:txBody>
+          <a:bodyPr/>
+          <a:lstStyle/>
+          <a:p>
+            <a:endParaRPr lang="pt-BR"/>
+          </a:p>
+        </p:txBody>
       </p:sp>
       <p:sp>
         <p:nvSpPr>
@@ -6199,7 +5930,7 @@
           <a:bodyPr wrap="square" rtlCol="0" anchor="ctr"/>
           <a:lstStyle/>
           <a:p>
-            <a:pPr algn="ctr" indent="0" marL="0">
+            <a:pPr marL="0" indent="0" algn="ctr">
               <a:buNone/>
             </a:pPr>
             <a:r>
@@ -6241,6 +5972,13 @@
             <a:prstDash val="solid"/>
           </a:ln>
         </p:spPr>
+        <p:txBody>
+          <a:bodyPr/>
+          <a:lstStyle/>
+          <a:p>
+            <a:endParaRPr lang="pt-BR"/>
+          </a:p>
+        </p:txBody>
       </p:sp>
       <p:sp>
         <p:nvSpPr>
@@ -6263,7 +6001,7 @@
           <a:bodyPr wrap="square" rtlCol="0" anchor="ctr"/>
           <a:lstStyle/>
           <a:p>
-            <a:pPr algn="ctr" indent="0" marL="0">
+            <a:pPr marL="0" indent="0" algn="ctr">
               <a:lnSpc>
                 <a:spcPct val="155000"/>
               </a:lnSpc>
@@ -6283,7 +6021,7 @@
             <a:endParaRPr lang="en-US" sz="1300" dirty="0"/>
           </a:p>
           <a:p>
-            <a:pPr algn="ctr" indent="0" marL="0">
+            <a:pPr marL="0" indent="0" algn="ctr">
               <a:lnSpc>
                 <a:spcPct val="155000"/>
               </a:lnSpc>
@@ -6303,7 +6041,7 @@
             <a:endParaRPr lang="en-US" sz="1300" dirty="0"/>
           </a:p>
           <a:p>
-            <a:pPr algn="ctr" indent="0" marL="0">
+            <a:pPr marL="0" indent="0" algn="ctr">
               <a:lnSpc>
                 <a:spcPct val="155000"/>
               </a:lnSpc>
@@ -6345,7 +6083,7 @@
           <a:bodyPr wrap="square" rtlCol="0" anchor="ctr"/>
           <a:lstStyle/>
           <a:p>
-            <a:pPr algn="ctr" indent="0" marL="0">
+            <a:pPr marL="0" indent="0" algn="ctr">
               <a:buNone/>
             </a:pPr>
             <a:r>
@@ -6412,6 +6150,13 @@
             <a:prstDash val="solid"/>
           </a:ln>
         </p:spPr>
+        <p:txBody>
+          <a:bodyPr/>
+          <a:lstStyle/>
+          <a:p>
+            <a:endParaRPr lang="pt-BR"/>
+          </a:p>
+        </p:txBody>
       </p:sp>
       <p:sp>
         <p:nvSpPr>
@@ -6434,11 +6179,11 @@
           <a:bodyPr wrap="square" rtlCol="0" anchor="ctr"/>
           <a:lstStyle/>
           <a:p>
-            <a:pPr algn="ctr" indent="0" marL="0">
-              <a:buNone/>
-            </a:pPr>
-            <a:r>
-              <a:rPr lang="en-US" sz="900" b="1" spc="300" kern="0" dirty="0">
+            <a:pPr marL="0" indent="0" algn="ctr">
+              <a:buNone/>
+            </a:pPr>
+            <a:r>
+              <a:rPr lang="en-US" sz="900" b="1" kern="0" spc="300" dirty="0">
                 <a:solidFill>
                   <a:srgbClr val="7C3AED"/>
                 </a:solidFill>
@@ -6473,7 +6218,7 @@
           <a:bodyPr wrap="square" rtlCol="0" anchor="ctr"/>
           <a:lstStyle/>
           <a:p>
-            <a:pPr algn="ctr" indent="0" marL="0">
+            <a:pPr marL="0" indent="0" algn="ctr">
               <a:lnSpc>
                 <a:spcPct val="115000"/>
               </a:lnSpc>
@@ -6493,7 +6238,7 @@
             <a:endParaRPr lang="en-US" sz="4400" dirty="0"/>
           </a:p>
           <a:p>
-            <a:pPr algn="ctr" indent="0" marL="0">
+            <a:pPr marL="0" indent="0" algn="ctr">
               <a:lnSpc>
                 <a:spcPct val="115000"/>
               </a:lnSpc>
@@ -6513,7 +6258,7 @@
             <a:endParaRPr lang="en-US" sz="4400" dirty="0"/>
           </a:p>
           <a:p>
-            <a:pPr algn="ctr" indent="0" marL="0">
+            <a:pPr marL="0" indent="0" algn="ctr">
               <a:lnSpc>
                 <a:spcPct val="115000"/>
               </a:lnSpc>
@@ -6558,6 +6303,13 @@
             <a:prstDash val="solid"/>
           </a:ln>
         </p:spPr>
+        <p:txBody>
+          <a:bodyPr/>
+          <a:lstStyle/>
+          <a:p>
+            <a:endParaRPr lang="pt-BR"/>
+          </a:p>
+        </p:txBody>
       </p:sp>
       <p:sp>
         <p:nvSpPr>
@@ -6571,9 +6323,7 @@
             <a:ext cx="3566160" cy="3291840"/>
           </a:xfrm>
           <a:prstGeom prst="rect">
-            <a:avLst>
-              <a:gd name="adj" fmla="val 4167"/>
-            </a:avLst>
+            <a:avLst/>
           </a:prstGeom>
           <a:solidFill>
             <a:srgbClr val="111111"/>
@@ -6585,6 +6335,13 @@
             <a:prstDash val="solid"/>
           </a:ln>
         </p:spPr>
+        <p:txBody>
+          <a:bodyPr/>
+          <a:lstStyle/>
+          <a:p>
+            <a:endParaRPr lang="pt-BR"/>
+          </a:p>
+        </p:txBody>
       </p:sp>
       <p:sp>
         <p:nvSpPr>
@@ -6607,11 +6364,11 @@
           <a:bodyPr wrap="square" rtlCol="0" anchor="ctr"/>
           <a:lstStyle/>
           <a:p>
-            <a:pPr algn="ctr" indent="0" marL="0">
-              <a:buNone/>
-            </a:pPr>
-            <a:r>
-              <a:rPr lang="en-US" sz="1000" b="1" spc="200" kern="0" dirty="0">
+            <a:pPr marL="0" indent="0" algn="ctr">
+              <a:buNone/>
+            </a:pPr>
+            <a:r>
+              <a:rPr lang="en-US" sz="1000" b="1" kern="0" spc="200" dirty="0">
                 <a:solidFill>
                   <a:srgbClr val="7C3AED"/>
                 </a:solidFill>
@@ -6646,7 +6403,7 @@
           <a:bodyPr wrap="square" rtlCol="0" anchor="ctr"/>
           <a:lstStyle/>
           <a:p>
-            <a:pPr algn="ctr" indent="0" marL="0">
+            <a:pPr marL="0" indent="0" algn="ctr">
               <a:buNone/>
             </a:pPr>
             <a:r>
@@ -6685,7 +6442,7 @@
           <a:bodyPr wrap="square" rtlCol="0" anchor="ctr"/>
           <a:lstStyle/>
           <a:p>
-            <a:pPr algn="ctr" indent="0" marL="0">
+            <a:pPr marL="0" indent="0" algn="ctr">
               <a:lnSpc>
                 <a:spcPct val="150000"/>
               </a:lnSpc>
@@ -6705,7 +6462,7 @@
             <a:endParaRPr lang="en-US" sz="1400" dirty="0"/>
           </a:p>
           <a:p>
-            <a:pPr algn="ctr" indent="0" marL="0">
+            <a:pPr marL="0" indent="0" algn="ctr">
               <a:lnSpc>
                 <a:spcPct val="150000"/>
               </a:lnSpc>
@@ -6725,7 +6482,7 @@
             <a:endParaRPr lang="en-US" sz="1400" dirty="0"/>
           </a:p>
           <a:p>
-            <a:pPr algn="ctr" indent="0" marL="0">
+            <a:pPr marL="0" indent="0" algn="ctr">
               <a:lnSpc>
                 <a:spcPct val="150000"/>
               </a:lnSpc>
@@ -6758,9 +6515,7 @@
             <a:ext cx="3566160" cy="3291840"/>
           </a:xfrm>
           <a:prstGeom prst="rect">
-            <a:avLst>
-              <a:gd name="adj" fmla="val 4167"/>
-            </a:avLst>
+            <a:avLst/>
           </a:prstGeom>
           <a:solidFill>
             <a:srgbClr val="1A0A2E"/>
@@ -6772,6 +6527,13 @@
             <a:prstDash val="solid"/>
           </a:ln>
         </p:spPr>
+        <p:txBody>
+          <a:bodyPr/>
+          <a:lstStyle/>
+          <a:p>
+            <a:endParaRPr lang="pt-BR"/>
+          </a:p>
+        </p:txBody>
       </p:sp>
       <p:sp>
         <p:nvSpPr>
@@ -6794,11 +6556,11 @@
           <a:bodyPr wrap="square" rtlCol="0" anchor="ctr"/>
           <a:lstStyle/>
           <a:p>
-            <a:pPr algn="ctr" indent="0" marL="0">
-              <a:buNone/>
-            </a:pPr>
-            <a:r>
-              <a:rPr lang="en-US" sz="1000" b="1" spc="200" kern="0" dirty="0">
+            <a:pPr marL="0" indent="0" algn="ctr">
+              <a:buNone/>
+            </a:pPr>
+            <a:r>
+              <a:rPr lang="en-US" sz="1000" b="1" kern="0" spc="200" dirty="0">
                 <a:solidFill>
                   <a:srgbClr val="7C3AED"/>
                 </a:solidFill>
@@ -6833,7 +6595,7 @@
           <a:bodyPr wrap="square" rtlCol="0" anchor="ctr"/>
           <a:lstStyle/>
           <a:p>
-            <a:pPr algn="ctr" indent="0" marL="0">
+            <a:pPr marL="0" indent="0" algn="ctr">
               <a:buNone/>
             </a:pPr>
             <a:r>
@@ -6872,7 +6634,7 @@
           <a:bodyPr wrap="square" rtlCol="0" anchor="ctr"/>
           <a:lstStyle/>
           <a:p>
-            <a:pPr algn="ctr" indent="0" marL="0">
+            <a:pPr marL="0" indent="0" algn="ctr">
               <a:lnSpc>
                 <a:spcPct val="150000"/>
               </a:lnSpc>
@@ -6892,7 +6654,7 @@
             <a:endParaRPr lang="en-US" sz="1400" dirty="0"/>
           </a:p>
           <a:p>
-            <a:pPr algn="ctr" indent="0" marL="0">
+            <a:pPr marL="0" indent="0" algn="ctr">
               <a:lnSpc>
                 <a:spcPct val="150000"/>
               </a:lnSpc>
@@ -6912,7 +6674,7 @@
             <a:endParaRPr lang="en-US" sz="1400" dirty="0"/>
           </a:p>
           <a:p>
-            <a:pPr algn="ctr" indent="0" marL="0">
+            <a:pPr marL="0" indent="0" algn="ctr">
               <a:lnSpc>
                 <a:spcPct val="150000"/>
               </a:lnSpc>
@@ -6945,9 +6707,7 @@
             <a:ext cx="3566160" cy="3291840"/>
           </a:xfrm>
           <a:prstGeom prst="rect">
-            <a:avLst>
-              <a:gd name="adj" fmla="val 4167"/>
-            </a:avLst>
+            <a:avLst/>
           </a:prstGeom>
           <a:solidFill>
             <a:srgbClr val="111111"/>
@@ -6959,6 +6719,13 @@
             <a:prstDash val="solid"/>
           </a:ln>
         </p:spPr>
+        <p:txBody>
+          <a:bodyPr/>
+          <a:lstStyle/>
+          <a:p>
+            <a:endParaRPr lang="pt-BR"/>
+          </a:p>
+        </p:txBody>
       </p:sp>
       <p:sp>
         <p:nvSpPr>
@@ -6981,11 +6748,11 @@
           <a:bodyPr wrap="square" rtlCol="0" anchor="ctr"/>
           <a:lstStyle/>
           <a:p>
-            <a:pPr algn="ctr" indent="0" marL="0">
-              <a:buNone/>
-            </a:pPr>
-            <a:r>
-              <a:rPr lang="en-US" sz="1000" b="1" spc="200" kern="0" dirty="0">
+            <a:pPr marL="0" indent="0" algn="ctr">
+              <a:buNone/>
+            </a:pPr>
+            <a:r>
+              <a:rPr lang="en-US" sz="1000" b="1" kern="0" spc="200" dirty="0">
                 <a:solidFill>
                   <a:srgbClr val="7C3AED"/>
                 </a:solidFill>
@@ -7020,7 +6787,7 @@
           <a:bodyPr wrap="square" rtlCol="0" anchor="ctr"/>
           <a:lstStyle/>
           <a:p>
-            <a:pPr algn="ctr" indent="0" marL="0">
+            <a:pPr marL="0" indent="0" algn="ctr">
               <a:buNone/>
             </a:pPr>
             <a:r>
@@ -7059,7 +6826,7 @@
           <a:bodyPr wrap="square" rtlCol="0" anchor="ctr"/>
           <a:lstStyle/>
           <a:p>
-            <a:pPr algn="ctr" indent="0" marL="0">
+            <a:pPr marL="0" indent="0" algn="ctr">
               <a:lnSpc>
                 <a:spcPct val="150000"/>
               </a:lnSpc>
@@ -7079,7 +6846,7 @@
             <a:endParaRPr lang="en-US" sz="1400" dirty="0"/>
           </a:p>
           <a:p>
-            <a:pPr algn="ctr" indent="0" marL="0">
+            <a:pPr marL="0" indent="0" algn="ctr">
               <a:lnSpc>
                 <a:spcPct val="150000"/>
               </a:lnSpc>
@@ -7099,7 +6866,7 @@
             <a:endParaRPr lang="en-US" sz="1400" dirty="0"/>
           </a:p>
           <a:p>
-            <a:pPr algn="ctr" indent="0" marL="0">
+            <a:pPr marL="0" indent="0" algn="ctr">
               <a:lnSpc>
                 <a:spcPct val="150000"/>
               </a:lnSpc>
@@ -7169,6 +6936,13 @@
             <a:prstDash val="solid"/>
           </a:ln>
         </p:spPr>
+        <p:txBody>
+          <a:bodyPr/>
+          <a:lstStyle/>
+          <a:p>
+            <a:endParaRPr lang="pt-BR"/>
+          </a:p>
+        </p:txBody>
       </p:sp>
       <p:sp>
         <p:nvSpPr>
@@ -7191,11 +6965,11 @@
           <a:bodyPr wrap="square" rtlCol="0" anchor="ctr"/>
           <a:lstStyle/>
           <a:p>
-            <a:pPr algn="ctr" indent="0" marL="0">
-              <a:buNone/>
-            </a:pPr>
-            <a:r>
-              <a:rPr lang="en-US" sz="900" b="1" spc="300" kern="0" dirty="0">
+            <a:pPr marL="0" indent="0" algn="ctr">
+              <a:buNone/>
+            </a:pPr>
+            <a:r>
+              <a:rPr lang="en-US" sz="900" b="1" kern="0" spc="300" dirty="0">
                 <a:solidFill>
                   <a:srgbClr val="7C3AED"/>
                 </a:solidFill>
@@ -7230,7 +7004,7 @@
           <a:bodyPr wrap="square" rtlCol="0" anchor="ctr"/>
           <a:lstStyle/>
           <a:p>
-            <a:pPr algn="ctr" indent="0" marL="0">
+            <a:pPr marL="0" indent="0" algn="ctr">
               <a:lnSpc>
                 <a:spcPct val="115000"/>
               </a:lnSpc>
@@ -7250,7 +7024,7 @@
             <a:endParaRPr lang="en-US" sz="3000" dirty="0"/>
           </a:p>
           <a:p>
-            <a:pPr algn="ctr" indent="0" marL="0">
+            <a:pPr marL="0" indent="0" algn="ctr">
               <a:lnSpc>
                 <a:spcPct val="115000"/>
               </a:lnSpc>
@@ -7295,6 +7069,13 @@
             <a:prstDash val="solid"/>
           </a:ln>
         </p:spPr>
+        <p:txBody>
+          <a:bodyPr/>
+          <a:lstStyle/>
+          <a:p>
+            <a:endParaRPr lang="pt-BR"/>
+          </a:p>
+        </p:txBody>
       </p:sp>
       <p:sp>
         <p:nvSpPr>
@@ -7308,9 +7089,7 @@
             <a:ext cx="1234440" cy="1463040"/>
           </a:xfrm>
           <a:prstGeom prst="rect">
-            <a:avLst>
-              <a:gd name="adj" fmla="val 11111"/>
-            </a:avLst>
+            <a:avLst/>
           </a:prstGeom>
           <a:solidFill>
             <a:srgbClr val="111111"/>
@@ -7322,6 +7101,13 @@
             <a:prstDash val="solid"/>
           </a:ln>
         </p:spPr>
+        <p:txBody>
+          <a:bodyPr/>
+          <a:lstStyle/>
+          <a:p>
+            <a:endParaRPr lang="pt-BR"/>
+          </a:p>
+        </p:txBody>
       </p:sp>
       <p:sp>
         <p:nvSpPr>
@@ -7344,7 +7130,7 @@
           <a:bodyPr wrap="square" rtlCol="0" anchor="ctr"/>
           <a:lstStyle/>
           <a:p>
-            <a:pPr algn="ctr" indent="0" marL="0">
+            <a:pPr marL="0" indent="0" algn="ctr">
               <a:buNone/>
             </a:pPr>
             <a:r>
@@ -7383,7 +7169,7 @@
           <a:bodyPr wrap="square" rtlCol="0" anchor="ctr"/>
           <a:lstStyle/>
           <a:p>
-            <a:pPr algn="ctr" indent="0" marL="0">
+            <a:pPr marL="0" indent="0" algn="ctr">
               <a:lnSpc>
                 <a:spcPct val="130000"/>
               </a:lnSpc>
@@ -7425,7 +7211,7 @@
           <a:bodyPr wrap="square" rtlCol="0" anchor="ctr"/>
           <a:lstStyle/>
           <a:p>
-            <a:pPr algn="ctr" indent="0" marL="0">
+            <a:pPr marL="0" indent="0" algn="ctr">
               <a:buNone/>
             </a:pPr>
             <a:r>
@@ -7455,9 +7241,7 @@
             <a:ext cx="1234440" cy="1463040"/>
           </a:xfrm>
           <a:prstGeom prst="rect">
-            <a:avLst>
-              <a:gd name="adj" fmla="val 11111"/>
-            </a:avLst>
+            <a:avLst/>
           </a:prstGeom>
           <a:solidFill>
             <a:srgbClr val="111111"/>
@@ -7469,6 +7253,13 @@
             <a:prstDash val="solid"/>
           </a:ln>
         </p:spPr>
+        <p:txBody>
+          <a:bodyPr/>
+          <a:lstStyle/>
+          <a:p>
+            <a:endParaRPr lang="pt-BR"/>
+          </a:p>
+        </p:txBody>
       </p:sp>
       <p:sp>
         <p:nvSpPr>
@@ -7491,7 +7282,7 @@
           <a:bodyPr wrap="square" rtlCol="0" anchor="ctr"/>
           <a:lstStyle/>
           <a:p>
-            <a:pPr algn="ctr" indent="0" marL="0">
+            <a:pPr marL="0" indent="0" algn="ctr">
               <a:buNone/>
             </a:pPr>
             <a:r>
@@ -7530,7 +7321,7 @@
           <a:bodyPr wrap="square" rtlCol="0" anchor="ctr"/>
           <a:lstStyle/>
           <a:p>
-            <a:pPr algn="ctr" indent="0" marL="0">
+            <a:pPr marL="0" indent="0" algn="ctr">
               <a:lnSpc>
                 <a:spcPct val="130000"/>
               </a:lnSpc>
@@ -7550,7 +7341,7 @@
             <a:endParaRPr lang="en-US" sz="900" dirty="0"/>
           </a:p>
           <a:p>
-            <a:pPr algn="ctr" indent="0" marL="0">
+            <a:pPr marL="0" indent="0" algn="ctr">
               <a:lnSpc>
                 <a:spcPct val="130000"/>
               </a:lnSpc>
@@ -7592,7 +7383,7 @@
           <a:bodyPr wrap="square" rtlCol="0" anchor="ctr"/>
           <a:lstStyle/>
           <a:p>
-            <a:pPr algn="ctr" indent="0" marL="0">
+            <a:pPr marL="0" indent="0" algn="ctr">
               <a:buNone/>
             </a:pPr>
             <a:r>
@@ -7622,9 +7413,7 @@
             <a:ext cx="1234440" cy="1463040"/>
           </a:xfrm>
           <a:prstGeom prst="rect">
-            <a:avLst>
-              <a:gd name="adj" fmla="val 11111"/>
-            </a:avLst>
+            <a:avLst/>
           </a:prstGeom>
           <a:solidFill>
             <a:srgbClr val="111111"/>
@@ -7636,6 +7425,13 @@
             <a:prstDash val="solid"/>
           </a:ln>
         </p:spPr>
+        <p:txBody>
+          <a:bodyPr/>
+          <a:lstStyle/>
+          <a:p>
+            <a:endParaRPr lang="pt-BR"/>
+          </a:p>
+        </p:txBody>
       </p:sp>
       <p:sp>
         <p:nvSpPr>
@@ -7658,7 +7454,7 @@
           <a:bodyPr wrap="square" rtlCol="0" anchor="ctr"/>
           <a:lstStyle/>
           <a:p>
-            <a:pPr algn="ctr" indent="0" marL="0">
+            <a:pPr marL="0" indent="0" algn="ctr">
               <a:buNone/>
             </a:pPr>
             <a:r>
@@ -7697,7 +7493,7 @@
           <a:bodyPr wrap="square" rtlCol="0" anchor="ctr"/>
           <a:lstStyle/>
           <a:p>
-            <a:pPr algn="ctr" indent="0" marL="0">
+            <a:pPr marL="0" indent="0" algn="ctr">
               <a:lnSpc>
                 <a:spcPct val="130000"/>
               </a:lnSpc>
@@ -7717,7 +7513,7 @@
             <a:endParaRPr lang="en-US" sz="900" dirty="0"/>
           </a:p>
           <a:p>
-            <a:pPr algn="ctr" indent="0" marL="0">
+            <a:pPr marL="0" indent="0" algn="ctr">
               <a:lnSpc>
                 <a:spcPct val="130000"/>
               </a:lnSpc>
@@ -7759,7 +7555,7 @@
           <a:bodyPr wrap="square" rtlCol="0" anchor="ctr"/>
           <a:lstStyle/>
           <a:p>
-            <a:pPr algn="ctr" indent="0" marL="0">
+            <a:pPr marL="0" indent="0" algn="ctr">
               <a:buNone/>
             </a:pPr>
             <a:r>
@@ -7789,9 +7585,7 @@
             <a:ext cx="1234440" cy="1463040"/>
           </a:xfrm>
           <a:prstGeom prst="rect">
-            <a:avLst>
-              <a:gd name="adj" fmla="val 11111"/>
-            </a:avLst>
+            <a:avLst/>
           </a:prstGeom>
           <a:solidFill>
             <a:srgbClr val="1A0A2E"/>
@@ -7803,6 +7597,13 @@
             <a:prstDash val="solid"/>
           </a:ln>
         </p:spPr>
+        <p:txBody>
+          <a:bodyPr/>
+          <a:lstStyle/>
+          <a:p>
+            <a:endParaRPr lang="pt-BR"/>
+          </a:p>
+        </p:txBody>
       </p:sp>
       <p:sp>
         <p:nvSpPr>
@@ -7825,7 +7626,7 @@
           <a:bodyPr wrap="square" rtlCol="0" anchor="ctr"/>
           <a:lstStyle/>
           <a:p>
-            <a:pPr algn="ctr" indent="0" marL="0">
+            <a:pPr marL="0" indent="0" algn="ctr">
               <a:buNone/>
             </a:pPr>
             <a:r>
@@ -7864,7 +7665,7 @@
           <a:bodyPr wrap="square" rtlCol="0" anchor="ctr"/>
           <a:lstStyle/>
           <a:p>
-            <a:pPr algn="ctr" indent="0" marL="0">
+            <a:pPr marL="0" indent="0" algn="ctr">
               <a:lnSpc>
                 <a:spcPct val="130000"/>
               </a:lnSpc>
@@ -7906,7 +7707,7 @@
           <a:bodyPr wrap="square" rtlCol="0" anchor="ctr"/>
           <a:lstStyle/>
           <a:p>
-            <a:pPr algn="ctr" indent="0" marL="0">
+            <a:pPr marL="0" indent="0" algn="ctr">
               <a:buNone/>
             </a:pPr>
             <a:r>
@@ -7936,9 +7737,7 @@
             <a:ext cx="1234440" cy="1463040"/>
           </a:xfrm>
           <a:prstGeom prst="rect">
-            <a:avLst>
-              <a:gd name="adj" fmla="val 11111"/>
-            </a:avLst>
+            <a:avLst/>
           </a:prstGeom>
           <a:solidFill>
             <a:srgbClr val="1A0A2E"/>
@@ -7950,6 +7749,13 @@
             <a:prstDash val="solid"/>
           </a:ln>
         </p:spPr>
+        <p:txBody>
+          <a:bodyPr/>
+          <a:lstStyle/>
+          <a:p>
+            <a:endParaRPr lang="pt-BR"/>
+          </a:p>
+        </p:txBody>
       </p:sp>
       <p:sp>
         <p:nvSpPr>
@@ -7972,7 +7778,7 @@
           <a:bodyPr wrap="square" rtlCol="0" anchor="ctr"/>
           <a:lstStyle/>
           <a:p>
-            <a:pPr algn="ctr" indent="0" marL="0">
+            <a:pPr marL="0" indent="0" algn="ctr">
               <a:buNone/>
             </a:pPr>
             <a:r>
@@ -8011,7 +7817,7 @@
           <a:bodyPr wrap="square" rtlCol="0" anchor="ctr"/>
           <a:lstStyle/>
           <a:p>
-            <a:pPr algn="ctr" indent="0" marL="0">
+            <a:pPr marL="0" indent="0" algn="ctr">
               <a:lnSpc>
                 <a:spcPct val="130000"/>
               </a:lnSpc>
@@ -8053,7 +7859,7 @@
           <a:bodyPr wrap="square" rtlCol="0" anchor="ctr"/>
           <a:lstStyle/>
           <a:p>
-            <a:pPr algn="ctr" indent="0" marL="0">
+            <a:pPr marL="0" indent="0" algn="ctr">
               <a:buNone/>
             </a:pPr>
             <a:r>
@@ -8083,9 +7889,7 @@
             <a:ext cx="1234440" cy="1463040"/>
           </a:xfrm>
           <a:prstGeom prst="rect">
-            <a:avLst>
-              <a:gd name="adj" fmla="val 11111"/>
-            </a:avLst>
+            <a:avLst/>
           </a:prstGeom>
           <a:solidFill>
             <a:srgbClr val="111111"/>
@@ -8097,6 +7901,13 @@
             <a:prstDash val="solid"/>
           </a:ln>
         </p:spPr>
+        <p:txBody>
+          <a:bodyPr/>
+          <a:lstStyle/>
+          <a:p>
+            <a:endParaRPr lang="pt-BR"/>
+          </a:p>
+        </p:txBody>
       </p:sp>
       <p:sp>
         <p:nvSpPr>
@@ -8119,7 +7930,7 @@
           <a:bodyPr wrap="square" rtlCol="0" anchor="ctr"/>
           <a:lstStyle/>
           <a:p>
-            <a:pPr algn="ctr" indent="0" marL="0">
+            <a:pPr marL="0" indent="0" algn="ctr">
               <a:buNone/>
             </a:pPr>
             <a:r>
@@ -8158,7 +7969,7 @@
           <a:bodyPr wrap="square" rtlCol="0" anchor="ctr"/>
           <a:lstStyle/>
           <a:p>
-            <a:pPr algn="ctr" indent="0" marL="0">
+            <a:pPr marL="0" indent="0" algn="ctr">
               <a:lnSpc>
                 <a:spcPct val="130000"/>
               </a:lnSpc>
@@ -8178,7 +7989,7 @@
             <a:endParaRPr lang="en-US" sz="900" dirty="0"/>
           </a:p>
           <a:p>
-            <a:pPr algn="ctr" indent="0" marL="0">
+            <a:pPr marL="0" indent="0" algn="ctr">
               <a:lnSpc>
                 <a:spcPct val="130000"/>
               </a:lnSpc>
@@ -8220,7 +8031,7 @@
           <a:bodyPr wrap="square" rtlCol="0" anchor="ctr"/>
           <a:lstStyle/>
           <a:p>
-            <a:pPr algn="ctr" indent="0" marL="0">
+            <a:pPr marL="0" indent="0" algn="ctr">
               <a:buNone/>
             </a:pPr>
             <a:r>
@@ -8250,9 +8061,7 @@
             <a:ext cx="1234440" cy="1463040"/>
           </a:xfrm>
           <a:prstGeom prst="rect">
-            <a:avLst>
-              <a:gd name="adj" fmla="val 11111"/>
-            </a:avLst>
+            <a:avLst/>
           </a:prstGeom>
           <a:solidFill>
             <a:srgbClr val="1A0A2E"/>
@@ -8264,6 +8073,13 @@
             <a:prstDash val="solid"/>
           </a:ln>
         </p:spPr>
+        <p:txBody>
+          <a:bodyPr/>
+          <a:lstStyle/>
+          <a:p>
+            <a:endParaRPr lang="pt-BR"/>
+          </a:p>
+        </p:txBody>
       </p:sp>
       <p:sp>
         <p:nvSpPr>
@@ -8286,7 +8102,7 @@
           <a:bodyPr wrap="square" rtlCol="0" anchor="ctr"/>
           <a:lstStyle/>
           <a:p>
-            <a:pPr algn="ctr" indent="0" marL="0">
+            <a:pPr marL="0" indent="0" algn="ctr">
               <a:buNone/>
             </a:pPr>
             <a:r>
@@ -8325,7 +8141,7 @@
           <a:bodyPr wrap="square" rtlCol="0" anchor="ctr"/>
           <a:lstStyle/>
           <a:p>
-            <a:pPr algn="ctr" indent="0" marL="0">
+            <a:pPr marL="0" indent="0" algn="ctr">
               <a:lnSpc>
                 <a:spcPct val="130000"/>
               </a:lnSpc>
@@ -8367,7 +8183,7 @@
           <a:bodyPr wrap="square" rtlCol="0" anchor="ctr"/>
           <a:lstStyle/>
           <a:p>
-            <a:pPr algn="ctr" indent="0" marL="0">
+            <a:pPr marL="0" indent="0" algn="ctr">
               <a:buNone/>
             </a:pPr>
             <a:r>
@@ -8397,9 +8213,7 @@
             <a:ext cx="1234440" cy="1463040"/>
           </a:xfrm>
           <a:prstGeom prst="rect">
-            <a:avLst>
-              <a:gd name="adj" fmla="val 11111"/>
-            </a:avLst>
+            <a:avLst/>
           </a:prstGeom>
           <a:solidFill>
             <a:srgbClr val="111111"/>
@@ -8411,6 +8225,13 @@
             <a:prstDash val="solid"/>
           </a:ln>
         </p:spPr>
+        <p:txBody>
+          <a:bodyPr/>
+          <a:lstStyle/>
+          <a:p>
+            <a:endParaRPr lang="pt-BR"/>
+          </a:p>
+        </p:txBody>
       </p:sp>
       <p:sp>
         <p:nvSpPr>
@@ -8433,7 +8254,7 @@
           <a:bodyPr wrap="square" rtlCol="0" anchor="ctr"/>
           <a:lstStyle/>
           <a:p>
-            <a:pPr algn="ctr" indent="0" marL="0">
+            <a:pPr marL="0" indent="0" algn="ctr">
               <a:buNone/>
             </a:pPr>
             <a:r>
@@ -8450,7 +8271,7 @@
             <a:endParaRPr lang="en-US" sz="1000" dirty="0"/>
           </a:p>
           <a:p>
-            <a:pPr algn="ctr" indent="0" marL="0">
+            <a:pPr marL="0" indent="0" algn="ctr">
               <a:buNone/>
             </a:pPr>
             <a:r>
@@ -8489,7 +8310,7 @@
           <a:bodyPr wrap="square" rtlCol="0" anchor="ctr"/>
           <a:lstStyle/>
           <a:p>
-            <a:pPr algn="ctr" indent="0" marL="0">
+            <a:pPr marL="0" indent="0" algn="ctr">
               <a:lnSpc>
                 <a:spcPct val="130000"/>
               </a:lnSpc>
@@ -8531,7 +8352,7 @@
           <a:bodyPr wrap="square" rtlCol="0" anchor="ctr"/>
           <a:lstStyle/>
           <a:p>
-            <a:pPr algn="ctr" indent="0" marL="0">
+            <a:pPr marL="0" indent="0" algn="ctr">
               <a:buNone/>
             </a:pPr>
             <a:r>
@@ -8573,6 +8394,13 @@
             <a:prstDash val="solid"/>
           </a:ln>
         </p:spPr>
+        <p:txBody>
+          <a:bodyPr/>
+          <a:lstStyle/>
+          <a:p>
+            <a:endParaRPr lang="pt-BR"/>
+          </a:p>
+        </p:txBody>
       </p:sp>
       <p:sp>
         <p:nvSpPr>
@@ -8595,7 +8423,7 @@
           <a:bodyPr wrap="square" rtlCol="0" anchor="ctr"/>
           <a:lstStyle/>
           <a:p>
-            <a:pPr algn="ctr" indent="0" marL="0">
+            <a:pPr marL="0" indent="0" algn="ctr">
               <a:buNone/>
             </a:pPr>
             <a:r>
@@ -8662,6 +8490,13 @@
             <a:prstDash val="solid"/>
           </a:ln>
         </p:spPr>
+        <p:txBody>
+          <a:bodyPr/>
+          <a:lstStyle/>
+          <a:p>
+            <a:endParaRPr lang="pt-BR"/>
+          </a:p>
+        </p:txBody>
       </p:sp>
       <p:sp>
         <p:nvSpPr>
@@ -8684,11 +8519,11 @@
           <a:bodyPr wrap="square" rtlCol="0" anchor="ctr"/>
           <a:lstStyle/>
           <a:p>
-            <a:pPr algn="ctr" indent="0" marL="0">
-              <a:buNone/>
-            </a:pPr>
-            <a:r>
-              <a:rPr lang="en-US" sz="900" b="1" spc="300" kern="0" dirty="0">
+            <a:pPr marL="0" indent="0" algn="ctr">
+              <a:buNone/>
+            </a:pPr>
+            <a:r>
+              <a:rPr lang="en-US" sz="900" b="1" kern="0" spc="300" dirty="0">
                 <a:solidFill>
                   <a:srgbClr val="7C3AED"/>
                 </a:solidFill>
@@ -8723,7 +8558,7 @@
           <a:bodyPr wrap="square" rtlCol="0" anchor="ctr"/>
           <a:lstStyle/>
           <a:p>
-            <a:pPr algn="ctr" indent="0" marL="0">
+            <a:pPr marL="0" indent="0" algn="ctr">
               <a:lnSpc>
                 <a:spcPct val="120000"/>
               </a:lnSpc>
@@ -8743,7 +8578,7 @@
             <a:endParaRPr lang="en-US" sz="3600" dirty="0"/>
           </a:p>
           <a:p>
-            <a:pPr algn="ctr" indent="0" marL="0">
+            <a:pPr marL="0" indent="0" algn="ctr">
               <a:lnSpc>
                 <a:spcPct val="120000"/>
               </a:lnSpc>
@@ -8788,6 +8623,13 @@
             <a:prstDash val="solid"/>
           </a:ln>
         </p:spPr>
+        <p:txBody>
+          <a:bodyPr/>
+          <a:lstStyle/>
+          <a:p>
+            <a:endParaRPr lang="pt-BR"/>
+          </a:p>
+        </p:txBody>
       </p:sp>
       <p:sp>
         <p:nvSpPr>
@@ -8801,9 +8643,7 @@
             <a:ext cx="2743200" cy="4297680"/>
           </a:xfrm>
           <a:prstGeom prst="rect">
-            <a:avLst>
-              <a:gd name="adj" fmla="val 5000"/>
-            </a:avLst>
+            <a:avLst/>
           </a:prstGeom>
           <a:solidFill>
             <a:srgbClr val="111111"/>
@@ -8815,6 +8655,13 @@
             <a:prstDash val="solid"/>
           </a:ln>
         </p:spPr>
+        <p:txBody>
+          <a:bodyPr/>
+          <a:lstStyle/>
+          <a:p>
+            <a:endParaRPr lang="pt-BR"/>
+          </a:p>
+        </p:txBody>
       </p:sp>
       <p:sp>
         <p:nvSpPr>
@@ -8837,11 +8684,11 @@
           <a:bodyPr wrap="square" rtlCol="0" anchor="ctr"/>
           <a:lstStyle/>
           <a:p>
-            <a:pPr algn="ctr" indent="0" marL="0">
-              <a:buNone/>
-            </a:pPr>
-            <a:r>
-              <a:rPr lang="en-US" sz="1000" b="1" spc="300" kern="0" dirty="0">
+            <a:pPr marL="0" indent="0" algn="ctr">
+              <a:buNone/>
+            </a:pPr>
+            <a:r>
+              <a:rPr lang="en-US" sz="1000" b="1" kern="0" spc="300" dirty="0">
                 <a:solidFill>
                   <a:srgbClr val="7C3AED"/>
                 </a:solidFill>
@@ -8876,7 +8723,7 @@
           <a:bodyPr wrap="square" rtlCol="0" anchor="ctr"/>
           <a:lstStyle/>
           <a:p>
-            <a:pPr algn="ctr" indent="0" marL="0">
+            <a:pPr marL="0" indent="0" algn="ctr">
               <a:lnSpc>
                 <a:spcPct val="120000"/>
               </a:lnSpc>
@@ -8896,7 +8743,7 @@
             <a:endParaRPr lang="en-US" sz="1600" dirty="0"/>
           </a:p>
           <a:p>
-            <a:pPr algn="ctr" indent="0" marL="0">
+            <a:pPr marL="0" indent="0" algn="ctr">
               <a:lnSpc>
                 <a:spcPct val="120000"/>
               </a:lnSpc>
@@ -8941,6 +8788,13 @@
             <a:prstDash val="solid"/>
           </a:ln>
         </p:spPr>
+        <p:txBody>
+          <a:bodyPr/>
+          <a:lstStyle/>
+          <a:p>
+            <a:endParaRPr lang="pt-BR"/>
+          </a:p>
+        </p:txBody>
       </p:sp>
       <p:sp>
         <p:nvSpPr>
@@ -8963,7 +8817,7 @@
           <a:bodyPr wrap="square" rtlCol="0" anchor="ctr"/>
           <a:lstStyle/>
           <a:p>
-            <a:pPr algn="ctr" indent="0" marL="0">
+            <a:pPr marL="0" indent="0" algn="ctr">
               <a:lnSpc>
                 <a:spcPct val="155000"/>
               </a:lnSpc>
@@ -8983,7 +8837,7 @@
             <a:endParaRPr lang="en-US" sz="1200" dirty="0"/>
           </a:p>
           <a:p>
-            <a:pPr algn="ctr" indent="0" marL="0">
+            <a:pPr marL="0" indent="0" algn="ctr">
               <a:lnSpc>
                 <a:spcPct val="155000"/>
               </a:lnSpc>
@@ -9003,7 +8857,7 @@
             <a:endParaRPr lang="en-US" sz="1200" dirty="0"/>
           </a:p>
           <a:p>
-            <a:pPr algn="ctr" indent="0" marL="0">
+            <a:pPr marL="0" indent="0" algn="ctr">
               <a:lnSpc>
                 <a:spcPct val="155000"/>
               </a:lnSpc>
@@ -9045,7 +8899,7 @@
           <a:bodyPr wrap="square" rtlCol="0" anchor="ctr"/>
           <a:lstStyle/>
           <a:p>
-            <a:pPr algn="ctr" indent="0" marL="0">
+            <a:pPr marL="0" indent="0" algn="ctr">
               <a:buNone/>
             </a:pPr>
             <a:r>
@@ -9084,7 +8938,7 @@
           <a:bodyPr wrap="square" rtlCol="0" anchor="ctr"/>
           <a:lstStyle/>
           <a:p>
-            <a:pPr algn="ctr" indent="0" marL="0">
+            <a:pPr marL="0" indent="0" algn="ctr">
               <a:buNone/>
             </a:pPr>
             <a:r>
@@ -9114,9 +8968,7 @@
             <a:ext cx="2743200" cy="4297680"/>
           </a:xfrm>
           <a:prstGeom prst="rect">
-            <a:avLst>
-              <a:gd name="adj" fmla="val 5000"/>
-            </a:avLst>
+            <a:avLst/>
           </a:prstGeom>
           <a:solidFill>
             <a:srgbClr val="111111"/>
@@ -9128,6 +8980,13 @@
             <a:prstDash val="solid"/>
           </a:ln>
         </p:spPr>
+        <p:txBody>
+          <a:bodyPr/>
+          <a:lstStyle/>
+          <a:p>
+            <a:endParaRPr lang="pt-BR"/>
+          </a:p>
+        </p:txBody>
       </p:sp>
       <p:sp>
         <p:nvSpPr>
@@ -9150,11 +9009,11 @@
           <a:bodyPr wrap="square" rtlCol="0" anchor="ctr"/>
           <a:lstStyle/>
           <a:p>
-            <a:pPr algn="ctr" indent="0" marL="0">
-              <a:buNone/>
-            </a:pPr>
-            <a:r>
-              <a:rPr lang="en-US" sz="1000" b="1" spc="300" kern="0" dirty="0">
+            <a:pPr marL="0" indent="0" algn="ctr">
+              <a:buNone/>
+            </a:pPr>
+            <a:r>
+              <a:rPr lang="en-US" sz="1000" b="1" kern="0" spc="300" dirty="0">
                 <a:solidFill>
                   <a:srgbClr val="7C3AED"/>
                 </a:solidFill>
@@ -9189,7 +9048,7 @@
           <a:bodyPr wrap="square" rtlCol="0" anchor="ctr"/>
           <a:lstStyle/>
           <a:p>
-            <a:pPr algn="ctr" indent="0" marL="0">
+            <a:pPr marL="0" indent="0" algn="ctr">
               <a:lnSpc>
                 <a:spcPct val="120000"/>
               </a:lnSpc>
@@ -9209,7 +9068,7 @@
             <a:endParaRPr lang="en-US" sz="1600" dirty="0"/>
           </a:p>
           <a:p>
-            <a:pPr algn="ctr" indent="0" marL="0">
+            <a:pPr marL="0" indent="0" algn="ctr">
               <a:lnSpc>
                 <a:spcPct val="120000"/>
               </a:lnSpc>
@@ -9254,6 +9113,13 @@
             <a:prstDash val="solid"/>
           </a:ln>
         </p:spPr>
+        <p:txBody>
+          <a:bodyPr/>
+          <a:lstStyle/>
+          <a:p>
+            <a:endParaRPr lang="pt-BR"/>
+          </a:p>
+        </p:txBody>
       </p:sp>
       <p:sp>
         <p:nvSpPr>
@@ -9276,7 +9142,7 @@
           <a:bodyPr wrap="square" rtlCol="0" anchor="ctr"/>
           <a:lstStyle/>
           <a:p>
-            <a:pPr algn="ctr" indent="0" marL="0">
+            <a:pPr marL="0" indent="0" algn="ctr">
               <a:lnSpc>
                 <a:spcPct val="155000"/>
               </a:lnSpc>
@@ -9296,7 +9162,7 @@
             <a:endParaRPr lang="en-US" sz="1200" dirty="0"/>
           </a:p>
           <a:p>
-            <a:pPr algn="ctr" indent="0" marL="0">
+            <a:pPr marL="0" indent="0" algn="ctr">
               <a:lnSpc>
                 <a:spcPct val="155000"/>
               </a:lnSpc>
@@ -9316,7 +9182,7 @@
             <a:endParaRPr lang="en-US" sz="1200" dirty="0"/>
           </a:p>
           <a:p>
-            <a:pPr algn="ctr" indent="0" marL="0">
+            <a:pPr marL="0" indent="0" algn="ctr">
               <a:lnSpc>
                 <a:spcPct val="155000"/>
               </a:lnSpc>
@@ -9358,7 +9224,7 @@
           <a:bodyPr wrap="square" rtlCol="0" anchor="ctr"/>
           <a:lstStyle/>
           <a:p>
-            <a:pPr algn="ctr" indent="0" marL="0">
+            <a:pPr marL="0" indent="0" algn="ctr">
               <a:buNone/>
             </a:pPr>
             <a:r>
@@ -9397,7 +9263,7 @@
           <a:bodyPr wrap="square" rtlCol="0" anchor="ctr"/>
           <a:lstStyle/>
           <a:p>
-            <a:pPr algn="ctr" indent="0" marL="0">
+            <a:pPr marL="0" indent="0" algn="ctr">
               <a:buNone/>
             </a:pPr>
             <a:r>
@@ -9427,9 +9293,7 @@
             <a:ext cx="2743200" cy="4297680"/>
           </a:xfrm>
           <a:prstGeom prst="rect">
-            <a:avLst>
-              <a:gd name="adj" fmla="val 5000"/>
-            </a:avLst>
+            <a:avLst/>
           </a:prstGeom>
           <a:solidFill>
             <a:srgbClr val="111111"/>
@@ -9441,6 +9305,13 @@
             <a:prstDash val="solid"/>
           </a:ln>
         </p:spPr>
+        <p:txBody>
+          <a:bodyPr/>
+          <a:lstStyle/>
+          <a:p>
+            <a:endParaRPr lang="pt-BR"/>
+          </a:p>
+        </p:txBody>
       </p:sp>
       <p:sp>
         <p:nvSpPr>
@@ -9463,11 +9334,11 @@
           <a:bodyPr wrap="square" rtlCol="0" anchor="ctr"/>
           <a:lstStyle/>
           <a:p>
-            <a:pPr algn="ctr" indent="0" marL="0">
-              <a:buNone/>
-            </a:pPr>
-            <a:r>
-              <a:rPr lang="en-US" sz="1000" b="1" spc="300" kern="0" dirty="0">
+            <a:pPr marL="0" indent="0" algn="ctr">
+              <a:buNone/>
+            </a:pPr>
+            <a:r>
+              <a:rPr lang="en-US" sz="1000" b="1" kern="0" spc="300" dirty="0">
                 <a:solidFill>
                   <a:srgbClr val="7C3AED"/>
                 </a:solidFill>
@@ -9502,7 +9373,7 @@
           <a:bodyPr wrap="square" rtlCol="0" anchor="ctr"/>
           <a:lstStyle/>
           <a:p>
-            <a:pPr algn="ctr" indent="0" marL="0">
+            <a:pPr marL="0" indent="0" algn="ctr">
               <a:lnSpc>
                 <a:spcPct val="120000"/>
               </a:lnSpc>
@@ -9522,7 +9393,7 @@
             <a:endParaRPr lang="en-US" sz="1600" dirty="0"/>
           </a:p>
           <a:p>
-            <a:pPr algn="ctr" indent="0" marL="0">
+            <a:pPr marL="0" indent="0" algn="ctr">
               <a:lnSpc>
                 <a:spcPct val="120000"/>
               </a:lnSpc>
@@ -9567,6 +9438,13 @@
             <a:prstDash val="solid"/>
           </a:ln>
         </p:spPr>
+        <p:txBody>
+          <a:bodyPr/>
+          <a:lstStyle/>
+          <a:p>
+            <a:endParaRPr lang="pt-BR"/>
+          </a:p>
+        </p:txBody>
       </p:sp>
       <p:sp>
         <p:nvSpPr>
@@ -9589,7 +9467,7 @@
           <a:bodyPr wrap="square" rtlCol="0" anchor="ctr"/>
           <a:lstStyle/>
           <a:p>
-            <a:pPr algn="ctr" indent="0" marL="0">
+            <a:pPr marL="0" indent="0" algn="ctr">
               <a:lnSpc>
                 <a:spcPct val="155000"/>
               </a:lnSpc>
@@ -9609,7 +9487,7 @@
             <a:endParaRPr lang="en-US" sz="1200" dirty="0"/>
           </a:p>
           <a:p>
-            <a:pPr algn="ctr" indent="0" marL="0">
+            <a:pPr marL="0" indent="0" algn="ctr">
               <a:lnSpc>
                 <a:spcPct val="155000"/>
               </a:lnSpc>
@@ -9629,7 +9507,7 @@
             <a:endParaRPr lang="en-US" sz="1200" dirty="0"/>
           </a:p>
           <a:p>
-            <a:pPr algn="ctr" indent="0" marL="0">
+            <a:pPr marL="0" indent="0" algn="ctr">
               <a:lnSpc>
                 <a:spcPct val="155000"/>
               </a:lnSpc>
@@ -9671,7 +9549,7 @@
           <a:bodyPr wrap="square" rtlCol="0" anchor="ctr"/>
           <a:lstStyle/>
           <a:p>
-            <a:pPr algn="ctr" indent="0" marL="0">
+            <a:pPr marL="0" indent="0" algn="ctr">
               <a:buNone/>
             </a:pPr>
             <a:r>
@@ -9710,7 +9588,7 @@
           <a:bodyPr wrap="square" rtlCol="0" anchor="ctr"/>
           <a:lstStyle/>
           <a:p>
-            <a:pPr algn="ctr" indent="0" marL="0">
+            <a:pPr marL="0" indent="0" algn="ctr">
               <a:buNone/>
             </a:pPr>
             <a:r>
@@ -9740,9 +9618,7 @@
             <a:ext cx="2743200" cy="4297680"/>
           </a:xfrm>
           <a:prstGeom prst="rect">
-            <a:avLst>
-              <a:gd name="adj" fmla="val 5000"/>
-            </a:avLst>
+            <a:avLst/>
           </a:prstGeom>
           <a:solidFill>
             <a:srgbClr val="1A0A2E"/>
@@ -9754,6 +9630,13 @@
             <a:prstDash val="solid"/>
           </a:ln>
         </p:spPr>
+        <p:txBody>
+          <a:bodyPr/>
+          <a:lstStyle/>
+          <a:p>
+            <a:endParaRPr lang="pt-BR"/>
+          </a:p>
+        </p:txBody>
       </p:sp>
       <p:sp>
         <p:nvSpPr>
@@ -9776,11 +9659,11 @@
           <a:bodyPr wrap="square" rtlCol="0" anchor="ctr"/>
           <a:lstStyle/>
           <a:p>
-            <a:pPr algn="ctr" indent="0" marL="0">
-              <a:buNone/>
-            </a:pPr>
-            <a:r>
-              <a:rPr lang="en-US" sz="1000" b="1" spc="300" kern="0" dirty="0">
+            <a:pPr marL="0" indent="0" algn="ctr">
+              <a:buNone/>
+            </a:pPr>
+            <a:r>
+              <a:rPr lang="en-US" sz="1000" b="1" kern="0" spc="300" dirty="0">
                 <a:solidFill>
                   <a:srgbClr val="7C3AED"/>
                 </a:solidFill>
@@ -9815,7 +9698,7 @@
           <a:bodyPr wrap="square" rtlCol="0" anchor="ctr"/>
           <a:lstStyle/>
           <a:p>
-            <a:pPr algn="ctr" indent="0" marL="0">
+            <a:pPr marL="0" indent="0" algn="ctr">
               <a:lnSpc>
                 <a:spcPct val="120000"/>
               </a:lnSpc>
@@ -9835,7 +9718,7 @@
             <a:endParaRPr lang="en-US" sz="1600" dirty="0"/>
           </a:p>
           <a:p>
-            <a:pPr algn="ctr" indent="0" marL="0">
+            <a:pPr marL="0" indent="0" algn="ctr">
               <a:lnSpc>
                 <a:spcPct val="120000"/>
               </a:lnSpc>
@@ -9880,6 +9763,13 @@
             <a:prstDash val="solid"/>
           </a:ln>
         </p:spPr>
+        <p:txBody>
+          <a:bodyPr/>
+          <a:lstStyle/>
+          <a:p>
+            <a:endParaRPr lang="pt-BR"/>
+          </a:p>
+        </p:txBody>
       </p:sp>
       <p:sp>
         <p:nvSpPr>
@@ -9902,7 +9792,7 @@
           <a:bodyPr wrap="square" rtlCol="0" anchor="ctr"/>
           <a:lstStyle/>
           <a:p>
-            <a:pPr algn="ctr" indent="0" marL="0">
+            <a:pPr marL="0" indent="0" algn="ctr">
               <a:lnSpc>
                 <a:spcPct val="155000"/>
               </a:lnSpc>
@@ -9922,7 +9812,7 @@
             <a:endParaRPr lang="en-US" sz="1200" dirty="0"/>
           </a:p>
           <a:p>
-            <a:pPr algn="ctr" indent="0" marL="0">
+            <a:pPr marL="0" indent="0" algn="ctr">
               <a:lnSpc>
                 <a:spcPct val="155000"/>
               </a:lnSpc>
@@ -9942,7 +9832,7 @@
             <a:endParaRPr lang="en-US" sz="1200" dirty="0"/>
           </a:p>
           <a:p>
-            <a:pPr algn="ctr" indent="0" marL="0">
+            <a:pPr marL="0" indent="0" algn="ctr">
               <a:lnSpc>
                 <a:spcPct val="155000"/>
               </a:lnSpc>
@@ -9984,7 +9874,7 @@
           <a:bodyPr wrap="square" rtlCol="0" anchor="ctr"/>
           <a:lstStyle/>
           <a:p>
-            <a:pPr algn="ctr" indent="0" marL="0">
+            <a:pPr marL="0" indent="0" algn="ctr">
               <a:buNone/>
             </a:pPr>
             <a:r>
@@ -10023,7 +9913,7 @@
           <a:bodyPr wrap="square" rtlCol="0" anchor="ctr"/>
           <a:lstStyle/>
           <a:p>
-            <a:pPr algn="ctr" indent="0" marL="0">
+            <a:pPr marL="0" indent="0" algn="ctr">
               <a:buNone/>
             </a:pPr>
             <a:r>
@@ -10090,6 +9980,13 @@
             <a:prstDash val="solid"/>
           </a:ln>
         </p:spPr>
+        <p:txBody>
+          <a:bodyPr/>
+          <a:lstStyle/>
+          <a:p>
+            <a:endParaRPr lang="pt-BR"/>
+          </a:p>
+        </p:txBody>
       </p:sp>
       <p:sp>
         <p:nvSpPr>
@@ -10112,11 +10009,11 @@
           <a:bodyPr wrap="square" rtlCol="0" anchor="ctr"/>
           <a:lstStyle/>
           <a:p>
-            <a:pPr algn="ctr" indent="0" marL="0">
-              <a:buNone/>
-            </a:pPr>
-            <a:r>
-              <a:rPr lang="en-US" sz="900" b="1" spc="300" kern="0" dirty="0">
+            <a:pPr marL="0" indent="0" algn="ctr">
+              <a:buNone/>
+            </a:pPr>
+            <a:r>
+              <a:rPr lang="en-US" sz="900" b="1" kern="0" spc="300" dirty="0">
                 <a:solidFill>
                   <a:srgbClr val="7C3AED"/>
                 </a:solidFill>
@@ -10151,7 +10048,7 @@
           <a:bodyPr wrap="square" rtlCol="0" anchor="ctr"/>
           <a:lstStyle/>
           <a:p>
-            <a:pPr algn="ctr" indent="0" marL="0">
+            <a:pPr marL="0" indent="0" algn="ctr">
               <a:lnSpc>
                 <a:spcPct val="115000"/>
               </a:lnSpc>
@@ -10171,7 +10068,7 @@
             <a:endParaRPr lang="en-US" sz="4000" dirty="0"/>
           </a:p>
           <a:p>
-            <a:pPr algn="ctr" indent="0" marL="0">
+            <a:pPr marL="0" indent="0" algn="ctr">
               <a:lnSpc>
                 <a:spcPct val="115000"/>
               </a:lnSpc>
@@ -10216,6 +10113,13 @@
             <a:prstDash val="solid"/>
           </a:ln>
         </p:spPr>
+        <p:txBody>
+          <a:bodyPr/>
+          <a:lstStyle/>
+          <a:p>
+            <a:endParaRPr lang="pt-BR"/>
+          </a:p>
+        </p:txBody>
       </p:sp>
       <p:sp>
         <p:nvSpPr>
@@ -10229,9 +10133,7 @@
             <a:ext cx="5029200" cy="3291840"/>
           </a:xfrm>
           <a:prstGeom prst="rect">
-            <a:avLst>
-              <a:gd name="adj" fmla="val 4167"/>
-            </a:avLst>
+            <a:avLst/>
           </a:prstGeom>
           <a:solidFill>
             <a:srgbClr val="111111"/>
@@ -10243,6 +10145,13 @@
             <a:prstDash val="solid"/>
           </a:ln>
         </p:spPr>
+        <p:txBody>
+          <a:bodyPr/>
+          <a:lstStyle/>
+          <a:p>
+            <a:endParaRPr lang="pt-BR"/>
+          </a:p>
+        </p:txBody>
       </p:sp>
       <p:sp>
         <p:nvSpPr>
@@ -10265,11 +10174,11 @@
           <a:bodyPr wrap="square" rtlCol="0" anchor="ctr"/>
           <a:lstStyle/>
           <a:p>
-            <a:pPr algn="ctr" indent="0" marL="0">
-              <a:buNone/>
-            </a:pPr>
-            <a:r>
-              <a:rPr lang="en-US" sz="900" b="1" spc="300" kern="0" dirty="0">
+            <a:pPr marL="0" indent="0" algn="ctr">
+              <a:buNone/>
+            </a:pPr>
+            <a:r>
+              <a:rPr lang="en-US" sz="900" b="1" kern="0" spc="300" dirty="0">
                 <a:solidFill>
                   <a:srgbClr val="374151"/>
                 </a:solidFill>
@@ -10304,7 +10213,7 @@
           <a:bodyPr wrap="square" rtlCol="0" anchor="ctr"/>
           <a:lstStyle/>
           <a:p>
-            <a:pPr indent="0" marL="0">
+            <a:pPr marL="0" indent="0">
               <a:lnSpc>
                 <a:spcPct val="120000"/>
               </a:lnSpc>
@@ -10346,7 +10255,7 @@
           <a:bodyPr wrap="square" rtlCol="0" anchor="ctr"/>
           <a:lstStyle/>
           <a:p>
-            <a:pPr indent="0" marL="0">
+            <a:pPr marL="0" indent="0">
               <a:lnSpc>
                 <a:spcPct val="120000"/>
               </a:lnSpc>
@@ -10388,7 +10297,7 @@
           <a:bodyPr wrap="square" rtlCol="0" anchor="ctr"/>
           <a:lstStyle/>
           <a:p>
-            <a:pPr indent="0" marL="0">
+            <a:pPr marL="0" indent="0">
               <a:lnSpc>
                 <a:spcPct val="120000"/>
               </a:lnSpc>
@@ -10430,7 +10339,7 @@
           <a:bodyPr wrap="square" rtlCol="0" anchor="ctr"/>
           <a:lstStyle/>
           <a:p>
-            <a:pPr indent="0" marL="0">
+            <a:pPr marL="0" indent="0">
               <a:lnSpc>
                 <a:spcPct val="120000"/>
               </a:lnSpc>
@@ -10472,7 +10381,7 @@
           <a:bodyPr wrap="square" rtlCol="0" anchor="ctr"/>
           <a:lstStyle/>
           <a:p>
-            <a:pPr indent="0" marL="0">
+            <a:pPr marL="0" indent="0">
               <a:lnSpc>
                 <a:spcPct val="120000"/>
               </a:lnSpc>
@@ -10505,9 +10414,7 @@
             <a:ext cx="5029200" cy="3291840"/>
           </a:xfrm>
           <a:prstGeom prst="rect">
-            <a:avLst>
-              <a:gd name="adj" fmla="val 4167"/>
-            </a:avLst>
+            <a:avLst/>
           </a:prstGeom>
           <a:solidFill>
             <a:srgbClr val="1A0A2E"/>
@@ -10519,6 +10426,13 @@
             <a:prstDash val="solid"/>
           </a:ln>
         </p:spPr>
+        <p:txBody>
+          <a:bodyPr/>
+          <a:lstStyle/>
+          <a:p>
+            <a:endParaRPr lang="pt-BR"/>
+          </a:p>
+        </p:txBody>
       </p:sp>
       <p:sp>
         <p:nvSpPr>
@@ -10541,11 +10455,11 @@
           <a:bodyPr wrap="square" rtlCol="0" anchor="ctr"/>
           <a:lstStyle/>
           <a:p>
-            <a:pPr algn="ctr" indent="0" marL="0">
-              <a:buNone/>
-            </a:pPr>
-            <a:r>
-              <a:rPr lang="en-US" sz="900" b="1" spc="300" kern="0" dirty="0">
+            <a:pPr marL="0" indent="0" algn="ctr">
+              <a:buNone/>
+            </a:pPr>
+            <a:r>
+              <a:rPr lang="en-US" sz="900" b="1" kern="0" spc="300" dirty="0">
                 <a:solidFill>
                   <a:srgbClr val="7C3AED"/>
                 </a:solidFill>
@@ -10580,7 +10494,7 @@
           <a:bodyPr wrap="square" rtlCol="0" anchor="ctr"/>
           <a:lstStyle/>
           <a:p>
-            <a:pPr indent="0" marL="0">
+            <a:pPr marL="0" indent="0">
               <a:lnSpc>
                 <a:spcPct val="120000"/>
               </a:lnSpc>
@@ -10622,7 +10536,7 @@
           <a:bodyPr wrap="square" rtlCol="0" anchor="ctr"/>
           <a:lstStyle/>
           <a:p>
-            <a:pPr indent="0" marL="0">
+            <a:pPr marL="0" indent="0">
               <a:lnSpc>
                 <a:spcPct val="120000"/>
               </a:lnSpc>
@@ -10664,7 +10578,7 @@
           <a:bodyPr wrap="square" rtlCol="0" anchor="ctr"/>
           <a:lstStyle/>
           <a:p>
-            <a:pPr indent="0" marL="0">
+            <a:pPr marL="0" indent="0">
               <a:lnSpc>
                 <a:spcPct val="120000"/>
               </a:lnSpc>
@@ -10706,7 +10620,7 @@
           <a:bodyPr wrap="square" rtlCol="0" anchor="ctr"/>
           <a:lstStyle/>
           <a:p>
-            <a:pPr indent="0" marL="0">
+            <a:pPr marL="0" indent="0">
               <a:lnSpc>
                 <a:spcPct val="120000"/>
               </a:lnSpc>
@@ -10748,7 +10662,7 @@
           <a:bodyPr wrap="square" rtlCol="0" anchor="ctr"/>
           <a:lstStyle/>
           <a:p>
-            <a:pPr indent="0" marL="0">
+            <a:pPr marL="0" indent="0">
               <a:lnSpc>
                 <a:spcPct val="120000"/>
               </a:lnSpc>
@@ -10790,7 +10704,7 @@
           <a:bodyPr wrap="square" rtlCol="0" anchor="ctr"/>
           <a:lstStyle/>
           <a:p>
-            <a:pPr algn="ctr" indent="0" marL="0">
+            <a:pPr marL="0" indent="0" algn="ctr">
               <a:buNone/>
             </a:pPr>
             <a:r>
@@ -10857,6 +10771,13 @@
             <a:prstDash val="solid"/>
           </a:ln>
         </p:spPr>
+        <p:txBody>
+          <a:bodyPr/>
+          <a:lstStyle/>
+          <a:p>
+            <a:endParaRPr lang="pt-BR"/>
+          </a:p>
+        </p:txBody>
       </p:sp>
       <p:sp>
         <p:nvSpPr>
@@ -10879,11 +10800,11 @@
           <a:bodyPr wrap="square" rtlCol="0" anchor="ctr"/>
           <a:lstStyle/>
           <a:p>
-            <a:pPr algn="ctr" indent="0" marL="0">
-              <a:buNone/>
-            </a:pPr>
-            <a:r>
-              <a:rPr lang="en-US" sz="900" b="1" spc="300" kern="0" dirty="0">
+            <a:pPr marL="0" indent="0" algn="ctr">
+              <a:buNone/>
+            </a:pPr>
+            <a:r>
+              <a:rPr lang="en-US" sz="900" b="1" kern="0" spc="300" dirty="0">
                 <a:solidFill>
                   <a:srgbClr val="7C3AED"/>
                 </a:solidFill>
@@ -10918,7 +10839,7 @@
           <a:bodyPr wrap="square" rtlCol="0" anchor="ctr"/>
           <a:lstStyle/>
           <a:p>
-            <a:pPr algn="ctr" indent="0" marL="0">
+            <a:pPr marL="0" indent="0" algn="ctr">
               <a:buNone/>
             </a:pPr>
             <a:r>
@@ -10960,6 +10881,13 @@
             <a:prstDash val="solid"/>
           </a:ln>
         </p:spPr>
+        <p:txBody>
+          <a:bodyPr/>
+          <a:lstStyle/>
+          <a:p>
+            <a:endParaRPr lang="pt-BR"/>
+          </a:p>
+        </p:txBody>
       </p:sp>
       <p:sp>
         <p:nvSpPr>
@@ -10973,9 +10901,7 @@
             <a:ext cx="3657600" cy="4846320"/>
           </a:xfrm>
           <a:prstGeom prst="rect">
-            <a:avLst>
-              <a:gd name="adj" fmla="val 3750"/>
-            </a:avLst>
+            <a:avLst/>
           </a:prstGeom>
           <a:solidFill>
             <a:srgbClr val="111111"/>
@@ -10987,18 +10913,25 @@
             <a:prstDash val="solid"/>
           </a:ln>
         </p:spPr>
+        <p:txBody>
+          <a:bodyPr/>
+          <a:lstStyle/>
+          <a:p>
+            <a:endParaRPr lang="pt-BR"/>
+          </a:p>
+        </p:txBody>
       </p:sp>
       <p:pic>
         <p:nvPicPr>
-          <p:cNvPr id="7" name="Image 0" descr="c:/Users/Desktop/Downloads/grupoaura/operacoes/apresentacoes/monica/foto-elida.jpg">    </p:cNvPr>
+          <p:cNvPr id="7" name="Image 0" descr="c:/Users/Desktop/Downloads/grupoaura/operacoes/apresentacoes/monica/foto-elida.jpg"/>
           <p:cNvPicPr>
             <a:picLocks noChangeAspect="1"/>
           </p:cNvPicPr>
           <p:nvPr/>
         </p:nvPicPr>
         <p:blipFill>
-          <a:blip r:embed="rId1"/>
-          <a:srcRect l="0" r="0" t="0" b="0"/>
+          <a:blip r:embed="rId3"/>
+          <a:srcRect/>
           <a:stretch/>
         </p:blipFill>
         <p:spPr>
@@ -11032,11 +10965,11 @@
           <a:bodyPr wrap="square" rtlCol="0" anchor="ctr"/>
           <a:lstStyle/>
           <a:p>
-            <a:pPr indent="0" marL="0">
-              <a:buNone/>
-            </a:pPr>
-            <a:r>
-              <a:rPr lang="en-US" sz="1000" b="1" spc="100" kern="0" dirty="0">
+            <a:pPr marL="0" indent="0">
+              <a:buNone/>
+            </a:pPr>
+            <a:r>
+              <a:rPr lang="en-US" sz="1000" b="1" kern="0" spc="100" dirty="0">
                 <a:solidFill>
                   <a:srgbClr val="7C3AED"/>
                 </a:solidFill>
@@ -11071,7 +11004,7 @@
           <a:bodyPr wrap="square" rtlCol="0" anchor="ctr"/>
           <a:lstStyle/>
           <a:p>
-            <a:pPr indent="0" marL="0">
+            <a:pPr marL="0" indent="0">
               <a:buNone/>
             </a:pPr>
             <a:r>
@@ -11110,7 +11043,7 @@
           <a:bodyPr wrap="square" rtlCol="0" anchor="ctr"/>
           <a:lstStyle/>
           <a:p>
-            <a:pPr indent="0" marL="0">
+            <a:pPr marL="0" indent="0">
               <a:buNone/>
             </a:pPr>
             <a:r>
@@ -11149,7 +11082,7 @@
           <a:bodyPr wrap="square" rtlCol="0" anchor="ctr"/>
           <a:lstStyle/>
           <a:p>
-            <a:pPr indent="0" marL="0">
+            <a:pPr marL="0" indent="0">
               <a:buNone/>
             </a:pPr>
             <a:r>
@@ -11191,6 +11124,13 @@
             <a:prstDash val="solid"/>
           </a:ln>
         </p:spPr>
+        <p:txBody>
+          <a:bodyPr/>
+          <a:lstStyle/>
+          <a:p>
+            <a:endParaRPr lang="pt-BR"/>
+          </a:p>
+        </p:txBody>
       </p:sp>
       <p:sp>
         <p:nvSpPr>
@@ -11213,7 +11153,7 @@
           <a:bodyPr wrap="square" rtlCol="0" anchor="ctr"/>
           <a:lstStyle/>
           <a:p>
-            <a:pPr indent="0" marL="0">
+            <a:pPr marL="0" indent="0">
               <a:lnSpc>
                 <a:spcPct val="155000"/>
               </a:lnSpc>
@@ -11233,7 +11173,7 @@
             <a:endParaRPr lang="en-US" sz="1200" dirty="0"/>
           </a:p>
           <a:p>
-            <a:pPr indent="0" marL="0">
+            <a:pPr marL="0" indent="0">
               <a:lnSpc>
                 <a:spcPct val="155000"/>
               </a:lnSpc>
@@ -11253,7 +11193,7 @@
             <a:endParaRPr lang="en-US" sz="1200" dirty="0"/>
           </a:p>
           <a:p>
-            <a:pPr indent="0" marL="0">
+            <a:pPr marL="0" indent="0">
               <a:lnSpc>
                 <a:spcPct val="155000"/>
               </a:lnSpc>
@@ -11273,7 +11213,7 @@
             <a:endParaRPr lang="en-US" sz="1200" dirty="0"/>
           </a:p>
           <a:p>
-            <a:pPr indent="0" marL="0">
+            <a:pPr marL="0" indent="0">
               <a:lnSpc>
                 <a:spcPct val="155000"/>
               </a:lnSpc>
@@ -11315,7 +11255,7 @@
           <a:bodyPr wrap="square" rtlCol="0" anchor="ctr"/>
           <a:lstStyle/>
           <a:p>
-            <a:pPr indent="0" marL="0">
+            <a:pPr marL="0" indent="0">
               <a:buNone/>
             </a:pPr>
             <a:r>
@@ -11345,9 +11285,7 @@
             <a:ext cx="3657600" cy="4846320"/>
           </a:xfrm>
           <a:prstGeom prst="rect">
-            <a:avLst>
-              <a:gd name="adj" fmla="val 3750"/>
-            </a:avLst>
+            <a:avLst/>
           </a:prstGeom>
           <a:solidFill>
             <a:srgbClr val="1A0A2E"/>
@@ -11359,18 +11297,25 @@
             <a:prstDash val="solid"/>
           </a:ln>
         </p:spPr>
+        <p:txBody>
+          <a:bodyPr/>
+          <a:lstStyle/>
+          <a:p>
+            <a:endParaRPr lang="pt-BR"/>
+          </a:p>
+        </p:txBody>
       </p:sp>
       <p:pic>
         <p:nvPicPr>
-          <p:cNvPr id="16" name="Image 1" descr="c:/Users/Desktop/Downloads/grupoaura/operacoes/apresentacoes/monica/foto-lucas.jpg">    </p:cNvPr>
+          <p:cNvPr id="16" name="Image 1" descr="c:/Users/Desktop/Downloads/grupoaura/operacoes/apresentacoes/monica/foto-lucas.jpg"/>
           <p:cNvPicPr>
             <a:picLocks noChangeAspect="1"/>
           </p:cNvPicPr>
           <p:nvPr/>
         </p:nvPicPr>
         <p:blipFill>
-          <a:blip r:embed="rId2"/>
-          <a:srcRect l="0" r="0" t="0" b="0"/>
+          <a:blip r:embed="rId4"/>
+          <a:srcRect/>
           <a:stretch/>
         </p:blipFill>
         <p:spPr>
@@ -11404,11 +11349,11 @@
           <a:bodyPr wrap="square" rtlCol="0" anchor="ctr"/>
           <a:lstStyle/>
           <a:p>
-            <a:pPr indent="0" marL="0">
-              <a:buNone/>
-            </a:pPr>
-            <a:r>
-              <a:rPr lang="en-US" sz="1000" b="1" spc="100" kern="0" dirty="0">
+            <a:pPr marL="0" indent="0">
+              <a:buNone/>
+            </a:pPr>
+            <a:r>
+              <a:rPr lang="en-US" sz="1000" b="1" kern="0" spc="100" dirty="0">
                 <a:solidFill>
                   <a:srgbClr val="7C3AED"/>
                 </a:solidFill>
@@ -11443,7 +11388,7 @@
           <a:bodyPr wrap="square" rtlCol="0" anchor="ctr"/>
           <a:lstStyle/>
           <a:p>
-            <a:pPr indent="0" marL="0">
+            <a:pPr marL="0" indent="0">
               <a:buNone/>
             </a:pPr>
             <a:r>
@@ -11482,7 +11427,7 @@
           <a:bodyPr wrap="square" rtlCol="0" anchor="ctr"/>
           <a:lstStyle/>
           <a:p>
-            <a:pPr indent="0" marL="0">
+            <a:pPr marL="0" indent="0">
               <a:buNone/>
             </a:pPr>
             <a:r>
@@ -11521,7 +11466,7 @@
           <a:bodyPr wrap="square" rtlCol="0" anchor="ctr"/>
           <a:lstStyle/>
           <a:p>
-            <a:pPr indent="0" marL="0">
+            <a:pPr marL="0" indent="0">
               <a:buNone/>
             </a:pPr>
             <a:r>
@@ -11563,6 +11508,13 @@
             <a:prstDash val="solid"/>
           </a:ln>
         </p:spPr>
+        <p:txBody>
+          <a:bodyPr/>
+          <a:lstStyle/>
+          <a:p>
+            <a:endParaRPr lang="pt-BR"/>
+          </a:p>
+        </p:txBody>
       </p:sp>
       <p:sp>
         <p:nvSpPr>
@@ -11585,7 +11537,7 @@
           <a:bodyPr wrap="square" rtlCol="0" anchor="ctr"/>
           <a:lstStyle/>
           <a:p>
-            <a:pPr indent="0" marL="0">
+            <a:pPr marL="0" indent="0">
               <a:lnSpc>
                 <a:spcPct val="155000"/>
               </a:lnSpc>
@@ -11605,7 +11557,7 @@
             <a:endParaRPr lang="en-US" sz="1200" dirty="0"/>
           </a:p>
           <a:p>
-            <a:pPr indent="0" marL="0">
+            <a:pPr marL="0" indent="0">
               <a:lnSpc>
                 <a:spcPct val="155000"/>
               </a:lnSpc>
@@ -11625,7 +11577,7 @@
             <a:endParaRPr lang="en-US" sz="1200" dirty="0"/>
           </a:p>
           <a:p>
-            <a:pPr indent="0" marL="0">
+            <a:pPr marL="0" indent="0">
               <a:lnSpc>
                 <a:spcPct val="155000"/>
               </a:lnSpc>
@@ -11645,7 +11597,7 @@
             <a:endParaRPr lang="en-US" sz="1200" dirty="0"/>
           </a:p>
           <a:p>
-            <a:pPr indent="0" marL="0">
+            <a:pPr marL="0" indent="0">
               <a:lnSpc>
                 <a:spcPct val="155000"/>
               </a:lnSpc>
@@ -11687,7 +11639,7 @@
           <a:bodyPr wrap="square" rtlCol="0" anchor="ctr"/>
           <a:lstStyle/>
           <a:p>
-            <a:pPr indent="0" marL="0">
+            <a:pPr marL="0" indent="0">
               <a:buNone/>
             </a:pPr>
             <a:r>
@@ -11717,9 +11669,7 @@
             <a:ext cx="3657600" cy="4846320"/>
           </a:xfrm>
           <a:prstGeom prst="rect">
-            <a:avLst>
-              <a:gd name="adj" fmla="val 3750"/>
-            </a:avLst>
+            <a:avLst/>
           </a:prstGeom>
           <a:solidFill>
             <a:srgbClr val="111111"/>
@@ -11731,18 +11681,25 @@
             <a:prstDash val="solid"/>
           </a:ln>
         </p:spPr>
+        <p:txBody>
+          <a:bodyPr/>
+          <a:lstStyle/>
+          <a:p>
+            <a:endParaRPr lang="pt-BR"/>
+          </a:p>
+        </p:txBody>
       </p:sp>
       <p:pic>
         <p:nvPicPr>
-          <p:cNvPr id="25" name="Image 2" descr="c:/Users/Desktop/Downloads/grupoaura/operacoes/apresentacoes/monica/foto-enzo.jpg">    </p:cNvPr>
+          <p:cNvPr id="25" name="Image 2" descr="c:/Users/Desktop/Downloads/grupoaura/operacoes/apresentacoes/monica/foto-enzo.jpg"/>
           <p:cNvPicPr>
             <a:picLocks noChangeAspect="1"/>
           </p:cNvPicPr>
           <p:nvPr/>
         </p:nvPicPr>
         <p:blipFill>
-          <a:blip r:embed="rId3"/>
-          <a:srcRect l="0" r="0" t="0" b="0"/>
+          <a:blip r:embed="rId5"/>
+          <a:srcRect/>
           <a:stretch/>
         </p:blipFill>
         <p:spPr>
@@ -11776,11 +11733,11 @@
           <a:bodyPr wrap="square" rtlCol="0" anchor="ctr"/>
           <a:lstStyle/>
           <a:p>
-            <a:pPr indent="0" marL="0">
-              <a:buNone/>
-            </a:pPr>
-            <a:r>
-              <a:rPr lang="en-US" sz="1000" b="1" spc="100" kern="0" dirty="0">
+            <a:pPr marL="0" indent="0">
+              <a:buNone/>
+            </a:pPr>
+            <a:r>
+              <a:rPr lang="en-US" sz="1000" b="1" kern="0" spc="100" dirty="0">
                 <a:solidFill>
                   <a:srgbClr val="7C3AED"/>
                 </a:solidFill>
@@ -11815,7 +11772,7 @@
           <a:bodyPr wrap="square" rtlCol="0" anchor="ctr"/>
           <a:lstStyle/>
           <a:p>
-            <a:pPr indent="0" marL="0">
+            <a:pPr marL="0" indent="0">
               <a:buNone/>
             </a:pPr>
             <a:r>
@@ -11854,7 +11811,7 @@
           <a:bodyPr wrap="square" rtlCol="0" anchor="ctr"/>
           <a:lstStyle/>
           <a:p>
-            <a:pPr indent="0" marL="0">
+            <a:pPr marL="0" indent="0">
               <a:buNone/>
             </a:pPr>
             <a:r>
@@ -11893,7 +11850,7 @@
           <a:bodyPr wrap="square" rtlCol="0" anchor="ctr"/>
           <a:lstStyle/>
           <a:p>
-            <a:pPr indent="0" marL="0">
+            <a:pPr marL="0" indent="0">
               <a:buNone/>
             </a:pPr>
             <a:r>
@@ -11935,6 +11892,13 @@
             <a:prstDash val="solid"/>
           </a:ln>
         </p:spPr>
+        <p:txBody>
+          <a:bodyPr/>
+          <a:lstStyle/>
+          <a:p>
+            <a:endParaRPr lang="pt-BR"/>
+          </a:p>
+        </p:txBody>
       </p:sp>
       <p:sp>
         <p:nvSpPr>
@@ -11957,7 +11921,7 @@
           <a:bodyPr wrap="square" rtlCol="0" anchor="ctr"/>
           <a:lstStyle/>
           <a:p>
-            <a:pPr indent="0" marL="0">
+            <a:pPr marL="0" indent="0">
               <a:lnSpc>
                 <a:spcPct val="155000"/>
               </a:lnSpc>
@@ -11977,7 +11941,7 @@
             <a:endParaRPr lang="en-US" sz="1200" dirty="0"/>
           </a:p>
           <a:p>
-            <a:pPr indent="0" marL="0">
+            <a:pPr marL="0" indent="0">
               <a:lnSpc>
                 <a:spcPct val="155000"/>
               </a:lnSpc>
@@ -11997,7 +11961,7 @@
             <a:endParaRPr lang="en-US" sz="1200" dirty="0"/>
           </a:p>
           <a:p>
-            <a:pPr indent="0" marL="0">
+            <a:pPr marL="0" indent="0">
               <a:lnSpc>
                 <a:spcPct val="155000"/>
               </a:lnSpc>
@@ -12017,7 +11981,7 @@
             <a:endParaRPr lang="en-US" sz="1200" dirty="0"/>
           </a:p>
           <a:p>
-            <a:pPr indent="0" marL="0">
+            <a:pPr marL="0" indent="0">
               <a:lnSpc>
                 <a:spcPct val="155000"/>
               </a:lnSpc>
@@ -12059,7 +12023,7 @@
           <a:bodyPr wrap="square" rtlCol="0" anchor="ctr"/>
           <a:lstStyle/>
           <a:p>
-            <a:pPr indent="0" marL="0">
+            <a:pPr marL="0" indent="0">
               <a:buNone/>
             </a:pPr>
             <a:r>
@@ -12126,6 +12090,13 @@
             <a:prstDash val="solid"/>
           </a:ln>
         </p:spPr>
+        <p:txBody>
+          <a:bodyPr/>
+          <a:lstStyle/>
+          <a:p>
+            <a:endParaRPr lang="pt-BR"/>
+          </a:p>
+        </p:txBody>
       </p:sp>
       <p:sp>
         <p:nvSpPr>
@@ -12148,11 +12119,11 @@
           <a:bodyPr wrap="square" rtlCol="0" anchor="ctr"/>
           <a:lstStyle/>
           <a:p>
-            <a:pPr algn="ctr" indent="0" marL="0">
-              <a:buNone/>
-            </a:pPr>
-            <a:r>
-              <a:rPr lang="en-US" sz="900" b="1" spc="300" kern="0" dirty="0">
+            <a:pPr marL="0" indent="0" algn="ctr">
+              <a:buNone/>
+            </a:pPr>
+            <a:r>
+              <a:rPr lang="en-US" sz="900" b="1" kern="0" spc="300" dirty="0">
                 <a:solidFill>
                   <a:srgbClr val="7C3AED"/>
                 </a:solidFill>
@@ -12178,9 +12149,7 @@
             <a:ext cx="5120640" cy="4754880"/>
           </a:xfrm>
           <a:prstGeom prst="rect">
-            <a:avLst>
-              <a:gd name="adj" fmla="val 2885"/>
-            </a:avLst>
+            <a:avLst/>
           </a:prstGeom>
           <a:solidFill>
             <a:srgbClr val="1A0A2E"/>
@@ -12192,18 +12161,25 @@
             <a:prstDash val="solid"/>
           </a:ln>
         </p:spPr>
+        <p:txBody>
+          <a:bodyPr/>
+          <a:lstStyle/>
+          <a:p>
+            <a:endParaRPr lang="pt-BR"/>
+          </a:p>
+        </p:txBody>
       </p:sp>
       <p:pic>
         <p:nvPicPr>
-          <p:cNvPr id="5" name="Image 0" descr="c:/Users/Desktop/Downloads/grupoaura/operacoes/apresentacoes/monica/foto-prisciane.jpg">    </p:cNvPr>
+          <p:cNvPr id="5" name="Image 0" descr="c:/Users/Desktop/Downloads/grupoaura/operacoes/apresentacoes/monica/foto-prisciane.jpg"/>
           <p:cNvPicPr>
             <a:picLocks noChangeAspect="1"/>
           </p:cNvPicPr>
           <p:nvPr/>
         </p:nvPicPr>
         <p:blipFill>
-          <a:blip r:embed="rId1"/>
-          <a:srcRect l="0" r="0" t="0" b="0"/>
+          <a:blip r:embed="rId3"/>
+          <a:srcRect/>
           <a:stretch/>
         </p:blipFill>
         <p:spPr>
@@ -12237,11 +12213,11 @@
           <a:bodyPr wrap="square" rtlCol="0" anchor="ctr"/>
           <a:lstStyle/>
           <a:p>
-            <a:pPr indent="0" marL="0">
-              <a:buNone/>
-            </a:pPr>
-            <a:r>
-              <a:rPr lang="en-US" sz="1000" b="1" spc="100" kern="0" dirty="0">
+            <a:pPr marL="0" indent="0">
+              <a:buNone/>
+            </a:pPr>
+            <a:r>
+              <a:rPr lang="en-US" sz="1000" b="1" kern="0" spc="100" dirty="0">
                 <a:solidFill>
                   <a:srgbClr val="7C3AED"/>
                 </a:solidFill>
@@ -12276,7 +12252,7 @@
           <a:bodyPr wrap="square" rtlCol="0" anchor="ctr"/>
           <a:lstStyle/>
           <a:p>
-            <a:pPr indent="0" marL="0">
+            <a:pPr marL="0" indent="0">
               <a:buNone/>
             </a:pPr>
             <a:r>
@@ -12315,7 +12291,7 @@
           <a:bodyPr wrap="square" rtlCol="0" anchor="ctr"/>
           <a:lstStyle/>
           <a:p>
-            <a:pPr indent="0" marL="0">
+            <a:pPr marL="0" indent="0">
               <a:buNone/>
             </a:pPr>
             <a:r>
@@ -12354,7 +12330,7 @@
           <a:bodyPr wrap="square" rtlCol="0" anchor="ctr"/>
           <a:lstStyle/>
           <a:p>
-            <a:pPr indent="0" marL="0">
+            <a:pPr marL="0" indent="0">
               <a:buNone/>
             </a:pPr>
             <a:r>
@@ -12396,6 +12372,13 @@
             <a:prstDash val="solid"/>
           </a:ln>
         </p:spPr>
+        <p:txBody>
+          <a:bodyPr/>
+          <a:lstStyle/>
+          <a:p>
+            <a:endParaRPr lang="pt-BR"/>
+          </a:p>
+        </p:txBody>
       </p:sp>
       <p:sp>
         <p:nvSpPr>
@@ -12418,7 +12401,7 @@
           <a:bodyPr wrap="square" rtlCol="0" anchor="ctr"/>
           <a:lstStyle/>
           <a:p>
-            <a:pPr indent="0" marL="0">
+            <a:pPr marL="0" indent="0">
               <a:lnSpc>
                 <a:spcPct val="155000"/>
               </a:lnSpc>
@@ -12438,7 +12421,7 @@
             <a:endParaRPr lang="en-US" sz="1400" dirty="0"/>
           </a:p>
           <a:p>
-            <a:pPr indent="0" marL="0">
+            <a:pPr marL="0" indent="0">
               <a:lnSpc>
                 <a:spcPct val="155000"/>
               </a:lnSpc>
@@ -12458,7 +12441,7 @@
             <a:endParaRPr lang="en-US" sz="1400" dirty="0"/>
           </a:p>
           <a:p>
-            <a:pPr indent="0" marL="0">
+            <a:pPr marL="0" indent="0">
               <a:lnSpc>
                 <a:spcPct val="155000"/>
               </a:lnSpc>
@@ -12478,7 +12461,7 @@
             <a:endParaRPr lang="en-US" sz="1400" dirty="0"/>
           </a:p>
           <a:p>
-            <a:pPr indent="0" marL="0">
+            <a:pPr marL="0" indent="0">
               <a:lnSpc>
                 <a:spcPct val="155000"/>
               </a:lnSpc>
@@ -12520,7 +12503,7 @@
           <a:bodyPr wrap="square" rtlCol="0" anchor="ctr"/>
           <a:lstStyle/>
           <a:p>
-            <a:pPr indent="0" marL="0">
+            <a:pPr marL="0" indent="0">
               <a:buNone/>
             </a:pPr>
             <a:r>
@@ -12550,9 +12533,7 @@
             <a:ext cx="5120640" cy="4754880"/>
           </a:xfrm>
           <a:prstGeom prst="rect">
-            <a:avLst>
-              <a:gd name="adj" fmla="val 2885"/>
-            </a:avLst>
+            <a:avLst/>
           </a:prstGeom>
           <a:solidFill>
             <a:srgbClr val="111111"/>
@@ -12564,18 +12545,25 @@
             <a:prstDash val="solid"/>
           </a:ln>
         </p:spPr>
+        <p:txBody>
+          <a:bodyPr/>
+          <a:lstStyle/>
+          <a:p>
+            <a:endParaRPr lang="pt-BR"/>
+          </a:p>
+        </p:txBody>
       </p:sp>
       <p:pic>
         <p:nvPicPr>
-          <p:cNvPr id="14" name="Image 1" descr="c:/Users/Desktop/Downloads/grupoaura/operacoes/apresentacoes/monica/foto-fealves.jpg">    </p:cNvPr>
+          <p:cNvPr id="14" name="Image 1" descr="c:/Users/Desktop/Downloads/grupoaura/operacoes/apresentacoes/monica/foto-fealves.jpg"/>
           <p:cNvPicPr>
             <a:picLocks noChangeAspect="1"/>
           </p:cNvPicPr>
           <p:nvPr/>
         </p:nvPicPr>
         <p:blipFill>
-          <a:blip r:embed="rId2"/>
-          <a:srcRect l="0" r="0" t="0" b="0"/>
+          <a:blip r:embed="rId4"/>
+          <a:srcRect/>
           <a:stretch/>
         </p:blipFill>
         <p:spPr>
@@ -12609,11 +12597,11 @@
           <a:bodyPr wrap="square" rtlCol="0" anchor="ctr"/>
           <a:lstStyle/>
           <a:p>
-            <a:pPr indent="0" marL="0">
-              <a:buNone/>
-            </a:pPr>
-            <a:r>
-              <a:rPr lang="en-US" sz="1000" b="1" spc="100" kern="0" dirty="0">
+            <a:pPr marL="0" indent="0">
+              <a:buNone/>
+            </a:pPr>
+            <a:r>
+              <a:rPr lang="en-US" sz="1000" b="1" kern="0" spc="100" dirty="0">
                 <a:solidFill>
                   <a:srgbClr val="7C3AED"/>
                 </a:solidFill>
@@ -12648,7 +12636,7 @@
           <a:bodyPr wrap="square" rtlCol="0" anchor="ctr"/>
           <a:lstStyle/>
           <a:p>
-            <a:pPr indent="0" marL="0">
+            <a:pPr marL="0" indent="0">
               <a:buNone/>
             </a:pPr>
             <a:r>
@@ -12687,7 +12675,7 @@
           <a:bodyPr wrap="square" rtlCol="0" anchor="ctr"/>
           <a:lstStyle/>
           <a:p>
-            <a:pPr indent="0" marL="0">
+            <a:pPr marL="0" indent="0">
               <a:buNone/>
             </a:pPr>
             <a:r>
@@ -12726,7 +12714,7 @@
           <a:bodyPr wrap="square" rtlCol="0" anchor="ctr"/>
           <a:lstStyle/>
           <a:p>
-            <a:pPr indent="0" marL="0">
+            <a:pPr marL="0" indent="0">
               <a:buNone/>
             </a:pPr>
             <a:r>
@@ -12768,6 +12756,13 @@
             <a:prstDash val="solid"/>
           </a:ln>
         </p:spPr>
+        <p:txBody>
+          <a:bodyPr/>
+          <a:lstStyle/>
+          <a:p>
+            <a:endParaRPr lang="pt-BR"/>
+          </a:p>
+        </p:txBody>
       </p:sp>
       <p:sp>
         <p:nvSpPr>
@@ -12790,7 +12785,7 @@
           <a:bodyPr wrap="square" rtlCol="0" anchor="ctr"/>
           <a:lstStyle/>
           <a:p>
-            <a:pPr indent="0" marL="0">
+            <a:pPr marL="0" indent="0">
               <a:lnSpc>
                 <a:spcPct val="155000"/>
               </a:lnSpc>
@@ -12810,7 +12805,7 @@
             <a:endParaRPr lang="en-US" sz="1400" dirty="0"/>
           </a:p>
           <a:p>
-            <a:pPr indent="0" marL="0">
+            <a:pPr marL="0" indent="0">
               <a:lnSpc>
                 <a:spcPct val="155000"/>
               </a:lnSpc>
@@ -12830,7 +12825,7 @@
             <a:endParaRPr lang="en-US" sz="1400" dirty="0"/>
           </a:p>
           <a:p>
-            <a:pPr indent="0" marL="0">
+            <a:pPr marL="0" indent="0">
               <a:lnSpc>
                 <a:spcPct val="155000"/>
               </a:lnSpc>
@@ -12850,7 +12845,7 @@
             <a:endParaRPr lang="en-US" sz="1400" dirty="0"/>
           </a:p>
           <a:p>
-            <a:pPr indent="0" marL="0">
+            <a:pPr marL="0" indent="0">
               <a:lnSpc>
                 <a:spcPct val="155000"/>
               </a:lnSpc>
@@ -12892,7 +12887,7 @@
           <a:bodyPr wrap="square" rtlCol="0" anchor="ctr"/>
           <a:lstStyle/>
           <a:p>
-            <a:pPr indent="0" marL="0">
+            <a:pPr marL="0" indent="0">
               <a:buNone/>
             </a:pPr>
             <a:r>
@@ -12931,7 +12926,7 @@
           <a:bodyPr wrap="square" rtlCol="0" anchor="ctr"/>
           <a:lstStyle/>
           <a:p>
-            <a:pPr algn="ctr" indent="0" marL="0">
+            <a:pPr marL="0" indent="0" algn="ctr">
               <a:buNone/>
             </a:pPr>
             <a:r>
@@ -12998,6 +12993,13 @@
             <a:prstDash val="solid"/>
           </a:ln>
         </p:spPr>
+        <p:txBody>
+          <a:bodyPr/>
+          <a:lstStyle/>
+          <a:p>
+            <a:endParaRPr lang="pt-BR"/>
+          </a:p>
+        </p:txBody>
       </p:sp>
       <p:sp>
         <p:nvSpPr>
@@ -13023,18 +13025,25 @@
             <a:prstDash val="solid"/>
           </a:ln>
         </p:spPr>
+        <p:txBody>
+          <a:bodyPr/>
+          <a:lstStyle/>
+          <a:p>
+            <a:endParaRPr lang="pt-BR"/>
+          </a:p>
+        </p:txBody>
       </p:sp>
       <p:pic>
         <p:nvPicPr>
-          <p:cNvPr id="4" name="Image 0" descr="c:/Users/Desktop/Downloads/grupoaura/operacoes/apresentacoes/monica/kaua-palco.jpg">    </p:cNvPr>
+          <p:cNvPr id="4" name="Image 0" descr="c:/Users/Desktop/Downloads/grupoaura/operacoes/apresentacoes/monica/kaua-palco.jpg"/>
           <p:cNvPicPr>
             <a:picLocks noChangeAspect="1"/>
           </p:cNvPicPr>
           <p:nvPr/>
         </p:nvPicPr>
         <p:blipFill>
-          <a:blip r:embed="rId1"/>
-          <a:srcRect l="0" r="0" t="0" b="0"/>
+          <a:blip r:embed="rId3"/>
+          <a:srcRect/>
           <a:stretch/>
         </p:blipFill>
         <p:spPr>
@@ -13075,6 +13084,13 @@
             <a:prstDash val="solid"/>
           </a:ln>
         </p:spPr>
+        <p:txBody>
+          <a:bodyPr/>
+          <a:lstStyle/>
+          <a:p>
+            <a:endParaRPr lang="pt-BR"/>
+          </a:p>
+        </p:txBody>
       </p:sp>
       <p:sp>
         <p:nvSpPr>
@@ -13097,11 +13113,11 @@
           <a:bodyPr wrap="square" rtlCol="0" anchor="ctr"/>
           <a:lstStyle/>
           <a:p>
-            <a:pPr algn="l" indent="0" marL="0">
-              <a:buNone/>
-            </a:pPr>
-            <a:r>
-              <a:rPr lang="en-US" sz="900" b="1" spc="300" kern="0" dirty="0">
+            <a:pPr marL="0" indent="0" algn="l">
+              <a:buNone/>
+            </a:pPr>
+            <a:r>
+              <a:rPr lang="en-US" sz="900" b="1" kern="0" spc="300" dirty="0">
                 <a:solidFill>
                   <a:srgbClr val="7C3AED"/>
                 </a:solidFill>
@@ -13136,7 +13152,7 @@
           <a:bodyPr wrap="square" rtlCol="0" anchor="ctr"/>
           <a:lstStyle/>
           <a:p>
-            <a:pPr indent="0" marL="0">
+            <a:pPr marL="0" indent="0">
               <a:lnSpc>
                 <a:spcPct val="105000"/>
               </a:lnSpc>
@@ -13156,7 +13172,7 @@
             <a:endParaRPr lang="en-US" sz="5200" dirty="0"/>
           </a:p>
           <a:p>
-            <a:pPr indent="0" marL="0">
+            <a:pPr marL="0" indent="0">
               <a:lnSpc>
                 <a:spcPct val="105000"/>
               </a:lnSpc>
@@ -13198,7 +13214,7 @@
           <a:bodyPr wrap="square" rtlCol="0" anchor="ctr"/>
           <a:lstStyle/>
           <a:p>
-            <a:pPr indent="0" marL="0">
+            <a:pPr marL="0" indent="0">
               <a:buNone/>
             </a:pPr>
             <a:r>
@@ -13240,6 +13256,13 @@
             <a:prstDash val="solid"/>
           </a:ln>
         </p:spPr>
+        <p:txBody>
+          <a:bodyPr/>
+          <a:lstStyle/>
+          <a:p>
+            <a:endParaRPr lang="pt-BR"/>
+          </a:p>
+        </p:txBody>
       </p:sp>
       <p:sp>
         <p:nvSpPr>
@@ -13262,7 +13285,7 @@
           <a:bodyPr wrap="square" rtlCol="0" anchor="ctr"/>
           <a:lstStyle/>
           <a:p>
-            <a:pPr indent="0" marL="0">
+            <a:pPr marL="0" indent="0">
               <a:lnSpc>
                 <a:spcPct val="140000"/>
               </a:lnSpc>
@@ -13279,12 +13302,6 @@
               </a:rPr>
               <a:t>→ </a:t>
             </a:r>
-            <a:pPr indent="0" marL="0">
-              <a:lnSpc>
-                <a:spcPct val="140000"/>
-              </a:lnSpc>
-              <a:buNone/>
-            </a:pPr>
             <a:r>
               <a:rPr lang="en-US" sz="1400" b="1" dirty="0">
                 <a:solidFill>
@@ -13296,12 +13313,6 @@
               </a:rPr>
               <a:t>+7 dígitos faturados</a:t>
             </a:r>
-            <a:pPr indent="0" marL="0">
-              <a:lnSpc>
-                <a:spcPct val="140000"/>
-              </a:lnSpc>
-              <a:buNone/>
-            </a:pPr>
             <a:r>
               <a:rPr lang="en-US" sz="1400" dirty="0">
                 <a:solidFill>
@@ -13341,6 +13352,13 @@
             <a:prstDash val="solid"/>
           </a:ln>
         </p:spPr>
+        <p:txBody>
+          <a:bodyPr/>
+          <a:lstStyle/>
+          <a:p>
+            <a:endParaRPr lang="pt-BR"/>
+          </a:p>
+        </p:txBody>
       </p:sp>
       <p:sp>
         <p:nvSpPr>
@@ -13363,7 +13381,7 @@
           <a:bodyPr wrap="square" rtlCol="0" anchor="ctr"/>
           <a:lstStyle/>
           <a:p>
-            <a:pPr indent="0" marL="0">
+            <a:pPr marL="0" indent="0">
               <a:lnSpc>
                 <a:spcPct val="140000"/>
               </a:lnSpc>
@@ -13380,12 +13398,6 @@
               </a:rPr>
               <a:t>→ </a:t>
             </a:r>
-            <a:pPr indent="0" marL="0">
-              <a:lnSpc>
-                <a:spcPct val="140000"/>
-              </a:lnSpc>
-              <a:buNone/>
-            </a:pPr>
             <a:r>
               <a:rPr lang="en-US" sz="1400" b="1" dirty="0">
                 <a:solidFill>
@@ -13397,12 +13409,6 @@
               </a:rPr>
               <a:t>6 anos no digital.</a:t>
             </a:r>
-            <a:pPr indent="0" marL="0">
-              <a:lnSpc>
-                <a:spcPct val="140000"/>
-              </a:lnSpc>
-              <a:buNone/>
-            </a:pPr>
             <a:r>
               <a:rPr lang="en-US" sz="1400" dirty="0">
                 <a:solidFill>
@@ -13442,6 +13448,13 @@
             <a:prstDash val="solid"/>
           </a:ln>
         </p:spPr>
+        <p:txBody>
+          <a:bodyPr/>
+          <a:lstStyle/>
+          <a:p>
+            <a:endParaRPr lang="pt-BR"/>
+          </a:p>
+        </p:txBody>
       </p:sp>
       <p:sp>
         <p:nvSpPr>
@@ -13464,7 +13477,7 @@
           <a:bodyPr wrap="square" rtlCol="0" anchor="ctr"/>
           <a:lstStyle/>
           <a:p>
-            <a:pPr indent="0" marL="0">
+            <a:pPr marL="0" indent="0">
               <a:lnSpc>
                 <a:spcPct val="140000"/>
               </a:lnSpc>
@@ -13481,12 +13494,6 @@
               </a:rPr>
               <a:t>→ </a:t>
             </a:r>
-            <a:pPr indent="0" marL="0">
-              <a:lnSpc>
-                <a:spcPct val="140000"/>
-              </a:lnSpc>
-              <a:buNone/>
-            </a:pPr>
             <a:r>
               <a:rPr lang="en-US" sz="1400" b="1" dirty="0">
                 <a:solidFill>
@@ -13498,12 +13505,6 @@
               </a:rPr>
               <a:t>Escalei mais de 3 experts</a:t>
             </a:r>
-            <a:pPr indent="0" marL="0">
-              <a:lnSpc>
-                <a:spcPct val="140000"/>
-              </a:lnSpc>
-              <a:buNone/>
-            </a:pPr>
             <a:r>
               <a:rPr lang="en-US" sz="1400" dirty="0">
                 <a:solidFill>
@@ -13543,6 +13544,13 @@
             <a:prstDash val="solid"/>
           </a:ln>
         </p:spPr>
+        <p:txBody>
+          <a:bodyPr/>
+          <a:lstStyle/>
+          <a:p>
+            <a:endParaRPr lang="pt-BR"/>
+          </a:p>
+        </p:txBody>
       </p:sp>
       <p:sp>
         <p:nvSpPr>
@@ -13565,7 +13573,7 @@
           <a:bodyPr wrap="square" rtlCol="0" anchor="ctr"/>
           <a:lstStyle/>
           <a:p>
-            <a:pPr indent="0" marL="0">
+            <a:pPr marL="0" indent="0">
               <a:lnSpc>
                 <a:spcPct val="140000"/>
               </a:lnSpc>
@@ -13582,12 +13590,6 @@
               </a:rPr>
               <a:t>→ </a:t>
             </a:r>
-            <a:pPr indent="0" marL="0">
-              <a:lnSpc>
-                <a:spcPct val="140000"/>
-              </a:lnSpc>
-              <a:buNone/>
-            </a:pPr>
             <a:r>
               <a:rPr lang="en-US" sz="1400" b="1" dirty="0">
                 <a:solidFill>
@@ -13599,12 +13601,6 @@
               </a:rPr>
               <a:t>Convidado a palestrar no Ouro Digital</a:t>
             </a:r>
-            <a:pPr indent="0" marL="0">
-              <a:lnSpc>
-                <a:spcPct val="140000"/>
-              </a:lnSpc>
-              <a:buNone/>
-            </a:pPr>
             <a:r>
               <a:rPr lang="en-US" sz="1400" dirty="0">
                 <a:solidFill>
@@ -13921,4 +13917,319 @@
     </a:ext>
   </a:extLst>
 </a:theme>
+</file>
+
+<file path=ppt/theme/theme2.xml><?xml version="1.0" encoding="utf-8"?>
+<a:theme xmlns:a="http://schemas.openxmlformats.org/drawingml/2006/main" name="Tema do Office">
+  <a:themeElements>
+    <a:clrScheme name="Office">
+      <a:dk1>
+        <a:sysClr val="windowText" lastClr="000000"/>
+      </a:dk1>
+      <a:lt1>
+        <a:sysClr val="window" lastClr="FFFFFF"/>
+      </a:lt1>
+      <a:dk2>
+        <a:srgbClr val="0E2841"/>
+      </a:dk2>
+      <a:lt2>
+        <a:srgbClr val="E8E8E8"/>
+      </a:lt2>
+      <a:accent1>
+        <a:srgbClr val="156082"/>
+      </a:accent1>
+      <a:accent2>
+        <a:srgbClr val="E97132"/>
+      </a:accent2>
+      <a:accent3>
+        <a:srgbClr val="196B24"/>
+      </a:accent3>
+      <a:accent4>
+        <a:srgbClr val="0F9ED5"/>
+      </a:accent4>
+      <a:accent5>
+        <a:srgbClr val="A02B93"/>
+      </a:accent5>
+      <a:accent6>
+        <a:srgbClr val="4EA72E"/>
+      </a:accent6>
+      <a:hlink>
+        <a:srgbClr val="467886"/>
+      </a:hlink>
+      <a:folHlink>
+        <a:srgbClr val="96607D"/>
+      </a:folHlink>
+    </a:clrScheme>
+    <a:fontScheme name="Office">
+      <a:majorFont>
+        <a:latin typeface="Aptos Display" panose="02110004020202020204"/>
+        <a:ea typeface=""/>
+        <a:cs typeface=""/>
+        <a:font script="Jpan" typeface="游ゴシック Light"/>
+        <a:font script="Hang" typeface="맑은 고딕"/>
+        <a:font script="Hans" typeface="等线 Light"/>
+        <a:font script="Hant" typeface="新細明體"/>
+        <a:font script="Arab" typeface="Times New Roman"/>
+        <a:font script="Hebr" typeface="Times New Roman"/>
+        <a:font script="Thai" typeface="Angsana New"/>
+        <a:font script="Ethi" typeface="Nyala"/>
+        <a:font script="Beng" typeface="Vrinda"/>
+        <a:font script="Gujr" typeface="Shruti"/>
+        <a:font script="Khmr" typeface="MoolBoran"/>
+        <a:font script="Knda" typeface="Tunga"/>
+        <a:font script="Guru" typeface="Raavi"/>
+        <a:font script="Cans" typeface="Euphemia"/>
+        <a:font script="Cher" typeface="Plantagenet Cherokee"/>
+        <a:font script="Yiii" typeface="Microsoft Yi Baiti"/>
+        <a:font script="Tibt" typeface="Microsoft Himalaya"/>
+        <a:font script="Thaa" typeface="MV Boli"/>
+        <a:font script="Deva" typeface="Mangal"/>
+        <a:font script="Telu" typeface="Gautami"/>
+        <a:font script="Taml" typeface="Latha"/>
+        <a:font script="Syrc" typeface="Estrangelo Edessa"/>
+        <a:font script="Orya" typeface="Kalinga"/>
+        <a:font script="Mlym" typeface="Kartika"/>
+        <a:font script="Laoo" typeface="DokChampa"/>
+        <a:font script="Sinh" typeface="Iskoola Pota"/>
+        <a:font script="Mong" typeface="Mongolian Baiti"/>
+        <a:font script="Viet" typeface="Times New Roman"/>
+        <a:font script="Uigh" typeface="Microsoft Uighur"/>
+        <a:font script="Geor" typeface="Sylfaen"/>
+        <a:font script="Armn" typeface="Arial"/>
+        <a:font script="Bugi" typeface="Leelawadee UI"/>
+        <a:font script="Bopo" typeface="Microsoft JhengHei"/>
+        <a:font script="Java" typeface="Javanese Text"/>
+        <a:font script="Lisu" typeface="Segoe UI"/>
+        <a:font script="Mymr" typeface="Myanmar Text"/>
+        <a:font script="Nkoo" typeface="Ebrima"/>
+        <a:font script="Olck" typeface="Nirmala UI"/>
+        <a:font script="Osma" typeface="Ebrima"/>
+        <a:font script="Phag" typeface="Phagspa"/>
+        <a:font script="Syrn" typeface="Estrangelo Edessa"/>
+        <a:font script="Syrj" typeface="Estrangelo Edessa"/>
+        <a:font script="Syre" typeface="Estrangelo Edessa"/>
+        <a:font script="Sora" typeface="Nirmala UI"/>
+        <a:font script="Tale" typeface="Microsoft Tai Le"/>
+        <a:font script="Talu" typeface="Microsoft New Tai Lue"/>
+        <a:font script="Tfng" typeface="Ebrima"/>
+      </a:majorFont>
+      <a:minorFont>
+        <a:latin typeface="Aptos" panose="02110004020202020204"/>
+        <a:ea typeface=""/>
+        <a:cs typeface=""/>
+        <a:font script="Jpan" typeface="游ゴシック"/>
+        <a:font script="Hang" typeface="맑은 고딕"/>
+        <a:font script="Hans" typeface="等线"/>
+        <a:font script="Hant" typeface="新細明體"/>
+        <a:font script="Arab" typeface="Arial"/>
+        <a:font script="Hebr" typeface="Arial"/>
+        <a:font script="Thai" typeface="Cordia New"/>
+        <a:font script="Ethi" typeface="Nyala"/>
+        <a:font script="Beng" typeface="Vrinda"/>
+        <a:font script="Gujr" typeface="Shruti"/>
+        <a:font script="Khmr" typeface="DaunPenh"/>
+        <a:font script="Knda" typeface="Tunga"/>
+        <a:font script="Guru" typeface="Raavi"/>
+        <a:font script="Cans" typeface="Euphemia"/>
+        <a:font script="Cher" typeface="Plantagenet Cherokee"/>
+        <a:font script="Yiii" typeface="Microsoft Yi Baiti"/>
+        <a:font script="Tibt" typeface="Microsoft Himalaya"/>
+        <a:font script="Thaa" typeface="MV Boli"/>
+        <a:font script="Deva" typeface="Mangal"/>
+        <a:font script="Telu" typeface="Gautami"/>
+        <a:font script="Taml" typeface="Latha"/>
+        <a:font script="Syrc" typeface="Estrangelo Edessa"/>
+        <a:font script="Orya" typeface="Kalinga"/>
+        <a:font script="Mlym" typeface="Kartika"/>
+        <a:font script="Laoo" typeface="DokChampa"/>
+        <a:font script="Sinh" typeface="Iskoola Pota"/>
+        <a:font script="Mong" typeface="Mongolian Baiti"/>
+        <a:font script="Viet" typeface="Arial"/>
+        <a:font script="Uigh" typeface="Microsoft Uighur"/>
+        <a:font script="Geor" typeface="Sylfaen"/>
+        <a:font script="Armn" typeface="Arial"/>
+        <a:font script="Bugi" typeface="Leelawadee UI"/>
+        <a:font script="Bopo" typeface="Microsoft JhengHei"/>
+        <a:font script="Java" typeface="Javanese Text"/>
+        <a:font script="Lisu" typeface="Segoe UI"/>
+        <a:font script="Mymr" typeface="Myanmar Text"/>
+        <a:font script="Nkoo" typeface="Ebrima"/>
+        <a:font script="Olck" typeface="Nirmala UI"/>
+        <a:font script="Osma" typeface="Ebrima"/>
+        <a:font script="Phag" typeface="Phagspa"/>
+        <a:font script="Syrn" typeface="Estrangelo Edessa"/>
+        <a:font script="Syrj" typeface="Estrangelo Edessa"/>
+        <a:font script="Syre" typeface="Estrangelo Edessa"/>
+        <a:font script="Sora" typeface="Nirmala UI"/>
+        <a:font script="Tale" typeface="Microsoft Tai Le"/>
+        <a:font script="Talu" typeface="Microsoft New Tai Lue"/>
+        <a:font script="Tfng" typeface="Ebrima"/>
+      </a:minorFont>
+    </a:fontScheme>
+    <a:fmtScheme name="Office">
+      <a:fillStyleLst>
+        <a:solidFill>
+          <a:schemeClr val="phClr"/>
+        </a:solidFill>
+        <a:gradFill rotWithShape="1">
+          <a:gsLst>
+            <a:gs pos="0">
+              <a:schemeClr val="phClr">
+                <a:lumMod val="110000"/>
+                <a:satMod val="105000"/>
+                <a:tint val="67000"/>
+              </a:schemeClr>
+            </a:gs>
+            <a:gs pos="50000">
+              <a:schemeClr val="phClr">
+                <a:lumMod val="105000"/>
+                <a:satMod val="103000"/>
+                <a:tint val="73000"/>
+              </a:schemeClr>
+            </a:gs>
+            <a:gs pos="100000">
+              <a:schemeClr val="phClr">
+                <a:lumMod val="105000"/>
+                <a:satMod val="109000"/>
+                <a:tint val="81000"/>
+              </a:schemeClr>
+            </a:gs>
+          </a:gsLst>
+          <a:lin ang="5400000" scaled="0"/>
+        </a:gradFill>
+        <a:gradFill rotWithShape="1">
+          <a:gsLst>
+            <a:gs pos="0">
+              <a:schemeClr val="phClr">
+                <a:satMod val="103000"/>
+                <a:lumMod val="102000"/>
+                <a:tint val="94000"/>
+              </a:schemeClr>
+            </a:gs>
+            <a:gs pos="50000">
+              <a:schemeClr val="phClr">
+                <a:satMod val="110000"/>
+                <a:lumMod val="100000"/>
+                <a:shade val="100000"/>
+              </a:schemeClr>
+            </a:gs>
+            <a:gs pos="100000">
+              <a:schemeClr val="phClr">
+                <a:lumMod val="99000"/>
+                <a:satMod val="120000"/>
+                <a:shade val="78000"/>
+              </a:schemeClr>
+            </a:gs>
+          </a:gsLst>
+          <a:lin ang="5400000" scaled="0"/>
+        </a:gradFill>
+      </a:fillStyleLst>
+      <a:lnStyleLst>
+        <a:ln w="12700" cap="flat" cmpd="sng" algn="ctr">
+          <a:solidFill>
+            <a:schemeClr val="phClr"/>
+          </a:solidFill>
+          <a:prstDash val="solid"/>
+          <a:miter lim="800000"/>
+        </a:ln>
+        <a:ln w="19050" cap="flat" cmpd="sng" algn="ctr">
+          <a:solidFill>
+            <a:schemeClr val="phClr"/>
+          </a:solidFill>
+          <a:prstDash val="solid"/>
+          <a:miter lim="800000"/>
+        </a:ln>
+        <a:ln w="25400" cap="flat" cmpd="sng" algn="ctr">
+          <a:solidFill>
+            <a:schemeClr val="phClr"/>
+          </a:solidFill>
+          <a:prstDash val="solid"/>
+          <a:miter lim="800000"/>
+        </a:ln>
+      </a:lnStyleLst>
+      <a:effectStyleLst>
+        <a:effectStyle>
+          <a:effectLst/>
+        </a:effectStyle>
+        <a:effectStyle>
+          <a:effectLst/>
+        </a:effectStyle>
+        <a:effectStyle>
+          <a:effectLst>
+            <a:outerShdw blurRad="57150" dist="19050" dir="5400000" algn="ctr" rotWithShape="0">
+              <a:srgbClr val="000000">
+                <a:alpha val="63000"/>
+              </a:srgbClr>
+            </a:outerShdw>
+          </a:effectLst>
+        </a:effectStyle>
+      </a:effectStyleLst>
+      <a:bgFillStyleLst>
+        <a:solidFill>
+          <a:schemeClr val="phClr"/>
+        </a:solidFill>
+        <a:solidFill>
+          <a:schemeClr val="phClr">
+            <a:tint val="95000"/>
+            <a:satMod val="170000"/>
+          </a:schemeClr>
+        </a:solidFill>
+        <a:gradFill rotWithShape="1">
+          <a:gsLst>
+            <a:gs pos="0">
+              <a:schemeClr val="phClr">
+                <a:tint val="93000"/>
+                <a:satMod val="150000"/>
+                <a:shade val="98000"/>
+                <a:lumMod val="102000"/>
+              </a:schemeClr>
+            </a:gs>
+            <a:gs pos="50000">
+              <a:schemeClr val="phClr">
+                <a:tint val="98000"/>
+                <a:satMod val="130000"/>
+                <a:shade val="90000"/>
+                <a:lumMod val="103000"/>
+              </a:schemeClr>
+            </a:gs>
+            <a:gs pos="100000">
+              <a:schemeClr val="phClr">
+                <a:shade val="63000"/>
+                <a:satMod val="120000"/>
+              </a:schemeClr>
+            </a:gs>
+          </a:gsLst>
+          <a:lin ang="5400000" scaled="0"/>
+        </a:gradFill>
+      </a:bgFillStyleLst>
+    </a:fmtScheme>
+  </a:themeElements>
+  <a:objectDefaults>
+    <a:lnDef>
+      <a:spPr/>
+      <a:bodyPr/>
+      <a:lstStyle/>
+      <a:style>
+        <a:lnRef idx="2">
+          <a:schemeClr val="accent1"/>
+        </a:lnRef>
+        <a:fillRef idx="0">
+          <a:schemeClr val="accent1"/>
+        </a:fillRef>
+        <a:effectRef idx="1">
+          <a:schemeClr val="accent1"/>
+        </a:effectRef>
+        <a:fontRef idx="minor">
+          <a:schemeClr val="tx1"/>
+        </a:fontRef>
+      </a:style>
+    </a:lnDef>
+  </a:objectDefaults>
+  <a:extraClrSchemeLst/>
+  <a:extLst>
+    <a:ext uri="{05A4C25C-085E-4340-85A3-A5531E510DB2}">
+      <thm15:themeFamily xmlns:thm15="http://schemas.microsoft.com/office/thememl/2012/main" name="Office Theme" id="{2E142A2C-CD16-42D6-873A-C26D2A0506FA}" vid="{1BDDFF52-6CD6-40A5-AB3C-68EB2F1E4D0A}"/>
+    </a:ext>
+  </a:extLst>
+</a:theme>
 </file>